--- a/prompt_engineering/pe-1-basics_Tokenization_Hallucinations_PromptFormula_v2.pptx
+++ b/prompt_engineering/pe-1-basics_Tokenization_Hallucinations_PromptFormula_v2.pptx
@@ -5,42 +5,46 @@
     <p:sldMasterId id="2147483648" r:id="rId1"/>
   </p:sldMasterIdLst>
   <p:notesMasterIdLst>
-    <p:notesMasterId r:id="rId32"/>
+    <p:notesMasterId r:id="rId36"/>
   </p:notesMasterIdLst>
   <p:handoutMasterIdLst>
-    <p:handoutMasterId r:id="rId33"/>
+    <p:handoutMasterId r:id="rId37"/>
   </p:handoutMasterIdLst>
   <p:sldIdLst>
     <p:sldId id="260" r:id="rId2"/>
-    <p:sldId id="261" r:id="rId3"/>
-    <p:sldId id="262" r:id="rId4"/>
-    <p:sldId id="284" r:id="rId5"/>
-    <p:sldId id="259" r:id="rId6"/>
-    <p:sldId id="283" r:id="rId7"/>
-    <p:sldId id="263" r:id="rId8"/>
-    <p:sldId id="265" r:id="rId9"/>
-    <p:sldId id="266" r:id="rId10"/>
-    <p:sldId id="267" r:id="rId11"/>
-    <p:sldId id="275" r:id="rId12"/>
-    <p:sldId id="268" r:id="rId13"/>
-    <p:sldId id="286" r:id="rId14"/>
-    <p:sldId id="276" r:id="rId15"/>
-    <p:sldId id="277" r:id="rId16"/>
-    <p:sldId id="274" r:id="rId17"/>
-    <p:sldId id="278" r:id="rId18"/>
-    <p:sldId id="279" r:id="rId19"/>
-    <p:sldId id="269" r:id="rId20"/>
-    <p:sldId id="281" r:id="rId21"/>
-    <p:sldId id="280" r:id="rId22"/>
-    <p:sldId id="270" r:id="rId23"/>
-    <p:sldId id="271" r:id="rId24"/>
-    <p:sldId id="287" r:id="rId25"/>
-    <p:sldId id="288" r:id="rId26"/>
-    <p:sldId id="285" r:id="rId27"/>
-    <p:sldId id="282" r:id="rId28"/>
-    <p:sldId id="272" r:id="rId29"/>
-    <p:sldId id="273" r:id="rId30"/>
-    <p:sldId id="264" r:id="rId31"/>
+    <p:sldId id="289" r:id="rId3"/>
+    <p:sldId id="261" r:id="rId4"/>
+    <p:sldId id="262" r:id="rId5"/>
+    <p:sldId id="284" r:id="rId6"/>
+    <p:sldId id="259" r:id="rId7"/>
+    <p:sldId id="283" r:id="rId8"/>
+    <p:sldId id="290" r:id="rId9"/>
+    <p:sldId id="263" r:id="rId10"/>
+    <p:sldId id="265" r:id="rId11"/>
+    <p:sldId id="291" r:id="rId12"/>
+    <p:sldId id="266" r:id="rId13"/>
+    <p:sldId id="267" r:id="rId14"/>
+    <p:sldId id="275" r:id="rId15"/>
+    <p:sldId id="268" r:id="rId16"/>
+    <p:sldId id="286" r:id="rId17"/>
+    <p:sldId id="276" r:id="rId18"/>
+    <p:sldId id="277" r:id="rId19"/>
+    <p:sldId id="274" r:id="rId20"/>
+    <p:sldId id="278" r:id="rId21"/>
+    <p:sldId id="279" r:id="rId22"/>
+    <p:sldId id="269" r:id="rId23"/>
+    <p:sldId id="292" r:id="rId24"/>
+    <p:sldId id="281" r:id="rId25"/>
+    <p:sldId id="280" r:id="rId26"/>
+    <p:sldId id="270" r:id="rId27"/>
+    <p:sldId id="271" r:id="rId28"/>
+    <p:sldId id="287" r:id="rId29"/>
+    <p:sldId id="288" r:id="rId30"/>
+    <p:sldId id="285" r:id="rId31"/>
+    <p:sldId id="282" r:id="rId32"/>
+    <p:sldId id="272" r:id="rId33"/>
+    <p:sldId id="273" r:id="rId34"/>
+    <p:sldId id="264" r:id="rId35"/>
   </p:sldIdLst>
   <p:sldSz cx="12192000" cy="6858000"/>
   <p:notesSz cx="6858000" cy="9144000"/>
@@ -244,7 +248,7 @@
           <a:p>
             <a:fld id="{7BAEECA8-D063-486F-AE31-5020270C1449}" type="datetimeFigureOut">
               <a:rPr lang="en-US" smtClean="0"/>
-              <a:t>7/14/2026</a:t>
+              <a:t>9/22/2026</a:t>
             </a:fld>
             <a:endParaRPr lang="en-US"/>
           </a:p>
@@ -337,6 +341,34 @@
   </p:cSld>
   <p:clrMap bg1="lt1" tx1="dk1" bg2="lt2" tx2="dk2" accent1="accent1" accent2="accent2" accent3="accent3" accent4="accent4" accent5="accent5" accent6="accent6" hlink="hlink" folHlink="folHlink"/>
 </p:handoutMaster>
+</file>
+
+<file path=ppt/ink/ink1.xml><?xml version="1.0" encoding="utf-8"?>
+<inkml:ink xmlns:inkml="http://www.w3.org/2003/InkML">
+  <inkml:definitions>
+    <inkml:context xml:id="ctx0">
+      <inkml:inkSource xml:id="inkSrc0">
+        <inkml:traceFormat>
+          <inkml:channel name="X" type="integer" min="-2.14748E9" max="2.14748E9" units="cm"/>
+          <inkml:channel name="Y" type="integer" min="-2.14748E9" max="2.14748E9" units="cm"/>
+          <inkml:channel name="F" type="integer" max="32767" units="dev"/>
+        </inkml:traceFormat>
+        <inkml:channelProperties>
+          <inkml:channelProperty channel="X" name="resolution" value="1000" units="1/cm"/>
+          <inkml:channelProperty channel="Y" name="resolution" value="1000" units="1/cm"/>
+          <inkml:channelProperty channel="F" name="resolution" value="0" units="1/dev"/>
+        </inkml:channelProperties>
+      </inkml:inkSource>
+      <inkml:timestamp xml:id="ts0" timeString="2026-09-22T14:28:43.674"/>
+    </inkml:context>
+    <inkml:brush xml:id="br0">
+      <inkml:brushProperty name="width" value="0.1" units="cm"/>
+      <inkml:brushProperty name="height" value="0.1" units="cm"/>
+      <inkml:brushProperty name="color" value="#FFC114"/>
+    </inkml:brush>
+  </inkml:definitions>
+  <inkml:trace contextRef="#ctx0" brushRef="#br0">0 15 24575,'73'-8'0,"-59"6"0,0 0 0,1 0 0,-1 2 0,1 0 0,14 1 0,16 8 0,77 26 0,-88-23 0,0-1 0,1-3 0,0 0 0,40 2 0,-69-10 0,0 0 0,-1 1 0,1 0 0,-1-1 0,1 2 0,-1-1 0,1 1 0,-1 0 0,0 0 0,7 4 0,-9-4 0,0 0 0,-1 1 0,1-1 0,-1 1 0,0 0 0,0 0 0,0 0 0,0 0 0,0 0 0,-1 1 0,1-1 0,-1 0 0,0 1 0,0-1 0,0 1 0,0-1 0,-1 7 0,9 86 0,-5 0 0,-9 109 0,1-55 0,4-143 0,-2 107 0,19 175 0,-5-175 0,-8-58 0,18 83 0,-4-73 0,-9-34 0,-1 1 0,-1 0 0,4 67 0,-7-44 0,18 97 0,-12-101 0,-3 1 0,2 71 0,-9-35 0,19 134 0,-12-136 0,-6 159 0,-4-107 0,24 343 0,-15-378 0,-5-58 0,13 76 0,2-19 0,-6 0 0,-2 137 0,-4-56 0,3-117 0,3-1 0,3 0 0,31 97 0,5 22 0,-40-113 0,-7-55 0,0 0 0,0 0 0,2 0 0,6 20 0,11 24 0,-3 0 0,-2 1 0,-3 1 0,5 73 0,-14-107 0,13 48 0,-12-58 0,0 0 0,-1 0 0,-1 0 0,-1 0 0,-1 0 0,-1 22 0,-1-37 0,0 1 0,0-1 0,-1 0 0,1 0 0,-1 1 0,0-1 0,0-1 0,-1 1 0,1 0 0,-1 0 0,0-1 0,0 0 0,0 1 0,0-1 0,0 0 0,-1 0 0,0-1 0,1 1 0,-9 3 0,-8 4 0,0-1 0,-40 12 0,18-6 0,19-6 0,2 1 0,-32 19 0,38-22 0,0-1 0,0-1 0,-1 0 0,1-1 0,-1 0 0,0-1 0,0-1 0,-17 0 0,-13 3 0,15 1 0,1 1 0,-54 21 0,49-15 0,-54 12 0,77-23 0,1-1 0,-1 0 0,0 0 0,0-1 0,1-1 0,-1 0 0,0-1 0,1 0 0,-1 0 0,1-2 0,0 1 0,0-1 0,0-1 0,0 0 0,1 0 0,-1-1 0,2-1 0,-1 1 0,-13-14 0,21 19-8,1-1-1,-1 0 1,1 1-1,-1-1 1,1 0-1,0 0 0,0 0 1,0 0-1,0 0 1,0 0-1,-1-4 1,2 5 15,0 1 1,0-1 0,0 0-1,0 0 1,0 0-1,0 1 1,0-1-1,1 0 1,-1 0 0,0 1-1,0-1 1,1 0-1,-1 0 1,0 1 0,1-1-1,-1 0 1,1 1-1,-1-1 1,1 1 0,-1-1-1,1 1 1,0-2-1,4 0-71,-1-1 0,1 1 0,0 0-1,0 0 1,0 0 0,0 1 0,8-2-1,4-1-858,2-1-5903</inkml:trace>
+</inkml:ink>
 </file>
 
 <file path=ppt/notesMasters/notesMaster1.xml><?xml version="1.0" encoding="utf-8"?>
@@ -421,7 +453,7 @@
           <a:p>
             <a:fld id="{073EEAA7-AFB7-4D13-AC6E-D387B4394DA4}" type="datetimeFigureOut">
               <a:rPr lang="en-IN" smtClean="0"/>
-              <a:t>14-07-2026</a:t>
+              <a:t>22-09-2026</a:t>
             </a:fld>
             <a:endParaRPr lang="en-IN"/>
           </a:p>
@@ -754,7 +786,7 @@
           <a:p>
             <a:fld id="{BE7BD907-10E1-4554-8631-1965B6043C47}" type="slidenum">
               <a:rPr lang="en-IN" smtClean="0"/>
-              <a:t>23</a:t>
+              <a:t>27</a:t>
             </a:fld>
             <a:endParaRPr lang="en-IN"/>
           </a:p>
@@ -862,7 +894,7 @@
           <a:p>
             <a:fld id="{BE7BD907-10E1-4554-8631-1965B6043C47}" type="slidenum">
               <a:rPr lang="en-IN" smtClean="0"/>
-              <a:t>24</a:t>
+              <a:t>28</a:t>
             </a:fld>
             <a:endParaRPr lang="en-IN"/>
           </a:p>
@@ -970,7 +1002,7 @@
           <a:p>
             <a:fld id="{BE7BD907-10E1-4554-8631-1965B6043C47}" type="slidenum">
               <a:rPr lang="en-IN" smtClean="0"/>
-              <a:t>25</a:t>
+              <a:t>29</a:t>
             </a:fld>
             <a:endParaRPr lang="en-IN"/>
           </a:p>
@@ -1136,7 +1168,7 @@
           <a:p>
             <a:fld id="{6383FAE1-13DE-4511-8C1B-C8AFB720664C}" type="datetimeFigureOut">
               <a:rPr lang="en-US" smtClean="0"/>
-              <a:t>7/14/2026</a:t>
+              <a:t>9/22/2026</a:t>
             </a:fld>
             <a:endParaRPr lang="en-US"/>
           </a:p>
@@ -1334,7 +1366,7 @@
           <a:p>
             <a:fld id="{6383FAE1-13DE-4511-8C1B-C8AFB720664C}" type="datetimeFigureOut">
               <a:rPr lang="en-US" smtClean="0"/>
-              <a:t>7/14/2026</a:t>
+              <a:t>9/22/2026</a:t>
             </a:fld>
             <a:endParaRPr lang="en-US"/>
           </a:p>
@@ -1542,7 +1574,7 @@
           <a:p>
             <a:fld id="{6383FAE1-13DE-4511-8C1B-C8AFB720664C}" type="datetimeFigureOut">
               <a:rPr lang="en-US" smtClean="0"/>
-              <a:t>7/14/2026</a:t>
+              <a:t>9/22/2026</a:t>
             </a:fld>
             <a:endParaRPr lang="en-US"/>
           </a:p>
@@ -1740,7 +1772,7 @@
           <a:p>
             <a:fld id="{6383FAE1-13DE-4511-8C1B-C8AFB720664C}" type="datetimeFigureOut">
               <a:rPr lang="en-US" smtClean="0"/>
-              <a:t>7/14/2026</a:t>
+              <a:t>9/22/2026</a:t>
             </a:fld>
             <a:endParaRPr lang="en-US"/>
           </a:p>
@@ -2015,7 +2047,7 @@
           <a:p>
             <a:fld id="{6383FAE1-13DE-4511-8C1B-C8AFB720664C}" type="datetimeFigureOut">
               <a:rPr lang="en-US" smtClean="0"/>
-              <a:t>7/14/2026</a:t>
+              <a:t>9/22/2026</a:t>
             </a:fld>
             <a:endParaRPr lang="en-US"/>
           </a:p>
@@ -2280,7 +2312,7 @@
           <a:p>
             <a:fld id="{6383FAE1-13DE-4511-8C1B-C8AFB720664C}" type="datetimeFigureOut">
               <a:rPr lang="en-US" smtClean="0"/>
-              <a:t>7/14/2026</a:t>
+              <a:t>9/22/2026</a:t>
             </a:fld>
             <a:endParaRPr lang="en-US"/>
           </a:p>
@@ -2692,7 +2724,7 @@
           <a:p>
             <a:fld id="{6383FAE1-13DE-4511-8C1B-C8AFB720664C}" type="datetimeFigureOut">
               <a:rPr lang="en-US" smtClean="0"/>
-              <a:t>7/14/2026</a:t>
+              <a:t>9/22/2026</a:t>
             </a:fld>
             <a:endParaRPr lang="en-US"/>
           </a:p>
@@ -2833,7 +2865,7 @@
           <a:p>
             <a:fld id="{6383FAE1-13DE-4511-8C1B-C8AFB720664C}" type="datetimeFigureOut">
               <a:rPr lang="en-US" smtClean="0"/>
-              <a:t>7/14/2026</a:t>
+              <a:t>9/22/2026</a:t>
             </a:fld>
             <a:endParaRPr lang="en-US"/>
           </a:p>
@@ -2946,7 +2978,7 @@
           <a:p>
             <a:fld id="{6383FAE1-13DE-4511-8C1B-C8AFB720664C}" type="datetimeFigureOut">
               <a:rPr lang="en-US" smtClean="0"/>
-              <a:t>7/14/2026</a:t>
+              <a:t>9/22/2026</a:t>
             </a:fld>
             <a:endParaRPr lang="en-US"/>
           </a:p>
@@ -3257,7 +3289,7 @@
           <a:p>
             <a:fld id="{6383FAE1-13DE-4511-8C1B-C8AFB720664C}" type="datetimeFigureOut">
               <a:rPr lang="en-US" smtClean="0"/>
-              <a:t>7/14/2026</a:t>
+              <a:t>9/22/2026</a:t>
             </a:fld>
             <a:endParaRPr lang="en-US"/>
           </a:p>
@@ -3548,7 +3580,7 @@
           <a:p>
             <a:fld id="{6383FAE1-13DE-4511-8C1B-C8AFB720664C}" type="datetimeFigureOut">
               <a:rPr lang="en-US" smtClean="0"/>
-              <a:t>7/14/2026</a:t>
+              <a:t>9/22/2026</a:t>
             </a:fld>
             <a:endParaRPr lang="en-US"/>
           </a:p>
@@ -3792,7 +3824,7 @@
           <a:p>
             <a:fld id="{6383FAE1-13DE-4511-8C1B-C8AFB720664C}" type="datetimeFigureOut">
               <a:rPr lang="en-US" smtClean="0"/>
-              <a:t>7/14/2026</a:t>
+              <a:t>9/22/2026</a:t>
             </a:fld>
             <a:endParaRPr lang="en-US"/>
           </a:p>
@@ -4440,7 +4472,29 @@
                   </a:schemeClr>
                 </a:solidFill>
               </a:rPr>
-              <a:t>Prompt engineering and optimization involve designing, testing, and refining input text (prompts) to guide AI models like LLMs to produce output that is</a:t>
+              <a:t>Prompt engineering and optimization involve </a:t>
+            </a:r>
+            <a:r>
+              <a:rPr lang="en-US" sz="2400" b="1" i="1" dirty="0">
+                <a:solidFill>
+                  <a:schemeClr val="accent6">
+                    <a:lumMod val="60000"/>
+                    <a:lumOff val="40000"/>
+                  </a:schemeClr>
+                </a:solidFill>
+              </a:rPr>
+              <a:t>designing, testing, and refining </a:t>
+            </a:r>
+            <a:r>
+              <a:rPr lang="en-US" sz="2400" dirty="0">
+                <a:solidFill>
+                  <a:schemeClr val="accent6">
+                    <a:lumMod val="60000"/>
+                    <a:lumOff val="40000"/>
+                  </a:schemeClr>
+                </a:solidFill>
+              </a:rPr>
+              <a:t>input text (prompts) to guide AI models like LLMs to produce output that is</a:t>
             </a:r>
           </a:p>
           <a:p>
@@ -4755,6 +4809,785 @@
         <p:cNvPr id="1" name="">
           <a:extLst>
             <a:ext uri="{FF2B5EF4-FFF2-40B4-BE49-F238E27FC236}">
+              <a16:creationId xmlns:a16="http://schemas.microsoft.com/office/drawing/2014/main" id="{CB37646A-C09A-9147-0AE2-A7C2894BAB11}"/>
+            </a:ext>
+          </a:extLst>
+        </p:cNvPr>
+        <p:cNvGrpSpPr/>
+        <p:nvPr/>
+      </p:nvGrpSpPr>
+      <p:grpSpPr>
+        <a:xfrm>
+          <a:off x="0" y="0"/>
+          <a:ext cx="0" cy="0"/>
+          <a:chOff x="0" y="0"/>
+          <a:chExt cx="0" cy="0"/>
+        </a:xfrm>
+      </p:grpSpPr>
+      <p:sp>
+        <p:nvSpPr>
+          <p:cNvPr id="9" name="TextBox 8">
+            <a:extLst>
+              <a:ext uri="{FF2B5EF4-FFF2-40B4-BE49-F238E27FC236}">
+                <a16:creationId xmlns:a16="http://schemas.microsoft.com/office/drawing/2014/main" id="{D64FB20C-BEAB-7BCE-2467-E1A631605A9E}"/>
+              </a:ext>
+            </a:extLst>
+          </p:cNvPr>
+          <p:cNvSpPr txBox="1"/>
+          <p:nvPr/>
+        </p:nvSpPr>
+        <p:spPr>
+          <a:xfrm>
+            <a:off x="720103" y="2583594"/>
+            <a:ext cx="9859604" cy="646331"/>
+          </a:xfrm>
+          <a:prstGeom prst="rect">
+            <a:avLst/>
+          </a:prstGeom>
+          <a:noFill/>
+        </p:spPr>
+        <p:txBody>
+          <a:bodyPr wrap="square" rtlCol="0">
+            <a:spAutoFit/>
+          </a:bodyPr>
+          <a:lstStyle/>
+          <a:p>
+            <a:pPr algn="ctr"/>
+            <a:r>
+              <a:rPr lang="en-US" sz="3600" b="1" dirty="0">
+                <a:solidFill>
+                  <a:schemeClr val="accent6">
+                    <a:lumMod val="60000"/>
+                    <a:lumOff val="40000"/>
+                  </a:schemeClr>
+                </a:solidFill>
+              </a:rPr>
+              <a:t>Hallucinations – Why AI Lies &amp; How to Stop It</a:t>
+            </a:r>
+          </a:p>
+        </p:txBody>
+      </p:sp>
+    </p:spTree>
+    <p:extLst>
+      <p:ext uri="{BB962C8B-B14F-4D97-AF65-F5344CB8AC3E}">
+        <p14:creationId xmlns:p14="http://schemas.microsoft.com/office/powerpoint/2010/main" val="1297782942"/>
+      </p:ext>
+    </p:extLst>
+  </p:cSld>
+  <p:clrMapOvr>
+    <a:masterClrMapping/>
+  </p:clrMapOvr>
+</p:sld>
+</file>
+
+<file path=ppt/slides/slide11.xml><?xml version="1.0" encoding="utf-8"?>
+<p:sld xmlns:a="http://schemas.openxmlformats.org/drawingml/2006/main" xmlns:r="http://schemas.openxmlformats.org/officeDocument/2006/relationships" xmlns:p="http://schemas.openxmlformats.org/presentationml/2006/main">
+  <p:cSld>
+    <p:spTree>
+      <p:nvGrpSpPr>
+        <p:cNvPr id="1" name="">
+          <a:extLst>
+            <a:ext uri="{FF2B5EF4-FFF2-40B4-BE49-F238E27FC236}">
+              <a16:creationId xmlns:a16="http://schemas.microsoft.com/office/drawing/2014/main" id="{F969432F-274F-0CFC-28E9-9E416DA771F6}"/>
+            </a:ext>
+          </a:extLst>
+        </p:cNvPr>
+        <p:cNvGrpSpPr/>
+        <p:nvPr/>
+      </p:nvGrpSpPr>
+      <p:grpSpPr>
+        <a:xfrm>
+          <a:off x="0" y="0"/>
+          <a:ext cx="0" cy="0"/>
+          <a:chOff x="0" y="0"/>
+          <a:chExt cx="0" cy="0"/>
+        </a:xfrm>
+      </p:grpSpPr>
+      <p:sp>
+        <p:nvSpPr>
+          <p:cNvPr id="3" name="TextBox 2">
+            <a:extLst>
+              <a:ext uri="{FF2B5EF4-FFF2-40B4-BE49-F238E27FC236}">
+                <a16:creationId xmlns:a16="http://schemas.microsoft.com/office/drawing/2014/main" id="{FA38D2F8-5C15-4749-D603-6D9795F025D6}"/>
+              </a:ext>
+            </a:extLst>
+          </p:cNvPr>
+          <p:cNvSpPr txBox="1"/>
+          <p:nvPr/>
+        </p:nvSpPr>
+        <p:spPr>
+          <a:xfrm>
+            <a:off x="1395000" y="537501"/>
+            <a:ext cx="9859603" cy="2677656"/>
+          </a:xfrm>
+          <a:prstGeom prst="rect">
+            <a:avLst/>
+          </a:prstGeom>
+          <a:noFill/>
+        </p:spPr>
+        <p:txBody>
+          <a:bodyPr wrap="square">
+            <a:spAutoFit/>
+          </a:bodyPr>
+          <a:lstStyle/>
+          <a:p>
+            <a:pPr>
+              <a:buNone/>
+            </a:pPr>
+            <a:r>
+              <a:rPr lang="en-US" sz="2400" b="1" dirty="0">
+                <a:solidFill>
+                  <a:schemeClr val="accent6">
+                    <a:lumMod val="60000"/>
+                    <a:lumOff val="40000"/>
+                  </a:schemeClr>
+                </a:solidFill>
+              </a:rPr>
+              <a:t>What is Hallucination?</a:t>
+            </a:r>
+          </a:p>
+          <a:p>
+            <a:pPr>
+              <a:buNone/>
+            </a:pPr>
+            <a:endParaRPr lang="en-US" sz="2400" dirty="0">
+              <a:solidFill>
+                <a:schemeClr val="accent6">
+                  <a:lumMod val="60000"/>
+                  <a:lumOff val="40000"/>
+                </a:schemeClr>
+              </a:solidFill>
+            </a:endParaRPr>
+          </a:p>
+          <a:p>
+            <a:r>
+              <a:rPr lang="en-US" sz="2400" b="1" dirty="0">
+                <a:solidFill>
+                  <a:schemeClr val="accent6">
+                    <a:lumMod val="60000"/>
+                    <a:lumOff val="40000"/>
+                  </a:schemeClr>
+                </a:solidFill>
+              </a:rPr>
+              <a:t>Real Example</a:t>
+            </a:r>
+          </a:p>
+          <a:p>
+            <a:r>
+              <a:rPr lang="en-US" sz="2400" dirty="0">
+                <a:solidFill>
+                  <a:schemeClr val="accent6">
+                    <a:lumMod val="60000"/>
+                    <a:lumOff val="40000"/>
+                  </a:schemeClr>
+                </a:solidFill>
+              </a:rPr>
+              <a:t>Prompt: </a:t>
+            </a:r>
+            <a:r>
+              <a:rPr lang="en-US" sz="2400" b="1" dirty="0">
+                <a:solidFill>
+                  <a:schemeClr val="accent6">
+                    <a:lumMod val="60000"/>
+                    <a:lumOff val="40000"/>
+                  </a:schemeClr>
+                </a:solidFill>
+              </a:rPr>
+              <a:t>Who won FIFA World Cup 2050?</a:t>
+            </a:r>
+          </a:p>
+          <a:p>
+            <a:endParaRPr lang="en-US" sz="2400" dirty="0">
+              <a:solidFill>
+                <a:schemeClr val="accent6">
+                  <a:lumMod val="60000"/>
+                  <a:lumOff val="40000"/>
+                </a:schemeClr>
+              </a:solidFill>
+            </a:endParaRPr>
+          </a:p>
+          <a:p>
+            <a:r>
+              <a:rPr lang="en-US" sz="2400" dirty="0">
+                <a:solidFill>
+                  <a:schemeClr val="accent6">
+                    <a:lumMod val="60000"/>
+                    <a:lumOff val="40000"/>
+                  </a:schemeClr>
+                </a:solidFill>
+              </a:rPr>
+              <a:t>AI may confidently give wrong answer:</a:t>
+            </a:r>
+          </a:p>
+          <a:p>
+            <a:r>
+              <a:rPr lang="en-US" sz="2400" dirty="0">
+                <a:solidFill>
+                  <a:schemeClr val="accent6">
+                    <a:lumMod val="60000"/>
+                    <a:lumOff val="40000"/>
+                  </a:schemeClr>
+                </a:solidFill>
+              </a:rPr>
+              <a:t> </a:t>
+            </a:r>
+            <a:r>
+              <a:rPr lang="en-US" sz="2400" b="1" dirty="0">
+                <a:solidFill>
+                  <a:schemeClr val="accent6">
+                    <a:lumMod val="60000"/>
+                    <a:lumOff val="40000"/>
+                  </a:schemeClr>
+                </a:solidFill>
+              </a:rPr>
+              <a:t>The FIFA was won by Argentina</a:t>
+            </a:r>
+          </a:p>
+        </p:txBody>
+      </p:sp>
+      <p:sp>
+        <p:nvSpPr>
+          <p:cNvPr id="4" name="TextBox 3">
+            <a:extLst>
+              <a:ext uri="{FF2B5EF4-FFF2-40B4-BE49-F238E27FC236}">
+                <a16:creationId xmlns:a16="http://schemas.microsoft.com/office/drawing/2014/main" id="{0190AAA0-61DA-2DE3-8EA8-8A5CC3E380BC}"/>
+              </a:ext>
+            </a:extLst>
+          </p:cNvPr>
+          <p:cNvSpPr txBox="1"/>
+          <p:nvPr/>
+        </p:nvSpPr>
+        <p:spPr>
+          <a:xfrm>
+            <a:off x="690372" y="4580466"/>
+            <a:ext cx="7758684" cy="1200329"/>
+          </a:xfrm>
+          <a:prstGeom prst="rect">
+            <a:avLst/>
+          </a:prstGeom>
+          <a:noFill/>
+        </p:spPr>
+        <p:txBody>
+          <a:bodyPr wrap="square">
+            <a:spAutoFit/>
+          </a:bodyPr>
+          <a:lstStyle/>
+          <a:p>
+            <a:pPr>
+              <a:buNone/>
+            </a:pPr>
+            <a:r>
+              <a:rPr lang="en-US" sz="2400" dirty="0">
+                <a:solidFill>
+                  <a:schemeClr val="accent6">
+                    <a:lumMod val="60000"/>
+                    <a:lumOff val="40000"/>
+                  </a:schemeClr>
+                </a:solidFill>
+              </a:rPr>
+              <a:t>Hallucination happens when AI:</a:t>
+            </a:r>
+          </a:p>
+          <a:p>
+            <a:pPr marL="342900" indent="-342900">
+              <a:buFont typeface="Arial" panose="020B0604020202020204" pitchFamily="34" charset="0"/>
+              <a:buChar char="•"/>
+            </a:pPr>
+            <a:r>
+              <a:rPr lang="en-US" sz="2400" dirty="0">
+                <a:solidFill>
+                  <a:schemeClr val="accent6">
+                    <a:lumMod val="60000"/>
+                    <a:lumOff val="40000"/>
+                  </a:schemeClr>
+                </a:solidFill>
+              </a:rPr>
+              <a:t>Generates false information</a:t>
+            </a:r>
+          </a:p>
+          <a:p>
+            <a:pPr marL="342900" indent="-342900">
+              <a:buFont typeface="Arial" panose="020B0604020202020204" pitchFamily="34" charset="0"/>
+              <a:buChar char="•"/>
+            </a:pPr>
+            <a:r>
+              <a:rPr lang="en-US" sz="2400" dirty="0">
+                <a:solidFill>
+                  <a:schemeClr val="accent6">
+                    <a:lumMod val="60000"/>
+                    <a:lumOff val="40000"/>
+                  </a:schemeClr>
+                </a:solidFill>
+              </a:rPr>
+              <a:t>Sounds confident, but information is incorrect or invented</a:t>
+            </a:r>
+          </a:p>
+        </p:txBody>
+      </p:sp>
+    </p:spTree>
+    <p:extLst>
+      <p:ext uri="{BB962C8B-B14F-4D97-AF65-F5344CB8AC3E}">
+        <p14:creationId xmlns:p14="http://schemas.microsoft.com/office/powerpoint/2010/main" val="701008718"/>
+      </p:ext>
+    </p:extLst>
+  </p:cSld>
+  <p:clrMapOvr>
+    <a:masterClrMapping/>
+  </p:clrMapOvr>
+</p:sld>
+</file>
+
+<file path=ppt/slides/slide12.xml><?xml version="1.0" encoding="utf-8"?>
+<p:sld xmlns:a="http://schemas.openxmlformats.org/drawingml/2006/main" xmlns:r="http://schemas.openxmlformats.org/officeDocument/2006/relationships" xmlns:p="http://schemas.openxmlformats.org/presentationml/2006/main">
+  <p:cSld>
+    <p:spTree>
+      <p:nvGrpSpPr>
+        <p:cNvPr id="1" name="">
+          <a:extLst>
+            <a:ext uri="{FF2B5EF4-FFF2-40B4-BE49-F238E27FC236}">
+              <a16:creationId xmlns:a16="http://schemas.microsoft.com/office/drawing/2014/main" id="{61A6605F-B7B7-01EA-6F91-2D463EBE205C}"/>
+            </a:ext>
+          </a:extLst>
+        </p:cNvPr>
+        <p:cNvGrpSpPr/>
+        <p:nvPr/>
+      </p:nvGrpSpPr>
+      <p:grpSpPr>
+        <a:xfrm>
+          <a:off x="0" y="0"/>
+          <a:ext cx="0" cy="0"/>
+          <a:chOff x="0" y="0"/>
+          <a:chExt cx="0" cy="0"/>
+        </a:xfrm>
+      </p:grpSpPr>
+      <p:sp>
+        <p:nvSpPr>
+          <p:cNvPr id="3" name="TextBox 2">
+            <a:extLst>
+              <a:ext uri="{FF2B5EF4-FFF2-40B4-BE49-F238E27FC236}">
+                <a16:creationId xmlns:a16="http://schemas.microsoft.com/office/drawing/2014/main" id="{BC0C5F40-6196-BAAF-9D14-D8C4A4CC6487}"/>
+              </a:ext>
+            </a:extLst>
+          </p:cNvPr>
+          <p:cNvSpPr txBox="1"/>
+          <p:nvPr/>
+        </p:nvSpPr>
+        <p:spPr>
+          <a:xfrm>
+            <a:off x="470916" y="3344709"/>
+            <a:ext cx="8863780" cy="1938992"/>
+          </a:xfrm>
+          <a:prstGeom prst="rect">
+            <a:avLst/>
+          </a:prstGeom>
+          <a:noFill/>
+        </p:spPr>
+        <p:txBody>
+          <a:bodyPr wrap="square">
+            <a:spAutoFit/>
+          </a:bodyPr>
+          <a:lstStyle/>
+          <a:p>
+            <a:r>
+              <a:rPr lang="en-US" sz="2400" b="1" dirty="0">
+                <a:solidFill>
+                  <a:schemeClr val="accent6">
+                    <a:lumMod val="60000"/>
+                    <a:lumOff val="40000"/>
+                  </a:schemeClr>
+                </a:solidFill>
+              </a:rPr>
+              <a:t>2. Missing Information</a:t>
+            </a:r>
+          </a:p>
+          <a:p>
+            <a:r>
+              <a:rPr lang="en-US" sz="2400" dirty="0">
+                <a:solidFill>
+                  <a:schemeClr val="accent6">
+                    <a:lumMod val="60000"/>
+                    <a:lumOff val="40000"/>
+                  </a:schemeClr>
+                </a:solidFill>
+              </a:rPr>
+              <a:t>If prompt lacks details → AI guesses.</a:t>
+            </a:r>
+          </a:p>
+          <a:p>
+            <a:endParaRPr lang="en-US" sz="2400" dirty="0">
+              <a:solidFill>
+                <a:schemeClr val="accent6">
+                  <a:lumMod val="60000"/>
+                  <a:lumOff val="40000"/>
+                </a:schemeClr>
+              </a:solidFill>
+            </a:endParaRPr>
+          </a:p>
+          <a:p>
+            <a:r>
+              <a:rPr lang="en-US" sz="2400" dirty="0">
+                <a:solidFill>
+                  <a:schemeClr val="accent6">
+                    <a:lumMod val="60000"/>
+                    <a:lumOff val="40000"/>
+                  </a:schemeClr>
+                </a:solidFill>
+              </a:rPr>
+              <a:t>Prompt </a:t>
+            </a:r>
+            <a:r>
+              <a:rPr lang="en-US" sz="2400" b="1" i="1" dirty="0">
+                <a:solidFill>
+                  <a:schemeClr val="accent6">
+                    <a:lumMod val="60000"/>
+                    <a:lumOff val="40000"/>
+                  </a:schemeClr>
+                </a:solidFill>
+              </a:rPr>
+              <a:t>lacking</a:t>
+            </a:r>
+            <a:r>
+              <a:rPr lang="en-US" sz="2400" dirty="0">
+                <a:solidFill>
+                  <a:schemeClr val="accent6">
+                    <a:lumMod val="60000"/>
+                    <a:lumOff val="40000"/>
+                  </a:schemeClr>
+                </a:solidFill>
+              </a:rPr>
+              <a:t> Details:</a:t>
+            </a:r>
+          </a:p>
+          <a:p>
+            <a:r>
+              <a:rPr lang="en-US" sz="2400" dirty="0">
+                <a:solidFill>
+                  <a:schemeClr val="accent4">
+                    <a:lumMod val="60000"/>
+                    <a:lumOff val="40000"/>
+                  </a:schemeClr>
+                </a:solidFill>
+              </a:rPr>
+              <a:t>I am trying to go to London. Tell me cheapest travel mode.</a:t>
+            </a:r>
+          </a:p>
+        </p:txBody>
+      </p:sp>
+      <p:sp>
+        <p:nvSpPr>
+          <p:cNvPr id="4" name="TextBox 3">
+            <a:extLst>
+              <a:ext uri="{FF2B5EF4-FFF2-40B4-BE49-F238E27FC236}">
+                <a16:creationId xmlns:a16="http://schemas.microsoft.com/office/drawing/2014/main" id="{EAAE5D72-C9D5-F53F-0846-7B1FA5D468E7}"/>
+              </a:ext>
+            </a:extLst>
+          </p:cNvPr>
+          <p:cNvSpPr txBox="1"/>
+          <p:nvPr/>
+        </p:nvSpPr>
+        <p:spPr>
+          <a:xfrm>
+            <a:off x="470916" y="1074510"/>
+            <a:ext cx="9742932" cy="1569660"/>
+          </a:xfrm>
+          <a:prstGeom prst="rect">
+            <a:avLst/>
+          </a:prstGeom>
+          <a:noFill/>
+        </p:spPr>
+        <p:txBody>
+          <a:bodyPr wrap="square">
+            <a:spAutoFit/>
+          </a:bodyPr>
+          <a:lstStyle/>
+          <a:p>
+            <a:r>
+              <a:rPr lang="en-US" sz="2400" b="1" dirty="0">
+                <a:solidFill>
+                  <a:schemeClr val="accent6">
+                    <a:lumMod val="60000"/>
+                    <a:lumOff val="40000"/>
+                  </a:schemeClr>
+                </a:solidFill>
+              </a:rPr>
+              <a:t>Why Hallucination Happens</a:t>
+            </a:r>
+          </a:p>
+          <a:p>
+            <a:endParaRPr lang="en-US" sz="2400" b="1" dirty="0">
+              <a:solidFill>
+                <a:schemeClr val="accent6">
+                  <a:lumMod val="60000"/>
+                  <a:lumOff val="40000"/>
+                </a:schemeClr>
+              </a:solidFill>
+            </a:endParaRPr>
+          </a:p>
+          <a:p>
+            <a:r>
+              <a:rPr lang="en-US" sz="2400" b="1" dirty="0">
+                <a:solidFill>
+                  <a:schemeClr val="accent6">
+                    <a:lumMod val="60000"/>
+                    <a:lumOff val="40000"/>
+                  </a:schemeClr>
+                </a:solidFill>
+              </a:rPr>
+              <a:t>1. Prediction Based Model</a:t>
+            </a:r>
+          </a:p>
+          <a:p>
+            <a:r>
+              <a:rPr lang="en-US" sz="2400" dirty="0">
+                <a:solidFill>
+                  <a:schemeClr val="accent6">
+                    <a:lumMod val="60000"/>
+                    <a:lumOff val="40000"/>
+                  </a:schemeClr>
+                </a:solidFill>
+              </a:rPr>
+              <a:t>AI predicts </a:t>
+            </a:r>
+            <a:r>
+              <a:rPr lang="en-US" sz="2400" b="1" dirty="0">
+                <a:solidFill>
+                  <a:schemeClr val="accent6">
+                    <a:lumMod val="60000"/>
+                    <a:lumOff val="40000"/>
+                  </a:schemeClr>
+                </a:solidFill>
+              </a:rPr>
+              <a:t>most probable next word</a:t>
+            </a:r>
+            <a:r>
+              <a:rPr lang="en-US" sz="2400" dirty="0">
+                <a:solidFill>
+                  <a:schemeClr val="accent6">
+                    <a:lumMod val="60000"/>
+                    <a:lumOff val="40000"/>
+                  </a:schemeClr>
+                </a:solidFill>
+              </a:rPr>
+              <a:t>, not truth. It is </a:t>
+            </a:r>
+            <a:r>
+              <a:rPr lang="en-US" sz="2400" b="1" i="1" dirty="0">
+                <a:solidFill>
+                  <a:schemeClr val="accent6">
+                    <a:lumMod val="60000"/>
+                    <a:lumOff val="40000"/>
+                  </a:schemeClr>
+                </a:solidFill>
+              </a:rPr>
+              <a:t>not verifying.</a:t>
+            </a:r>
+          </a:p>
+        </p:txBody>
+      </p:sp>
+      <p:sp>
+        <p:nvSpPr>
+          <p:cNvPr id="6" name="TextBox 5">
+            <a:extLst>
+              <a:ext uri="{FF2B5EF4-FFF2-40B4-BE49-F238E27FC236}">
+                <a16:creationId xmlns:a16="http://schemas.microsoft.com/office/drawing/2014/main" id="{FD09C277-96F1-DFD7-3575-4B2BD3CDB29C}"/>
+              </a:ext>
+            </a:extLst>
+          </p:cNvPr>
+          <p:cNvSpPr txBox="1"/>
+          <p:nvPr/>
+        </p:nvSpPr>
+        <p:spPr>
+          <a:xfrm>
+            <a:off x="9334696" y="4118140"/>
+            <a:ext cx="2804741" cy="1569660"/>
+          </a:xfrm>
+          <a:prstGeom prst="rect">
+            <a:avLst/>
+          </a:prstGeom>
+          <a:noFill/>
+        </p:spPr>
+        <p:txBody>
+          <a:bodyPr wrap="square">
+            <a:spAutoFit/>
+          </a:bodyPr>
+          <a:lstStyle/>
+          <a:p>
+            <a:r>
+              <a:rPr lang="en-US" sz="2400" b="1" dirty="0">
+                <a:solidFill>
+                  <a:schemeClr val="accent6">
+                    <a:lumMod val="60000"/>
+                    <a:lumOff val="40000"/>
+                  </a:schemeClr>
+                </a:solidFill>
+              </a:rPr>
+              <a:t>AI does not know where you are living and when you have to be there</a:t>
+            </a:r>
+            <a:endParaRPr lang="en-US" sz="2400" dirty="0">
+              <a:solidFill>
+                <a:schemeClr val="accent6">
+                  <a:lumMod val="60000"/>
+                  <a:lumOff val="40000"/>
+                </a:schemeClr>
+              </a:solidFill>
+            </a:endParaRPr>
+          </a:p>
+        </p:txBody>
+      </p:sp>
+      <p:sp>
+        <p:nvSpPr>
+          <p:cNvPr id="7" name="Arrow: Right 6">
+            <a:extLst>
+              <a:ext uri="{FF2B5EF4-FFF2-40B4-BE49-F238E27FC236}">
+                <a16:creationId xmlns:a16="http://schemas.microsoft.com/office/drawing/2014/main" id="{EA44C26F-5025-80DB-C5BE-4653520D3B34}"/>
+              </a:ext>
+            </a:extLst>
+          </p:cNvPr>
+          <p:cNvSpPr/>
+          <p:nvPr/>
+        </p:nvSpPr>
+        <p:spPr>
+          <a:xfrm>
+            <a:off x="8174072" y="4853487"/>
+            <a:ext cx="1097280" cy="384048"/>
+          </a:xfrm>
+          <a:prstGeom prst="rightArrow">
+            <a:avLst/>
+          </a:prstGeom>
+        </p:spPr>
+        <p:style>
+          <a:lnRef idx="2">
+            <a:schemeClr val="accent1">
+              <a:shade val="15000"/>
+            </a:schemeClr>
+          </a:lnRef>
+          <a:fillRef idx="1">
+            <a:schemeClr val="accent1"/>
+          </a:fillRef>
+          <a:effectRef idx="0">
+            <a:schemeClr val="accent1"/>
+          </a:effectRef>
+          <a:fontRef idx="minor">
+            <a:schemeClr val="lt1"/>
+          </a:fontRef>
+        </p:style>
+        <p:txBody>
+          <a:bodyPr rtlCol="0" anchor="ctr"/>
+          <a:lstStyle/>
+          <a:p>
+            <a:pPr algn="ctr"/>
+            <a:endParaRPr lang="en-IN"/>
+          </a:p>
+        </p:txBody>
+      </p:sp>
+      <p:sp>
+        <p:nvSpPr>
+          <p:cNvPr id="10" name="TextBox 9">
+            <a:extLst>
+              <a:ext uri="{FF2B5EF4-FFF2-40B4-BE49-F238E27FC236}">
+                <a16:creationId xmlns:a16="http://schemas.microsoft.com/office/drawing/2014/main" id="{80CAB3AC-E25E-A57A-BE26-F9157DA0DFC4}"/>
+              </a:ext>
+            </a:extLst>
+          </p:cNvPr>
+          <p:cNvSpPr txBox="1"/>
+          <p:nvPr/>
+        </p:nvSpPr>
+        <p:spPr>
+          <a:xfrm>
+            <a:off x="413004" y="5496420"/>
+            <a:ext cx="11050524" cy="1569660"/>
+          </a:xfrm>
+          <a:prstGeom prst="rect">
+            <a:avLst/>
+          </a:prstGeom>
+          <a:noFill/>
+        </p:spPr>
+        <p:txBody>
+          <a:bodyPr wrap="square">
+            <a:spAutoFit/>
+          </a:bodyPr>
+          <a:lstStyle/>
+          <a:p>
+            <a:r>
+              <a:rPr lang="en-US" sz="2400" dirty="0">
+                <a:solidFill>
+                  <a:schemeClr val="accent6">
+                    <a:lumMod val="60000"/>
+                    <a:lumOff val="40000"/>
+                  </a:schemeClr>
+                </a:solidFill>
+              </a:rPr>
+              <a:t>Prompt </a:t>
+            </a:r>
+            <a:r>
+              <a:rPr lang="en-US" sz="2400" b="1" i="1" dirty="0">
+                <a:solidFill>
+                  <a:schemeClr val="accent6">
+                    <a:lumMod val="60000"/>
+                    <a:lumOff val="40000"/>
+                  </a:schemeClr>
+                </a:solidFill>
+              </a:rPr>
+              <a:t>with</a:t>
+            </a:r>
+            <a:r>
+              <a:rPr lang="en-US" sz="2400" dirty="0">
+                <a:solidFill>
+                  <a:schemeClr val="accent6">
+                    <a:lumMod val="60000"/>
+                    <a:lumOff val="40000"/>
+                  </a:schemeClr>
+                </a:solidFill>
+              </a:rPr>
+              <a:t> Details:</a:t>
+            </a:r>
+          </a:p>
+          <a:p>
+            <a:r>
+              <a:rPr lang="en-US" sz="2400" dirty="0">
+                <a:solidFill>
+                  <a:schemeClr val="accent4">
+                    <a:lumMod val="60000"/>
+                    <a:lumOff val="40000"/>
+                  </a:schemeClr>
+                </a:solidFill>
+              </a:rPr>
+              <a:t>I am living in Berlin. I have to reach London between Sep 21 to 23, of this year.  Tell me cheapest train or flight.</a:t>
+            </a:r>
+          </a:p>
+          <a:p>
+            <a:endParaRPr lang="en-US" sz="2400" dirty="0">
+              <a:solidFill>
+                <a:schemeClr val="accent4">
+                  <a:lumMod val="60000"/>
+                  <a:lumOff val="40000"/>
+                </a:schemeClr>
+              </a:solidFill>
+            </a:endParaRPr>
+          </a:p>
+        </p:txBody>
+      </p:sp>
+    </p:spTree>
+    <p:extLst>
+      <p:ext uri="{BB962C8B-B14F-4D97-AF65-F5344CB8AC3E}">
+        <p14:creationId xmlns:p14="http://schemas.microsoft.com/office/powerpoint/2010/main" val="629540453"/>
+      </p:ext>
+    </p:extLst>
+  </p:cSld>
+  <p:clrMapOvr>
+    <a:masterClrMapping/>
+  </p:clrMapOvr>
+</p:sld>
+</file>
+
+<file path=ppt/slides/slide13.xml><?xml version="1.0" encoding="utf-8"?>
+<p:sld xmlns:a="http://schemas.openxmlformats.org/drawingml/2006/main" xmlns:r="http://schemas.openxmlformats.org/officeDocument/2006/relationships" xmlns:p="http://schemas.openxmlformats.org/presentationml/2006/main">
+  <p:cSld>
+    <p:spTree>
+      <p:nvGrpSpPr>
+        <p:cNvPr id="1" name="">
+          <a:extLst>
+            <a:ext uri="{FF2B5EF4-FFF2-40B4-BE49-F238E27FC236}">
               <a16:creationId xmlns:a16="http://schemas.microsoft.com/office/drawing/2014/main" id="{85C0F4EE-EB17-42EE-3881-A7470ADF2FFE}"/>
             </a:ext>
           </a:extLst>
@@ -4772,10 +5605,10 @@
       </p:grpSpPr>
       <p:sp>
         <p:nvSpPr>
-          <p:cNvPr id="9" name="TextBox 8">
-            <a:extLst>
-              <a:ext uri="{FF2B5EF4-FFF2-40B4-BE49-F238E27FC236}">
-                <a16:creationId xmlns:a16="http://schemas.microsoft.com/office/drawing/2014/main" id="{F2C1745C-9086-2BCE-D857-A54E004A4A4C}"/>
+          <p:cNvPr id="3" name="TextBox 2">
+            <a:extLst>
+              <a:ext uri="{FF2B5EF4-FFF2-40B4-BE49-F238E27FC236}">
+                <a16:creationId xmlns:a16="http://schemas.microsoft.com/office/drawing/2014/main" id="{E71998F6-9734-7D0E-E5C3-B94558928266}"/>
               </a:ext>
             </a:extLst>
           </p:cNvPr>
@@ -4784,51 +5617,8 @@
         </p:nvSpPr>
         <p:spPr>
           <a:xfrm>
-            <a:off x="592087" y="123858"/>
-            <a:ext cx="9859604" cy="523220"/>
-          </a:xfrm>
-          <a:prstGeom prst="rect">
-            <a:avLst/>
-          </a:prstGeom>
-          <a:noFill/>
-        </p:spPr>
-        <p:txBody>
-          <a:bodyPr wrap="square" rtlCol="0">
-            <a:spAutoFit/>
-          </a:bodyPr>
-          <a:lstStyle/>
-          <a:p>
-            <a:pPr algn="ctr"/>
-            <a:r>
-              <a:rPr lang="en-US" sz="2800" dirty="0">
-                <a:solidFill>
-                  <a:schemeClr val="accent6">
-                    <a:lumMod val="60000"/>
-                    <a:lumOff val="40000"/>
-                  </a:schemeClr>
-                </a:solidFill>
-              </a:rPr>
-              <a:t>Hallucinations – Why AI Lies &amp; How to Stop It</a:t>
-            </a:r>
-          </a:p>
-        </p:txBody>
-      </p:sp>
-      <p:sp>
-        <p:nvSpPr>
-          <p:cNvPr id="3" name="TextBox 2">
-            <a:extLst>
-              <a:ext uri="{FF2B5EF4-FFF2-40B4-BE49-F238E27FC236}">
-                <a16:creationId xmlns:a16="http://schemas.microsoft.com/office/drawing/2014/main" id="{E71998F6-9734-7D0E-E5C3-B94558928266}"/>
-              </a:ext>
-            </a:extLst>
-          </p:cNvPr>
-          <p:cNvSpPr txBox="1"/>
-          <p:nvPr/>
-        </p:nvSpPr>
-        <p:spPr>
-          <a:xfrm>
-            <a:off x="233712" y="647078"/>
-            <a:ext cx="11232864" cy="6370975"/>
+            <a:off x="178848" y="308750"/>
+            <a:ext cx="9321768" cy="6370975"/>
           </a:xfrm>
           <a:prstGeom prst="rect">
             <a:avLst/>
@@ -4876,7 +5666,7 @@
                   </a:schemeClr>
                 </a:solidFill>
               </a:rPr>
-              <a:t>Provide Context</a:t>
+              <a:t>Provide Context + Constraint</a:t>
             </a:r>
           </a:p>
           <a:p>
@@ -4909,7 +5699,7 @@
             <a:r>
               <a:rPr lang="en-US" sz="2400" dirty="0">
                 <a:solidFill>
-                  <a:schemeClr val="accent6">
+                  <a:schemeClr val="accent4">
                     <a:lumMod val="60000"/>
                     <a:lumOff val="40000"/>
                   </a:schemeClr>
@@ -4945,7 +5735,7 @@
             <a:r>
               <a:rPr lang="en-US" sz="2400" dirty="0">
                 <a:solidFill>
-                  <a:schemeClr val="accent6">
+                  <a:schemeClr val="accent4">
                     <a:lumMod val="60000"/>
                     <a:lumOff val="40000"/>
                   </a:schemeClr>
@@ -4958,26 +5748,26 @@
             <a:r>
               <a:rPr lang="en-US" sz="2400" dirty="0">
                 <a:solidFill>
-                  <a:schemeClr val="accent6">
-                    <a:lumMod val="60000"/>
-                    <a:lumOff val="40000"/>
-                  </a:schemeClr>
-                </a:solidFill>
-              </a:rPr>
-              <a:t>Explain Type 2 diabetes for class 11 students in exactly 100 words. The students are all majoring in biology.</a:t>
-            </a:r>
-          </a:p>
-          <a:p>
-            <a:r>
-              <a:rPr lang="en-US" sz="2400" dirty="0">
-                <a:solidFill>
-                  <a:schemeClr val="accent6">
-                    <a:lumMod val="60000"/>
-                    <a:lumOff val="40000"/>
-                  </a:schemeClr>
-                </a:solidFill>
-              </a:rPr>
-              <a:t>Constraints to reduce hallucination:</a:t>
+                  <a:schemeClr val="accent4">
+                    <a:lumMod val="60000"/>
+                    <a:lumOff val="40000"/>
+                  </a:schemeClr>
+                </a:solidFill>
+              </a:rPr>
+              <a:t>Explain Type 2 diabetes for class 11 students in exactly 100 words. </a:t>
+            </a:r>
+          </a:p>
+          <a:p>
+            <a:r>
+              <a:rPr lang="en-US" sz="2400" dirty="0">
+                <a:solidFill>
+                  <a:schemeClr val="accent4">
+                    <a:lumMod val="60000"/>
+                    <a:lumOff val="40000"/>
+                  </a:schemeClr>
+                </a:solidFill>
+              </a:rPr>
+              <a:t>The students are all majoring in biology.</a:t>
             </a:r>
           </a:p>
           <a:p>
@@ -4987,7 +5777,7 @@
             <a:r>
               <a:rPr lang="en-US" sz="2400" dirty="0">
                 <a:solidFill>
-                  <a:schemeClr val="accent6">
+                  <a:schemeClr val="accent4">
                     <a:lumMod val="60000"/>
                     <a:lumOff val="40000"/>
                   </a:schemeClr>
@@ -5003,7 +5793,7 @@
             <a:r>
               <a:rPr lang="en-US" sz="2400" dirty="0">
                 <a:solidFill>
-                  <a:schemeClr val="accent6">
+                  <a:schemeClr val="accent4">
                     <a:lumMod val="60000"/>
                     <a:lumOff val="40000"/>
                   </a:schemeClr>
@@ -5019,7 +5809,7 @@
             <a:r>
               <a:rPr lang="en-US" sz="2400" dirty="0">
                 <a:solidFill>
-                  <a:schemeClr val="accent6">
+                  <a:schemeClr val="accent4">
                     <a:lumMod val="60000"/>
                     <a:lumOff val="40000"/>
                   </a:schemeClr>
@@ -5030,6 +5820,99 @@
           </a:p>
         </p:txBody>
       </p:sp>
+      <p:sp>
+        <p:nvSpPr>
+          <p:cNvPr id="4" name="TextBox 3">
+            <a:extLst>
+              <a:ext uri="{FF2B5EF4-FFF2-40B4-BE49-F238E27FC236}">
+                <a16:creationId xmlns:a16="http://schemas.microsoft.com/office/drawing/2014/main" id="{AA93A07B-4B48-72BA-A863-CEE75E08F252}"/>
+              </a:ext>
+            </a:extLst>
+          </p:cNvPr>
+          <p:cNvSpPr txBox="1"/>
+          <p:nvPr/>
+        </p:nvSpPr>
+        <p:spPr>
+          <a:xfrm>
+            <a:off x="9841442" y="5058642"/>
+            <a:ext cx="2451111" cy="707886"/>
+          </a:xfrm>
+          <a:prstGeom prst="rect">
+            <a:avLst/>
+          </a:prstGeom>
+          <a:noFill/>
+        </p:spPr>
+        <p:txBody>
+          <a:bodyPr wrap="square">
+            <a:spAutoFit/>
+          </a:bodyPr>
+          <a:lstStyle/>
+          <a:p>
+            <a:r>
+              <a:rPr lang="en-US" sz="2000" dirty="0">
+                <a:solidFill>
+                  <a:schemeClr val="accent6">
+                    <a:lumMod val="60000"/>
+                    <a:lumOff val="40000"/>
+                  </a:schemeClr>
+                </a:solidFill>
+              </a:rPr>
+              <a:t>Constraints to reduce hallucination</a:t>
+            </a:r>
+          </a:p>
+        </p:txBody>
+      </p:sp>
+      <mc:AlternateContent xmlns:mc="http://schemas.openxmlformats.org/markup-compatibility/2006">
+        <mc:Choice xmlns:p14="http://schemas.microsoft.com/office/powerpoint/2010/main" Requires="p14">
+          <p:contentPart p14:bwMode="auto" r:id="rId2">
+            <p14:nvContentPartPr>
+              <p14:cNvPr id="5" name="Ink 4">
+                <a:extLst>
+                  <a:ext uri="{FF2B5EF4-FFF2-40B4-BE49-F238E27FC236}">
+                    <a16:creationId xmlns:a16="http://schemas.microsoft.com/office/drawing/2014/main" id="{E8BE64D9-954A-7B28-7BC8-E5790269EA39}"/>
+                  </a:ext>
+                </a:extLst>
+              </p14:cNvPr>
+              <p14:cNvContentPartPr/>
+              <p14:nvPr/>
+            </p14:nvContentPartPr>
+            <p14:xfrm>
+              <a:off x="9294658" y="4378131"/>
+              <a:ext cx="430920" cy="2153520"/>
+            </p14:xfrm>
+          </p:contentPart>
+        </mc:Choice>
+        <mc:Fallback>
+          <p:pic>
+            <p:nvPicPr>
+              <p:cNvPr id="5" name="Ink 4">
+                <a:extLst>
+                  <a:ext uri="{FF2B5EF4-FFF2-40B4-BE49-F238E27FC236}">
+                    <a16:creationId xmlns:a16="http://schemas.microsoft.com/office/drawing/2014/main" id="{E8BE64D9-954A-7B28-7BC8-E5790269EA39}"/>
+                  </a:ext>
+                </a:extLst>
+              </p:cNvPr>
+              <p:cNvPicPr/>
+              <p:nvPr/>
+            </p:nvPicPr>
+            <p:blipFill>
+              <a:blip r:embed="rId3"/>
+              <a:stretch>
+                <a:fillRect/>
+              </a:stretch>
+            </p:blipFill>
+            <p:spPr>
+              <a:xfrm>
+                <a:off x="9276658" y="4360491"/>
+                <a:ext cx="466560" cy="2189160"/>
+              </a:xfrm>
+              <a:prstGeom prst="rect">
+                <a:avLst/>
+              </a:prstGeom>
+            </p:spPr>
+          </p:pic>
+        </mc:Fallback>
+      </mc:AlternateContent>
     </p:spTree>
     <p:extLst>
       <p:ext uri="{BB962C8B-B14F-4D97-AF65-F5344CB8AC3E}">
@@ -5043,7 +5926,7 @@
 </p:sld>
 </file>
 
-<file path=ppt/slides/slide11.xml><?xml version="1.0" encoding="utf-8"?>
+<file path=ppt/slides/slide14.xml><?xml version="1.0" encoding="utf-8"?>
 <p:sld xmlns:a="http://schemas.openxmlformats.org/drawingml/2006/main" xmlns:r="http://schemas.openxmlformats.org/officeDocument/2006/relationships" xmlns:p="http://schemas.openxmlformats.org/presentationml/2006/main">
   <p:cSld>
     <p:spTree>
@@ -5068,49 +5951,6 @@
       </p:grpSpPr>
       <p:sp>
         <p:nvSpPr>
-          <p:cNvPr id="9" name="TextBox 8">
-            <a:extLst>
-              <a:ext uri="{FF2B5EF4-FFF2-40B4-BE49-F238E27FC236}">
-                <a16:creationId xmlns:a16="http://schemas.microsoft.com/office/drawing/2014/main" id="{81596D14-62E2-D55A-2A0A-1D76598CE28F}"/>
-              </a:ext>
-            </a:extLst>
-          </p:cNvPr>
-          <p:cNvSpPr txBox="1"/>
-          <p:nvPr/>
-        </p:nvSpPr>
-        <p:spPr>
-          <a:xfrm>
-            <a:off x="592087" y="123858"/>
-            <a:ext cx="9859604" cy="523220"/>
-          </a:xfrm>
-          <a:prstGeom prst="rect">
-            <a:avLst/>
-          </a:prstGeom>
-          <a:noFill/>
-        </p:spPr>
-        <p:txBody>
-          <a:bodyPr wrap="square" rtlCol="0">
-            <a:spAutoFit/>
-          </a:bodyPr>
-          <a:lstStyle/>
-          <a:p>
-            <a:pPr algn="ctr"/>
-            <a:r>
-              <a:rPr lang="en-US" sz="2800" dirty="0">
-                <a:solidFill>
-                  <a:schemeClr val="accent6">
-                    <a:lumMod val="60000"/>
-                    <a:lumOff val="40000"/>
-                  </a:schemeClr>
-                </a:solidFill>
-              </a:rPr>
-              <a:t>Hallucinations – Why AI Lies &amp; How to Stop It</a:t>
-            </a:r>
-          </a:p>
-        </p:txBody>
-      </p:sp>
-      <p:sp>
-        <p:nvSpPr>
           <p:cNvPr id="3" name="TextBox 2">
             <a:extLst>
               <a:ext uri="{FF2B5EF4-FFF2-40B4-BE49-F238E27FC236}">
@@ -5193,7 +6033,7 @@
             <a:r>
               <a:rPr lang="en-US" sz="2400" dirty="0">
                 <a:solidFill>
-                  <a:schemeClr val="accent6">
+                  <a:schemeClr val="accent4">
                     <a:lumMod val="60000"/>
                     <a:lumOff val="40000"/>
                   </a:schemeClr>
@@ -5204,7 +6044,7 @@
             <a:r>
               <a:rPr lang="en-US" sz="2400" b="1" i="1" dirty="0">
                 <a:solidFill>
-                  <a:schemeClr val="accent6">
+                  <a:schemeClr val="accent4">
                     <a:lumMod val="60000"/>
                     <a:lumOff val="40000"/>
                   </a:schemeClr>
@@ -5215,7 +6055,7 @@
             <a:r>
               <a:rPr lang="en-US" sz="2400" dirty="0">
                 <a:solidFill>
-                  <a:schemeClr val="accent6">
+                  <a:schemeClr val="accent4">
                     <a:lumMod val="60000"/>
                     <a:lumOff val="40000"/>
                   </a:schemeClr>
@@ -5293,7 +6133,7 @@
             <a:r>
               <a:rPr lang="en-US" sz="2400" dirty="0">
                 <a:solidFill>
-                  <a:schemeClr val="accent6">
+                  <a:schemeClr val="accent4">
                     <a:lumMod val="60000"/>
                     <a:lumOff val="40000"/>
                   </a:schemeClr>
@@ -5306,7 +6146,7 @@
             <a:r>
               <a:rPr lang="en-US" sz="2400" dirty="0">
                 <a:solidFill>
-                  <a:schemeClr val="accent6">
+                  <a:schemeClr val="accent4">
                     <a:lumMod val="60000"/>
                     <a:lumOff val="40000"/>
                   </a:schemeClr>
@@ -5315,20 +6155,20 @@
               <a:t>Use following source to answer: &lt;</a:t>
             </a:r>
             <a:r>
-              <a:rPr lang="en-US" sz="2400" dirty="0" err="1">
-                <a:solidFill>
-                  <a:schemeClr val="accent6">
-                    <a:lumMod val="60000"/>
-                    <a:lumOff val="40000"/>
-                  </a:schemeClr>
-                </a:solidFill>
-              </a:rPr>
-              <a:t>source_text</a:t>
-            </a:r>
-            <a:r>
-              <a:rPr lang="en-US" sz="2400" dirty="0">
-                <a:solidFill>
-                  <a:schemeClr val="accent6">
+              <a:rPr lang="en-US" sz="2400" b="1" i="1" dirty="0" err="1">
+                <a:solidFill>
+                  <a:schemeClr val="accent6">
+                    <a:lumMod val="60000"/>
+                    <a:lumOff val="40000"/>
+                  </a:schemeClr>
+                </a:solidFill>
+              </a:rPr>
+              <a:t>copy_paste_text</a:t>
+            </a:r>
+            <a:r>
+              <a:rPr lang="en-US" sz="2400" dirty="0">
+                <a:solidFill>
+                  <a:schemeClr val="accent4">
                     <a:lumMod val="60000"/>
                     <a:lumOff val="40000"/>
                   </a:schemeClr>
@@ -5341,7 +6181,7 @@
             <a:r>
               <a:rPr lang="en-US" sz="2400" b="1" i="1" dirty="0">
                 <a:solidFill>
-                  <a:schemeClr val="accent6">
+                  <a:schemeClr val="accent4">
                     <a:lumMod val="60000"/>
                     <a:lumOff val="40000"/>
                   </a:schemeClr>
@@ -5365,7 +6205,7 @@
 </p:sld>
 </file>
 
-<file path=ppt/slides/slide12.xml><?xml version="1.0" encoding="utf-8"?>
+<file path=ppt/slides/slide15.xml><?xml version="1.0" encoding="utf-8"?>
 <p:sld xmlns:a="http://schemas.openxmlformats.org/drawingml/2006/main" xmlns:r="http://schemas.openxmlformats.org/officeDocument/2006/relationships" xmlns:p="http://schemas.openxmlformats.org/presentationml/2006/main">
   <p:cSld>
     <p:spTree>
@@ -5390,10 +6230,10 @@
       </p:grpSpPr>
       <p:sp>
         <p:nvSpPr>
-          <p:cNvPr id="9" name="TextBox 8">
-            <a:extLst>
-              <a:ext uri="{FF2B5EF4-FFF2-40B4-BE49-F238E27FC236}">
-                <a16:creationId xmlns:a16="http://schemas.microsoft.com/office/drawing/2014/main" id="{3E6B0D61-1992-C963-5A44-97132CF54A93}"/>
+          <p:cNvPr id="3" name="TextBox 2">
+            <a:extLst>
+              <a:ext uri="{FF2B5EF4-FFF2-40B4-BE49-F238E27FC236}">
+                <a16:creationId xmlns:a16="http://schemas.microsoft.com/office/drawing/2014/main" id="{82C43C40-96BD-393C-A4D2-2DE6E52198D7}"/>
               </a:ext>
             </a:extLst>
           </p:cNvPr>
@@ -5402,51 +6242,8 @@
         </p:nvSpPr>
         <p:spPr>
           <a:xfrm>
-            <a:off x="592087" y="123858"/>
-            <a:ext cx="9859604" cy="523220"/>
-          </a:xfrm>
-          <a:prstGeom prst="rect">
-            <a:avLst/>
-          </a:prstGeom>
-          <a:noFill/>
-        </p:spPr>
-        <p:txBody>
-          <a:bodyPr wrap="square" rtlCol="0">
-            <a:spAutoFit/>
-          </a:bodyPr>
-          <a:lstStyle/>
-          <a:p>
-            <a:pPr algn="ctr"/>
-            <a:r>
-              <a:rPr lang="en-US" sz="2800" dirty="0">
-                <a:solidFill>
-                  <a:schemeClr val="accent6">
-                    <a:lumMod val="60000"/>
-                    <a:lumOff val="40000"/>
-                  </a:schemeClr>
-                </a:solidFill>
-              </a:rPr>
-              <a:t>Hallucinations – Why AI Lies &amp; How to Stop It</a:t>
-            </a:r>
-          </a:p>
-        </p:txBody>
-      </p:sp>
-      <p:sp>
-        <p:nvSpPr>
-          <p:cNvPr id="3" name="TextBox 2">
-            <a:extLst>
-              <a:ext uri="{FF2B5EF4-FFF2-40B4-BE49-F238E27FC236}">
-                <a16:creationId xmlns:a16="http://schemas.microsoft.com/office/drawing/2014/main" id="{82C43C40-96BD-393C-A4D2-2DE6E52198D7}"/>
-              </a:ext>
-            </a:extLst>
-          </p:cNvPr>
-          <p:cNvSpPr txBox="1"/>
-          <p:nvPr/>
-        </p:nvSpPr>
-        <p:spPr>
-          <a:xfrm>
-            <a:off x="242857" y="912405"/>
-            <a:ext cx="8863780" cy="4154984"/>
+            <a:off x="197137" y="537501"/>
+            <a:ext cx="8863780" cy="6001643"/>
           </a:xfrm>
           <a:prstGeom prst="rect">
             <a:avLst/>
@@ -5491,7 +6288,7 @@
                   </a:schemeClr>
                 </a:solidFill>
               </a:rPr>
-              <a:t>4) Break Tasks into Steps</a:t>
+              <a:t>4) Break Complicated Tasks into Steps</a:t>
             </a:r>
           </a:p>
           <a:p>
@@ -5511,7 +6308,7 @@
             <a:r>
               <a:rPr lang="en-US" sz="2400" dirty="0">
                 <a:solidFill>
-                  <a:schemeClr val="accent6">
+                  <a:schemeClr val="accent4">
                     <a:lumMod val="60000"/>
                     <a:lumOff val="40000"/>
                   </a:schemeClr>
@@ -5540,7 +6337,7 @@
                   </a:schemeClr>
                 </a:solidFill>
               </a:rPr>
-              <a:t>Use:</a:t>
+              <a:t>Use Steps : </a:t>
             </a:r>
           </a:p>
           <a:p>
@@ -5553,19 +6350,31 @@
                   </a:schemeClr>
                 </a:solidFill>
               </a:rPr>
-              <a:t>Step1: </a:t>
-            </a:r>
-            <a:r>
-              <a:rPr lang="en-US" sz="2400" dirty="0">
-                <a:solidFill>
-                  <a:schemeClr val="accent6">
-                    <a:lumMod val="60000"/>
-                    <a:lumOff val="40000"/>
-                  </a:schemeClr>
-                </a:solidFill>
-              </a:rPr>
-              <a:t>I will give you a general idea, and you will propose 3 specific, researchable angles.</a:t>
-            </a:r>
+              <a:t>Step1 -</a:t>
+            </a:r>
+          </a:p>
+          <a:p>
+            <a:r>
+              <a:rPr lang="en-US" sz="2400" dirty="0">
+                <a:solidFill>
+                  <a:schemeClr val="accent4">
+                    <a:lumMod val="60000"/>
+                    <a:lumOff val="40000"/>
+                  </a:schemeClr>
+                </a:solidFill>
+              </a:rPr>
+              <a:t>I will give you a general idea, and you will propose 3 specific, researchable angles…..[Write you general idea]</a:t>
+            </a:r>
+          </a:p>
+          <a:p>
+            <a:endParaRPr lang="en-US" sz="2400" dirty="0">
+              <a:solidFill>
+                <a:schemeClr val="accent6">
+                  <a:lumMod val="60000"/>
+                  <a:lumOff val="40000"/>
+                </a:schemeClr>
+              </a:solidFill>
+            </a:endParaRPr>
           </a:p>
           <a:p>
             <a:r>
@@ -5577,19 +6386,42 @@
                   </a:schemeClr>
                 </a:solidFill>
               </a:rPr>
-              <a:t>Step 2</a:t>
-            </a:r>
-            <a:r>
-              <a:rPr lang="en-US" sz="2400" dirty="0">
-                <a:solidFill>
-                  <a:schemeClr val="accent6">
-                    <a:lumMod val="60000"/>
-                    <a:lumOff val="40000"/>
-                  </a:schemeClr>
-                </a:solidFill>
-              </a:rPr>
-              <a:t>: Ask AI to create outline  </a:t>
-            </a:r>
+              <a:t>Step 2 -</a:t>
+            </a:r>
+            <a:r>
+              <a:rPr lang="en-US" sz="2400" dirty="0">
+                <a:solidFill>
+                  <a:schemeClr val="accent6">
+                    <a:lumMod val="60000"/>
+                    <a:lumOff val="40000"/>
+                  </a:schemeClr>
+                </a:solidFill>
+              </a:rPr>
+              <a:t> </a:t>
+            </a:r>
+          </a:p>
+          <a:p>
+            <a:r>
+              <a:rPr lang="en-US" sz="2400" dirty="0">
+                <a:solidFill>
+                  <a:schemeClr val="accent4">
+                    <a:lumMod val="60000"/>
+                    <a:lumOff val="40000"/>
+                  </a:schemeClr>
+                </a:solidFill>
+              </a:rPr>
+              <a:t>Ask AI to create outline on each of 3 research angles</a:t>
+            </a:r>
+          </a:p>
+          <a:p>
+            <a:endParaRPr lang="en-US" sz="2400" dirty="0">
+              <a:solidFill>
+                <a:schemeClr val="accent6">
+                  <a:lumMod val="60000"/>
+                  <a:lumOff val="40000"/>
+                </a:schemeClr>
+              </a:solidFill>
+            </a:endParaRPr>
           </a:p>
           <a:p>
             <a:r>
@@ -5601,18 +6433,20 @@
                   </a:schemeClr>
                 </a:solidFill>
               </a:rPr>
-              <a:t>Step 3: </a:t>
-            </a:r>
-            <a:r>
-              <a:rPr lang="en-US" sz="2400" dirty="0">
-                <a:solidFill>
-                  <a:schemeClr val="accent6">
-                    <a:lumMod val="60000"/>
-                    <a:lumOff val="40000"/>
-                  </a:schemeClr>
-                </a:solidFill>
-              </a:rPr>
-              <a:t>Ask AI to expand sections</a:t>
+              <a:t>Step 3 -</a:t>
+            </a:r>
+          </a:p>
+          <a:p>
+            <a:r>
+              <a:rPr lang="en-US" sz="2400" dirty="0">
+                <a:solidFill>
+                  <a:schemeClr val="accent4">
+                    <a:lumMod val="60000"/>
+                    <a:lumOff val="40000"/>
+                  </a:schemeClr>
+                </a:solidFill>
+              </a:rPr>
+              <a:t>Ask AI to expand sections for each research topic</a:t>
             </a:r>
           </a:p>
         </p:txBody>
@@ -5630,7 +6464,7 @@
 </p:sld>
 </file>
 
-<file path=ppt/slides/slide13.xml><?xml version="1.0" encoding="utf-8"?>
+<file path=ppt/slides/slide16.xml><?xml version="1.0" encoding="utf-8"?>
 <p:sld xmlns:a="http://schemas.openxmlformats.org/drawingml/2006/main" xmlns:r="http://schemas.openxmlformats.org/officeDocument/2006/relationships" xmlns:p="http://schemas.openxmlformats.org/presentationml/2006/main">
   <p:cSld>
     <p:spTree>
@@ -5655,49 +6489,6 @@
       </p:grpSpPr>
       <p:sp>
         <p:nvSpPr>
-          <p:cNvPr id="9" name="TextBox 8">
-            <a:extLst>
-              <a:ext uri="{FF2B5EF4-FFF2-40B4-BE49-F238E27FC236}">
-                <a16:creationId xmlns:a16="http://schemas.microsoft.com/office/drawing/2014/main" id="{B239BD44-B356-B35D-1249-5547AB9A573A}"/>
-              </a:ext>
-            </a:extLst>
-          </p:cNvPr>
-          <p:cNvSpPr txBox="1"/>
-          <p:nvPr/>
-        </p:nvSpPr>
-        <p:spPr>
-          <a:xfrm>
-            <a:off x="592087" y="123858"/>
-            <a:ext cx="9859604" cy="523220"/>
-          </a:xfrm>
-          <a:prstGeom prst="rect">
-            <a:avLst/>
-          </a:prstGeom>
-          <a:noFill/>
-        </p:spPr>
-        <p:txBody>
-          <a:bodyPr wrap="square" rtlCol="0">
-            <a:spAutoFit/>
-          </a:bodyPr>
-          <a:lstStyle/>
-          <a:p>
-            <a:pPr algn="ctr"/>
-            <a:r>
-              <a:rPr lang="en-US" sz="2800" dirty="0">
-                <a:solidFill>
-                  <a:schemeClr val="accent6">
-                    <a:lumMod val="60000"/>
-                    <a:lumOff val="40000"/>
-                  </a:schemeClr>
-                </a:solidFill>
-              </a:rPr>
-              <a:t>Hallucinations – Why AI Lies &amp; How to Stop It</a:t>
-            </a:r>
-          </a:p>
-        </p:txBody>
-      </p:sp>
-      <p:sp>
-        <p:nvSpPr>
           <p:cNvPr id="3" name="TextBox 2">
             <a:extLst>
               <a:ext uri="{FF2B5EF4-FFF2-40B4-BE49-F238E27FC236}">
@@ -5711,7 +6502,7 @@
         <p:spPr>
           <a:xfrm>
             <a:off x="242857" y="912405"/>
-            <a:ext cx="8863780" cy="3785652"/>
+            <a:ext cx="8863780" cy="4154984"/>
           </a:xfrm>
           <a:prstGeom prst="rect">
             <a:avLst/>
@@ -5753,7 +6544,7 @@
             <a:r>
               <a:rPr lang="en-US" sz="2400" dirty="0">
                 <a:solidFill>
-                  <a:schemeClr val="accent6">
+                  <a:schemeClr val="accent4">
                     <a:lumMod val="60000"/>
                     <a:lumOff val="40000"/>
                   </a:schemeClr>
@@ -5800,7 +6591,7 @@
             <a:r>
               <a:rPr lang="en-US" sz="2400" dirty="0">
                 <a:solidFill>
-                  <a:schemeClr val="accent6">
+                  <a:schemeClr val="accent4">
                     <a:lumMod val="60000"/>
                     <a:lumOff val="40000"/>
                   </a:schemeClr>
@@ -5811,7 +6602,7 @@
             <a:r>
               <a:rPr lang="en-US" sz="2400" dirty="0" err="1">
                 <a:solidFill>
-                  <a:schemeClr val="accent6">
+                  <a:schemeClr val="accent4">
                     <a:lumMod val="60000"/>
                     <a:lumOff val="40000"/>
                   </a:schemeClr>
@@ -5822,7 +6613,7 @@
             <a:r>
               <a:rPr lang="en-US" sz="2400" dirty="0">
                 <a:solidFill>
-                  <a:schemeClr val="accent6">
+                  <a:schemeClr val="accent4">
                     <a:lumMod val="60000"/>
                     <a:lumOff val="40000"/>
                   </a:schemeClr>
@@ -5833,7 +6624,7 @@
             <a:r>
               <a:rPr lang="en-US" sz="2400" dirty="0" err="1">
                 <a:solidFill>
-                  <a:schemeClr val="accent6">
+                  <a:schemeClr val="accent4">
                     <a:lumMod val="60000"/>
                     <a:lumOff val="40000"/>
                   </a:schemeClr>
@@ -5844,7 +6635,7 @@
             <a:r>
               <a:rPr lang="en-US" sz="2400" dirty="0">
                 <a:solidFill>
-                  <a:schemeClr val="accent6">
+                  <a:schemeClr val="accent4">
                     <a:lumMod val="60000"/>
                     <a:lumOff val="40000"/>
                   </a:schemeClr>
@@ -5868,7 +6659,7 @@
             <a:r>
               <a:rPr lang="en-US" sz="2400" dirty="0">
                 <a:solidFill>
-                  <a:schemeClr val="accent6">
+                  <a:schemeClr val="accent4">
                     <a:lumMod val="60000"/>
                     <a:lumOff val="40000"/>
                   </a:schemeClr>
@@ -5879,7 +6670,7 @@
             <a:r>
               <a:rPr lang="en-US" sz="2400" dirty="0" err="1">
                 <a:solidFill>
-                  <a:schemeClr val="accent6">
+                  <a:schemeClr val="accent4">
                     <a:lumMod val="60000"/>
                     <a:lumOff val="40000"/>
                   </a:schemeClr>
@@ -5890,7 +6681,7 @@
             <a:r>
               <a:rPr lang="en-US" sz="2400" dirty="0">
                 <a:solidFill>
-                  <a:schemeClr val="accent6">
+                  <a:schemeClr val="accent4">
                     <a:lumMod val="60000"/>
                     <a:lumOff val="40000"/>
                   </a:schemeClr>
@@ -5901,7 +6692,7 @@
             <a:r>
               <a:rPr lang="en-US" sz="2400" dirty="0" err="1">
                 <a:solidFill>
-                  <a:schemeClr val="accent6">
+                  <a:schemeClr val="accent4">
                     <a:lumMod val="60000"/>
                     <a:lumOff val="40000"/>
                   </a:schemeClr>
@@ -5911,7 +6702,7 @@
             </a:r>
             <a:endParaRPr lang="en-US" sz="2400" b="1" dirty="0">
               <a:solidFill>
-                <a:schemeClr val="accent6">
+                <a:schemeClr val="accent4">
                   <a:lumMod val="60000"/>
                   <a:lumOff val="40000"/>
                 </a:schemeClr>
@@ -5939,7 +6730,18 @@
                   </a:schemeClr>
                 </a:solidFill>
               </a:rPr>
-              <a:t>: How can I identify the datatype  </a:t>
+              <a:t>: </a:t>
+            </a:r>
+            <a:r>
+              <a:rPr lang="en-US" sz="2400" dirty="0">
+                <a:solidFill>
+                  <a:schemeClr val="accent4">
+                    <a:lumMod val="60000"/>
+                    <a:lumOff val="40000"/>
+                  </a:schemeClr>
+                </a:solidFill>
+              </a:rPr>
+              <a:t>How can I identify the datatype  </a:t>
             </a:r>
           </a:p>
           <a:p>
@@ -5957,7 +6759,31 @@
             <a:r>
               <a:rPr lang="en-US" sz="2400" dirty="0">
                 <a:solidFill>
-                  <a:schemeClr val="accent6">
+                  <a:schemeClr val="accent4">
+                    <a:lumMod val="60000"/>
+                    <a:lumOff val="40000"/>
+                  </a:schemeClr>
+                </a:solidFill>
+              </a:rPr>
+              <a:t>How do I remove duplicates</a:t>
+            </a:r>
+          </a:p>
+          <a:p>
+            <a:r>
+              <a:rPr lang="en-US" sz="2400" b="1" dirty="0">
+                <a:solidFill>
+                  <a:schemeClr val="accent6">
+                    <a:lumMod val="60000"/>
+                    <a:lumOff val="40000"/>
+                  </a:schemeClr>
+                </a:solidFill>
+              </a:rPr>
+              <a:t>Step 5: </a:t>
+            </a:r>
+            <a:r>
+              <a:rPr lang="en-US" sz="2400" dirty="0">
+                <a:solidFill>
+                  <a:schemeClr val="accent4">
                     <a:lumMod val="60000"/>
                     <a:lumOff val="40000"/>
                   </a:schemeClr>
@@ -5976,18 +6802,18 @@
                   </a:schemeClr>
                 </a:solidFill>
               </a:rPr>
-              <a:t>Step 5: </a:t>
-            </a:r>
-            <a:r>
-              <a:rPr lang="en-US" sz="2400" dirty="0">
-                <a:solidFill>
-                  <a:schemeClr val="accent6">
-                    <a:lumMod val="60000"/>
-                    <a:lumOff val="40000"/>
-                  </a:schemeClr>
-                </a:solidFill>
-              </a:rPr>
-              <a:t>How do I remove duplicates</a:t>
+              <a:t>Step 6: </a:t>
+            </a:r>
+            <a:r>
+              <a:rPr lang="en-US" sz="2400" dirty="0">
+                <a:solidFill>
+                  <a:schemeClr val="accent4">
+                    <a:lumMod val="60000"/>
+                    <a:lumOff val="40000"/>
+                  </a:schemeClr>
+                </a:solidFill>
+              </a:rPr>
+              <a:t>How do I print descriptive statistics</a:t>
             </a:r>
           </a:p>
         </p:txBody>
@@ -6005,7 +6831,7 @@
 </p:sld>
 </file>
 
-<file path=ppt/slides/slide14.xml><?xml version="1.0" encoding="utf-8"?>
+<file path=ppt/slides/slide17.xml><?xml version="1.0" encoding="utf-8"?>
 <p:sld xmlns:a="http://schemas.openxmlformats.org/drawingml/2006/main" xmlns:r="http://schemas.openxmlformats.org/officeDocument/2006/relationships" xmlns:p="http://schemas.openxmlformats.org/presentationml/2006/main">
   <p:cSld>
     <p:spTree>
@@ -6030,49 +6856,6 @@
       </p:grpSpPr>
       <p:sp>
         <p:nvSpPr>
-          <p:cNvPr id="9" name="TextBox 8">
-            <a:extLst>
-              <a:ext uri="{FF2B5EF4-FFF2-40B4-BE49-F238E27FC236}">
-                <a16:creationId xmlns:a16="http://schemas.microsoft.com/office/drawing/2014/main" id="{4D43C62C-A737-D781-009F-90634BF23F14}"/>
-              </a:ext>
-            </a:extLst>
-          </p:cNvPr>
-          <p:cNvSpPr txBox="1"/>
-          <p:nvPr/>
-        </p:nvSpPr>
-        <p:spPr>
-          <a:xfrm>
-            <a:off x="592087" y="123858"/>
-            <a:ext cx="9859604" cy="523220"/>
-          </a:xfrm>
-          <a:prstGeom prst="rect">
-            <a:avLst/>
-          </a:prstGeom>
-          <a:noFill/>
-        </p:spPr>
-        <p:txBody>
-          <a:bodyPr wrap="square" rtlCol="0">
-            <a:spAutoFit/>
-          </a:bodyPr>
-          <a:lstStyle/>
-          <a:p>
-            <a:pPr algn="ctr"/>
-            <a:r>
-              <a:rPr lang="en-US" sz="2800" dirty="0">
-                <a:solidFill>
-                  <a:schemeClr val="accent6">
-                    <a:lumMod val="60000"/>
-                    <a:lumOff val="40000"/>
-                  </a:schemeClr>
-                </a:solidFill>
-              </a:rPr>
-              <a:t>Hallucinations – Why AI Lies &amp; How to Stop It</a:t>
-            </a:r>
-          </a:p>
-        </p:txBody>
-      </p:sp>
-      <p:sp>
-        <p:nvSpPr>
           <p:cNvPr id="3" name="TextBox 2">
             <a:extLst>
               <a:ext uri="{FF2B5EF4-FFF2-40B4-BE49-F238E27FC236}">
@@ -6086,7 +6869,7 @@
         <p:spPr>
           <a:xfrm>
             <a:off x="334297" y="1305597"/>
-            <a:ext cx="8863780" cy="1200329"/>
+            <a:ext cx="4886927" cy="461665"/>
           </a:xfrm>
           <a:prstGeom prst="rect">
             <a:avLst/>
@@ -6100,33 +6883,6 @@
           <a:lstStyle/>
           <a:p>
             <a:r>
-              <a:rPr lang="en-IN" sz="2400" b="1" dirty="0">
-                <a:solidFill>
-                  <a:schemeClr val="accent6">
-                    <a:lumMod val="60000"/>
-                    <a:lumOff val="40000"/>
-                  </a:schemeClr>
-                </a:solidFill>
-              </a:rPr>
-              <a:t>How to Reduce Hallucinations</a:t>
-            </a:r>
-          </a:p>
-          <a:p>
-            <a:endParaRPr lang="en-IN" sz="2400" dirty="0">
-              <a:solidFill>
-                <a:schemeClr val="accent6">
-                  <a:lumMod val="60000"/>
-                  <a:lumOff val="40000"/>
-                </a:schemeClr>
-              </a:solidFill>
-            </a:endParaRPr>
-          </a:p>
-          <a:p>
-            <a:pPr marL="342900" indent="-342900">
-              <a:buFont typeface="Arial" panose="020B0604020202020204" pitchFamily="34" charset="0"/>
-              <a:buChar char="•"/>
-            </a:pPr>
-            <a:r>
               <a:rPr lang="en-US" sz="2400" b="1" dirty="0">
                 <a:solidFill>
                   <a:schemeClr val="accent6">
@@ -6135,7 +6891,7 @@
                   </a:schemeClr>
                 </a:solidFill>
               </a:rPr>
-              <a:t>Break Tasks into Steps</a:t>
+              <a:t>Break Tasks into Steps - EXAMPLE</a:t>
             </a:r>
           </a:p>
         </p:txBody>
@@ -6162,7 +6918,7 @@
         </p:blipFill>
         <p:spPr>
           <a:xfrm>
-            <a:off x="975965" y="3044952"/>
+            <a:off x="3170525" y="2286000"/>
             <a:ext cx="6926354" cy="2642139"/>
           </a:xfrm>
           <a:prstGeom prst="rect">
@@ -6183,7 +6939,7 @@
 </p:sld>
 </file>
 
-<file path=ppt/slides/slide15.xml><?xml version="1.0" encoding="utf-8"?>
+<file path=ppt/slides/slide18.xml><?xml version="1.0" encoding="utf-8"?>
 <p:sld xmlns:a="http://schemas.openxmlformats.org/drawingml/2006/main" xmlns:r="http://schemas.openxmlformats.org/officeDocument/2006/relationships" xmlns:p="http://schemas.openxmlformats.org/presentationml/2006/main">
   <p:cSld>
     <p:spTree>
@@ -6206,75 +6962,6 @@
           <a:chExt cx="0" cy="0"/>
         </a:xfrm>
       </p:grpSpPr>
-      <p:sp>
-        <p:nvSpPr>
-          <p:cNvPr id="3" name="TextBox 2">
-            <a:extLst>
-              <a:ext uri="{FF2B5EF4-FFF2-40B4-BE49-F238E27FC236}">
-                <a16:creationId xmlns:a16="http://schemas.microsoft.com/office/drawing/2014/main" id="{BDF4C98F-9FE3-4601-AACB-F2E71EA21969}"/>
-              </a:ext>
-            </a:extLst>
-          </p:cNvPr>
-          <p:cNvSpPr txBox="1"/>
-          <p:nvPr/>
-        </p:nvSpPr>
-        <p:spPr>
-          <a:xfrm>
-            <a:off x="334297" y="1305597"/>
-            <a:ext cx="8863780" cy="1200329"/>
-          </a:xfrm>
-          <a:prstGeom prst="rect">
-            <a:avLst/>
-          </a:prstGeom>
-          <a:noFill/>
-        </p:spPr>
-        <p:txBody>
-          <a:bodyPr wrap="square">
-            <a:spAutoFit/>
-          </a:bodyPr>
-          <a:lstStyle/>
-          <a:p>
-            <a:r>
-              <a:rPr lang="en-IN" sz="2400" b="1" dirty="0">
-                <a:solidFill>
-                  <a:schemeClr val="accent6">
-                    <a:lumMod val="60000"/>
-                    <a:lumOff val="40000"/>
-                  </a:schemeClr>
-                </a:solidFill>
-              </a:rPr>
-              <a:t>How to Reduce Hallucinations</a:t>
-            </a:r>
-          </a:p>
-          <a:p>
-            <a:endParaRPr lang="en-IN" sz="2400" dirty="0">
-              <a:solidFill>
-                <a:schemeClr val="accent6">
-                  <a:lumMod val="60000"/>
-                  <a:lumOff val="40000"/>
-                </a:schemeClr>
-              </a:solidFill>
-            </a:endParaRPr>
-          </a:p>
-          <a:p>
-            <a:pPr marL="342900" indent="-342900">
-              <a:buFont typeface="Arial" panose="020B0604020202020204" pitchFamily="34" charset="0"/>
-              <a:buChar char="•"/>
-            </a:pPr>
-            <a:r>
-              <a:rPr lang="en-US" sz="2400" b="1" dirty="0">
-                <a:solidFill>
-                  <a:schemeClr val="accent6">
-                    <a:lumMod val="60000"/>
-                    <a:lumOff val="40000"/>
-                  </a:schemeClr>
-                </a:solidFill>
-              </a:rPr>
-              <a:t>Break Tasks into Steps</a:t>
-            </a:r>
-          </a:p>
-        </p:txBody>
-      </p:sp>
       <p:pic>
         <p:nvPicPr>
           <p:cNvPr id="4" name="Picture 3">
@@ -6297,7 +6984,7 @@
         </p:blipFill>
         <p:spPr>
           <a:xfrm>
-            <a:off x="4690873" y="80491"/>
+            <a:off x="4782313" y="80491"/>
             <a:ext cx="6043544" cy="5005568"/>
           </a:xfrm>
           <a:prstGeom prst="rect">
@@ -6327,7 +7014,7 @@
         </p:blipFill>
         <p:spPr>
           <a:xfrm>
-            <a:off x="4658745" y="5285232"/>
+            <a:off x="4750185" y="5285232"/>
             <a:ext cx="6281678" cy="1492277"/>
           </a:xfrm>
           <a:prstGeom prst="rect">
@@ -6335,6 +7022,48 @@
           </a:prstGeom>
         </p:spPr>
       </p:pic>
+      <p:sp>
+        <p:nvSpPr>
+          <p:cNvPr id="5" name="TextBox 4">
+            <a:extLst>
+              <a:ext uri="{FF2B5EF4-FFF2-40B4-BE49-F238E27FC236}">
+                <a16:creationId xmlns:a16="http://schemas.microsoft.com/office/drawing/2014/main" id="{C63F5923-FAF3-DDC2-135D-A04EA4663ED7}"/>
+              </a:ext>
+            </a:extLst>
+          </p:cNvPr>
+          <p:cNvSpPr txBox="1"/>
+          <p:nvPr/>
+        </p:nvSpPr>
+        <p:spPr>
+          <a:xfrm>
+            <a:off x="334297" y="1305597"/>
+            <a:ext cx="4886927" cy="461665"/>
+          </a:xfrm>
+          <a:prstGeom prst="rect">
+            <a:avLst/>
+          </a:prstGeom>
+          <a:noFill/>
+        </p:spPr>
+        <p:txBody>
+          <a:bodyPr wrap="square">
+            <a:spAutoFit/>
+          </a:bodyPr>
+          <a:lstStyle/>
+          <a:p>
+            <a:r>
+              <a:rPr lang="en-US" sz="2400" b="1" dirty="0">
+                <a:solidFill>
+                  <a:schemeClr val="accent6">
+                    <a:lumMod val="60000"/>
+                    <a:lumOff val="40000"/>
+                  </a:schemeClr>
+                </a:solidFill>
+              </a:rPr>
+              <a:t>Break Tasks into Steps - EXAMPLE</a:t>
+            </a:r>
+          </a:p>
+        </p:txBody>
+      </p:sp>
     </p:spTree>
     <p:extLst>
       <p:ext uri="{BB962C8B-B14F-4D97-AF65-F5344CB8AC3E}">
@@ -6348,7 +7077,7 @@
 </p:sld>
 </file>
 
-<file path=ppt/slides/slide16.xml><?xml version="1.0" encoding="utf-8"?>
+<file path=ppt/slides/slide19.xml><?xml version="1.0" encoding="utf-8"?>
 <p:sld xmlns:a="http://schemas.openxmlformats.org/drawingml/2006/main" xmlns:r="http://schemas.openxmlformats.org/officeDocument/2006/relationships" xmlns:p="http://schemas.openxmlformats.org/presentationml/2006/main">
   <p:cSld>
     <p:spTree>
@@ -6373,49 +7102,6 @@
       </p:grpSpPr>
       <p:sp>
         <p:nvSpPr>
-          <p:cNvPr id="9" name="TextBox 8">
-            <a:extLst>
-              <a:ext uri="{FF2B5EF4-FFF2-40B4-BE49-F238E27FC236}">
-                <a16:creationId xmlns:a16="http://schemas.microsoft.com/office/drawing/2014/main" id="{B11140F2-2819-299B-9758-1E687AEBE8F3}"/>
-              </a:ext>
-            </a:extLst>
-          </p:cNvPr>
-          <p:cNvSpPr txBox="1"/>
-          <p:nvPr/>
-        </p:nvSpPr>
-        <p:spPr>
-          <a:xfrm>
-            <a:off x="592087" y="123858"/>
-            <a:ext cx="9859604" cy="523220"/>
-          </a:xfrm>
-          <a:prstGeom prst="rect">
-            <a:avLst/>
-          </a:prstGeom>
-          <a:noFill/>
-        </p:spPr>
-        <p:txBody>
-          <a:bodyPr wrap="square" rtlCol="0">
-            <a:spAutoFit/>
-          </a:bodyPr>
-          <a:lstStyle/>
-          <a:p>
-            <a:pPr algn="ctr"/>
-            <a:r>
-              <a:rPr lang="en-US" sz="2800" dirty="0">
-                <a:solidFill>
-                  <a:schemeClr val="accent6">
-                    <a:lumMod val="60000"/>
-                    <a:lumOff val="40000"/>
-                  </a:schemeClr>
-                </a:solidFill>
-              </a:rPr>
-              <a:t>Hallucinations – Why AI Lies &amp; How to Stop It</a:t>
-            </a:r>
-          </a:p>
-        </p:txBody>
-      </p:sp>
-      <p:sp>
-        <p:nvSpPr>
           <p:cNvPr id="3" name="TextBox 2">
             <a:extLst>
               <a:ext uri="{FF2B5EF4-FFF2-40B4-BE49-F238E27FC236}">
@@ -6429,7 +7115,7 @@
         <p:spPr>
           <a:xfrm>
             <a:off x="334297" y="1305597"/>
-            <a:ext cx="8863780" cy="4154984"/>
+            <a:ext cx="8863780" cy="3785652"/>
           </a:xfrm>
           <a:prstGeom prst="rect">
             <a:avLst/>
@@ -6443,15 +7129,15 @@
           <a:lstStyle/>
           <a:p>
             <a:r>
-              <a:rPr lang="en-IN" sz="2400" b="1" dirty="0">
-                <a:solidFill>
-                  <a:schemeClr val="accent6">
-                    <a:lumMod val="60000"/>
-                    <a:lumOff val="40000"/>
-                  </a:schemeClr>
-                </a:solidFill>
-              </a:rPr>
-              <a:t>How to Reduce Hallucinations</a:t>
+              <a:rPr lang="en-US" sz="2400" b="1" dirty="0">
+                <a:solidFill>
+                  <a:schemeClr val="accent6">
+                    <a:lumMod val="60000"/>
+                    <a:lumOff val="40000"/>
+                  </a:schemeClr>
+                </a:solidFill>
+              </a:rPr>
+              <a:t>Role Prompting - Example</a:t>
             </a:r>
           </a:p>
           <a:p>
@@ -6463,23 +7149,6 @@
                 </a:schemeClr>
               </a:solidFill>
             </a:endParaRPr>
-          </a:p>
-          <a:p>
-            <a:pPr marL="342900" indent="-342900">
-              <a:buFont typeface="Arial" panose="020B0604020202020204" pitchFamily="34" charset="0"/>
-              <a:buChar char="•"/>
-            </a:pPr>
-            <a:r>
-              <a:rPr lang="en-US" sz="2400" b="1" dirty="0">
-                <a:solidFill>
-                  <a:schemeClr val="accent6">
-                    <a:lumMod val="60000"/>
-                    <a:lumOff val="40000"/>
-                  </a:schemeClr>
-                </a:solidFill>
-              </a:rPr>
-              <a:t>Use Role Prompting</a:t>
-            </a:r>
           </a:p>
           <a:p>
             <a:r>
@@ -6606,7 +7275,766 @@
 </p:sld>
 </file>
 
-<file path=ppt/slides/slide17.xml><?xml version="1.0" encoding="utf-8"?>
+<file path=ppt/slides/slide2.xml><?xml version="1.0" encoding="utf-8"?>
+<p:sld xmlns:a="http://schemas.openxmlformats.org/drawingml/2006/main" xmlns:r="http://schemas.openxmlformats.org/officeDocument/2006/relationships" xmlns:p="http://schemas.openxmlformats.org/presentationml/2006/main">
+  <p:cSld>
+    <p:spTree>
+      <p:nvGrpSpPr>
+        <p:cNvPr id="1" name="">
+          <a:extLst>
+            <a:ext uri="{FF2B5EF4-FFF2-40B4-BE49-F238E27FC236}">
+              <a16:creationId xmlns:a16="http://schemas.microsoft.com/office/drawing/2014/main" id="{3A40731C-F97B-1C41-5A63-33D4A3A9E781}"/>
+            </a:ext>
+          </a:extLst>
+        </p:cNvPr>
+        <p:cNvGrpSpPr/>
+        <p:nvPr/>
+      </p:nvGrpSpPr>
+      <p:grpSpPr>
+        <a:xfrm>
+          <a:off x="0" y="0"/>
+          <a:ext cx="0" cy="0"/>
+          <a:chOff x="0" y="0"/>
+          <a:chExt cx="0" cy="0"/>
+        </a:xfrm>
+      </p:grpSpPr>
+      <p:sp>
+        <p:nvSpPr>
+          <p:cNvPr id="118" name="TextBox 117">
+            <a:extLst>
+              <a:ext uri="{FF2B5EF4-FFF2-40B4-BE49-F238E27FC236}">
+                <a16:creationId xmlns:a16="http://schemas.microsoft.com/office/drawing/2014/main" id="{8E8A41AF-7468-7869-1ED8-1B24AE4C6DFC}"/>
+              </a:ext>
+            </a:extLst>
+          </p:cNvPr>
+          <p:cNvSpPr txBox="1"/>
+          <p:nvPr/>
+        </p:nvSpPr>
+        <p:spPr>
+          <a:xfrm>
+            <a:off x="88957" y="242852"/>
+            <a:ext cx="7813942" cy="3416320"/>
+          </a:xfrm>
+          <a:prstGeom prst="rect">
+            <a:avLst/>
+          </a:prstGeom>
+          <a:noFill/>
+        </p:spPr>
+        <p:txBody>
+          <a:bodyPr wrap="square">
+            <a:spAutoFit/>
+          </a:bodyPr>
+          <a:lstStyle/>
+          <a:p>
+            <a:r>
+              <a:rPr lang="en-IN" sz="2400" dirty="0">
+                <a:solidFill>
+                  <a:schemeClr val="accent6">
+                    <a:lumMod val="60000"/>
+                    <a:lumOff val="40000"/>
+                  </a:schemeClr>
+                </a:solidFill>
+              </a:rPr>
+              <a:t>It Follows the Engineering Method</a:t>
+            </a:r>
+          </a:p>
+          <a:p>
+            <a:pPr marL="342900" lvl="0" indent="-342900">
+              <a:buFont typeface="Arial" panose="020B0604020202020204" pitchFamily="34" charset="0"/>
+              <a:buChar char="•"/>
+            </a:pPr>
+            <a:r>
+              <a:rPr lang="en-IN" sz="2400" b="1" dirty="0">
+                <a:solidFill>
+                  <a:schemeClr val="accent6">
+                    <a:lumMod val="60000"/>
+                    <a:lumOff val="40000"/>
+                  </a:schemeClr>
+                </a:solidFill>
+              </a:rPr>
+              <a:t>Requirement Gathering:</a:t>
+            </a:r>
+            <a:r>
+              <a:rPr lang="en-IN" sz="2400" dirty="0">
+                <a:solidFill>
+                  <a:schemeClr val="accent6">
+                    <a:lumMod val="60000"/>
+                    <a:lumOff val="40000"/>
+                  </a:schemeClr>
+                </a:solidFill>
+              </a:rPr>
+              <a:t> Defining exactly what the AI needs to accomplish.</a:t>
+            </a:r>
+          </a:p>
+          <a:p>
+            <a:pPr marL="342900" lvl="0" indent="-342900">
+              <a:buFont typeface="Arial" panose="020B0604020202020204" pitchFamily="34" charset="0"/>
+              <a:buChar char="•"/>
+            </a:pPr>
+            <a:r>
+              <a:rPr lang="en-IN" sz="2400" b="1" dirty="0">
+                <a:solidFill>
+                  <a:schemeClr val="accent6">
+                    <a:lumMod val="60000"/>
+                    <a:lumOff val="40000"/>
+                  </a:schemeClr>
+                </a:solidFill>
+              </a:rPr>
+              <a:t>Prototyping:</a:t>
+            </a:r>
+            <a:r>
+              <a:rPr lang="en-IN" sz="2400" dirty="0">
+                <a:solidFill>
+                  <a:schemeClr val="accent6">
+                    <a:lumMod val="60000"/>
+                    <a:lumOff val="40000"/>
+                  </a:schemeClr>
+                </a:solidFill>
+              </a:rPr>
+              <a:t> Writing an initial version of the prompt.</a:t>
+            </a:r>
+          </a:p>
+          <a:p>
+            <a:pPr marL="342900" lvl="0" indent="-342900">
+              <a:buFont typeface="Arial" panose="020B0604020202020204" pitchFamily="34" charset="0"/>
+              <a:buChar char="•"/>
+            </a:pPr>
+            <a:r>
+              <a:rPr lang="en-IN" sz="2400" b="1" dirty="0">
+                <a:solidFill>
+                  <a:schemeClr val="accent6">
+                    <a:lumMod val="60000"/>
+                    <a:lumOff val="40000"/>
+                  </a:schemeClr>
+                </a:solidFill>
+              </a:rPr>
+              <a:t>Testing and Iteration:</a:t>
+            </a:r>
+            <a:r>
+              <a:rPr lang="en-IN" sz="2400" dirty="0">
+                <a:solidFill>
+                  <a:schemeClr val="accent6">
+                    <a:lumMod val="60000"/>
+                    <a:lumOff val="40000"/>
+                  </a:schemeClr>
+                </a:solidFill>
+              </a:rPr>
+              <a:t> Running the prompt multiple times against different inputs.</a:t>
+            </a:r>
+          </a:p>
+          <a:p>
+            <a:pPr marL="342900" lvl="0" indent="-342900">
+              <a:buFont typeface="Arial" panose="020B0604020202020204" pitchFamily="34" charset="0"/>
+              <a:buChar char="•"/>
+            </a:pPr>
+            <a:r>
+              <a:rPr lang="en-IN" sz="2400" b="1" dirty="0">
+                <a:solidFill>
+                  <a:schemeClr val="accent6">
+                    <a:lumMod val="60000"/>
+                    <a:lumOff val="40000"/>
+                  </a:schemeClr>
+                </a:solidFill>
+              </a:rPr>
+              <a:t>Debugging:</a:t>
+            </a:r>
+            <a:r>
+              <a:rPr lang="en-IN" sz="2400" dirty="0">
+                <a:solidFill>
+                  <a:schemeClr val="accent6">
+                    <a:lumMod val="60000"/>
+                    <a:lumOff val="40000"/>
+                  </a:schemeClr>
+                </a:solidFill>
+              </a:rPr>
+              <a:t> Identifying why the model failed (e.g., hallucination, ignoring constraints) and fixing the prompt to eliminate that error.</a:t>
+            </a:r>
+          </a:p>
+        </p:txBody>
+      </p:sp>
+      <p:sp>
+        <p:nvSpPr>
+          <p:cNvPr id="2" name="Rectangle 1">
+            <a:extLst>
+              <a:ext uri="{FF2B5EF4-FFF2-40B4-BE49-F238E27FC236}">
+                <a16:creationId xmlns:a16="http://schemas.microsoft.com/office/drawing/2014/main" id="{4D26A4AA-A100-7D4C-C221-4F3DDF5E60A6}"/>
+              </a:ext>
+            </a:extLst>
+          </p:cNvPr>
+          <p:cNvSpPr/>
+          <p:nvPr/>
+        </p:nvSpPr>
+        <p:spPr>
+          <a:xfrm>
+            <a:off x="4361688" y="3813048"/>
+            <a:ext cx="3154680" cy="1490472"/>
+          </a:xfrm>
+          <a:prstGeom prst="rect">
+            <a:avLst/>
+          </a:prstGeom>
+        </p:spPr>
+        <p:style>
+          <a:lnRef idx="2">
+            <a:schemeClr val="accent1">
+              <a:shade val="15000"/>
+            </a:schemeClr>
+          </a:lnRef>
+          <a:fillRef idx="1">
+            <a:schemeClr val="accent1"/>
+          </a:fillRef>
+          <a:effectRef idx="0">
+            <a:schemeClr val="accent1"/>
+          </a:effectRef>
+          <a:fontRef idx="minor">
+            <a:schemeClr val="lt1"/>
+          </a:fontRef>
+        </p:style>
+        <p:txBody>
+          <a:bodyPr rtlCol="0" anchor="ctr"/>
+          <a:lstStyle/>
+          <a:p>
+            <a:pPr algn="ctr"/>
+            <a:r>
+              <a:rPr lang="en-US" sz="2400" dirty="0"/>
+              <a:t>LLM</a:t>
+            </a:r>
+          </a:p>
+          <a:p>
+            <a:pPr algn="ctr"/>
+            <a:r>
+              <a:rPr lang="en-US" sz="2400" dirty="0"/>
+              <a:t>(ChatGPT, Gemini, Claude AI, </a:t>
+            </a:r>
+            <a:r>
+              <a:rPr lang="en-US" sz="2400" dirty="0" err="1"/>
+              <a:t>etc</a:t>
+            </a:r>
+            <a:r>
+              <a:rPr lang="en-US" sz="2400" dirty="0"/>
+              <a:t>)</a:t>
+            </a:r>
+          </a:p>
+        </p:txBody>
+      </p:sp>
+      <p:sp>
+        <p:nvSpPr>
+          <p:cNvPr id="3" name="Arrow: Right 2">
+            <a:extLst>
+              <a:ext uri="{FF2B5EF4-FFF2-40B4-BE49-F238E27FC236}">
+                <a16:creationId xmlns:a16="http://schemas.microsoft.com/office/drawing/2014/main" id="{1BC0DB2E-91C6-6D3A-AA74-DA9B321762AD}"/>
+              </a:ext>
+            </a:extLst>
+          </p:cNvPr>
+          <p:cNvSpPr/>
+          <p:nvPr/>
+        </p:nvSpPr>
+        <p:spPr>
+          <a:xfrm>
+            <a:off x="2807208" y="4206240"/>
+            <a:ext cx="1188720" cy="640080"/>
+          </a:xfrm>
+          <a:prstGeom prst="rightArrow">
+            <a:avLst/>
+          </a:prstGeom>
+        </p:spPr>
+        <p:style>
+          <a:lnRef idx="2">
+            <a:schemeClr val="accent1">
+              <a:shade val="15000"/>
+            </a:schemeClr>
+          </a:lnRef>
+          <a:fillRef idx="1">
+            <a:schemeClr val="accent1"/>
+          </a:fillRef>
+          <a:effectRef idx="0">
+            <a:schemeClr val="accent1"/>
+          </a:effectRef>
+          <a:fontRef idx="minor">
+            <a:schemeClr val="lt1"/>
+          </a:fontRef>
+        </p:style>
+        <p:txBody>
+          <a:bodyPr rtlCol="0" anchor="ctr"/>
+          <a:lstStyle/>
+          <a:p>
+            <a:pPr algn="ctr"/>
+            <a:endParaRPr lang="en-US"/>
+          </a:p>
+        </p:txBody>
+      </p:sp>
+      <p:sp>
+        <p:nvSpPr>
+          <p:cNvPr id="5" name="Arrow: Right 4">
+            <a:extLst>
+              <a:ext uri="{FF2B5EF4-FFF2-40B4-BE49-F238E27FC236}">
+                <a16:creationId xmlns:a16="http://schemas.microsoft.com/office/drawing/2014/main" id="{F07C3C08-BC3F-CFAD-419B-C2AC9019493E}"/>
+              </a:ext>
+            </a:extLst>
+          </p:cNvPr>
+          <p:cNvSpPr/>
+          <p:nvPr/>
+        </p:nvSpPr>
+        <p:spPr>
+          <a:xfrm>
+            <a:off x="7729728" y="4130040"/>
+            <a:ext cx="1130808" cy="640080"/>
+          </a:xfrm>
+          <a:prstGeom prst="rightArrow">
+            <a:avLst/>
+          </a:prstGeom>
+        </p:spPr>
+        <p:style>
+          <a:lnRef idx="2">
+            <a:schemeClr val="accent1">
+              <a:shade val="15000"/>
+            </a:schemeClr>
+          </a:lnRef>
+          <a:fillRef idx="1">
+            <a:schemeClr val="accent1"/>
+          </a:fillRef>
+          <a:effectRef idx="0">
+            <a:schemeClr val="accent1"/>
+          </a:effectRef>
+          <a:fontRef idx="minor">
+            <a:schemeClr val="lt1"/>
+          </a:fontRef>
+        </p:style>
+        <p:txBody>
+          <a:bodyPr rtlCol="0" anchor="ctr"/>
+          <a:lstStyle/>
+          <a:p>
+            <a:pPr algn="ctr"/>
+            <a:endParaRPr lang="en-US"/>
+          </a:p>
+        </p:txBody>
+      </p:sp>
+      <p:sp>
+        <p:nvSpPr>
+          <p:cNvPr id="6" name="Oval 5">
+            <a:extLst>
+              <a:ext uri="{FF2B5EF4-FFF2-40B4-BE49-F238E27FC236}">
+                <a16:creationId xmlns:a16="http://schemas.microsoft.com/office/drawing/2014/main" id="{18BF0BA1-42E3-ACC4-E978-A8DF06E27B66}"/>
+              </a:ext>
+            </a:extLst>
+          </p:cNvPr>
+          <p:cNvSpPr/>
+          <p:nvPr/>
+        </p:nvSpPr>
+        <p:spPr>
+          <a:xfrm>
+            <a:off x="777240" y="3933444"/>
+            <a:ext cx="1664208" cy="1033272"/>
+          </a:xfrm>
+          <a:prstGeom prst="ellipse">
+            <a:avLst/>
+          </a:prstGeom>
+        </p:spPr>
+        <p:style>
+          <a:lnRef idx="2">
+            <a:schemeClr val="accent1">
+              <a:shade val="15000"/>
+            </a:schemeClr>
+          </a:lnRef>
+          <a:fillRef idx="1">
+            <a:schemeClr val="accent1"/>
+          </a:fillRef>
+          <a:effectRef idx="0">
+            <a:schemeClr val="accent1"/>
+          </a:effectRef>
+          <a:fontRef idx="minor">
+            <a:schemeClr val="lt1"/>
+          </a:fontRef>
+        </p:style>
+        <p:txBody>
+          <a:bodyPr rtlCol="0" anchor="ctr"/>
+          <a:lstStyle/>
+          <a:p>
+            <a:pPr algn="ctr"/>
+            <a:r>
+              <a:rPr lang="en-US" dirty="0"/>
+              <a:t>Prompt</a:t>
+            </a:r>
+          </a:p>
+        </p:txBody>
+      </p:sp>
+      <p:sp>
+        <p:nvSpPr>
+          <p:cNvPr id="9" name="Oval 8">
+            <a:extLst>
+              <a:ext uri="{FF2B5EF4-FFF2-40B4-BE49-F238E27FC236}">
+                <a16:creationId xmlns:a16="http://schemas.microsoft.com/office/drawing/2014/main" id="{FA6591A3-4491-63D2-ED0A-D0183076390D}"/>
+              </a:ext>
+            </a:extLst>
+          </p:cNvPr>
+          <p:cNvSpPr/>
+          <p:nvPr/>
+        </p:nvSpPr>
+        <p:spPr>
+          <a:xfrm>
+            <a:off x="9168384" y="3933444"/>
+            <a:ext cx="1664208" cy="1033272"/>
+          </a:xfrm>
+          <a:prstGeom prst="ellipse">
+            <a:avLst/>
+          </a:prstGeom>
+        </p:spPr>
+        <p:style>
+          <a:lnRef idx="2">
+            <a:schemeClr val="accent1">
+              <a:shade val="15000"/>
+            </a:schemeClr>
+          </a:lnRef>
+          <a:fillRef idx="1">
+            <a:schemeClr val="accent1"/>
+          </a:fillRef>
+          <a:effectRef idx="0">
+            <a:schemeClr val="accent1"/>
+          </a:effectRef>
+          <a:fontRef idx="minor">
+            <a:schemeClr val="lt1"/>
+          </a:fontRef>
+        </p:style>
+        <p:txBody>
+          <a:bodyPr rtlCol="0" anchor="ctr"/>
+          <a:lstStyle/>
+          <a:p>
+            <a:pPr algn="ctr"/>
+            <a:r>
+              <a:rPr lang="en-US"/>
+              <a:t>Output</a:t>
+            </a:r>
+            <a:endParaRPr lang="en-US" dirty="0"/>
+          </a:p>
+        </p:txBody>
+      </p:sp>
+      <p:sp>
+        <p:nvSpPr>
+          <p:cNvPr id="4" name="TextBox 3">
+            <a:extLst>
+              <a:ext uri="{FF2B5EF4-FFF2-40B4-BE49-F238E27FC236}">
+                <a16:creationId xmlns:a16="http://schemas.microsoft.com/office/drawing/2014/main" id="{9A344E24-BD87-E7E3-313F-7A271B22ECD1}"/>
+              </a:ext>
+            </a:extLst>
+          </p:cNvPr>
+          <p:cNvSpPr txBox="1"/>
+          <p:nvPr/>
+        </p:nvSpPr>
+        <p:spPr>
+          <a:xfrm>
+            <a:off x="8153400" y="653212"/>
+            <a:ext cx="3063240" cy="646331"/>
+          </a:xfrm>
+          <a:prstGeom prst="rect">
+            <a:avLst/>
+          </a:prstGeom>
+          <a:noFill/>
+        </p:spPr>
+        <p:txBody>
+          <a:bodyPr wrap="square" rtlCol="0">
+            <a:spAutoFit/>
+          </a:bodyPr>
+          <a:lstStyle/>
+          <a:p>
+            <a:r>
+              <a:rPr lang="en-US" dirty="0">
+                <a:solidFill>
+                  <a:schemeClr val="accent4">
+                    <a:lumMod val="60000"/>
+                    <a:lumOff val="40000"/>
+                  </a:schemeClr>
+                </a:solidFill>
+              </a:rPr>
+              <a:t>Create an email for client that is late on payments</a:t>
+            </a:r>
+            <a:endParaRPr lang="en-IN" dirty="0">
+              <a:solidFill>
+                <a:schemeClr val="accent4">
+                  <a:lumMod val="60000"/>
+                  <a:lumOff val="40000"/>
+                </a:schemeClr>
+              </a:solidFill>
+            </a:endParaRPr>
+          </a:p>
+        </p:txBody>
+      </p:sp>
+      <p:sp>
+        <p:nvSpPr>
+          <p:cNvPr id="10" name="TextBox 9">
+            <a:extLst>
+              <a:ext uri="{FF2B5EF4-FFF2-40B4-BE49-F238E27FC236}">
+                <a16:creationId xmlns:a16="http://schemas.microsoft.com/office/drawing/2014/main" id="{3826AF69-5E46-F68A-C513-060CFF5B7C45}"/>
+              </a:ext>
+            </a:extLst>
+          </p:cNvPr>
+          <p:cNvSpPr txBox="1"/>
+          <p:nvPr/>
+        </p:nvSpPr>
+        <p:spPr>
+          <a:xfrm>
+            <a:off x="8096250" y="1447245"/>
+            <a:ext cx="3681222" cy="646331"/>
+          </a:xfrm>
+          <a:prstGeom prst="rect">
+            <a:avLst/>
+          </a:prstGeom>
+          <a:noFill/>
+        </p:spPr>
+        <p:txBody>
+          <a:bodyPr wrap="square" rtlCol="0">
+            <a:spAutoFit/>
+          </a:bodyPr>
+          <a:lstStyle/>
+          <a:p>
+            <a:r>
+              <a:rPr lang="en-US" dirty="0">
+                <a:solidFill>
+                  <a:schemeClr val="accent4">
+                    <a:lumMod val="60000"/>
+                    <a:lumOff val="40000"/>
+                  </a:schemeClr>
+                </a:solidFill>
+              </a:rPr>
+              <a:t>Generate email for XYZ. He is late on payment.</a:t>
+            </a:r>
+            <a:endParaRPr lang="en-IN" dirty="0">
+              <a:solidFill>
+                <a:schemeClr val="accent4">
+                  <a:lumMod val="60000"/>
+                  <a:lumOff val="40000"/>
+                </a:schemeClr>
+              </a:solidFill>
+            </a:endParaRPr>
+          </a:p>
+        </p:txBody>
+      </p:sp>
+      <p:sp>
+        <p:nvSpPr>
+          <p:cNvPr id="12" name="TextBox 11">
+            <a:extLst>
+              <a:ext uri="{FF2B5EF4-FFF2-40B4-BE49-F238E27FC236}">
+                <a16:creationId xmlns:a16="http://schemas.microsoft.com/office/drawing/2014/main" id="{6D1B8633-10E3-F226-867D-889497375D14}"/>
+              </a:ext>
+            </a:extLst>
+          </p:cNvPr>
+          <p:cNvSpPr txBox="1"/>
+          <p:nvPr/>
+        </p:nvSpPr>
+        <p:spPr>
+          <a:xfrm>
+            <a:off x="8295132" y="2404794"/>
+            <a:ext cx="3482340" cy="923330"/>
+          </a:xfrm>
+          <a:prstGeom prst="rect">
+            <a:avLst/>
+          </a:prstGeom>
+          <a:noFill/>
+        </p:spPr>
+        <p:txBody>
+          <a:bodyPr wrap="square" rtlCol="0">
+            <a:spAutoFit/>
+          </a:bodyPr>
+          <a:lstStyle/>
+          <a:p>
+            <a:r>
+              <a:rPr lang="en-US" b="1" dirty="0">
+                <a:solidFill>
+                  <a:schemeClr val="accent4">
+                    <a:lumMod val="60000"/>
+                    <a:lumOff val="40000"/>
+                  </a:schemeClr>
+                </a:solidFill>
+              </a:rPr>
+              <a:t>Keep refining prompts</a:t>
+            </a:r>
+          </a:p>
+          <a:p>
+            <a:pPr marL="285750" indent="-285750">
+              <a:buFont typeface="Arial" panose="020B0604020202020204" pitchFamily="34" charset="0"/>
+              <a:buChar char="•"/>
+            </a:pPr>
+            <a:r>
+              <a:rPr lang="en-US" dirty="0">
+                <a:solidFill>
+                  <a:schemeClr val="accent4">
+                    <a:lumMod val="60000"/>
+                    <a:lumOff val="40000"/>
+                  </a:schemeClr>
+                </a:solidFill>
+              </a:rPr>
+              <a:t>Keep it under 80 words</a:t>
+            </a:r>
+          </a:p>
+          <a:p>
+            <a:pPr marL="285750" indent="-285750">
+              <a:buFont typeface="Arial" panose="020B0604020202020204" pitchFamily="34" charset="0"/>
+              <a:buChar char="•"/>
+            </a:pPr>
+            <a:r>
+              <a:rPr lang="en-US" dirty="0">
+                <a:solidFill>
+                  <a:schemeClr val="accent4">
+                    <a:lumMod val="60000"/>
+                    <a:lumOff val="40000"/>
+                  </a:schemeClr>
+                </a:solidFill>
+              </a:rPr>
+              <a:t>Keep the tone friendly.</a:t>
+            </a:r>
+          </a:p>
+        </p:txBody>
+      </p:sp>
+      <p:sp>
+        <p:nvSpPr>
+          <p:cNvPr id="13" name="Arrow: Right 12">
+            <a:extLst>
+              <a:ext uri="{FF2B5EF4-FFF2-40B4-BE49-F238E27FC236}">
+                <a16:creationId xmlns:a16="http://schemas.microsoft.com/office/drawing/2014/main" id="{582B3943-9643-E5EE-4DC5-F31C685897E8}"/>
+              </a:ext>
+            </a:extLst>
+          </p:cNvPr>
+          <p:cNvSpPr/>
+          <p:nvPr/>
+        </p:nvSpPr>
+        <p:spPr>
+          <a:xfrm rot="11148238">
+            <a:off x="7542207" y="727880"/>
+            <a:ext cx="448056" cy="292608"/>
+          </a:xfrm>
+          <a:prstGeom prst="rightArrow">
+            <a:avLst/>
+          </a:prstGeom>
+        </p:spPr>
+        <p:style>
+          <a:lnRef idx="2">
+            <a:schemeClr val="accent1">
+              <a:shade val="15000"/>
+            </a:schemeClr>
+          </a:lnRef>
+          <a:fillRef idx="1">
+            <a:schemeClr val="accent1"/>
+          </a:fillRef>
+          <a:effectRef idx="0">
+            <a:schemeClr val="accent1"/>
+          </a:effectRef>
+          <a:fontRef idx="minor">
+            <a:schemeClr val="lt1"/>
+          </a:fontRef>
+        </p:style>
+        <p:txBody>
+          <a:bodyPr rtlCol="0" anchor="ctr"/>
+          <a:lstStyle/>
+          <a:p>
+            <a:pPr algn="ctr"/>
+            <a:endParaRPr lang="en-IN"/>
+          </a:p>
+        </p:txBody>
+      </p:sp>
+      <p:sp>
+        <p:nvSpPr>
+          <p:cNvPr id="15" name="Arrow: Right 14">
+            <a:extLst>
+              <a:ext uri="{FF2B5EF4-FFF2-40B4-BE49-F238E27FC236}">
+                <a16:creationId xmlns:a16="http://schemas.microsoft.com/office/drawing/2014/main" id="{F893A6BF-3741-7C44-9AE9-A6DC2CD52BF0}"/>
+              </a:ext>
+            </a:extLst>
+          </p:cNvPr>
+          <p:cNvSpPr/>
+          <p:nvPr/>
+        </p:nvSpPr>
+        <p:spPr>
+          <a:xfrm rot="11148238">
+            <a:off x="7678871" y="1577903"/>
+            <a:ext cx="448056" cy="292608"/>
+          </a:xfrm>
+          <a:prstGeom prst="rightArrow">
+            <a:avLst/>
+          </a:prstGeom>
+        </p:spPr>
+        <p:style>
+          <a:lnRef idx="2">
+            <a:schemeClr val="accent1">
+              <a:shade val="15000"/>
+            </a:schemeClr>
+          </a:lnRef>
+          <a:fillRef idx="1">
+            <a:schemeClr val="accent1"/>
+          </a:fillRef>
+          <a:effectRef idx="0">
+            <a:schemeClr val="accent1"/>
+          </a:effectRef>
+          <a:fontRef idx="minor">
+            <a:schemeClr val="lt1"/>
+          </a:fontRef>
+        </p:style>
+        <p:txBody>
+          <a:bodyPr rtlCol="0" anchor="ctr"/>
+          <a:lstStyle/>
+          <a:p>
+            <a:pPr algn="ctr"/>
+            <a:endParaRPr lang="en-IN"/>
+          </a:p>
+        </p:txBody>
+      </p:sp>
+      <p:sp>
+        <p:nvSpPr>
+          <p:cNvPr id="17" name="Arrow: Right 16">
+            <a:extLst>
+              <a:ext uri="{FF2B5EF4-FFF2-40B4-BE49-F238E27FC236}">
+                <a16:creationId xmlns:a16="http://schemas.microsoft.com/office/drawing/2014/main" id="{1054E7A0-1C95-112B-E0DF-DF77F8760D50}"/>
+              </a:ext>
+            </a:extLst>
+          </p:cNvPr>
+          <p:cNvSpPr/>
+          <p:nvPr/>
+        </p:nvSpPr>
+        <p:spPr>
+          <a:xfrm rot="11148238">
+            <a:off x="7743375" y="2418139"/>
+            <a:ext cx="448056" cy="292608"/>
+          </a:xfrm>
+          <a:prstGeom prst="rightArrow">
+            <a:avLst/>
+          </a:prstGeom>
+        </p:spPr>
+        <p:style>
+          <a:lnRef idx="2">
+            <a:schemeClr val="accent1">
+              <a:shade val="15000"/>
+            </a:schemeClr>
+          </a:lnRef>
+          <a:fillRef idx="1">
+            <a:schemeClr val="accent1"/>
+          </a:fillRef>
+          <a:effectRef idx="0">
+            <a:schemeClr val="accent1"/>
+          </a:effectRef>
+          <a:fontRef idx="minor">
+            <a:schemeClr val="lt1"/>
+          </a:fontRef>
+        </p:style>
+        <p:txBody>
+          <a:bodyPr rtlCol="0" anchor="ctr"/>
+          <a:lstStyle/>
+          <a:p>
+            <a:pPr algn="ctr"/>
+            <a:endParaRPr lang="en-IN"/>
+          </a:p>
+        </p:txBody>
+      </p:sp>
+    </p:spTree>
+    <p:extLst>
+      <p:ext uri="{BB962C8B-B14F-4D97-AF65-F5344CB8AC3E}">
+        <p14:creationId xmlns:p14="http://schemas.microsoft.com/office/powerpoint/2010/main" val="2036063314"/>
+      </p:ext>
+    </p:extLst>
+  </p:cSld>
+  <p:clrMapOvr>
+    <a:masterClrMapping/>
+  </p:clrMapOvr>
+</p:sld>
+</file>
+
+<file path=ppt/slides/slide20.xml><?xml version="1.0" encoding="utf-8"?>
 <p:sld xmlns:a="http://schemas.openxmlformats.org/drawingml/2006/main" xmlns:r="http://schemas.openxmlformats.org/officeDocument/2006/relationships" xmlns:p="http://schemas.openxmlformats.org/presentationml/2006/main">
   <p:cSld>
     <p:spTree>
@@ -6687,7 +8115,7 @@
         <p:spPr>
           <a:xfrm>
             <a:off x="334296" y="1305597"/>
-            <a:ext cx="10336751" cy="4154984"/>
+            <a:ext cx="10336751" cy="3785652"/>
           </a:xfrm>
           <a:prstGeom prst="rect">
             <a:avLst/>
@@ -6701,15 +8129,60 @@
           <a:lstStyle/>
           <a:p>
             <a:r>
-              <a:rPr lang="en-IN" sz="2400" b="1" dirty="0">
-                <a:solidFill>
-                  <a:schemeClr val="accent6">
-                    <a:lumMod val="60000"/>
-                    <a:lumOff val="40000"/>
-                  </a:schemeClr>
-                </a:solidFill>
-              </a:rPr>
-              <a:t>How to Reduce Hallucinations</a:t>
+              <a:rPr lang="en-US" sz="2400" b="1" dirty="0">
+                <a:solidFill>
+                  <a:schemeClr val="accent6">
+                    <a:lumMod val="60000"/>
+                    <a:lumOff val="40000"/>
+                  </a:schemeClr>
+                </a:solidFill>
+              </a:rPr>
+              <a:t>Role Prompting</a:t>
+            </a:r>
+          </a:p>
+          <a:p>
+            <a:endParaRPr lang="en-US" sz="2400" b="1" dirty="0">
+              <a:solidFill>
+                <a:schemeClr val="accent6">
+                  <a:lumMod val="60000"/>
+                  <a:lumOff val="40000"/>
+                </a:schemeClr>
+              </a:solidFill>
+            </a:endParaRPr>
+          </a:p>
+          <a:p>
+            <a:r>
+              <a:rPr lang="en-US" sz="2400" dirty="0">
+                <a:solidFill>
+                  <a:schemeClr val="accent6">
+                    <a:lumMod val="60000"/>
+                    <a:lumOff val="40000"/>
+                  </a:schemeClr>
+                </a:solidFill>
+              </a:rPr>
+              <a:t>The "</a:t>
+            </a:r>
+            <a:r>
+              <a:rPr lang="en-US" sz="2400" b="1" i="1" dirty="0">
+                <a:solidFill>
+                  <a:schemeClr val="accent6">
+                    <a:lumMod val="60000"/>
+                    <a:lumOff val="40000"/>
+                  </a:schemeClr>
+                </a:solidFill>
+              </a:rPr>
+              <a:t>Generic</a:t>
+            </a:r>
+            <a:r>
+              <a:rPr lang="en-US" sz="2400" dirty="0">
+                <a:solidFill>
+                  <a:schemeClr val="accent6">
+                    <a:lumMod val="60000"/>
+                    <a:lumOff val="40000"/>
+                  </a:schemeClr>
+                </a:solidFill>
+              </a:rPr>
+              <a:t>" Prompt (High Hallucination Risk)</a:t>
             </a:r>
           </a:p>
           <a:p>
@@ -6723,56 +8196,27 @@
             </a:endParaRPr>
           </a:p>
           <a:p>
-            <a:pPr marL="342900" indent="-342900">
-              <a:buFont typeface="Arial" panose="020B0604020202020204" pitchFamily="34" charset="0"/>
-              <a:buChar char="•"/>
-            </a:pPr>
-            <a:r>
-              <a:rPr lang="en-US" sz="2400" b="1" dirty="0">
-                <a:solidFill>
-                  <a:schemeClr val="accent6">
-                    <a:lumMod val="60000"/>
-                    <a:lumOff val="40000"/>
-                  </a:schemeClr>
-                </a:solidFill>
-              </a:rPr>
-              <a:t>Use Role Prompting</a:t>
-            </a:r>
-          </a:p>
-          <a:p>
-            <a:r>
-              <a:rPr lang="en-US" sz="2400" dirty="0">
-                <a:solidFill>
-                  <a:schemeClr val="accent6">
-                    <a:lumMod val="60000"/>
-                    <a:lumOff val="40000"/>
-                  </a:schemeClr>
-                </a:solidFill>
-              </a:rPr>
-              <a:t>The "Generic" Prompt (High Hallucination Risk)</a:t>
-            </a:r>
-          </a:p>
-          <a:p>
-            <a:endParaRPr lang="en-US" sz="2400" dirty="0">
-              <a:solidFill>
-                <a:schemeClr val="accent6">
-                  <a:lumMod val="60000"/>
-                  <a:lumOff val="40000"/>
-                </a:schemeClr>
-              </a:solidFill>
-            </a:endParaRPr>
-          </a:p>
-          <a:p>
-            <a:r>
-              <a:rPr lang="en-US" sz="2400" dirty="0">
-                <a:solidFill>
-                  <a:schemeClr val="accent6">
-                    <a:lumMod val="60000"/>
-                    <a:lumOff val="40000"/>
-                  </a:schemeClr>
-                </a:solidFill>
-              </a:rPr>
-              <a:t>Bad Prompt: "What should I do if my heart is racing?“</a:t>
+            <a:r>
+              <a:rPr lang="en-US" sz="2400" dirty="0">
+                <a:solidFill>
+                  <a:schemeClr val="accent6">
+                    <a:lumMod val="60000"/>
+                    <a:lumOff val="40000"/>
+                  </a:schemeClr>
+                </a:solidFill>
+              </a:rPr>
+              <a:t>Bad Prompt: </a:t>
+            </a:r>
+            <a:r>
+              <a:rPr lang="en-US" sz="2400" dirty="0">
+                <a:solidFill>
+                  <a:schemeClr val="accent4">
+                    <a:lumMod val="60000"/>
+                    <a:lumOff val="40000"/>
+                  </a:schemeClr>
+                </a:solidFill>
+              </a:rPr>
+              <a:t>"What should I do if my heart is racing?“</a:t>
             </a:r>
           </a:p>
           <a:p>
@@ -6826,7 +8270,7 @@
 </p:sld>
 </file>
 
-<file path=ppt/slides/slide18.xml><?xml version="1.0" encoding="utf-8"?>
+<file path=ppt/slides/slide21.xml><?xml version="1.0" encoding="utf-8"?>
 <p:sld xmlns:a="http://schemas.openxmlformats.org/drawingml/2006/main" xmlns:r="http://schemas.openxmlformats.org/officeDocument/2006/relationships" xmlns:p="http://schemas.openxmlformats.org/presentationml/2006/main">
   <p:cSld>
     <p:spTree>
@@ -6864,7 +8308,7 @@
         <p:spPr>
           <a:xfrm>
             <a:off x="334296" y="116877"/>
-            <a:ext cx="11379168" cy="6370975"/>
+            <a:ext cx="11379168" cy="2308324"/>
           </a:xfrm>
           <a:prstGeom prst="rect">
             <a:avLst/>
@@ -6878,15 +8322,15 @@
           <a:lstStyle/>
           <a:p>
             <a:r>
-              <a:rPr lang="en-IN" sz="2400" b="1" dirty="0">
-                <a:solidFill>
-                  <a:schemeClr val="accent6">
-                    <a:lumMod val="60000"/>
-                    <a:lumOff val="40000"/>
-                  </a:schemeClr>
-                </a:solidFill>
-              </a:rPr>
-              <a:t>How to Reduce Hallucinations</a:t>
+              <a:rPr lang="en-US" sz="2400" dirty="0">
+                <a:solidFill>
+                  <a:schemeClr val="accent6">
+                    <a:lumMod val="60000"/>
+                    <a:lumOff val="40000"/>
+                  </a:schemeClr>
+                </a:solidFill>
+              </a:rPr>
+              <a:t>The "Role-Prompted" Example (Lower Hallucination Risk)</a:t>
             </a:r>
           </a:p>
           <a:p>
@@ -6900,6 +8344,96 @@
             </a:endParaRPr>
           </a:p>
           <a:p>
+            <a:r>
+              <a:rPr lang="en-US" sz="2400" dirty="0">
+                <a:solidFill>
+                  <a:schemeClr val="accent6">
+                    <a:lumMod val="60000"/>
+                    <a:lumOff val="40000"/>
+                  </a:schemeClr>
+                </a:solidFill>
+              </a:rPr>
+              <a:t>Better Prompt: </a:t>
+            </a:r>
+            <a:r>
+              <a:rPr lang="en-US" sz="2400" dirty="0">
+                <a:solidFill>
+                  <a:schemeClr val="accent4">
+                    <a:lumMod val="60000"/>
+                    <a:lumOff val="40000"/>
+                  </a:schemeClr>
+                </a:solidFill>
+              </a:rPr>
+              <a:t>"You are a board-certified cardiologist with 20 years of experience. </a:t>
+            </a:r>
+          </a:p>
+          <a:p>
+            <a:r>
+              <a:rPr lang="en-US" sz="2400" dirty="0">
+                <a:solidFill>
+                  <a:schemeClr val="accent4">
+                    <a:lumMod val="60000"/>
+                    <a:lumOff val="40000"/>
+                  </a:schemeClr>
+                </a:solidFill>
+              </a:rPr>
+              <a:t>Based on clinical emergency protocols, what is the step-by-step procedure for a patient experiencing a sudden resting heart rate over 120 BPM? If you are unsure of specific diagnostic criteria, state that you cannot provide medical advice for that detail</a:t>
+            </a:r>
+            <a:r>
+              <a:rPr lang="en-US" sz="2400" dirty="0">
+                <a:solidFill>
+                  <a:schemeClr val="accent6">
+                    <a:lumMod val="60000"/>
+                    <a:lumOff val="40000"/>
+                  </a:schemeClr>
+                </a:solidFill>
+              </a:rPr>
+              <a:t>."</a:t>
+            </a:r>
+          </a:p>
+        </p:txBody>
+      </p:sp>
+      <p:sp>
+        <p:nvSpPr>
+          <p:cNvPr id="4" name="TextBox 3">
+            <a:extLst>
+              <a:ext uri="{FF2B5EF4-FFF2-40B4-BE49-F238E27FC236}">
+                <a16:creationId xmlns:a16="http://schemas.microsoft.com/office/drawing/2014/main" id="{2F7D8C63-60B9-7002-C7A3-9E98DEA0AA6D}"/>
+              </a:ext>
+            </a:extLst>
+          </p:cNvPr>
+          <p:cNvSpPr txBox="1"/>
+          <p:nvPr/>
+        </p:nvSpPr>
+        <p:spPr>
+          <a:xfrm>
+            <a:off x="571500" y="3160235"/>
+            <a:ext cx="10410444" cy="2308324"/>
+          </a:xfrm>
+          <a:prstGeom prst="rect">
+            <a:avLst/>
+          </a:prstGeom>
+          <a:noFill/>
+        </p:spPr>
+        <p:txBody>
+          <a:bodyPr wrap="square">
+            <a:spAutoFit/>
+          </a:bodyPr>
+          <a:lstStyle/>
+          <a:p>
+            <a:r>
+              <a:rPr lang="en-US" sz="2400" u="sng" dirty="0">
+                <a:solidFill>
+                  <a:schemeClr val="accent6">
+                    <a:lumMod val="60000"/>
+                    <a:lumOff val="40000"/>
+                  </a:schemeClr>
+                </a:solidFill>
+              </a:rPr>
+              <a:t>Why this works:</a:t>
+            </a:r>
+          </a:p>
+          <a:p>
             <a:pPr marL="342900" indent="-342900">
               <a:buFont typeface="Arial" panose="020B0604020202020204" pitchFamily="34" charset="0"/>
               <a:buChar char="•"/>
@@ -6913,24 +8447,26 @@
                   </a:schemeClr>
                 </a:solidFill>
               </a:rPr>
-              <a:t>Use Role Prompting</a:t>
-            </a:r>
-          </a:p>
-          <a:p>
-            <a:r>
-              <a:rPr lang="en-US" sz="2400" dirty="0">
-                <a:solidFill>
-                  <a:schemeClr val="accent6">
-                    <a:lumMod val="60000"/>
-                    <a:lumOff val="40000"/>
-                  </a:schemeClr>
-                </a:solidFill>
-              </a:rPr>
-              <a:t>The "Role-Prompted" Example (Lower Hallucination Risk)</a:t>
-            </a:r>
-          </a:p>
-          <a:p>
-            <a:endParaRPr lang="en-US" sz="2400" dirty="0">
+              <a:t>Domain Alignment: </a:t>
+            </a:r>
+            <a:r>
+              <a:rPr lang="en-US" sz="2400" dirty="0">
+                <a:solidFill>
+                  <a:schemeClr val="accent6">
+                    <a:lumMod val="60000"/>
+                    <a:lumOff val="40000"/>
+                  </a:schemeClr>
+                </a:solidFill>
+              </a:rPr>
+              <a:t>By assuming the role, the model weights "medical journal" data more heavily than "internet forum" data.</a:t>
+            </a:r>
+          </a:p>
+          <a:p>
+            <a:pPr marL="342900" indent="-342900">
+              <a:buFont typeface="Arial" panose="020B0604020202020204" pitchFamily="34" charset="0"/>
+              <a:buChar char="•"/>
+            </a:pPr>
+            <a:endParaRPr lang="en-US" sz="2400" b="1" dirty="0">
               <a:solidFill>
                 <a:schemeClr val="accent6">
                   <a:lumMod val="60000"/>
@@ -6940,103 +8476,10 @@
             </a:endParaRPr>
           </a:p>
           <a:p>
-            <a:r>
-              <a:rPr lang="en-US" sz="2400" dirty="0">
-                <a:solidFill>
-                  <a:schemeClr val="accent6">
-                    <a:lumMod val="60000"/>
-                    <a:lumOff val="40000"/>
-                  </a:schemeClr>
-                </a:solidFill>
-              </a:rPr>
-              <a:t>Better Prompt: "You are a board-certified cardiologist with 20 years of experience. </a:t>
-            </a:r>
-          </a:p>
-          <a:p>
-            <a:r>
-              <a:rPr lang="en-US" sz="2400" dirty="0">
-                <a:solidFill>
-                  <a:schemeClr val="accent6">
-                    <a:lumMod val="60000"/>
-                    <a:lumOff val="40000"/>
-                  </a:schemeClr>
-                </a:solidFill>
-              </a:rPr>
-              <a:t>Based on clinical emergency protocols, what is the step-by-step procedure for a patient experiencing a sudden resting heart rate over 120 BPM? If you are unsure of specific diagnostic criteria, state that you cannot provide medical advice for that detail."</a:t>
-            </a:r>
-          </a:p>
-          <a:p>
-            <a:endParaRPr lang="en-US" sz="2400" dirty="0">
-              <a:solidFill>
-                <a:schemeClr val="accent6">
-                  <a:lumMod val="60000"/>
-                  <a:lumOff val="40000"/>
-                </a:schemeClr>
-              </a:solidFill>
-            </a:endParaRPr>
-          </a:p>
-          <a:p>
-            <a:r>
-              <a:rPr lang="en-US" sz="2400" dirty="0">
-                <a:solidFill>
-                  <a:schemeClr val="accent6">
-                    <a:lumMod val="60000"/>
-                    <a:lumOff val="40000"/>
-                  </a:schemeClr>
-                </a:solidFill>
-              </a:rPr>
-              <a:t>Why this works:</a:t>
-            </a:r>
-          </a:p>
-          <a:p>
-            <a:r>
-              <a:rPr lang="en-US" sz="2400" b="1" dirty="0">
-                <a:solidFill>
-                  <a:schemeClr val="accent6">
-                    <a:lumMod val="60000"/>
-                    <a:lumOff val="40000"/>
-                  </a:schemeClr>
-                </a:solidFill>
-              </a:rPr>
-              <a:t>Domain Alignment: </a:t>
-            </a:r>
-            <a:r>
-              <a:rPr lang="en-US" sz="2400" dirty="0">
-                <a:solidFill>
-                  <a:schemeClr val="accent6">
-                    <a:lumMod val="60000"/>
-                    <a:lumOff val="40000"/>
-                  </a:schemeClr>
-                </a:solidFill>
-              </a:rPr>
-              <a:t>By assuming the role, the model weights "medical journal" data more heavily than "internet forum" data.</a:t>
-            </a:r>
-          </a:p>
-          <a:p>
-            <a:r>
-              <a:rPr lang="en-US" sz="2400" b="1" dirty="0">
-                <a:solidFill>
-                  <a:schemeClr val="accent6">
-                    <a:lumMod val="60000"/>
-                    <a:lumOff val="40000"/>
-                  </a:schemeClr>
-                </a:solidFill>
-              </a:rPr>
-              <a:t>Tone Shift: </a:t>
-            </a:r>
-            <a:r>
-              <a:rPr lang="en-US" sz="2400" dirty="0">
-                <a:solidFill>
-                  <a:schemeClr val="accent6">
-                    <a:lumMod val="60000"/>
-                    <a:lumOff val="40000"/>
-                  </a:schemeClr>
-                </a:solidFill>
-              </a:rPr>
-              <a:t>It shifts from a conversational buddy to a professional authority, which often suppresses the AI's tendency to "people please" with made-up answers.</a:t>
-            </a:r>
-          </a:p>
-          <a:p>
+            <a:pPr marL="342900" indent="-342900">
+              <a:buFont typeface="Arial" panose="020B0604020202020204" pitchFamily="34" charset="0"/>
+              <a:buChar char="•"/>
+            </a:pPr>
             <a:r>
               <a:rPr lang="en-US" sz="2400" b="1" dirty="0">
                 <a:solidFill>
@@ -7075,7 +8518,7 @@
 </p:sld>
 </file>
 
-<file path=ppt/slides/slide19.xml><?xml version="1.0" encoding="utf-8"?>
+<file path=ppt/slides/slide22.xml><?xml version="1.0" encoding="utf-8"?>
 <p:sld xmlns:a="http://schemas.openxmlformats.org/drawingml/2006/main" xmlns:r="http://schemas.openxmlformats.org/officeDocument/2006/relationships" xmlns:p="http://schemas.openxmlformats.org/presentationml/2006/main">
   <p:cSld>
     <p:spTree>
@@ -7112,6 +8555,93 @@
         </p:nvSpPr>
         <p:spPr>
           <a:xfrm>
+            <a:off x="930415" y="2281842"/>
+            <a:ext cx="9859604" cy="707886"/>
+          </a:xfrm>
+          <a:prstGeom prst="rect">
+            <a:avLst/>
+          </a:prstGeom>
+          <a:noFill/>
+        </p:spPr>
+        <p:txBody>
+          <a:bodyPr wrap="square" rtlCol="0">
+            <a:spAutoFit/>
+          </a:bodyPr>
+          <a:lstStyle/>
+          <a:p>
+            <a:pPr algn="ctr"/>
+            <a:r>
+              <a:rPr lang="en-IN" sz="4000" b="1" dirty="0">
+                <a:solidFill>
+                  <a:schemeClr val="accent6">
+                    <a:lumMod val="60000"/>
+                    <a:lumOff val="40000"/>
+                  </a:schemeClr>
+                </a:solidFill>
+              </a:rPr>
+              <a:t>The Golden Prompt Formula</a:t>
+            </a:r>
+            <a:endParaRPr lang="en-US" sz="4000" b="1" dirty="0">
+              <a:solidFill>
+                <a:schemeClr val="accent6">
+                  <a:lumMod val="60000"/>
+                  <a:lumOff val="40000"/>
+                </a:schemeClr>
+              </a:solidFill>
+            </a:endParaRPr>
+          </a:p>
+        </p:txBody>
+      </p:sp>
+    </p:spTree>
+    <p:extLst>
+      <p:ext uri="{BB962C8B-B14F-4D97-AF65-F5344CB8AC3E}">
+        <p14:creationId xmlns:p14="http://schemas.microsoft.com/office/powerpoint/2010/main" val="813288299"/>
+      </p:ext>
+    </p:extLst>
+  </p:cSld>
+  <p:clrMapOvr>
+    <a:masterClrMapping/>
+  </p:clrMapOvr>
+</p:sld>
+</file>
+
+<file path=ppt/slides/slide23.xml><?xml version="1.0" encoding="utf-8"?>
+<p:sld xmlns:a="http://schemas.openxmlformats.org/drawingml/2006/main" xmlns:r="http://schemas.openxmlformats.org/officeDocument/2006/relationships" xmlns:p="http://schemas.openxmlformats.org/presentationml/2006/main">
+  <p:cSld>
+    <p:spTree>
+      <p:nvGrpSpPr>
+        <p:cNvPr id="1" name="">
+          <a:extLst>
+            <a:ext uri="{FF2B5EF4-FFF2-40B4-BE49-F238E27FC236}">
+              <a16:creationId xmlns:a16="http://schemas.microsoft.com/office/drawing/2014/main" id="{280A40C9-5836-9616-9193-C4C731FF36DB}"/>
+            </a:ext>
+          </a:extLst>
+        </p:cNvPr>
+        <p:cNvGrpSpPr/>
+        <p:nvPr/>
+      </p:nvGrpSpPr>
+      <p:grpSpPr>
+        <a:xfrm>
+          <a:off x="0" y="0"/>
+          <a:ext cx="0" cy="0"/>
+          <a:chOff x="0" y="0"/>
+          <a:chExt cx="0" cy="0"/>
+        </a:xfrm>
+      </p:grpSpPr>
+      <p:sp>
+        <p:nvSpPr>
+          <p:cNvPr id="9" name="TextBox 8">
+            <a:extLst>
+              <a:ext uri="{FF2B5EF4-FFF2-40B4-BE49-F238E27FC236}">
+                <a16:creationId xmlns:a16="http://schemas.microsoft.com/office/drawing/2014/main" id="{EFC1F84D-1637-4F29-477A-E9FC9817A89C}"/>
+              </a:ext>
+            </a:extLst>
+          </p:cNvPr>
+          <p:cNvSpPr txBox="1"/>
+          <p:nvPr/>
+        </p:nvSpPr>
+        <p:spPr>
+          <a:xfrm>
             <a:off x="592087" y="123858"/>
             <a:ext cx="9859604" cy="523220"/>
           </a:xfrm>
@@ -7154,7 +8684,7 @@
           <p:cNvPr id="3" name="TextBox 2">
             <a:extLst>
               <a:ext uri="{FF2B5EF4-FFF2-40B4-BE49-F238E27FC236}">
-                <a16:creationId xmlns:a16="http://schemas.microsoft.com/office/drawing/2014/main" id="{27CEB8E0-9237-B4A6-C1B7-45971732F65D}"/>
+                <a16:creationId xmlns:a16="http://schemas.microsoft.com/office/drawing/2014/main" id="{3ECCED15-FB22-1A40-3D21-D2AACED571C7}"/>
               </a:ext>
             </a:extLst>
           </p:cNvPr>
@@ -7358,7 +8888,7 @@
     </p:spTree>
     <p:extLst>
       <p:ext uri="{BB962C8B-B14F-4D97-AF65-F5344CB8AC3E}">
-        <p14:creationId xmlns:p14="http://schemas.microsoft.com/office/powerpoint/2010/main" val="813288299"/>
+        <p14:creationId xmlns:p14="http://schemas.microsoft.com/office/powerpoint/2010/main" val="3974240285"/>
       </p:ext>
     </p:extLst>
   </p:cSld>
@@ -7368,315 +8898,7 @@
 </p:sld>
 </file>
 
-<file path=ppt/slides/slide2.xml><?xml version="1.0" encoding="utf-8"?>
-<p:sld xmlns:a="http://schemas.openxmlformats.org/drawingml/2006/main" xmlns:r="http://schemas.openxmlformats.org/officeDocument/2006/relationships" xmlns:p="http://schemas.openxmlformats.org/presentationml/2006/main">
-  <p:cSld>
-    <p:spTree>
-      <p:nvGrpSpPr>
-        <p:cNvPr id="1" name="">
-          <a:extLst>
-            <a:ext uri="{FF2B5EF4-FFF2-40B4-BE49-F238E27FC236}">
-              <a16:creationId xmlns:a16="http://schemas.microsoft.com/office/drawing/2014/main" id="{1E5E4F6F-FF16-B480-353A-FD9A5B959985}"/>
-            </a:ext>
-          </a:extLst>
-        </p:cNvPr>
-        <p:cNvGrpSpPr/>
-        <p:nvPr/>
-      </p:nvGrpSpPr>
-      <p:grpSpPr>
-        <a:xfrm>
-          <a:off x="0" y="0"/>
-          <a:ext cx="0" cy="0"/>
-          <a:chOff x="0" y="0"/>
-          <a:chExt cx="0" cy="0"/>
-        </a:xfrm>
-      </p:grpSpPr>
-      <p:sp>
-        <p:nvSpPr>
-          <p:cNvPr id="20" name="TextBox 19">
-            <a:extLst>
-              <a:ext uri="{FF2B5EF4-FFF2-40B4-BE49-F238E27FC236}">
-                <a16:creationId xmlns:a16="http://schemas.microsoft.com/office/drawing/2014/main" id="{E66140D9-FCDC-B3BB-C84D-13761381A495}"/>
-              </a:ext>
-            </a:extLst>
-          </p:cNvPr>
-          <p:cNvSpPr txBox="1"/>
-          <p:nvPr/>
-        </p:nvSpPr>
-        <p:spPr>
-          <a:xfrm>
-            <a:off x="164592" y="1698209"/>
-            <a:ext cx="11402568" cy="2677656"/>
-          </a:xfrm>
-          <a:prstGeom prst="rect">
-            <a:avLst/>
-          </a:prstGeom>
-          <a:noFill/>
-        </p:spPr>
-        <p:txBody>
-          <a:bodyPr wrap="square">
-            <a:spAutoFit/>
-          </a:bodyPr>
-          <a:lstStyle/>
-          <a:p>
-            <a:r>
-              <a:rPr lang="en-US" sz="2400" b="1" dirty="0">
-                <a:solidFill>
-                  <a:schemeClr val="accent6">
-                    <a:lumMod val="60000"/>
-                    <a:lumOff val="40000"/>
-                  </a:schemeClr>
-                </a:solidFill>
-              </a:rPr>
-              <a:t>Tokenization</a:t>
-            </a:r>
-            <a:r>
-              <a:rPr lang="en-US" sz="2400" dirty="0">
-                <a:solidFill>
-                  <a:schemeClr val="accent6">
-                    <a:lumMod val="60000"/>
-                    <a:lumOff val="40000"/>
-                  </a:schemeClr>
-                </a:solidFill>
-              </a:rPr>
-              <a:t> – Why AI Sees Numbers, Not Words</a:t>
-            </a:r>
-          </a:p>
-          <a:p>
-            <a:endParaRPr lang="en-US" sz="2400" dirty="0">
-              <a:solidFill>
-                <a:schemeClr val="accent6">
-                  <a:lumMod val="60000"/>
-                  <a:lumOff val="40000"/>
-                </a:schemeClr>
-              </a:solidFill>
-            </a:endParaRPr>
-          </a:p>
-          <a:p>
-            <a:r>
-              <a:rPr lang="en-US" sz="2400" dirty="0">
-                <a:solidFill>
-                  <a:schemeClr val="accent6">
-                    <a:lumMod val="60000"/>
-                    <a:lumOff val="40000"/>
-                  </a:schemeClr>
-                </a:solidFill>
-              </a:rPr>
-              <a:t>AI models </a:t>
-            </a:r>
-            <a:r>
-              <a:rPr lang="en-US" sz="2400" b="1" dirty="0">
-                <a:solidFill>
-                  <a:schemeClr val="accent6">
-                    <a:lumMod val="60000"/>
-                    <a:lumOff val="40000"/>
-                  </a:schemeClr>
-                </a:solidFill>
-              </a:rPr>
-              <a:t>do not understand language like humans</a:t>
-            </a:r>
-            <a:r>
-              <a:rPr lang="en-US" sz="2400" dirty="0">
-                <a:solidFill>
-                  <a:schemeClr val="accent6">
-                    <a:lumMod val="60000"/>
-                    <a:lumOff val="40000"/>
-                  </a:schemeClr>
-                </a:solidFill>
-              </a:rPr>
-              <a:t>.</a:t>
-            </a:r>
-            <a:br>
-              <a:rPr lang="en-US" sz="2400" dirty="0">
-                <a:solidFill>
-                  <a:schemeClr val="accent6">
-                    <a:lumMod val="60000"/>
-                    <a:lumOff val="40000"/>
-                  </a:schemeClr>
-                </a:solidFill>
-              </a:rPr>
-            </a:br>
-            <a:r>
-              <a:rPr lang="en-US" sz="2400" dirty="0">
-                <a:solidFill>
-                  <a:schemeClr val="accent6">
-                    <a:lumMod val="60000"/>
-                    <a:lumOff val="40000"/>
-                  </a:schemeClr>
-                </a:solidFill>
-              </a:rPr>
-              <a:t>They convert text into </a:t>
-            </a:r>
-            <a:r>
-              <a:rPr lang="en-US" sz="2400" b="1" dirty="0">
-                <a:solidFill>
-                  <a:schemeClr val="accent6">
-                    <a:lumMod val="60000"/>
-                    <a:lumOff val="40000"/>
-                  </a:schemeClr>
-                </a:solidFill>
-              </a:rPr>
-              <a:t>tokens</a:t>
-            </a:r>
-            <a:r>
-              <a:rPr lang="en-US" sz="2400" dirty="0">
-                <a:solidFill>
-                  <a:schemeClr val="accent6">
-                    <a:lumMod val="60000"/>
-                    <a:lumOff val="40000"/>
-                  </a:schemeClr>
-                </a:solidFill>
-              </a:rPr>
-              <a:t>, which are basically </a:t>
-            </a:r>
-            <a:r>
-              <a:rPr lang="en-US" sz="2400" b="1" dirty="0">
-                <a:solidFill>
-                  <a:schemeClr val="accent6">
-                    <a:lumMod val="60000"/>
-                    <a:lumOff val="40000"/>
-                  </a:schemeClr>
-                </a:solidFill>
-              </a:rPr>
-              <a:t>numbers representing </a:t>
-            </a:r>
-            <a:r>
-              <a:rPr lang="en-US" sz="2400" b="1" dirty="0">
-                <a:solidFill>
-                  <a:schemeClr val="accent4">
-                    <a:lumMod val="60000"/>
-                    <a:lumOff val="40000"/>
-                  </a:schemeClr>
-                </a:solidFill>
-              </a:rPr>
-              <a:t>pieces</a:t>
-            </a:r>
-            <a:r>
-              <a:rPr lang="en-US" sz="2400" b="1" dirty="0">
-                <a:solidFill>
-                  <a:schemeClr val="accent6">
-                    <a:lumMod val="60000"/>
-                    <a:lumOff val="40000"/>
-                  </a:schemeClr>
-                </a:solidFill>
-              </a:rPr>
-              <a:t> of words</a:t>
-            </a:r>
-            <a:r>
-              <a:rPr lang="en-US" sz="2400" dirty="0">
-                <a:solidFill>
-                  <a:schemeClr val="accent6">
-                    <a:lumMod val="60000"/>
-                    <a:lumOff val="40000"/>
-                  </a:schemeClr>
-                </a:solidFill>
-              </a:rPr>
-              <a:t>.</a:t>
-            </a:r>
-          </a:p>
-          <a:p>
-            <a:endParaRPr lang="en-US" sz="2400" dirty="0">
-              <a:solidFill>
-                <a:schemeClr val="accent6">
-                  <a:lumMod val="60000"/>
-                  <a:lumOff val="40000"/>
-                </a:schemeClr>
-              </a:solidFill>
-            </a:endParaRPr>
-          </a:p>
-          <a:p>
-            <a:r>
-              <a:rPr lang="en-IN" sz="2400" dirty="0">
-                <a:solidFill>
-                  <a:schemeClr val="accent6">
-                    <a:lumMod val="60000"/>
-                    <a:lumOff val="40000"/>
-                  </a:schemeClr>
-                </a:solidFill>
-              </a:rPr>
-              <a:t>Humans see: I love machine learning</a:t>
-            </a:r>
-            <a:endParaRPr lang="en-US" sz="2400" dirty="0">
-              <a:solidFill>
-                <a:schemeClr val="accent6">
-                  <a:lumMod val="60000"/>
-                  <a:lumOff val="40000"/>
-                </a:schemeClr>
-              </a:solidFill>
-            </a:endParaRPr>
-          </a:p>
-          <a:p>
-            <a:r>
-              <a:rPr lang="it-IT" sz="2400" dirty="0">
-                <a:solidFill>
-                  <a:schemeClr val="accent6">
-                    <a:lumMod val="60000"/>
-                    <a:lumOff val="40000"/>
-                  </a:schemeClr>
-                </a:solidFill>
-              </a:rPr>
-              <a:t>AI sees         :  [101, 1045, 2293, 3698, 4083, 102]</a:t>
-            </a:r>
-          </a:p>
-        </p:txBody>
-      </p:sp>
-      <p:sp>
-        <p:nvSpPr>
-          <p:cNvPr id="2" name="TextBox 1">
-            <a:extLst>
-              <a:ext uri="{FF2B5EF4-FFF2-40B4-BE49-F238E27FC236}">
-                <a16:creationId xmlns:a16="http://schemas.microsoft.com/office/drawing/2014/main" id="{B7E3B0AF-F93F-C6A5-2CCD-85B96BE53AE3}"/>
-              </a:ext>
-            </a:extLst>
-          </p:cNvPr>
-          <p:cNvSpPr txBox="1"/>
-          <p:nvPr/>
-        </p:nvSpPr>
-        <p:spPr>
-          <a:xfrm>
-            <a:off x="3028950" y="85725"/>
-            <a:ext cx="6400800" cy="707886"/>
-          </a:xfrm>
-          <a:prstGeom prst="rect">
-            <a:avLst/>
-          </a:prstGeom>
-          <a:noFill/>
-        </p:spPr>
-        <p:txBody>
-          <a:bodyPr wrap="square" rtlCol="0">
-            <a:spAutoFit/>
-          </a:bodyPr>
-          <a:lstStyle/>
-          <a:p>
-            <a:pPr algn="ctr"/>
-            <a:r>
-              <a:rPr lang="en-US" sz="4000" dirty="0">
-                <a:solidFill>
-                  <a:schemeClr val="accent6">
-                    <a:lumMod val="60000"/>
-                    <a:lumOff val="40000"/>
-                  </a:schemeClr>
-                </a:solidFill>
-              </a:rPr>
-              <a:t>Prompt Engineering</a:t>
-            </a:r>
-          </a:p>
-        </p:txBody>
-      </p:sp>
-    </p:spTree>
-    <p:extLst>
-      <p:ext uri="{BB962C8B-B14F-4D97-AF65-F5344CB8AC3E}">
-        <p14:creationId xmlns:p14="http://schemas.microsoft.com/office/powerpoint/2010/main" val="513358844"/>
-      </p:ext>
-    </p:extLst>
-  </p:cSld>
-  <p:clrMapOvr>
-    <a:masterClrMapping/>
-  </p:clrMapOvr>
-</p:sld>
-</file>
-
-<file path=ppt/slides/slide20.xml><?xml version="1.0" encoding="utf-8"?>
+<file path=ppt/slides/slide24.xml><?xml version="1.0" encoding="utf-8"?>
 <p:sld xmlns:a="http://schemas.openxmlformats.org/drawingml/2006/main" xmlns:r="http://schemas.openxmlformats.org/officeDocument/2006/relationships" xmlns:p="http://schemas.openxmlformats.org/presentationml/2006/main">
   <p:cSld>
     <p:spTree>
@@ -7976,7 +9198,7 @@
 </p:sld>
 </file>
 
-<file path=ppt/slides/slide21.xml><?xml version="1.0" encoding="utf-8"?>
+<file path=ppt/slides/slide25.xml><?xml version="1.0" encoding="utf-8"?>
 <p:sld xmlns:a="http://schemas.openxmlformats.org/drawingml/2006/main" xmlns:r="http://schemas.openxmlformats.org/officeDocument/2006/relationships" xmlns:p="http://schemas.openxmlformats.org/presentationml/2006/main">
   <p:cSld>
     <p:spTree>
@@ -8199,7 +9421,7 @@
 </p:sld>
 </file>
 
-<file path=ppt/slides/slide22.xml><?xml version="1.0" encoding="utf-8"?>
+<file path=ppt/slides/slide26.xml><?xml version="1.0" encoding="utf-8"?>
 <p:sld xmlns:a="http://schemas.openxmlformats.org/drawingml/2006/main" xmlns:r="http://schemas.openxmlformats.org/officeDocument/2006/relationships" xmlns:p="http://schemas.openxmlformats.org/presentationml/2006/main">
   <p:cSld>
     <p:spTree>
@@ -8585,7 +9807,7 @@
 </p:sld>
 </file>
 
-<file path=ppt/slides/slide23.xml><?xml version="1.0" encoding="utf-8"?>
+<file path=ppt/slides/slide27.xml><?xml version="1.0" encoding="utf-8"?>
 <p:sld xmlns:a="http://schemas.openxmlformats.org/drawingml/2006/main" xmlns:r="http://schemas.openxmlformats.org/officeDocument/2006/relationships" xmlns:p="http://schemas.openxmlformats.org/presentationml/2006/main">
   <p:cSld>
     <p:spTree>
@@ -8858,7 +10080,7 @@
 </p:sld>
 </file>
 
-<file path=ppt/slides/slide24.xml><?xml version="1.0" encoding="utf-8"?>
+<file path=ppt/slides/slide28.xml><?xml version="1.0" encoding="utf-8"?>
 <p:sld xmlns:a="http://schemas.openxmlformats.org/drawingml/2006/main" xmlns:r="http://schemas.openxmlformats.org/officeDocument/2006/relationships" xmlns:p="http://schemas.openxmlformats.org/presentationml/2006/main">
   <p:cSld>
     <p:spTree>
@@ -9052,7 +10274,7 @@
 </p:sld>
 </file>
 
-<file path=ppt/slides/slide25.xml><?xml version="1.0" encoding="utf-8"?>
+<file path=ppt/slides/slide29.xml><?xml version="1.0" encoding="utf-8"?>
 <p:sld xmlns:a="http://schemas.openxmlformats.org/drawingml/2006/main" xmlns:r="http://schemas.openxmlformats.org/officeDocument/2006/relationships" xmlns:p="http://schemas.openxmlformats.org/presentationml/2006/main">
   <p:cSld>
     <p:spTree>
@@ -9246,7 +10468,269 @@
 </p:sld>
 </file>
 
-<file path=ppt/slides/slide26.xml><?xml version="1.0" encoding="utf-8"?>
+<file path=ppt/slides/slide3.xml><?xml version="1.0" encoding="utf-8"?>
+<p:sld xmlns:a="http://schemas.openxmlformats.org/drawingml/2006/main" xmlns:r="http://schemas.openxmlformats.org/officeDocument/2006/relationships" xmlns:p="http://schemas.openxmlformats.org/presentationml/2006/main">
+  <p:cSld>
+    <p:spTree>
+      <p:nvGrpSpPr>
+        <p:cNvPr id="1" name="">
+          <a:extLst>
+            <a:ext uri="{FF2B5EF4-FFF2-40B4-BE49-F238E27FC236}">
+              <a16:creationId xmlns:a16="http://schemas.microsoft.com/office/drawing/2014/main" id="{1E5E4F6F-FF16-B480-353A-FD9A5B959985}"/>
+            </a:ext>
+          </a:extLst>
+        </p:cNvPr>
+        <p:cNvGrpSpPr/>
+        <p:nvPr/>
+      </p:nvGrpSpPr>
+      <p:grpSpPr>
+        <a:xfrm>
+          <a:off x="0" y="0"/>
+          <a:ext cx="0" cy="0"/>
+          <a:chOff x="0" y="0"/>
+          <a:chExt cx="0" cy="0"/>
+        </a:xfrm>
+      </p:grpSpPr>
+      <p:sp>
+        <p:nvSpPr>
+          <p:cNvPr id="20" name="TextBox 19">
+            <a:extLst>
+              <a:ext uri="{FF2B5EF4-FFF2-40B4-BE49-F238E27FC236}">
+                <a16:creationId xmlns:a16="http://schemas.microsoft.com/office/drawing/2014/main" id="{E66140D9-FCDC-B3BB-C84D-13761381A495}"/>
+              </a:ext>
+            </a:extLst>
+          </p:cNvPr>
+          <p:cNvSpPr txBox="1"/>
+          <p:nvPr/>
+        </p:nvSpPr>
+        <p:spPr>
+          <a:xfrm>
+            <a:off x="164592" y="1698209"/>
+            <a:ext cx="11402568" cy="2677656"/>
+          </a:xfrm>
+          <a:prstGeom prst="rect">
+            <a:avLst/>
+          </a:prstGeom>
+          <a:noFill/>
+        </p:spPr>
+        <p:txBody>
+          <a:bodyPr wrap="square">
+            <a:spAutoFit/>
+          </a:bodyPr>
+          <a:lstStyle/>
+          <a:p>
+            <a:r>
+              <a:rPr lang="en-US" sz="2400" b="1" dirty="0">
+                <a:solidFill>
+                  <a:schemeClr val="accent6">
+                    <a:lumMod val="60000"/>
+                    <a:lumOff val="40000"/>
+                  </a:schemeClr>
+                </a:solidFill>
+              </a:rPr>
+              <a:t>Tokenization</a:t>
+            </a:r>
+            <a:endParaRPr lang="en-US" sz="2400" dirty="0">
+              <a:solidFill>
+                <a:schemeClr val="accent6">
+                  <a:lumMod val="60000"/>
+                  <a:lumOff val="40000"/>
+                </a:schemeClr>
+              </a:solidFill>
+            </a:endParaRPr>
+          </a:p>
+          <a:p>
+            <a:endParaRPr lang="en-US" sz="2400" dirty="0">
+              <a:solidFill>
+                <a:schemeClr val="accent6">
+                  <a:lumMod val="60000"/>
+                  <a:lumOff val="40000"/>
+                </a:schemeClr>
+              </a:solidFill>
+            </a:endParaRPr>
+          </a:p>
+          <a:p>
+            <a:r>
+              <a:rPr lang="en-US" sz="2400" dirty="0">
+                <a:solidFill>
+                  <a:schemeClr val="accent6">
+                    <a:lumMod val="60000"/>
+                    <a:lumOff val="40000"/>
+                  </a:schemeClr>
+                </a:solidFill>
+              </a:rPr>
+              <a:t>AI models </a:t>
+            </a:r>
+            <a:r>
+              <a:rPr lang="en-US" sz="2400" b="1" dirty="0">
+                <a:solidFill>
+                  <a:schemeClr val="accent6">
+                    <a:lumMod val="60000"/>
+                    <a:lumOff val="40000"/>
+                  </a:schemeClr>
+                </a:solidFill>
+              </a:rPr>
+              <a:t>do not understand language like humans</a:t>
+            </a:r>
+            <a:r>
+              <a:rPr lang="en-US" sz="2400" dirty="0">
+                <a:solidFill>
+                  <a:schemeClr val="accent6">
+                    <a:lumMod val="60000"/>
+                    <a:lumOff val="40000"/>
+                  </a:schemeClr>
+                </a:solidFill>
+              </a:rPr>
+              <a:t>.</a:t>
+            </a:r>
+            <a:br>
+              <a:rPr lang="en-US" sz="2400" dirty="0">
+                <a:solidFill>
+                  <a:schemeClr val="accent6">
+                    <a:lumMod val="60000"/>
+                    <a:lumOff val="40000"/>
+                  </a:schemeClr>
+                </a:solidFill>
+              </a:rPr>
+            </a:br>
+            <a:r>
+              <a:rPr lang="en-US" sz="2400" dirty="0">
+                <a:solidFill>
+                  <a:schemeClr val="accent6">
+                    <a:lumMod val="60000"/>
+                    <a:lumOff val="40000"/>
+                  </a:schemeClr>
+                </a:solidFill>
+              </a:rPr>
+              <a:t>They convert </a:t>
+            </a:r>
+            <a:r>
+              <a:rPr lang="en-US" sz="2400" b="1" dirty="0">
+                <a:solidFill>
+                  <a:schemeClr val="accent6">
+                    <a:lumMod val="60000"/>
+                    <a:lumOff val="40000"/>
+                  </a:schemeClr>
+                </a:solidFill>
+              </a:rPr>
+              <a:t>text into tokens</a:t>
+            </a:r>
+            <a:r>
+              <a:rPr lang="en-US" sz="2400" dirty="0">
+                <a:solidFill>
+                  <a:schemeClr val="accent6">
+                    <a:lumMod val="60000"/>
+                    <a:lumOff val="40000"/>
+                  </a:schemeClr>
+                </a:solidFill>
+              </a:rPr>
+              <a:t>, which are basically </a:t>
+            </a:r>
+            <a:r>
+              <a:rPr lang="en-US" sz="2400" b="1" dirty="0">
+                <a:solidFill>
+                  <a:schemeClr val="accent6">
+                    <a:lumMod val="60000"/>
+                    <a:lumOff val="40000"/>
+                  </a:schemeClr>
+                </a:solidFill>
+              </a:rPr>
+              <a:t>numbers representing </a:t>
+            </a:r>
+            <a:r>
+              <a:rPr lang="en-US" sz="2400" b="1" dirty="0">
+                <a:solidFill>
+                  <a:schemeClr val="accent4">
+                    <a:lumMod val="60000"/>
+                    <a:lumOff val="40000"/>
+                  </a:schemeClr>
+                </a:solidFill>
+              </a:rPr>
+              <a:t>pieces</a:t>
+            </a:r>
+            <a:r>
+              <a:rPr lang="en-US" sz="2400" b="1" dirty="0">
+                <a:solidFill>
+                  <a:schemeClr val="accent6">
+                    <a:lumMod val="60000"/>
+                    <a:lumOff val="40000"/>
+                  </a:schemeClr>
+                </a:solidFill>
+              </a:rPr>
+              <a:t> of words</a:t>
+            </a:r>
+            <a:r>
+              <a:rPr lang="en-US" sz="2400" dirty="0">
+                <a:solidFill>
+                  <a:schemeClr val="accent6">
+                    <a:lumMod val="60000"/>
+                    <a:lumOff val="40000"/>
+                  </a:schemeClr>
+                </a:solidFill>
+              </a:rPr>
+              <a:t>.</a:t>
+            </a:r>
+          </a:p>
+          <a:p>
+            <a:endParaRPr lang="en-US" sz="2400" dirty="0">
+              <a:solidFill>
+                <a:schemeClr val="accent6">
+                  <a:lumMod val="60000"/>
+                  <a:lumOff val="40000"/>
+                </a:schemeClr>
+              </a:solidFill>
+            </a:endParaRPr>
+          </a:p>
+          <a:p>
+            <a:r>
+              <a:rPr lang="en-IN" sz="2400" dirty="0">
+                <a:solidFill>
+                  <a:schemeClr val="accent6">
+                    <a:lumMod val="60000"/>
+                    <a:lumOff val="40000"/>
+                  </a:schemeClr>
+                </a:solidFill>
+              </a:rPr>
+              <a:t>Humans see: I love machine learning</a:t>
+            </a:r>
+            <a:endParaRPr lang="en-US" sz="2400" dirty="0">
+              <a:solidFill>
+                <a:schemeClr val="accent6">
+                  <a:lumMod val="60000"/>
+                  <a:lumOff val="40000"/>
+                </a:schemeClr>
+              </a:solidFill>
+            </a:endParaRPr>
+          </a:p>
+          <a:p>
+            <a:r>
+              <a:rPr lang="it-IT" sz="2400" dirty="0">
+                <a:solidFill>
+                  <a:schemeClr val="accent6">
+                    <a:lumMod val="60000"/>
+                    <a:lumOff val="40000"/>
+                  </a:schemeClr>
+                </a:solidFill>
+              </a:rPr>
+              <a:t>AI sees         :  [101, 1045, 2293, 3698, 4083, 102]</a:t>
+            </a:r>
+          </a:p>
+        </p:txBody>
+      </p:sp>
+    </p:spTree>
+    <p:extLst>
+      <p:ext uri="{BB962C8B-B14F-4D97-AF65-F5344CB8AC3E}">
+        <p14:creationId xmlns:p14="http://schemas.microsoft.com/office/powerpoint/2010/main" val="513358844"/>
+      </p:ext>
+    </p:extLst>
+  </p:cSld>
+  <p:clrMapOvr>
+    <a:masterClrMapping/>
+  </p:clrMapOvr>
+</p:sld>
+</file>
+
+<file path=ppt/slides/slide30.xml><?xml version="1.0" encoding="utf-8"?>
 <p:sld xmlns:a="http://schemas.openxmlformats.org/drawingml/2006/main" xmlns:r="http://schemas.openxmlformats.org/officeDocument/2006/relationships" xmlns:p="http://schemas.openxmlformats.org/presentationml/2006/main">
   <p:cSld>
     <p:spTree>
@@ -9393,7 +10877,7 @@
 </p:sld>
 </file>
 
-<file path=ppt/slides/slide27.xml><?xml version="1.0" encoding="utf-8"?>
+<file path=ppt/slides/slide31.xml><?xml version="1.0" encoding="utf-8"?>
 <p:sld xmlns:a="http://schemas.openxmlformats.org/drawingml/2006/main" xmlns:r="http://schemas.openxmlformats.org/officeDocument/2006/relationships" xmlns:p="http://schemas.openxmlformats.org/presentationml/2006/main">
   <p:cSld>
     <p:spTree>
@@ -9664,7 +11148,7 @@
 </p:sld>
 </file>
 
-<file path=ppt/slides/slide28.xml><?xml version="1.0" encoding="utf-8"?>
+<file path=ppt/slides/slide32.xml><?xml version="1.0" encoding="utf-8"?>
 <p:sld xmlns:a="http://schemas.openxmlformats.org/drawingml/2006/main" xmlns:r="http://schemas.openxmlformats.org/officeDocument/2006/relationships" xmlns:p="http://schemas.openxmlformats.org/presentationml/2006/main">
   <p:cSld>
     <p:spTree>
@@ -9976,7 +11460,7 @@
 </p:sld>
 </file>
 
-<file path=ppt/slides/slide29.xml><?xml version="1.0" encoding="utf-8"?>
+<file path=ppt/slides/slide33.xml><?xml version="1.0" encoding="utf-8"?>
 <p:sld xmlns:a="http://schemas.openxmlformats.org/drawingml/2006/main" xmlns:r="http://schemas.openxmlformats.org/officeDocument/2006/relationships" xmlns:p="http://schemas.openxmlformats.org/presentationml/2006/main">
   <p:cSld>
     <p:spTree>
@@ -10012,7 +11496,194 @@
 </p:sld>
 </file>
 
-<file path=ppt/slides/slide3.xml><?xml version="1.0" encoding="utf-8"?>
+<file path=ppt/slides/slide34.xml><?xml version="1.0" encoding="utf-8"?>
+<p:sld xmlns:a="http://schemas.openxmlformats.org/drawingml/2006/main" xmlns:r="http://schemas.openxmlformats.org/officeDocument/2006/relationships" xmlns:p="http://schemas.openxmlformats.org/presentationml/2006/main">
+  <p:cSld>
+    <p:spTree>
+      <p:nvGrpSpPr>
+        <p:cNvPr id="1" name="">
+          <a:extLst>
+            <a:ext uri="{FF2B5EF4-FFF2-40B4-BE49-F238E27FC236}">
+              <a16:creationId xmlns:a16="http://schemas.microsoft.com/office/drawing/2014/main" id="{4F92E9D7-16AF-61C3-A56D-933DA14F1D5E}"/>
+            </a:ext>
+          </a:extLst>
+        </p:cNvPr>
+        <p:cNvGrpSpPr/>
+        <p:nvPr/>
+      </p:nvGrpSpPr>
+      <p:grpSpPr>
+        <a:xfrm>
+          <a:off x="0" y="0"/>
+          <a:ext cx="0" cy="0"/>
+          <a:chOff x="0" y="0"/>
+          <a:chExt cx="0" cy="0"/>
+        </a:xfrm>
+      </p:grpSpPr>
+      <p:sp>
+        <p:nvSpPr>
+          <p:cNvPr id="9" name="TextBox 8">
+            <a:extLst>
+              <a:ext uri="{FF2B5EF4-FFF2-40B4-BE49-F238E27FC236}">
+                <a16:creationId xmlns:a16="http://schemas.microsoft.com/office/drawing/2014/main" id="{5997DE48-6EA1-1DA7-C6A0-000AD358FC46}"/>
+              </a:ext>
+            </a:extLst>
+          </p:cNvPr>
+          <p:cNvSpPr txBox="1"/>
+          <p:nvPr/>
+        </p:nvSpPr>
+        <p:spPr>
+          <a:xfrm>
+            <a:off x="238125" y="1244739"/>
+            <a:ext cx="9859604" cy="3416320"/>
+          </a:xfrm>
+          <a:prstGeom prst="rect">
+            <a:avLst/>
+          </a:prstGeom>
+          <a:noFill/>
+        </p:spPr>
+        <p:txBody>
+          <a:bodyPr wrap="square" rtlCol="0">
+            <a:spAutoFit/>
+          </a:bodyPr>
+          <a:lstStyle/>
+          <a:p>
+            <a:r>
+              <a:rPr lang="en-US" sz="2400" b="1" dirty="0">
+                <a:solidFill>
+                  <a:schemeClr val="accent6">
+                    <a:lumMod val="60000"/>
+                    <a:lumOff val="40000"/>
+                  </a:schemeClr>
+                </a:solidFill>
+              </a:rPr>
+              <a:t>Practical Demo Idea</a:t>
+            </a:r>
+          </a:p>
+          <a:p>
+            <a:endParaRPr lang="en-US" sz="2400" b="1" dirty="0">
+              <a:solidFill>
+                <a:schemeClr val="accent6">
+                  <a:lumMod val="60000"/>
+                  <a:lumOff val="40000"/>
+                </a:schemeClr>
+              </a:solidFill>
+            </a:endParaRPr>
+          </a:p>
+          <a:p>
+            <a:r>
+              <a:rPr lang="en-US" sz="2400" dirty="0">
+                <a:solidFill>
+                  <a:schemeClr val="accent6">
+                    <a:lumMod val="60000"/>
+                    <a:lumOff val="40000"/>
+                  </a:schemeClr>
+                </a:solidFill>
+              </a:rPr>
+              <a:t>Ask students:</a:t>
+            </a:r>
+          </a:p>
+          <a:p>
+            <a:r>
+              <a:rPr lang="en-US" sz="2400" dirty="0">
+                <a:solidFill>
+                  <a:schemeClr val="accent6">
+                    <a:lumMod val="60000"/>
+                    <a:lumOff val="40000"/>
+                  </a:schemeClr>
+                </a:solidFill>
+              </a:rPr>
+              <a:t>Count tokens in:</a:t>
+            </a:r>
+          </a:p>
+          <a:p>
+            <a:r>
+              <a:rPr lang="en-US" sz="2400" dirty="0">
+                <a:solidFill>
+                  <a:schemeClr val="accent6">
+                    <a:lumMod val="60000"/>
+                    <a:lumOff val="40000"/>
+                  </a:schemeClr>
+                </a:solidFill>
+              </a:rPr>
+              <a:t>"Machine learning is powerful.“</a:t>
+            </a:r>
+          </a:p>
+          <a:p>
+            <a:endParaRPr lang="en-US" sz="2400" dirty="0">
+              <a:solidFill>
+                <a:schemeClr val="accent6">
+                  <a:lumMod val="60000"/>
+                  <a:lumOff val="40000"/>
+                </a:schemeClr>
+              </a:solidFill>
+            </a:endParaRPr>
+          </a:p>
+          <a:p>
+            <a:r>
+              <a:rPr lang="en-US" sz="2400" dirty="0">
+                <a:solidFill>
+                  <a:schemeClr val="accent6">
+                    <a:lumMod val="60000"/>
+                    <a:lumOff val="40000"/>
+                  </a:schemeClr>
+                </a:solidFill>
+              </a:rPr>
+              <a:t>Then show them using tokenizer tools like:</a:t>
+            </a:r>
+          </a:p>
+          <a:p>
+            <a:r>
+              <a:rPr lang="en-US" sz="2400" dirty="0">
+                <a:solidFill>
+                  <a:schemeClr val="accent6">
+                    <a:lumMod val="60000"/>
+                    <a:lumOff val="40000"/>
+                  </a:schemeClr>
+                </a:solidFill>
+              </a:rPr>
+              <a:t>OpenAI tokenizer</a:t>
+            </a:r>
+          </a:p>
+          <a:p>
+            <a:r>
+              <a:rPr lang="en-US" sz="2400" dirty="0" err="1">
+                <a:solidFill>
+                  <a:schemeClr val="accent6">
+                    <a:lumMod val="60000"/>
+                    <a:lumOff val="40000"/>
+                  </a:schemeClr>
+                </a:solidFill>
+              </a:rPr>
+              <a:t>HuggingFace</a:t>
+            </a:r>
+            <a:r>
+              <a:rPr lang="en-US" sz="2400" dirty="0">
+                <a:solidFill>
+                  <a:schemeClr val="accent6">
+                    <a:lumMod val="60000"/>
+                    <a:lumOff val="40000"/>
+                  </a:schemeClr>
+                </a:solidFill>
+              </a:rPr>
+              <a:t> tokenizer</a:t>
+            </a:r>
+          </a:p>
+        </p:txBody>
+      </p:sp>
+    </p:spTree>
+    <p:extLst>
+      <p:ext uri="{BB962C8B-B14F-4D97-AF65-F5344CB8AC3E}">
+        <p14:creationId xmlns:p14="http://schemas.microsoft.com/office/powerpoint/2010/main" val="1911654944"/>
+      </p:ext>
+    </p:extLst>
+  </p:cSld>
+  <p:clrMapOvr>
+    <a:masterClrMapping/>
+  </p:clrMapOvr>
+</p:sld>
+</file>
+
+<file path=ppt/slides/slide4.xml><?xml version="1.0" encoding="utf-8"?>
 <p:sld xmlns:a="http://schemas.openxmlformats.org/drawingml/2006/main" xmlns:r="http://schemas.openxmlformats.org/officeDocument/2006/relationships" xmlns:p="http://schemas.openxmlformats.org/presentationml/2006/main">
   <p:cSld>
     <p:spTree>
@@ -10232,194 +11903,7 @@
 </p:sld>
 </file>
 
-<file path=ppt/slides/slide30.xml><?xml version="1.0" encoding="utf-8"?>
-<p:sld xmlns:a="http://schemas.openxmlformats.org/drawingml/2006/main" xmlns:r="http://schemas.openxmlformats.org/officeDocument/2006/relationships" xmlns:p="http://schemas.openxmlformats.org/presentationml/2006/main">
-  <p:cSld>
-    <p:spTree>
-      <p:nvGrpSpPr>
-        <p:cNvPr id="1" name="">
-          <a:extLst>
-            <a:ext uri="{FF2B5EF4-FFF2-40B4-BE49-F238E27FC236}">
-              <a16:creationId xmlns:a16="http://schemas.microsoft.com/office/drawing/2014/main" id="{4F92E9D7-16AF-61C3-A56D-933DA14F1D5E}"/>
-            </a:ext>
-          </a:extLst>
-        </p:cNvPr>
-        <p:cNvGrpSpPr/>
-        <p:nvPr/>
-      </p:nvGrpSpPr>
-      <p:grpSpPr>
-        <a:xfrm>
-          <a:off x="0" y="0"/>
-          <a:ext cx="0" cy="0"/>
-          <a:chOff x="0" y="0"/>
-          <a:chExt cx="0" cy="0"/>
-        </a:xfrm>
-      </p:grpSpPr>
-      <p:sp>
-        <p:nvSpPr>
-          <p:cNvPr id="9" name="TextBox 8">
-            <a:extLst>
-              <a:ext uri="{FF2B5EF4-FFF2-40B4-BE49-F238E27FC236}">
-                <a16:creationId xmlns:a16="http://schemas.microsoft.com/office/drawing/2014/main" id="{5997DE48-6EA1-1DA7-C6A0-000AD358FC46}"/>
-              </a:ext>
-            </a:extLst>
-          </p:cNvPr>
-          <p:cNvSpPr txBox="1"/>
-          <p:nvPr/>
-        </p:nvSpPr>
-        <p:spPr>
-          <a:xfrm>
-            <a:off x="238125" y="1244739"/>
-            <a:ext cx="9859604" cy="3416320"/>
-          </a:xfrm>
-          <a:prstGeom prst="rect">
-            <a:avLst/>
-          </a:prstGeom>
-          <a:noFill/>
-        </p:spPr>
-        <p:txBody>
-          <a:bodyPr wrap="square" rtlCol="0">
-            <a:spAutoFit/>
-          </a:bodyPr>
-          <a:lstStyle/>
-          <a:p>
-            <a:r>
-              <a:rPr lang="en-US" sz="2400" b="1" dirty="0">
-                <a:solidFill>
-                  <a:schemeClr val="accent6">
-                    <a:lumMod val="60000"/>
-                    <a:lumOff val="40000"/>
-                  </a:schemeClr>
-                </a:solidFill>
-              </a:rPr>
-              <a:t>Practical Demo Idea</a:t>
-            </a:r>
-          </a:p>
-          <a:p>
-            <a:endParaRPr lang="en-US" sz="2400" b="1" dirty="0">
-              <a:solidFill>
-                <a:schemeClr val="accent6">
-                  <a:lumMod val="60000"/>
-                  <a:lumOff val="40000"/>
-                </a:schemeClr>
-              </a:solidFill>
-            </a:endParaRPr>
-          </a:p>
-          <a:p>
-            <a:r>
-              <a:rPr lang="en-US" sz="2400" dirty="0">
-                <a:solidFill>
-                  <a:schemeClr val="accent6">
-                    <a:lumMod val="60000"/>
-                    <a:lumOff val="40000"/>
-                  </a:schemeClr>
-                </a:solidFill>
-              </a:rPr>
-              <a:t>Ask students:</a:t>
-            </a:r>
-          </a:p>
-          <a:p>
-            <a:r>
-              <a:rPr lang="en-US" sz="2400" dirty="0">
-                <a:solidFill>
-                  <a:schemeClr val="accent6">
-                    <a:lumMod val="60000"/>
-                    <a:lumOff val="40000"/>
-                  </a:schemeClr>
-                </a:solidFill>
-              </a:rPr>
-              <a:t>Count tokens in:</a:t>
-            </a:r>
-          </a:p>
-          <a:p>
-            <a:r>
-              <a:rPr lang="en-US" sz="2400" dirty="0">
-                <a:solidFill>
-                  <a:schemeClr val="accent6">
-                    <a:lumMod val="60000"/>
-                    <a:lumOff val="40000"/>
-                  </a:schemeClr>
-                </a:solidFill>
-              </a:rPr>
-              <a:t>"Machine learning is powerful.“</a:t>
-            </a:r>
-          </a:p>
-          <a:p>
-            <a:endParaRPr lang="en-US" sz="2400" dirty="0">
-              <a:solidFill>
-                <a:schemeClr val="accent6">
-                  <a:lumMod val="60000"/>
-                  <a:lumOff val="40000"/>
-                </a:schemeClr>
-              </a:solidFill>
-            </a:endParaRPr>
-          </a:p>
-          <a:p>
-            <a:r>
-              <a:rPr lang="en-US" sz="2400" dirty="0">
-                <a:solidFill>
-                  <a:schemeClr val="accent6">
-                    <a:lumMod val="60000"/>
-                    <a:lumOff val="40000"/>
-                  </a:schemeClr>
-                </a:solidFill>
-              </a:rPr>
-              <a:t>Then show them using tokenizer tools like:</a:t>
-            </a:r>
-          </a:p>
-          <a:p>
-            <a:r>
-              <a:rPr lang="en-US" sz="2400" dirty="0">
-                <a:solidFill>
-                  <a:schemeClr val="accent6">
-                    <a:lumMod val="60000"/>
-                    <a:lumOff val="40000"/>
-                  </a:schemeClr>
-                </a:solidFill>
-              </a:rPr>
-              <a:t>OpenAI tokenizer</a:t>
-            </a:r>
-          </a:p>
-          <a:p>
-            <a:r>
-              <a:rPr lang="en-US" sz="2400" dirty="0" err="1">
-                <a:solidFill>
-                  <a:schemeClr val="accent6">
-                    <a:lumMod val="60000"/>
-                    <a:lumOff val="40000"/>
-                  </a:schemeClr>
-                </a:solidFill>
-              </a:rPr>
-              <a:t>HuggingFace</a:t>
-            </a:r>
-            <a:r>
-              <a:rPr lang="en-US" sz="2400" dirty="0">
-                <a:solidFill>
-                  <a:schemeClr val="accent6">
-                    <a:lumMod val="60000"/>
-                    <a:lumOff val="40000"/>
-                  </a:schemeClr>
-                </a:solidFill>
-              </a:rPr>
-              <a:t> tokenizer</a:t>
-            </a:r>
-          </a:p>
-        </p:txBody>
-      </p:sp>
-    </p:spTree>
-    <p:extLst>
-      <p:ext uri="{BB962C8B-B14F-4D97-AF65-F5344CB8AC3E}">
-        <p14:creationId xmlns:p14="http://schemas.microsoft.com/office/powerpoint/2010/main" val="1911654944"/>
-      </p:ext>
-    </p:extLst>
-  </p:cSld>
-  <p:clrMapOvr>
-    <a:masterClrMapping/>
-  </p:clrMapOvr>
-</p:sld>
-</file>
-
-<file path=ppt/slides/slide4.xml><?xml version="1.0" encoding="utf-8"?>
+<file path=ppt/slides/slide5.xml><?xml version="1.0" encoding="utf-8"?>
 <p:sld xmlns:a="http://schemas.openxmlformats.org/drawingml/2006/main" xmlns:r="http://schemas.openxmlformats.org/officeDocument/2006/relationships" xmlns:p="http://schemas.openxmlformats.org/presentationml/2006/main">
   <p:cSld>
     <p:spTree>
@@ -10457,7 +11941,7 @@
         <p:spPr>
           <a:xfrm>
             <a:off x="290048" y="25360"/>
-            <a:ext cx="11611903" cy="6832640"/>
+            <a:ext cx="11611903" cy="1569660"/>
           </a:xfrm>
           <a:prstGeom prst="rect">
             <a:avLst/>
@@ -10577,310 +12061,6 @@
               <a:t>token ID</a:t>
             </a:r>
           </a:p>
-          <a:p>
-            <a:endParaRPr lang="en-US" sz="2400" dirty="0">
-              <a:solidFill>
-                <a:schemeClr val="accent6">
-                  <a:lumMod val="60000"/>
-                  <a:lumOff val="40000"/>
-                </a:schemeClr>
-              </a:solidFill>
-            </a:endParaRPr>
-          </a:p>
-          <a:p>
-            <a:r>
-              <a:rPr lang="en-US" sz="2400" dirty="0">
-                <a:solidFill>
-                  <a:schemeClr val="accent6">
-                    <a:lumMod val="60000"/>
-                    <a:lumOff val="40000"/>
-                  </a:schemeClr>
-                </a:solidFill>
-              </a:rPr>
-              <a:t>Each token id is a vector (say in 4D)</a:t>
-            </a:r>
-          </a:p>
-          <a:p>
-            <a:r>
-              <a:rPr lang="en-US" sz="2400" dirty="0">
-                <a:solidFill>
-                  <a:schemeClr val="accent6">
-                    <a:lumMod val="60000"/>
-                    <a:lumOff val="40000"/>
-                  </a:schemeClr>
-                </a:solidFill>
-              </a:rPr>
-              <a:t>1012   → [0.12, -0.45, 0.88, 0.33]</a:t>
-            </a:r>
-            <a:br>
-              <a:rPr lang="en-US" sz="2400" dirty="0">
-                <a:solidFill>
-                  <a:schemeClr val="accent6">
-                    <a:lumMod val="60000"/>
-                    <a:lumOff val="40000"/>
-                  </a:schemeClr>
-                </a:solidFill>
-              </a:rPr>
-            </a:br>
-            <a:r>
-              <a:rPr lang="en-US" sz="2400" dirty="0">
-                <a:solidFill>
-                  <a:schemeClr val="accent6">
-                    <a:lumMod val="60000"/>
-                    <a:lumOff val="40000"/>
-                  </a:schemeClr>
-                </a:solidFill>
-              </a:rPr>
-              <a:t>45892 → [0.91, 0.02, -0.11, 0.76]</a:t>
-            </a:r>
-            <a:br>
-              <a:rPr lang="en-US" sz="2400" dirty="0">
-                <a:solidFill>
-                  <a:schemeClr val="accent6">
-                    <a:lumMod val="60000"/>
-                    <a:lumOff val="40000"/>
-                  </a:schemeClr>
-                </a:solidFill>
-              </a:rPr>
-            </a:br>
-            <a:r>
-              <a:rPr lang="en-US" sz="2400" dirty="0">
-                <a:solidFill>
-                  <a:schemeClr val="accent6">
-                    <a:lumMod val="60000"/>
-                    <a:lumOff val="40000"/>
-                  </a:schemeClr>
-                </a:solidFill>
-              </a:rPr>
-              <a:t>672     → [0.55, -0.66, 0.14, 0.99]</a:t>
-            </a:r>
-            <a:br>
-              <a:rPr lang="en-US" sz="2400" dirty="0">
-                <a:solidFill>
-                  <a:schemeClr val="accent6">
-                    <a:lumMod val="60000"/>
-                    <a:lumOff val="40000"/>
-                  </a:schemeClr>
-                </a:solidFill>
-              </a:rPr>
-            </a:br>
-            <a:r>
-              <a:rPr lang="en-US" sz="2400" dirty="0">
-                <a:solidFill>
-                  <a:schemeClr val="accent6">
-                    <a:lumMod val="60000"/>
-                    <a:lumOff val="40000"/>
-                  </a:schemeClr>
-                </a:solidFill>
-              </a:rPr>
-              <a:t>9834   → [0.20, 0.77, -0.88, 0.10]</a:t>
-            </a:r>
-            <a:br>
-              <a:rPr lang="en-US" sz="2400" dirty="0">
-                <a:solidFill>
-                  <a:schemeClr val="accent6">
-                    <a:lumMod val="60000"/>
-                    <a:lumOff val="40000"/>
-                  </a:schemeClr>
-                </a:solidFill>
-              </a:rPr>
-            </a:br>
-            <a:r>
-              <a:rPr lang="en-US" sz="2400" dirty="0">
-                <a:solidFill>
-                  <a:schemeClr val="accent6">
-                    <a:lumMod val="60000"/>
-                    <a:lumOff val="40000"/>
-                  </a:schemeClr>
-                </a:solidFill>
-              </a:rPr>
-              <a:t>0          → [0.01, 0.02, 0.03, 0.04]</a:t>
-            </a:r>
-          </a:p>
-          <a:p>
-            <a:endParaRPr lang="en-US" sz="2400" dirty="0">
-              <a:solidFill>
-                <a:schemeClr val="accent6">
-                  <a:lumMod val="60000"/>
-                  <a:lumOff val="40000"/>
-                </a:schemeClr>
-              </a:solidFill>
-            </a:endParaRPr>
-          </a:p>
-          <a:p>
-            <a:r>
-              <a:rPr lang="en-US" sz="2400" dirty="0">
-                <a:solidFill>
-                  <a:schemeClr val="accent6">
-                    <a:lumMod val="60000"/>
-                    <a:lumOff val="40000"/>
-                  </a:schemeClr>
-                </a:solidFill>
-              </a:rPr>
-              <a:t>So final input becomes a </a:t>
-            </a:r>
-            <a:r>
-              <a:rPr lang="en-US" sz="2400" b="1" dirty="0">
-                <a:solidFill>
-                  <a:schemeClr val="accent6">
-                    <a:lumMod val="60000"/>
-                    <a:lumOff val="40000"/>
-                  </a:schemeClr>
-                </a:solidFill>
-              </a:rPr>
-              <a:t>matrix</a:t>
-            </a:r>
-            <a:r>
-              <a:rPr lang="en-US" sz="2400" dirty="0">
-                <a:solidFill>
-                  <a:schemeClr val="accent6">
-                    <a:lumMod val="60000"/>
-                    <a:lumOff val="40000"/>
-                  </a:schemeClr>
-                </a:solidFill>
-              </a:rPr>
-              <a:t>:</a:t>
-            </a:r>
-          </a:p>
-          <a:p>
-            <a:r>
-              <a:rPr lang="en-US" dirty="0">
-                <a:solidFill>
-                  <a:schemeClr val="accent6">
-                    <a:lumMod val="60000"/>
-                    <a:lumOff val="40000"/>
-                  </a:schemeClr>
-                </a:solidFill>
-              </a:rPr>
-              <a:t>[</a:t>
-            </a:r>
-            <a:br>
-              <a:rPr lang="en-US" dirty="0">
-                <a:solidFill>
-                  <a:schemeClr val="accent6">
-                    <a:lumMod val="60000"/>
-                    <a:lumOff val="40000"/>
-                  </a:schemeClr>
-                </a:solidFill>
-              </a:rPr>
-            </a:br>
-            <a:r>
-              <a:rPr lang="en-US" dirty="0">
-                <a:solidFill>
-                  <a:schemeClr val="accent6">
-                    <a:lumMod val="60000"/>
-                    <a:lumOff val="40000"/>
-                  </a:schemeClr>
-                </a:solidFill>
-              </a:rPr>
-              <a:t>[0.12, -0.45, 0.88, 0.33],</a:t>
-            </a:r>
-            <a:br>
-              <a:rPr lang="en-US" dirty="0">
-                <a:solidFill>
-                  <a:schemeClr val="accent6">
-                    <a:lumMod val="60000"/>
-                    <a:lumOff val="40000"/>
-                  </a:schemeClr>
-                </a:solidFill>
-              </a:rPr>
-            </a:br>
-            <a:r>
-              <a:rPr lang="en-US" dirty="0">
-                <a:solidFill>
-                  <a:schemeClr val="accent6">
-                    <a:lumMod val="60000"/>
-                    <a:lumOff val="40000"/>
-                  </a:schemeClr>
-                </a:solidFill>
-              </a:rPr>
-              <a:t>[0.91, 0.02, -0.11, 0.76],</a:t>
-            </a:r>
-            <a:br>
-              <a:rPr lang="en-US" dirty="0">
-                <a:solidFill>
-                  <a:schemeClr val="accent6">
-                    <a:lumMod val="60000"/>
-                    <a:lumOff val="40000"/>
-                  </a:schemeClr>
-                </a:solidFill>
-              </a:rPr>
-            </a:br>
-            <a:r>
-              <a:rPr lang="en-US" dirty="0">
-                <a:solidFill>
-                  <a:schemeClr val="accent6">
-                    <a:lumMod val="60000"/>
-                    <a:lumOff val="40000"/>
-                  </a:schemeClr>
-                </a:solidFill>
-              </a:rPr>
-              <a:t>[0.55, -0.66, 0.14, 0.99],</a:t>
-            </a:r>
-            <a:br>
-              <a:rPr lang="en-US" dirty="0">
-                <a:solidFill>
-                  <a:schemeClr val="accent6">
-                    <a:lumMod val="60000"/>
-                    <a:lumOff val="40000"/>
-                  </a:schemeClr>
-                </a:solidFill>
-              </a:rPr>
-            </a:br>
-            <a:r>
-              <a:rPr lang="en-US" dirty="0">
-                <a:solidFill>
-                  <a:schemeClr val="accent6">
-                    <a:lumMod val="60000"/>
-                    <a:lumOff val="40000"/>
-                  </a:schemeClr>
-                </a:solidFill>
-              </a:rPr>
-              <a:t>[0.20, 0.77, -0.88, 0.10],</a:t>
-            </a:r>
-            <a:br>
-              <a:rPr lang="en-US" dirty="0">
-                <a:solidFill>
-                  <a:schemeClr val="accent6">
-                    <a:lumMod val="60000"/>
-                    <a:lumOff val="40000"/>
-                  </a:schemeClr>
-                </a:solidFill>
-              </a:rPr>
-            </a:br>
-            <a:r>
-              <a:rPr lang="en-US" dirty="0">
-                <a:solidFill>
-                  <a:schemeClr val="accent6">
-                    <a:lumMod val="60000"/>
-                    <a:lumOff val="40000"/>
-                  </a:schemeClr>
-                </a:solidFill>
-              </a:rPr>
-              <a:t>[0.01, 0.02, 0.03, 0.04]</a:t>
-            </a:r>
-            <a:br>
-              <a:rPr lang="en-US" dirty="0">
-                <a:solidFill>
-                  <a:schemeClr val="accent6">
-                    <a:lumMod val="60000"/>
-                    <a:lumOff val="40000"/>
-                  </a:schemeClr>
-                </a:solidFill>
-              </a:rPr>
-            </a:br>
-            <a:r>
-              <a:rPr lang="en-US" dirty="0">
-                <a:solidFill>
-                  <a:schemeClr val="accent6">
-                    <a:lumMod val="60000"/>
-                    <a:lumOff val="40000"/>
-                  </a:schemeClr>
-                </a:solidFill>
-              </a:rPr>
-              <a:t>]</a:t>
-            </a:r>
-          </a:p>
         </p:txBody>
       </p:sp>
       <p:sp>
@@ -10897,7 +12077,7 @@
         </p:nvSpPr>
         <p:spPr>
           <a:xfrm>
-            <a:off x="4021836" y="5214237"/>
+            <a:off x="4277868" y="5291590"/>
             <a:ext cx="8170164" cy="830997"/>
           </a:xfrm>
           <a:prstGeom prst="rect">
@@ -10912,28 +12092,436 @@
           <a:lstStyle/>
           <a:p>
             <a:r>
-              <a:rPr lang="en-US" sz="2400" dirty="0">
-                <a:solidFill>
-                  <a:schemeClr val="accent6">
-                    <a:lumMod val="60000"/>
-                    <a:lumOff val="40000"/>
-                  </a:schemeClr>
-                </a:solidFill>
-              </a:rPr>
-              <a:t>Input Into LLM: Text → tokens → IDs → vectors → N. network</a:t>
-            </a:r>
-          </a:p>
-          <a:p>
-            <a:r>
-              <a:rPr lang="en-US" sz="2400" dirty="0">
-                <a:solidFill>
-                  <a:schemeClr val="accent6">
-                    <a:lumMod val="60000"/>
-                    <a:lumOff val="40000"/>
-                  </a:schemeClr>
-                </a:solidFill>
-              </a:rPr>
-              <a:t>Output from  LLM: IDs → tokens → text</a:t>
+              <a:rPr lang="en-US" sz="2400" b="1" i="1" u="sng" dirty="0">
+                <a:solidFill>
+                  <a:schemeClr val="accent6">
+                    <a:lumMod val="60000"/>
+                    <a:lumOff val="40000"/>
+                  </a:schemeClr>
+                </a:solidFill>
+              </a:rPr>
+              <a:t>Input Into LLM:</a:t>
+            </a:r>
+            <a:r>
+              <a:rPr lang="en-US" sz="2400" b="1" i="1" dirty="0">
+                <a:solidFill>
+                  <a:schemeClr val="accent6">
+                    <a:lumMod val="60000"/>
+                    <a:lumOff val="40000"/>
+                  </a:schemeClr>
+                </a:solidFill>
+              </a:rPr>
+              <a:t>   </a:t>
+            </a:r>
+            <a:r>
+              <a:rPr lang="en-US" sz="2400" dirty="0">
+                <a:solidFill>
+                  <a:schemeClr val="accent6">
+                    <a:lumMod val="60000"/>
+                    <a:lumOff val="40000"/>
+                  </a:schemeClr>
+                </a:solidFill>
+              </a:rPr>
+              <a:t>Text → </a:t>
+            </a:r>
+            <a:r>
+              <a:rPr lang="en-US" sz="2400" dirty="0">
+                <a:solidFill>
+                  <a:schemeClr val="accent4">
+                    <a:lumMod val="60000"/>
+                    <a:lumOff val="40000"/>
+                  </a:schemeClr>
+                </a:solidFill>
+              </a:rPr>
+              <a:t>tokens → IDs → vectors → N. network</a:t>
+            </a:r>
+          </a:p>
+          <a:p>
+            <a:r>
+              <a:rPr lang="en-US" sz="2400" b="1" i="1" u="sng" dirty="0">
+                <a:solidFill>
+                  <a:schemeClr val="accent6">
+                    <a:lumMod val="60000"/>
+                    <a:lumOff val="40000"/>
+                  </a:schemeClr>
+                </a:solidFill>
+              </a:rPr>
+              <a:t>Output from  LLM:</a:t>
+            </a:r>
+            <a:r>
+              <a:rPr lang="en-US" sz="2400" dirty="0">
+                <a:solidFill>
+                  <a:schemeClr val="accent6">
+                    <a:lumMod val="60000"/>
+                    <a:lumOff val="40000"/>
+                  </a:schemeClr>
+                </a:solidFill>
+              </a:rPr>
+              <a:t>   </a:t>
+            </a:r>
+            <a:r>
+              <a:rPr lang="en-US" sz="2400" dirty="0">
+                <a:solidFill>
+                  <a:schemeClr val="accent4">
+                    <a:lumMod val="60000"/>
+                    <a:lumOff val="40000"/>
+                  </a:schemeClr>
+                </a:solidFill>
+              </a:rPr>
+              <a:t>IDs → tokens </a:t>
+            </a:r>
+            <a:r>
+              <a:rPr lang="en-US" sz="2400" dirty="0">
+                <a:solidFill>
+                  <a:schemeClr val="accent6">
+                    <a:lumMod val="60000"/>
+                    <a:lumOff val="40000"/>
+                  </a:schemeClr>
+                </a:solidFill>
+              </a:rPr>
+              <a:t>→ text</a:t>
+            </a:r>
+          </a:p>
+        </p:txBody>
+      </p:sp>
+      <p:sp>
+        <p:nvSpPr>
+          <p:cNvPr id="3" name="TextBox 2">
+            <a:extLst>
+              <a:ext uri="{FF2B5EF4-FFF2-40B4-BE49-F238E27FC236}">
+                <a16:creationId xmlns:a16="http://schemas.microsoft.com/office/drawing/2014/main" id="{4C7AC6DA-4A97-5168-6274-B61B4A0EF06B}"/>
+              </a:ext>
+            </a:extLst>
+          </p:cNvPr>
+          <p:cNvSpPr txBox="1"/>
+          <p:nvPr/>
+        </p:nvSpPr>
+        <p:spPr>
+          <a:xfrm>
+            <a:off x="132588" y="4298002"/>
+            <a:ext cx="4841748" cy="2400657"/>
+          </a:xfrm>
+          <a:prstGeom prst="rect">
+            <a:avLst/>
+          </a:prstGeom>
+          <a:noFill/>
+        </p:spPr>
+        <p:txBody>
+          <a:bodyPr wrap="square">
+            <a:spAutoFit/>
+          </a:bodyPr>
+          <a:lstStyle/>
+          <a:p>
+            <a:r>
+              <a:rPr lang="en-US" sz="2400" dirty="0">
+                <a:solidFill>
+                  <a:schemeClr val="accent6">
+                    <a:lumMod val="60000"/>
+                    <a:lumOff val="40000"/>
+                  </a:schemeClr>
+                </a:solidFill>
+              </a:rPr>
+              <a:t>So final input becomes a </a:t>
+            </a:r>
+            <a:r>
+              <a:rPr lang="en-US" sz="2400" b="1" dirty="0">
+                <a:solidFill>
+                  <a:schemeClr val="accent6">
+                    <a:lumMod val="60000"/>
+                    <a:lumOff val="40000"/>
+                  </a:schemeClr>
+                </a:solidFill>
+              </a:rPr>
+              <a:t>matrix</a:t>
+            </a:r>
+            <a:r>
+              <a:rPr lang="en-US" sz="2400" dirty="0">
+                <a:solidFill>
+                  <a:schemeClr val="accent6">
+                    <a:lumMod val="60000"/>
+                    <a:lumOff val="40000"/>
+                  </a:schemeClr>
+                </a:solidFill>
+              </a:rPr>
+              <a:t>:</a:t>
+            </a:r>
+          </a:p>
+          <a:p>
+            <a:r>
+              <a:rPr lang="en-US" sz="1800" dirty="0">
+                <a:solidFill>
+                  <a:schemeClr val="accent6">
+                    <a:lumMod val="60000"/>
+                    <a:lumOff val="40000"/>
+                  </a:schemeClr>
+                </a:solidFill>
+              </a:rPr>
+              <a:t>[</a:t>
+            </a:r>
+            <a:br>
+              <a:rPr lang="en-US" sz="1800" dirty="0">
+                <a:solidFill>
+                  <a:schemeClr val="accent6">
+                    <a:lumMod val="60000"/>
+                    <a:lumOff val="40000"/>
+                  </a:schemeClr>
+                </a:solidFill>
+              </a:rPr>
+            </a:br>
+            <a:r>
+              <a:rPr lang="en-US" sz="1800" dirty="0">
+                <a:solidFill>
+                  <a:schemeClr val="accent6">
+                    <a:lumMod val="60000"/>
+                    <a:lumOff val="40000"/>
+                  </a:schemeClr>
+                </a:solidFill>
+              </a:rPr>
+              <a:t>[0.12, -0.45, 0.88, 0.33],</a:t>
+            </a:r>
+            <a:br>
+              <a:rPr lang="en-US" sz="1800" dirty="0">
+                <a:solidFill>
+                  <a:schemeClr val="accent6">
+                    <a:lumMod val="60000"/>
+                    <a:lumOff val="40000"/>
+                  </a:schemeClr>
+                </a:solidFill>
+              </a:rPr>
+            </a:br>
+            <a:r>
+              <a:rPr lang="en-US" sz="1800" dirty="0">
+                <a:solidFill>
+                  <a:schemeClr val="accent6">
+                    <a:lumMod val="60000"/>
+                    <a:lumOff val="40000"/>
+                  </a:schemeClr>
+                </a:solidFill>
+              </a:rPr>
+              <a:t>[0.91, 0.02, -0.11, 0.76],</a:t>
+            </a:r>
+            <a:br>
+              <a:rPr lang="en-US" sz="1800" dirty="0">
+                <a:solidFill>
+                  <a:schemeClr val="accent6">
+                    <a:lumMod val="60000"/>
+                    <a:lumOff val="40000"/>
+                  </a:schemeClr>
+                </a:solidFill>
+              </a:rPr>
+            </a:br>
+            <a:r>
+              <a:rPr lang="en-US" sz="1800" dirty="0">
+                <a:solidFill>
+                  <a:schemeClr val="accent6">
+                    <a:lumMod val="60000"/>
+                    <a:lumOff val="40000"/>
+                  </a:schemeClr>
+                </a:solidFill>
+              </a:rPr>
+              <a:t>[0.55, -0.66, 0.14, 0.99],</a:t>
+            </a:r>
+            <a:br>
+              <a:rPr lang="en-US" sz="1800" dirty="0">
+                <a:solidFill>
+                  <a:schemeClr val="accent6">
+                    <a:lumMod val="60000"/>
+                    <a:lumOff val="40000"/>
+                  </a:schemeClr>
+                </a:solidFill>
+              </a:rPr>
+            </a:br>
+            <a:r>
+              <a:rPr lang="en-US" sz="1800" dirty="0">
+                <a:solidFill>
+                  <a:schemeClr val="accent6">
+                    <a:lumMod val="60000"/>
+                    <a:lumOff val="40000"/>
+                  </a:schemeClr>
+                </a:solidFill>
+              </a:rPr>
+              <a:t>[0.20, 0.77, -0.88, 0.10],</a:t>
+            </a:r>
+            <a:br>
+              <a:rPr lang="en-US" sz="1800" dirty="0">
+                <a:solidFill>
+                  <a:schemeClr val="accent6">
+                    <a:lumMod val="60000"/>
+                    <a:lumOff val="40000"/>
+                  </a:schemeClr>
+                </a:solidFill>
+              </a:rPr>
+            </a:br>
+            <a:r>
+              <a:rPr lang="en-US" sz="1800" dirty="0">
+                <a:solidFill>
+                  <a:schemeClr val="accent6">
+                    <a:lumMod val="60000"/>
+                    <a:lumOff val="40000"/>
+                  </a:schemeClr>
+                </a:solidFill>
+              </a:rPr>
+              <a:t>[0.01, 0.02, 0.03, 0.04]</a:t>
+            </a:r>
+            <a:br>
+              <a:rPr lang="en-US" sz="1800" dirty="0">
+                <a:solidFill>
+                  <a:schemeClr val="accent6">
+                    <a:lumMod val="60000"/>
+                    <a:lumOff val="40000"/>
+                  </a:schemeClr>
+                </a:solidFill>
+              </a:rPr>
+            </a:br>
+            <a:r>
+              <a:rPr lang="en-US" sz="1800" dirty="0">
+                <a:solidFill>
+                  <a:schemeClr val="accent6">
+                    <a:lumMod val="60000"/>
+                    <a:lumOff val="40000"/>
+                  </a:schemeClr>
+                </a:solidFill>
+              </a:rPr>
+              <a:t>]</a:t>
+            </a:r>
+          </a:p>
+        </p:txBody>
+      </p:sp>
+      <p:sp>
+        <p:nvSpPr>
+          <p:cNvPr id="6" name="TextBox 5">
+            <a:extLst>
+              <a:ext uri="{FF2B5EF4-FFF2-40B4-BE49-F238E27FC236}">
+                <a16:creationId xmlns:a16="http://schemas.microsoft.com/office/drawing/2014/main" id="{3231E945-27ED-032B-88AF-720557EFCF40}"/>
+              </a:ext>
+            </a:extLst>
+          </p:cNvPr>
+          <p:cNvSpPr txBox="1"/>
+          <p:nvPr/>
+        </p:nvSpPr>
+        <p:spPr>
+          <a:xfrm>
+            <a:off x="132588" y="1792349"/>
+            <a:ext cx="4666489" cy="2308324"/>
+          </a:xfrm>
+          <a:prstGeom prst="rect">
+            <a:avLst/>
+          </a:prstGeom>
+          <a:noFill/>
+        </p:spPr>
+        <p:txBody>
+          <a:bodyPr wrap="square">
+            <a:spAutoFit/>
+          </a:bodyPr>
+          <a:lstStyle/>
+          <a:p>
+            <a:r>
+              <a:rPr lang="en-US" sz="2400" dirty="0">
+                <a:solidFill>
+                  <a:schemeClr val="accent6">
+                    <a:lumMod val="60000"/>
+                    <a:lumOff val="40000"/>
+                  </a:schemeClr>
+                </a:solidFill>
+              </a:rPr>
+              <a:t>Each token id is a vector (say in 4D)</a:t>
+            </a:r>
+          </a:p>
+          <a:p>
+            <a:r>
+              <a:rPr lang="en-US" sz="2400" dirty="0">
+                <a:solidFill>
+                  <a:schemeClr val="accent6">
+                    <a:lumMod val="60000"/>
+                    <a:lumOff val="40000"/>
+                  </a:schemeClr>
+                </a:solidFill>
+              </a:rPr>
+              <a:t>1012   → [0.12, -0.45, 0.88, 0.33]</a:t>
+            </a:r>
+            <a:br>
+              <a:rPr lang="en-US" sz="2400" dirty="0">
+                <a:solidFill>
+                  <a:schemeClr val="accent6">
+                    <a:lumMod val="60000"/>
+                    <a:lumOff val="40000"/>
+                  </a:schemeClr>
+                </a:solidFill>
+              </a:rPr>
+            </a:br>
+            <a:r>
+              <a:rPr lang="en-US" sz="2400" dirty="0">
+                <a:solidFill>
+                  <a:schemeClr val="accent6">
+                    <a:lumMod val="60000"/>
+                    <a:lumOff val="40000"/>
+                  </a:schemeClr>
+                </a:solidFill>
+              </a:rPr>
+              <a:t>45892 → [0.91, 0.02, -0.11, 0.76]</a:t>
+            </a:r>
+            <a:br>
+              <a:rPr lang="en-US" sz="2400" dirty="0">
+                <a:solidFill>
+                  <a:schemeClr val="accent6">
+                    <a:lumMod val="60000"/>
+                    <a:lumOff val="40000"/>
+                  </a:schemeClr>
+                </a:solidFill>
+              </a:rPr>
+            </a:br>
+            <a:r>
+              <a:rPr lang="en-US" sz="2400" dirty="0">
+                <a:solidFill>
+                  <a:schemeClr val="accent6">
+                    <a:lumMod val="60000"/>
+                    <a:lumOff val="40000"/>
+                  </a:schemeClr>
+                </a:solidFill>
+              </a:rPr>
+              <a:t>672     → [0.55, -0.66, 0.14, 0.99]</a:t>
+            </a:r>
+            <a:br>
+              <a:rPr lang="en-US" sz="2400" dirty="0">
+                <a:solidFill>
+                  <a:schemeClr val="accent6">
+                    <a:lumMod val="60000"/>
+                    <a:lumOff val="40000"/>
+                  </a:schemeClr>
+                </a:solidFill>
+              </a:rPr>
+            </a:br>
+            <a:r>
+              <a:rPr lang="en-US" sz="2400" dirty="0">
+                <a:solidFill>
+                  <a:schemeClr val="accent6">
+                    <a:lumMod val="60000"/>
+                    <a:lumOff val="40000"/>
+                  </a:schemeClr>
+                </a:solidFill>
+              </a:rPr>
+              <a:t>9834   → [0.20, 0.77, -0.88, 0.10]</a:t>
+            </a:r>
+            <a:br>
+              <a:rPr lang="en-US" sz="2400" dirty="0">
+                <a:solidFill>
+                  <a:schemeClr val="accent6">
+                    <a:lumMod val="60000"/>
+                    <a:lumOff val="40000"/>
+                  </a:schemeClr>
+                </a:solidFill>
+              </a:rPr>
+            </a:br>
+            <a:r>
+              <a:rPr lang="en-US" sz="2400" dirty="0">
+                <a:solidFill>
+                  <a:schemeClr val="accent6">
+                    <a:lumMod val="60000"/>
+                    <a:lumOff val="40000"/>
+                  </a:schemeClr>
+                </a:solidFill>
+              </a:rPr>
+              <a:t>0          → [0.01, 0.02, 0.03, 0.04]</a:t>
             </a:r>
           </a:p>
         </p:txBody>
@@ -10951,7 +12539,7 @@
 </p:sld>
 </file>
 
-<file path=ppt/slides/slide5.xml><?xml version="1.0" encoding="utf-8"?>
+<file path=ppt/slides/slide6.xml><?xml version="1.0" encoding="utf-8"?>
 <p:sld xmlns:a="http://schemas.openxmlformats.org/drawingml/2006/main" xmlns:r="http://schemas.openxmlformats.org/officeDocument/2006/relationships" xmlns:p="http://schemas.openxmlformats.org/presentationml/2006/main">
   <p:cSld>
     <p:spTree>
@@ -10989,7 +12577,7 @@
         <p:spPr>
           <a:xfrm>
             <a:off x="100965" y="394347"/>
-            <a:ext cx="7168515" cy="5262979"/>
+            <a:ext cx="7168515" cy="3785652"/>
           </a:xfrm>
           <a:prstGeom prst="rect">
             <a:avLst/>
@@ -11132,7 +12720,93 @@
             </a:endParaRPr>
           </a:p>
           <a:p>
-            <a:endParaRPr lang="en-US" sz="2400" dirty="0">
+            <a:r>
+              <a:rPr lang="en-US" sz="2400" dirty="0">
+                <a:solidFill>
+                  <a:schemeClr val="accent6">
+                    <a:lumMod val="60000"/>
+                    <a:lumOff val="40000"/>
+                  </a:schemeClr>
+                </a:solidFill>
+              </a:rPr>
+              <a:t>EXAMPLE: Suppose token limit is 20.</a:t>
+            </a:r>
+          </a:p>
+        </p:txBody>
+      </p:sp>
+      <p:sp>
+        <p:nvSpPr>
+          <p:cNvPr id="2" name="TextBox 1">
+            <a:extLst>
+              <a:ext uri="{FF2B5EF4-FFF2-40B4-BE49-F238E27FC236}">
+                <a16:creationId xmlns:a16="http://schemas.microsoft.com/office/drawing/2014/main" id="{95F44E76-456E-DCE6-EC3C-C9DB5C0EE503}"/>
+              </a:ext>
+            </a:extLst>
+          </p:cNvPr>
+          <p:cNvSpPr txBox="1"/>
+          <p:nvPr/>
+        </p:nvSpPr>
+        <p:spPr>
+          <a:xfrm>
+            <a:off x="310896" y="4544568"/>
+            <a:ext cx="7790688" cy="1200329"/>
+          </a:xfrm>
+          <a:prstGeom prst="rect">
+            <a:avLst/>
+          </a:prstGeom>
+          <a:noFill/>
+        </p:spPr>
+        <p:txBody>
+          <a:bodyPr wrap="square" rtlCol="0">
+            <a:spAutoFit/>
+          </a:bodyPr>
+          <a:lstStyle/>
+          <a:p>
+            <a:r>
+              <a:rPr lang="en-US" sz="2400" b="1" i="1" u="sng" dirty="0">
+                <a:solidFill>
+                  <a:schemeClr val="accent4">
+                    <a:lumMod val="60000"/>
+                    <a:lumOff val="40000"/>
+                  </a:schemeClr>
+                </a:solidFill>
+              </a:rPr>
+              <a:t>I want to go to London. I am living in  </a:t>
+            </a:r>
+            <a:r>
+              <a:rPr lang="en-US" sz="2400" b="1" u="sng" dirty="0">
+                <a:solidFill>
+                  <a:schemeClr val="accent4">
+                    <a:lumMod val="60000"/>
+                    <a:lumOff val="40000"/>
+                  </a:schemeClr>
+                </a:solidFill>
+              </a:rPr>
+              <a:t>Moscow. I do not want to live in Moscow. </a:t>
+            </a:r>
+            <a:r>
+              <a:rPr lang="en-US" sz="2400" b="1" i="1" u="sng" dirty="0">
+                <a:solidFill>
+                  <a:schemeClr val="accent4">
+                    <a:lumMod val="60000"/>
+                    <a:lumOff val="40000"/>
+                  </a:schemeClr>
+                </a:solidFill>
+              </a:rPr>
+              <a:t> I </a:t>
+            </a:r>
+            <a:r>
+              <a:rPr lang="en-US" sz="2400" dirty="0">
+                <a:solidFill>
+                  <a:schemeClr val="accent6">
+                    <a:lumMod val="60000"/>
+                    <a:lumOff val="40000"/>
+                  </a:schemeClr>
+                </a:solidFill>
+              </a:rPr>
+              <a:t>was thinking of taking train. How can I go there in London ?</a:t>
+            </a:r>
+            <a:endParaRPr lang="en-IN" sz="2400" dirty="0">
               <a:solidFill>
                 <a:schemeClr val="accent6">
                   <a:lumMod val="60000"/>
@@ -11141,56 +12815,48 @@
               </a:solidFill>
             </a:endParaRPr>
           </a:p>
-          <a:p>
-            <a:r>
-              <a:rPr lang="en-US" sz="2400" b="1" dirty="0">
-                <a:solidFill>
-                  <a:schemeClr val="accent6">
-                    <a:lumMod val="60000"/>
-                    <a:lumOff val="40000"/>
-                  </a:schemeClr>
-                </a:solidFill>
-              </a:rPr>
-              <a:t>2) Cost Calculation</a:t>
-            </a:r>
-          </a:p>
-          <a:p>
-            <a:r>
-              <a:rPr lang="en-US" sz="2400" dirty="0">
-                <a:solidFill>
-                  <a:schemeClr val="accent6">
-                    <a:lumMod val="60000"/>
-                    <a:lumOff val="40000"/>
-                  </a:schemeClr>
-                </a:solidFill>
-              </a:rPr>
-              <a:t>Most APIs charge </a:t>
-            </a:r>
-            <a:r>
-              <a:rPr lang="en-US" sz="2400" b="1" dirty="0">
-                <a:solidFill>
-                  <a:schemeClr val="accent6">
-                    <a:lumMod val="60000"/>
-                    <a:lumOff val="40000"/>
-                  </a:schemeClr>
-                </a:solidFill>
-              </a:rPr>
-              <a:t>per token used</a:t>
-            </a:r>
-            <a:r>
-              <a:rPr lang="en-US" sz="2400" dirty="0">
-                <a:solidFill>
-                  <a:schemeClr val="accent6">
-                    <a:lumMod val="60000"/>
-                    <a:lumOff val="40000"/>
-                  </a:schemeClr>
-                </a:solidFill>
-              </a:rPr>
-              <a:t>.</a:t>
-            </a:r>
-          </a:p>
-          <a:p>
-            <a:endParaRPr lang="en-US" sz="2400" dirty="0">
+        </p:txBody>
+      </p:sp>
+      <p:sp>
+        <p:nvSpPr>
+          <p:cNvPr id="4" name="TextBox 3">
+            <a:extLst>
+              <a:ext uri="{FF2B5EF4-FFF2-40B4-BE49-F238E27FC236}">
+                <a16:creationId xmlns:a16="http://schemas.microsoft.com/office/drawing/2014/main" id="{AB5A2014-6F7B-4BBE-A11A-8A227BD0BD6D}"/>
+              </a:ext>
+            </a:extLst>
+          </p:cNvPr>
+          <p:cNvSpPr txBox="1"/>
+          <p:nvPr/>
+        </p:nvSpPr>
+        <p:spPr>
+          <a:xfrm>
+            <a:off x="8970264" y="4828032"/>
+            <a:ext cx="3221736" cy="830997"/>
+          </a:xfrm>
+          <a:prstGeom prst="rect">
+            <a:avLst/>
+          </a:prstGeom>
+          <a:noFill/>
+        </p:spPr>
+        <p:txBody>
+          <a:bodyPr wrap="square" rtlCol="0">
+            <a:spAutoFit/>
+          </a:bodyPr>
+          <a:lstStyle/>
+          <a:p>
+            <a:r>
+              <a:rPr lang="en-US" sz="2400" dirty="0">
+                <a:solidFill>
+                  <a:schemeClr val="accent6">
+                    <a:lumMod val="60000"/>
+                    <a:lumOff val="40000"/>
+                  </a:schemeClr>
+                </a:solidFill>
+              </a:rPr>
+              <a:t>This part exceeds the token limit</a:t>
+            </a:r>
+            <a:endParaRPr lang="en-IN" sz="2400" dirty="0">
               <a:solidFill>
                 <a:schemeClr val="accent6">
                   <a:lumMod val="60000"/>
@@ -11199,18 +12865,51 @@
               </a:solidFill>
             </a:endParaRPr>
           </a:p>
-          <a:p>
-            <a:r>
-              <a:rPr lang="en-US" sz="2400" dirty="0">
-                <a:solidFill>
-                  <a:schemeClr val="accent6">
-                    <a:lumMod val="60000"/>
-                    <a:lumOff val="40000"/>
-                  </a:schemeClr>
-                </a:solidFill>
-              </a:rPr>
-              <a:t>More tokens = More cost</a:t>
-            </a:r>
+        </p:txBody>
+      </p:sp>
+      <p:sp>
+        <p:nvSpPr>
+          <p:cNvPr id="5" name="Arrow: Down 4">
+            <a:extLst>
+              <a:ext uri="{FF2B5EF4-FFF2-40B4-BE49-F238E27FC236}">
+                <a16:creationId xmlns:a16="http://schemas.microsoft.com/office/drawing/2014/main" id="{D74BC77F-9F15-3498-2411-24AEE479669E}"/>
+              </a:ext>
+            </a:extLst>
+          </p:cNvPr>
+          <p:cNvSpPr/>
+          <p:nvPr/>
+        </p:nvSpPr>
+        <p:spPr>
+          <a:xfrm rot="5400000" flipH="1">
+            <a:off x="8086344" y="4812499"/>
+            <a:ext cx="457199" cy="664464"/>
+          </a:xfrm>
+          <a:prstGeom prst="downArrow">
+            <a:avLst/>
+          </a:prstGeom>
+        </p:spPr>
+        <p:style>
+          <a:lnRef idx="2">
+            <a:schemeClr val="accent1">
+              <a:shade val="15000"/>
+            </a:schemeClr>
+          </a:lnRef>
+          <a:fillRef idx="1">
+            <a:schemeClr val="accent1"/>
+          </a:fillRef>
+          <a:effectRef idx="0">
+            <a:schemeClr val="accent1"/>
+          </a:effectRef>
+          <a:fontRef idx="minor">
+            <a:schemeClr val="lt1"/>
+          </a:fontRef>
+        </p:style>
+        <p:txBody>
+          <a:bodyPr rtlCol="0" anchor="ctr"/>
+          <a:lstStyle/>
+          <a:p>
+            <a:pPr algn="ctr"/>
+            <a:endParaRPr lang="en-IN"/>
           </a:p>
         </p:txBody>
       </p:sp>
@@ -11227,7 +12926,7 @@
 </p:sld>
 </file>
 
-<file path=ppt/slides/slide6.xml><?xml version="1.0" encoding="utf-8"?>
+<file path=ppt/slides/slide7.xml><?xml version="1.0" encoding="utf-8"?>
 <p:sld xmlns:a="http://schemas.openxmlformats.org/drawingml/2006/main" xmlns:r="http://schemas.openxmlformats.org/officeDocument/2006/relationships" xmlns:p="http://schemas.openxmlformats.org/presentationml/2006/main">
   <p:cSld>
     <p:spTree>
@@ -11272,7 +12971,7 @@
         </p:blipFill>
         <p:spPr>
           <a:xfrm>
-            <a:off x="1512577" y="237122"/>
+            <a:off x="2780545" y="163970"/>
             <a:ext cx="8087854" cy="6182588"/>
           </a:xfrm>
           <a:prstGeom prst="rect">
@@ -11293,7 +12992,1478 @@
 </p:sld>
 </file>
 
-<file path=ppt/slides/slide7.xml><?xml version="1.0" encoding="utf-8"?>
+<file path=ppt/slides/slide8.xml><?xml version="1.0" encoding="utf-8"?>
+<p:sld xmlns:a="http://schemas.openxmlformats.org/drawingml/2006/main" xmlns:r="http://schemas.openxmlformats.org/officeDocument/2006/relationships" xmlns:p="http://schemas.openxmlformats.org/presentationml/2006/main">
+  <p:cSld>
+    <p:spTree>
+      <p:nvGrpSpPr>
+        <p:cNvPr id="1" name="">
+          <a:extLst>
+            <a:ext uri="{FF2B5EF4-FFF2-40B4-BE49-F238E27FC236}">
+              <a16:creationId xmlns:a16="http://schemas.microsoft.com/office/drawing/2014/main" id="{34E2986E-A5B8-72C2-A3A8-8AFC2CEA8620}"/>
+            </a:ext>
+          </a:extLst>
+        </p:cNvPr>
+        <p:cNvGrpSpPr/>
+        <p:nvPr/>
+      </p:nvGrpSpPr>
+      <p:grpSpPr>
+        <a:xfrm>
+          <a:off x="0" y="0"/>
+          <a:ext cx="0" cy="0"/>
+          <a:chOff x="0" y="0"/>
+          <a:chExt cx="0" cy="0"/>
+        </a:xfrm>
+      </p:grpSpPr>
+      <p:sp>
+        <p:nvSpPr>
+          <p:cNvPr id="4" name="TextBox 3">
+            <a:extLst>
+              <a:ext uri="{FF2B5EF4-FFF2-40B4-BE49-F238E27FC236}">
+                <a16:creationId xmlns:a16="http://schemas.microsoft.com/office/drawing/2014/main" id="{A707BBEC-A291-BDD8-EDEE-B1F2F0464E5C}"/>
+              </a:ext>
+            </a:extLst>
+          </p:cNvPr>
+          <p:cNvSpPr txBox="1"/>
+          <p:nvPr/>
+        </p:nvSpPr>
+        <p:spPr>
+          <a:xfrm>
+            <a:off x="96012" y="1040398"/>
+            <a:ext cx="2623573" cy="2308324"/>
+          </a:xfrm>
+          <a:prstGeom prst="rect">
+            <a:avLst/>
+          </a:prstGeom>
+          <a:noFill/>
+        </p:spPr>
+        <p:txBody>
+          <a:bodyPr wrap="square">
+            <a:spAutoFit/>
+          </a:bodyPr>
+          <a:lstStyle/>
+          <a:p>
+            <a:r>
+              <a:rPr lang="en-US" sz="2400" b="1" dirty="0">
+                <a:solidFill>
+                  <a:schemeClr val="accent6">
+                    <a:lumMod val="60000"/>
+                    <a:lumOff val="40000"/>
+                  </a:schemeClr>
+                </a:solidFill>
+              </a:rPr>
+              <a:t>2) Cost Calculation</a:t>
+            </a:r>
+          </a:p>
+          <a:p>
+            <a:r>
+              <a:rPr lang="en-US" sz="2400" dirty="0">
+                <a:solidFill>
+                  <a:schemeClr val="accent6">
+                    <a:lumMod val="60000"/>
+                    <a:lumOff val="40000"/>
+                  </a:schemeClr>
+                </a:solidFill>
+              </a:rPr>
+              <a:t>Most APIs charge </a:t>
+            </a:r>
+            <a:r>
+              <a:rPr lang="en-US" sz="2400" b="1" dirty="0">
+                <a:solidFill>
+                  <a:schemeClr val="accent6">
+                    <a:lumMod val="60000"/>
+                    <a:lumOff val="40000"/>
+                  </a:schemeClr>
+                </a:solidFill>
+              </a:rPr>
+              <a:t>per token used</a:t>
+            </a:r>
+            <a:r>
+              <a:rPr lang="en-US" sz="2400" dirty="0">
+                <a:solidFill>
+                  <a:schemeClr val="accent6">
+                    <a:lumMod val="60000"/>
+                    <a:lumOff val="40000"/>
+                  </a:schemeClr>
+                </a:solidFill>
+              </a:rPr>
+              <a:t>.</a:t>
+            </a:r>
+          </a:p>
+          <a:p>
+            <a:endParaRPr lang="en-US" sz="2400" dirty="0">
+              <a:solidFill>
+                <a:schemeClr val="accent6">
+                  <a:lumMod val="60000"/>
+                  <a:lumOff val="40000"/>
+                </a:schemeClr>
+              </a:solidFill>
+            </a:endParaRPr>
+          </a:p>
+          <a:p>
+            <a:r>
+              <a:rPr lang="en-US" sz="2400" dirty="0">
+                <a:solidFill>
+                  <a:schemeClr val="accent6">
+                    <a:lumMod val="60000"/>
+                    <a:lumOff val="40000"/>
+                  </a:schemeClr>
+                </a:solidFill>
+              </a:rPr>
+              <a:t>More tokens = More cost</a:t>
+            </a:r>
+          </a:p>
+        </p:txBody>
+      </p:sp>
+      <p:graphicFrame>
+        <p:nvGraphicFramePr>
+          <p:cNvPr id="2" name="Table 1">
+            <a:extLst>
+              <a:ext uri="{FF2B5EF4-FFF2-40B4-BE49-F238E27FC236}">
+                <a16:creationId xmlns:a16="http://schemas.microsoft.com/office/drawing/2014/main" id="{036430BF-0CE8-3A3F-6F38-7B88B4EC8347}"/>
+              </a:ext>
+            </a:extLst>
+          </p:cNvPr>
+          <p:cNvGraphicFramePr>
+            <a:graphicFrameLocks noGrp="1"/>
+          </p:cNvGraphicFramePr>
+          <p:nvPr>
+            <p:extLst>
+              <p:ext uri="{D42A27DB-BD31-4B8C-83A1-F6EECF244321}">
+                <p14:modId xmlns:p14="http://schemas.microsoft.com/office/powerpoint/2010/main" val="4047442101"/>
+              </p:ext>
+            </p:extLst>
+          </p:nvPr>
+        </p:nvGraphicFramePr>
+        <p:xfrm>
+          <a:off x="3116580" y="1296430"/>
+          <a:ext cx="8979408" cy="4898277"/>
+        </p:xfrm>
+        <a:graphic>
+          <a:graphicData uri="http://schemas.openxmlformats.org/drawingml/2006/table">
+            <a:tbl>
+              <a:tblPr>
+                <a:tableStyleId>{5C22544A-7EE6-4342-B048-85BDC9FD1C3A}</a:tableStyleId>
+              </a:tblPr>
+              <a:tblGrid>
+                <a:gridCol w="1837944">
+                  <a:extLst>
+                    <a:ext uri="{9D8B030D-6E8A-4147-A177-3AD203B41FA5}">
+                      <a16:colId xmlns:a16="http://schemas.microsoft.com/office/drawing/2014/main" val="162351804"/>
+                    </a:ext>
+                  </a:extLst>
+                </a:gridCol>
+                <a:gridCol w="1905610">
+                  <a:extLst>
+                    <a:ext uri="{9D8B030D-6E8A-4147-A177-3AD203B41FA5}">
+                      <a16:colId xmlns:a16="http://schemas.microsoft.com/office/drawing/2014/main" val="1868725405"/>
+                    </a:ext>
+                  </a:extLst>
+                </a:gridCol>
+                <a:gridCol w="1647749">
+                  <a:extLst>
+                    <a:ext uri="{9D8B030D-6E8A-4147-A177-3AD203B41FA5}">
+                      <a16:colId xmlns:a16="http://schemas.microsoft.com/office/drawing/2014/main" val="595734976"/>
+                    </a:ext>
+                  </a:extLst>
+                </a:gridCol>
+                <a:gridCol w="1647749">
+                  <a:extLst>
+                    <a:ext uri="{9D8B030D-6E8A-4147-A177-3AD203B41FA5}">
+                      <a16:colId xmlns:a16="http://schemas.microsoft.com/office/drawing/2014/main" val="3040923979"/>
+                    </a:ext>
+                  </a:extLst>
+                </a:gridCol>
+                <a:gridCol w="1940356">
+                  <a:extLst>
+                    <a:ext uri="{9D8B030D-6E8A-4147-A177-3AD203B41FA5}">
+                      <a16:colId xmlns:a16="http://schemas.microsoft.com/office/drawing/2014/main" val="283644905"/>
+                    </a:ext>
+                  </a:extLst>
+                </a:gridCol>
+              </a:tblGrid>
+              <a:tr h="379395">
+                <a:tc>
+                  <a:txBody>
+                    <a:bodyPr/>
+                    <a:lstStyle/>
+                    <a:p>
+                      <a:pPr algn="l" fontAlgn="t">
+                        <a:buNone/>
+                      </a:pPr>
+                      <a:r>
+                        <a:rPr lang="en-IN" sz="1600" b="1" u="sng" strike="noStrike" dirty="0">
+                          <a:effectLst/>
+                        </a:rPr>
+                        <a:t>Provider &amp; Model</a:t>
+                      </a:r>
+                      <a:endParaRPr lang="en-IN" sz="1600" b="1" i="0" u="sng" strike="noStrike" dirty="0">
+                        <a:solidFill>
+                          <a:srgbClr val="000000"/>
+                        </a:solidFill>
+                        <a:effectLst/>
+                        <a:latin typeface="Aptos Narrow" panose="020B0004020202020204" pitchFamily="34" charset="0"/>
+                      </a:endParaRPr>
+                    </a:p>
+                  </a:txBody>
+                  <a:tcPr marL="4684" marR="4684" marT="4684" marB="0"/>
+                </a:tc>
+                <a:tc>
+                  <a:txBody>
+                    <a:bodyPr/>
+                    <a:lstStyle/>
+                    <a:p>
+                      <a:pPr algn="l" fontAlgn="t">
+                        <a:buNone/>
+                      </a:pPr>
+                      <a:r>
+                        <a:rPr lang="en-IN" sz="1600" b="1" u="sng" strike="noStrike">
+                          <a:effectLst/>
+                        </a:rPr>
+                        <a:t>Specific Model Example</a:t>
+                      </a:r>
+                      <a:endParaRPr lang="en-IN" sz="1600" b="1" i="0" u="sng" strike="noStrike">
+                        <a:solidFill>
+                          <a:srgbClr val="000000"/>
+                        </a:solidFill>
+                        <a:effectLst/>
+                        <a:latin typeface="Aptos Narrow" panose="020B0004020202020204" pitchFamily="34" charset="0"/>
+                      </a:endParaRPr>
+                    </a:p>
+                  </a:txBody>
+                  <a:tcPr marL="4684" marR="4684" marT="4684" marB="0"/>
+                </a:tc>
+                <a:tc>
+                  <a:txBody>
+                    <a:bodyPr/>
+                    <a:lstStyle/>
+                    <a:p>
+                      <a:pPr algn="l" fontAlgn="t">
+                        <a:buNone/>
+                      </a:pPr>
+                      <a:r>
+                        <a:rPr lang="en-IN" sz="1600" b="1" u="sng" strike="noStrike" dirty="0">
+                          <a:effectLst/>
+                        </a:rPr>
+                        <a:t>Input Cost </a:t>
+                      </a:r>
+                    </a:p>
+                    <a:p>
+                      <a:pPr algn="l" fontAlgn="t">
+                        <a:buNone/>
+                      </a:pPr>
+                      <a:r>
+                        <a:rPr lang="en-IN" sz="1600" b="1" u="sng" strike="noStrike" dirty="0">
+                          <a:effectLst/>
+                        </a:rPr>
+                        <a:t>(per 1M tokens)</a:t>
+                      </a:r>
+                      <a:endParaRPr lang="en-IN" sz="1600" b="1" i="0" u="sng" strike="noStrike" dirty="0">
+                        <a:solidFill>
+                          <a:srgbClr val="000000"/>
+                        </a:solidFill>
+                        <a:effectLst/>
+                        <a:latin typeface="Aptos Narrow" panose="020B0004020202020204" pitchFamily="34" charset="0"/>
+                      </a:endParaRPr>
+                    </a:p>
+                  </a:txBody>
+                  <a:tcPr marL="4684" marR="4684" marT="4684" marB="0"/>
+                </a:tc>
+                <a:tc>
+                  <a:txBody>
+                    <a:bodyPr/>
+                    <a:lstStyle/>
+                    <a:p>
+                      <a:pPr algn="l" fontAlgn="t">
+                        <a:buNone/>
+                      </a:pPr>
+                      <a:r>
+                        <a:rPr lang="en-IN" sz="1600" b="1" u="sng" strike="noStrike" dirty="0">
+                          <a:effectLst/>
+                        </a:rPr>
+                        <a:t>Output Cost </a:t>
+                      </a:r>
+                    </a:p>
+                    <a:p>
+                      <a:pPr algn="l" fontAlgn="t">
+                        <a:buNone/>
+                      </a:pPr>
+                      <a:r>
+                        <a:rPr lang="en-IN" sz="1600" b="1" u="sng" strike="noStrike" dirty="0">
+                          <a:effectLst/>
+                        </a:rPr>
+                        <a:t>(per 1M tokens)</a:t>
+                      </a:r>
+                      <a:endParaRPr lang="en-IN" sz="1600" b="1" i="0" u="sng" strike="noStrike" dirty="0">
+                        <a:solidFill>
+                          <a:srgbClr val="000000"/>
+                        </a:solidFill>
+                        <a:effectLst/>
+                        <a:latin typeface="Aptos Narrow" panose="020B0004020202020204" pitchFamily="34" charset="0"/>
+                      </a:endParaRPr>
+                    </a:p>
+                  </a:txBody>
+                  <a:tcPr marL="4684" marR="4684" marT="4684" marB="0"/>
+                </a:tc>
+                <a:tc>
+                  <a:txBody>
+                    <a:bodyPr/>
+                    <a:lstStyle/>
+                    <a:p>
+                      <a:pPr algn="l" fontAlgn="t">
+                        <a:buNone/>
+                      </a:pPr>
+                      <a:r>
+                        <a:rPr lang="en-IN" sz="1600" b="1" u="sng" strike="noStrike" dirty="0">
+                          <a:effectLst/>
+                        </a:rPr>
+                        <a:t>Key Advantage / Feature</a:t>
+                      </a:r>
+                      <a:endParaRPr lang="en-IN" sz="1600" b="1" i="0" u="sng" strike="noStrike" dirty="0">
+                        <a:solidFill>
+                          <a:srgbClr val="000000"/>
+                        </a:solidFill>
+                        <a:effectLst/>
+                        <a:latin typeface="Aptos Narrow" panose="020B0004020202020204" pitchFamily="34" charset="0"/>
+                      </a:endParaRPr>
+                    </a:p>
+                  </a:txBody>
+                  <a:tcPr marL="4684" marR="4684" marT="4684" marB="0"/>
+                </a:tc>
+                <a:extLst>
+                  <a:ext uri="{0D108BD9-81ED-4DB2-BD59-A6C34878D82A}">
+                    <a16:rowId xmlns:a16="http://schemas.microsoft.com/office/drawing/2014/main" val="1766403730"/>
+                  </a:ext>
+                </a:extLst>
+              </a:tr>
+              <a:tr h="379395">
+                <a:tc>
+                  <a:txBody>
+                    <a:bodyPr/>
+                    <a:lstStyle/>
+                    <a:p>
+                      <a:pPr algn="l" fontAlgn="t">
+                        <a:buNone/>
+                      </a:pPr>
+                      <a:r>
+                        <a:rPr lang="en-IN" sz="1600" b="1" u="none" strike="noStrike" dirty="0">
+                          <a:effectLst/>
+                        </a:rPr>
+                        <a:t>OpenAI (Frontier)</a:t>
+                      </a:r>
+                      <a:endParaRPr lang="en-IN" sz="1600" b="1" i="0" u="none" strike="noStrike" dirty="0">
+                        <a:solidFill>
+                          <a:srgbClr val="000000"/>
+                        </a:solidFill>
+                        <a:effectLst/>
+                        <a:latin typeface="Aptos Narrow" panose="020B0004020202020204" pitchFamily="34" charset="0"/>
+                      </a:endParaRPr>
+                    </a:p>
+                  </a:txBody>
+                  <a:tcPr marL="4684" marR="4684" marT="4684" marB="0"/>
+                </a:tc>
+                <a:tc>
+                  <a:txBody>
+                    <a:bodyPr/>
+                    <a:lstStyle/>
+                    <a:p>
+                      <a:pPr algn="l" fontAlgn="t">
+                        <a:buNone/>
+                      </a:pPr>
+                      <a:r>
+                        <a:rPr lang="en-IN" sz="1600" u="none" strike="noStrike" dirty="0">
+                          <a:effectLst/>
+                        </a:rPr>
+                        <a:t>GPT-6 Astra</a:t>
+                      </a:r>
+                      <a:endParaRPr lang="en-IN" sz="1600" b="0" i="0" u="none" strike="noStrike" dirty="0">
+                        <a:solidFill>
+                          <a:srgbClr val="000000"/>
+                        </a:solidFill>
+                        <a:effectLst/>
+                        <a:latin typeface="Aptos Narrow" panose="020B0004020202020204" pitchFamily="34" charset="0"/>
+                      </a:endParaRPr>
+                    </a:p>
+                  </a:txBody>
+                  <a:tcPr marL="4684" marR="4684" marT="4684" marB="0"/>
+                </a:tc>
+                <a:tc>
+                  <a:txBody>
+                    <a:bodyPr/>
+                    <a:lstStyle/>
+                    <a:p>
+                      <a:pPr algn="l" fontAlgn="t">
+                        <a:buNone/>
+                      </a:pPr>
+                      <a:r>
+                        <a:rPr lang="en-IN" sz="1600" u="none" strike="noStrike" dirty="0">
+                          <a:effectLst/>
+                        </a:rPr>
+                        <a:t>$10.00</a:t>
+                      </a:r>
+                      <a:endParaRPr lang="en-IN" sz="1600" b="1" i="0" u="none" strike="noStrike" dirty="0">
+                        <a:solidFill>
+                          <a:srgbClr val="000000"/>
+                        </a:solidFill>
+                        <a:effectLst/>
+                        <a:latin typeface="Aptos Narrow" panose="020B0004020202020204" pitchFamily="34" charset="0"/>
+                      </a:endParaRPr>
+                    </a:p>
+                  </a:txBody>
+                  <a:tcPr marL="4684" marR="4684" marT="4684" marB="0"/>
+                </a:tc>
+                <a:tc>
+                  <a:txBody>
+                    <a:bodyPr/>
+                    <a:lstStyle/>
+                    <a:p>
+                      <a:pPr algn="l" fontAlgn="t">
+                        <a:buNone/>
+                      </a:pPr>
+                      <a:r>
+                        <a:rPr lang="en-IN" sz="1600" u="none" strike="noStrike" dirty="0">
+                          <a:effectLst/>
+                        </a:rPr>
+                        <a:t>$50.00</a:t>
+                      </a:r>
+                      <a:endParaRPr lang="en-IN" sz="1600" b="1" i="0" u="none" strike="noStrike" dirty="0">
+                        <a:solidFill>
+                          <a:srgbClr val="000000"/>
+                        </a:solidFill>
+                        <a:effectLst/>
+                        <a:latin typeface="Aptos Narrow" panose="020B0004020202020204" pitchFamily="34" charset="0"/>
+                      </a:endParaRPr>
+                    </a:p>
+                  </a:txBody>
+                  <a:tcPr marL="4684" marR="4684" marT="4684" marB="0"/>
+                </a:tc>
+                <a:tc>
+                  <a:txBody>
+                    <a:bodyPr/>
+                    <a:lstStyle/>
+                    <a:p>
+                      <a:pPr algn="l" fontAlgn="t">
+                        <a:buNone/>
+                      </a:pPr>
+                      <a:r>
+                        <a:rPr lang="en-IN" sz="1600" u="none" strike="noStrike" dirty="0">
+                          <a:effectLst/>
+                        </a:rPr>
+                        <a:t>Next-gen flagship reasoning.</a:t>
+                      </a:r>
+                      <a:endParaRPr lang="en-IN" sz="1600" b="0" i="0" u="none" strike="noStrike" dirty="0">
+                        <a:solidFill>
+                          <a:srgbClr val="000000"/>
+                        </a:solidFill>
+                        <a:effectLst/>
+                        <a:latin typeface="Aptos Narrow" panose="020B0004020202020204" pitchFamily="34" charset="0"/>
+                      </a:endParaRPr>
+                    </a:p>
+                  </a:txBody>
+                  <a:tcPr marL="4684" marR="4684" marT="4684" marB="0"/>
+                </a:tc>
+                <a:extLst>
+                  <a:ext uri="{0D108BD9-81ED-4DB2-BD59-A6C34878D82A}">
+                    <a16:rowId xmlns:a16="http://schemas.microsoft.com/office/drawing/2014/main" val="956420105"/>
+                  </a:ext>
+                </a:extLst>
+              </a:tr>
+              <a:tr h="473073">
+                <a:tc>
+                  <a:txBody>
+                    <a:bodyPr/>
+                    <a:lstStyle/>
+                    <a:p>
+                      <a:pPr algn="l" fontAlgn="t">
+                        <a:buNone/>
+                      </a:pPr>
+                      <a:r>
+                        <a:rPr lang="en-IN" sz="1600" b="1" u="none" strike="noStrike" dirty="0">
+                          <a:effectLst/>
+                        </a:rPr>
+                        <a:t>OpenAI (Flagship)</a:t>
+                      </a:r>
+                      <a:endParaRPr lang="en-IN" sz="1600" b="1" i="0" u="none" strike="noStrike" dirty="0">
+                        <a:solidFill>
+                          <a:srgbClr val="000000"/>
+                        </a:solidFill>
+                        <a:effectLst/>
+                        <a:latin typeface="Aptos Narrow" panose="020B0004020202020204" pitchFamily="34" charset="0"/>
+                      </a:endParaRPr>
+                    </a:p>
+                  </a:txBody>
+                  <a:tcPr marL="4684" marR="4684" marT="4684" marB="0"/>
+                </a:tc>
+                <a:tc>
+                  <a:txBody>
+                    <a:bodyPr/>
+                    <a:lstStyle/>
+                    <a:p>
+                      <a:pPr algn="l" fontAlgn="t">
+                        <a:buNone/>
+                      </a:pPr>
+                      <a:r>
+                        <a:rPr lang="en-IN" sz="1600" u="none" strike="noStrike">
+                          <a:effectLst/>
+                        </a:rPr>
+                        <a:t>GPT-5.6 Sol</a:t>
+                      </a:r>
+                      <a:endParaRPr lang="en-IN" sz="1600" b="0" i="0" u="none" strike="noStrike">
+                        <a:solidFill>
+                          <a:srgbClr val="000000"/>
+                        </a:solidFill>
+                        <a:effectLst/>
+                        <a:latin typeface="Aptos Narrow" panose="020B0004020202020204" pitchFamily="34" charset="0"/>
+                      </a:endParaRPr>
+                    </a:p>
+                  </a:txBody>
+                  <a:tcPr marL="4684" marR="4684" marT="4684" marB="0"/>
+                </a:tc>
+                <a:tc>
+                  <a:txBody>
+                    <a:bodyPr/>
+                    <a:lstStyle/>
+                    <a:p>
+                      <a:pPr algn="l" fontAlgn="t">
+                        <a:buNone/>
+                      </a:pPr>
+                      <a:r>
+                        <a:rPr lang="en-IN" sz="1600" u="none" strike="noStrike">
+                          <a:effectLst/>
+                        </a:rPr>
+                        <a:t>$4.00</a:t>
+                      </a:r>
+                      <a:endParaRPr lang="en-IN" sz="1600" b="1" i="0" u="none" strike="noStrike">
+                        <a:solidFill>
+                          <a:srgbClr val="000000"/>
+                        </a:solidFill>
+                        <a:effectLst/>
+                        <a:latin typeface="Aptos Narrow" panose="020B0004020202020204" pitchFamily="34" charset="0"/>
+                      </a:endParaRPr>
+                    </a:p>
+                  </a:txBody>
+                  <a:tcPr marL="4684" marR="4684" marT="4684" marB="0"/>
+                </a:tc>
+                <a:tc>
+                  <a:txBody>
+                    <a:bodyPr/>
+                    <a:lstStyle/>
+                    <a:p>
+                      <a:pPr algn="l" fontAlgn="t">
+                        <a:buNone/>
+                      </a:pPr>
+                      <a:r>
+                        <a:rPr lang="en-IN" sz="1600" u="none" strike="noStrike">
+                          <a:effectLst/>
+                        </a:rPr>
+                        <a:t>$20.00</a:t>
+                      </a:r>
+                      <a:endParaRPr lang="en-IN" sz="1600" b="1" i="0" u="none" strike="noStrike">
+                        <a:solidFill>
+                          <a:srgbClr val="000000"/>
+                        </a:solidFill>
+                        <a:effectLst/>
+                        <a:latin typeface="Aptos Narrow" panose="020B0004020202020204" pitchFamily="34" charset="0"/>
+                      </a:endParaRPr>
+                    </a:p>
+                  </a:txBody>
+                  <a:tcPr marL="4684" marR="4684" marT="4684" marB="0"/>
+                </a:tc>
+                <a:tc>
+                  <a:txBody>
+                    <a:bodyPr/>
+                    <a:lstStyle/>
+                    <a:p>
+                      <a:pPr algn="l" fontAlgn="t">
+                        <a:buNone/>
+                      </a:pPr>
+                      <a:r>
+                        <a:rPr lang="en-IN" sz="1600" u="none" strike="noStrike">
+                          <a:effectLst/>
+                        </a:rPr>
+                        <a:t>Standard production powerhouse.</a:t>
+                      </a:r>
+                      <a:endParaRPr lang="en-IN" sz="1600" b="0" i="0" u="none" strike="noStrike">
+                        <a:solidFill>
+                          <a:srgbClr val="000000"/>
+                        </a:solidFill>
+                        <a:effectLst/>
+                        <a:latin typeface="Aptos Narrow" panose="020B0004020202020204" pitchFamily="34" charset="0"/>
+                      </a:endParaRPr>
+                    </a:p>
+                  </a:txBody>
+                  <a:tcPr marL="4684" marR="4684" marT="4684" marB="0"/>
+                </a:tc>
+                <a:extLst>
+                  <a:ext uri="{0D108BD9-81ED-4DB2-BD59-A6C34878D82A}">
+                    <a16:rowId xmlns:a16="http://schemas.microsoft.com/office/drawing/2014/main" val="2485462098"/>
+                  </a:ext>
+                </a:extLst>
+              </a:tr>
+              <a:tr h="473073">
+                <a:tc>
+                  <a:txBody>
+                    <a:bodyPr/>
+                    <a:lstStyle/>
+                    <a:p>
+                      <a:pPr algn="l" fontAlgn="t">
+                        <a:buNone/>
+                      </a:pPr>
+                      <a:r>
+                        <a:rPr lang="en-IN" sz="1600" b="1" u="none" strike="noStrike" dirty="0">
+                          <a:effectLst/>
+                        </a:rPr>
+                        <a:t>OpenAI (Flash/Mini)</a:t>
+                      </a:r>
+                      <a:endParaRPr lang="en-IN" sz="1600" b="1" i="0" u="none" strike="noStrike" dirty="0">
+                        <a:solidFill>
+                          <a:srgbClr val="000000"/>
+                        </a:solidFill>
+                        <a:effectLst/>
+                        <a:latin typeface="Aptos Narrow" panose="020B0004020202020204" pitchFamily="34" charset="0"/>
+                      </a:endParaRPr>
+                    </a:p>
+                  </a:txBody>
+                  <a:tcPr marL="4684" marR="4684" marT="4684" marB="0"/>
+                </a:tc>
+                <a:tc>
+                  <a:txBody>
+                    <a:bodyPr/>
+                    <a:lstStyle/>
+                    <a:p>
+                      <a:pPr algn="l" fontAlgn="t">
+                        <a:buNone/>
+                      </a:pPr>
+                      <a:r>
+                        <a:rPr lang="en-IN" sz="1600" u="none" strike="noStrike" dirty="0">
+                          <a:effectLst/>
+                        </a:rPr>
+                        <a:t>GPT-5.6 Luna / GPT-4o mini</a:t>
+                      </a:r>
+                      <a:endParaRPr lang="en-IN" sz="1600" b="0" i="0" u="none" strike="noStrike" dirty="0">
+                        <a:solidFill>
+                          <a:srgbClr val="000000"/>
+                        </a:solidFill>
+                        <a:effectLst/>
+                        <a:latin typeface="Aptos Narrow" panose="020B0004020202020204" pitchFamily="34" charset="0"/>
+                      </a:endParaRPr>
+                    </a:p>
+                  </a:txBody>
+                  <a:tcPr marL="4684" marR="4684" marT="4684" marB="0"/>
+                </a:tc>
+                <a:tc>
+                  <a:txBody>
+                    <a:bodyPr/>
+                    <a:lstStyle/>
+                    <a:p>
+                      <a:pPr algn="l" fontAlgn="t">
+                        <a:buNone/>
+                      </a:pPr>
+                      <a:r>
+                        <a:rPr lang="en-IN" sz="1600" u="none" strike="noStrike" dirty="0">
+                          <a:effectLst/>
+                        </a:rPr>
+                        <a:t>$0.15 – $0.20</a:t>
+                      </a:r>
+                      <a:endParaRPr lang="en-IN" sz="1600" b="1" i="0" u="none" strike="noStrike" dirty="0">
+                        <a:solidFill>
+                          <a:srgbClr val="000000"/>
+                        </a:solidFill>
+                        <a:effectLst/>
+                        <a:latin typeface="Aptos Narrow" panose="020B0004020202020204" pitchFamily="34" charset="0"/>
+                      </a:endParaRPr>
+                    </a:p>
+                  </a:txBody>
+                  <a:tcPr marL="4684" marR="4684" marT="4684" marB="0"/>
+                </a:tc>
+                <a:tc>
+                  <a:txBody>
+                    <a:bodyPr/>
+                    <a:lstStyle/>
+                    <a:p>
+                      <a:pPr algn="l" fontAlgn="t">
+                        <a:buNone/>
+                      </a:pPr>
+                      <a:r>
+                        <a:rPr lang="en-IN" sz="1600" u="none" strike="noStrike">
+                          <a:effectLst/>
+                        </a:rPr>
+                        <a:t>$0.60 – $1.20</a:t>
+                      </a:r>
+                      <a:endParaRPr lang="en-IN" sz="1600" b="1" i="0" u="none" strike="noStrike">
+                        <a:solidFill>
+                          <a:srgbClr val="000000"/>
+                        </a:solidFill>
+                        <a:effectLst/>
+                        <a:latin typeface="Aptos Narrow" panose="020B0004020202020204" pitchFamily="34" charset="0"/>
+                      </a:endParaRPr>
+                    </a:p>
+                  </a:txBody>
+                  <a:tcPr marL="4684" marR="4684" marT="4684" marB="0"/>
+                </a:tc>
+                <a:tc>
+                  <a:txBody>
+                    <a:bodyPr/>
+                    <a:lstStyle/>
+                    <a:p>
+                      <a:pPr algn="l" fontAlgn="t">
+                        <a:buNone/>
+                      </a:pPr>
+                      <a:r>
+                        <a:rPr lang="en-IN" sz="1600" u="none" strike="noStrike">
+                          <a:effectLst/>
+                        </a:rPr>
+                        <a:t>Deep cost efficiency for high volume.</a:t>
+                      </a:r>
+                      <a:endParaRPr lang="en-IN" sz="1600" b="0" i="0" u="none" strike="noStrike">
+                        <a:solidFill>
+                          <a:srgbClr val="000000"/>
+                        </a:solidFill>
+                        <a:effectLst/>
+                        <a:latin typeface="Aptos Narrow" panose="020B0004020202020204" pitchFamily="34" charset="0"/>
+                      </a:endParaRPr>
+                    </a:p>
+                  </a:txBody>
+                  <a:tcPr marL="4684" marR="4684" marT="4684" marB="0"/>
+                </a:tc>
+                <a:extLst>
+                  <a:ext uri="{0D108BD9-81ED-4DB2-BD59-A6C34878D82A}">
+                    <a16:rowId xmlns:a16="http://schemas.microsoft.com/office/drawing/2014/main" val="2993704714"/>
+                  </a:ext>
+                </a:extLst>
+              </a:tr>
+              <a:tr h="566751">
+                <a:tc>
+                  <a:txBody>
+                    <a:bodyPr/>
+                    <a:lstStyle/>
+                    <a:p>
+                      <a:pPr algn="l" fontAlgn="t">
+                        <a:buNone/>
+                      </a:pPr>
+                      <a:r>
+                        <a:rPr lang="en-IN" sz="1600" b="1" u="none" strike="noStrike" dirty="0">
+                          <a:effectLst/>
+                        </a:rPr>
+                        <a:t>Anthropic (Frontier)</a:t>
+                      </a:r>
+                      <a:endParaRPr lang="en-IN" sz="1600" b="1" i="0" u="none" strike="noStrike" dirty="0">
+                        <a:solidFill>
+                          <a:srgbClr val="000000"/>
+                        </a:solidFill>
+                        <a:effectLst/>
+                        <a:latin typeface="Aptos Narrow" panose="020B0004020202020204" pitchFamily="34" charset="0"/>
+                      </a:endParaRPr>
+                    </a:p>
+                  </a:txBody>
+                  <a:tcPr marL="4684" marR="4684" marT="4684" marB="0"/>
+                </a:tc>
+                <a:tc>
+                  <a:txBody>
+                    <a:bodyPr/>
+                    <a:lstStyle/>
+                    <a:p>
+                      <a:pPr algn="l" fontAlgn="t">
+                        <a:buNone/>
+                      </a:pPr>
+                      <a:r>
+                        <a:rPr lang="en-IN" sz="1600" u="none" strike="noStrike">
+                          <a:effectLst/>
+                        </a:rPr>
+                        <a:t>Claude Fable 5.1</a:t>
+                      </a:r>
+                      <a:endParaRPr lang="en-IN" sz="1600" b="0" i="0" u="none" strike="noStrike">
+                        <a:solidFill>
+                          <a:srgbClr val="000000"/>
+                        </a:solidFill>
+                        <a:effectLst/>
+                        <a:latin typeface="Aptos Narrow" panose="020B0004020202020204" pitchFamily="34" charset="0"/>
+                      </a:endParaRPr>
+                    </a:p>
+                  </a:txBody>
+                  <a:tcPr marL="4684" marR="4684" marT="4684" marB="0"/>
+                </a:tc>
+                <a:tc>
+                  <a:txBody>
+                    <a:bodyPr/>
+                    <a:lstStyle/>
+                    <a:p>
+                      <a:pPr algn="l" fontAlgn="t">
+                        <a:buNone/>
+                      </a:pPr>
+                      <a:r>
+                        <a:rPr lang="en-IN" sz="1600" u="none" strike="noStrike">
+                          <a:effectLst/>
+                        </a:rPr>
+                        <a:t>$10.00</a:t>
+                      </a:r>
+                      <a:endParaRPr lang="en-IN" sz="1600" b="1" i="0" u="none" strike="noStrike">
+                        <a:solidFill>
+                          <a:srgbClr val="000000"/>
+                        </a:solidFill>
+                        <a:effectLst/>
+                        <a:latin typeface="Aptos Narrow" panose="020B0004020202020204" pitchFamily="34" charset="0"/>
+                      </a:endParaRPr>
+                    </a:p>
+                  </a:txBody>
+                  <a:tcPr marL="4684" marR="4684" marT="4684" marB="0"/>
+                </a:tc>
+                <a:tc>
+                  <a:txBody>
+                    <a:bodyPr/>
+                    <a:lstStyle/>
+                    <a:p>
+                      <a:pPr algn="l" fontAlgn="t">
+                        <a:buNone/>
+                      </a:pPr>
+                      <a:r>
+                        <a:rPr lang="en-IN" sz="1600" u="none" strike="noStrike">
+                          <a:effectLst/>
+                        </a:rPr>
+                        <a:t>$50.00</a:t>
+                      </a:r>
+                      <a:endParaRPr lang="en-IN" sz="1600" b="1" i="0" u="none" strike="noStrike">
+                        <a:solidFill>
+                          <a:srgbClr val="000000"/>
+                        </a:solidFill>
+                        <a:effectLst/>
+                        <a:latin typeface="Aptos Narrow" panose="020B0004020202020204" pitchFamily="34" charset="0"/>
+                      </a:endParaRPr>
+                    </a:p>
+                  </a:txBody>
+                  <a:tcPr marL="4684" marR="4684" marT="4684" marB="0"/>
+                </a:tc>
+                <a:tc>
+                  <a:txBody>
+                    <a:bodyPr/>
+                    <a:lstStyle/>
+                    <a:p>
+                      <a:pPr algn="l" fontAlgn="t">
+                        <a:buNone/>
+                      </a:pPr>
+                      <a:r>
+                        <a:rPr lang="en-IN" sz="1600" u="none" strike="noStrike">
+                          <a:effectLst/>
+                        </a:rPr>
+                        <a:t>Complex logic and long agentic workflows.</a:t>
+                      </a:r>
+                      <a:endParaRPr lang="en-IN" sz="1600" b="0" i="0" u="none" strike="noStrike">
+                        <a:solidFill>
+                          <a:srgbClr val="000000"/>
+                        </a:solidFill>
+                        <a:effectLst/>
+                        <a:latin typeface="Aptos Narrow" panose="020B0004020202020204" pitchFamily="34" charset="0"/>
+                      </a:endParaRPr>
+                    </a:p>
+                  </a:txBody>
+                  <a:tcPr marL="4684" marR="4684" marT="4684" marB="0"/>
+                </a:tc>
+                <a:extLst>
+                  <a:ext uri="{0D108BD9-81ED-4DB2-BD59-A6C34878D82A}">
+                    <a16:rowId xmlns:a16="http://schemas.microsoft.com/office/drawing/2014/main" val="4103317175"/>
+                  </a:ext>
+                </a:extLst>
+              </a:tr>
+              <a:tr h="379395">
+                <a:tc>
+                  <a:txBody>
+                    <a:bodyPr/>
+                    <a:lstStyle/>
+                    <a:p>
+                      <a:pPr algn="l" fontAlgn="t">
+                        <a:buNone/>
+                      </a:pPr>
+                      <a:r>
+                        <a:rPr lang="en-IN" sz="1600" b="1" u="none" strike="noStrike" dirty="0">
+                          <a:effectLst/>
+                        </a:rPr>
+                        <a:t>Anthropic (Flagship)</a:t>
+                      </a:r>
+                      <a:endParaRPr lang="en-IN" sz="1600" b="1" i="0" u="none" strike="noStrike" dirty="0">
+                        <a:solidFill>
+                          <a:srgbClr val="000000"/>
+                        </a:solidFill>
+                        <a:effectLst/>
+                        <a:latin typeface="Aptos Narrow" panose="020B0004020202020204" pitchFamily="34" charset="0"/>
+                      </a:endParaRPr>
+                    </a:p>
+                  </a:txBody>
+                  <a:tcPr marL="4684" marR="4684" marT="4684" marB="0"/>
+                </a:tc>
+                <a:tc>
+                  <a:txBody>
+                    <a:bodyPr/>
+                    <a:lstStyle/>
+                    <a:p>
+                      <a:pPr algn="l" fontAlgn="t">
+                        <a:buNone/>
+                      </a:pPr>
+                      <a:r>
+                        <a:rPr lang="en-IN" sz="1600" u="none" strike="noStrike">
+                          <a:effectLst/>
+                        </a:rPr>
+                        <a:t>Claude Sonnet 5</a:t>
+                      </a:r>
+                      <a:endParaRPr lang="en-IN" sz="1600" b="0" i="0" u="none" strike="noStrike">
+                        <a:solidFill>
+                          <a:srgbClr val="000000"/>
+                        </a:solidFill>
+                        <a:effectLst/>
+                        <a:latin typeface="Aptos Narrow" panose="020B0004020202020204" pitchFamily="34" charset="0"/>
+                      </a:endParaRPr>
+                    </a:p>
+                  </a:txBody>
+                  <a:tcPr marL="4684" marR="4684" marT="4684" marB="0"/>
+                </a:tc>
+                <a:tc>
+                  <a:txBody>
+                    <a:bodyPr/>
+                    <a:lstStyle/>
+                    <a:p>
+                      <a:pPr algn="l" fontAlgn="t">
+                        <a:buNone/>
+                      </a:pPr>
+                      <a:r>
+                        <a:rPr lang="en-IN" sz="1600" u="none" strike="noStrike">
+                          <a:effectLst/>
+                        </a:rPr>
+                        <a:t>$2.00</a:t>
+                      </a:r>
+                      <a:endParaRPr lang="en-IN" sz="1600" b="1" i="0" u="none" strike="noStrike">
+                        <a:solidFill>
+                          <a:srgbClr val="000000"/>
+                        </a:solidFill>
+                        <a:effectLst/>
+                        <a:latin typeface="Aptos Narrow" panose="020B0004020202020204" pitchFamily="34" charset="0"/>
+                      </a:endParaRPr>
+                    </a:p>
+                  </a:txBody>
+                  <a:tcPr marL="4684" marR="4684" marT="4684" marB="0"/>
+                </a:tc>
+                <a:tc>
+                  <a:txBody>
+                    <a:bodyPr/>
+                    <a:lstStyle/>
+                    <a:p>
+                      <a:pPr algn="l" fontAlgn="t">
+                        <a:buNone/>
+                      </a:pPr>
+                      <a:r>
+                        <a:rPr lang="en-IN" sz="1600" u="none" strike="noStrike">
+                          <a:effectLst/>
+                        </a:rPr>
+                        <a:t>$10.00</a:t>
+                      </a:r>
+                      <a:endParaRPr lang="en-IN" sz="1600" b="1" i="0" u="none" strike="noStrike">
+                        <a:solidFill>
+                          <a:srgbClr val="000000"/>
+                        </a:solidFill>
+                        <a:effectLst/>
+                        <a:latin typeface="Aptos Narrow" panose="020B0004020202020204" pitchFamily="34" charset="0"/>
+                      </a:endParaRPr>
+                    </a:p>
+                  </a:txBody>
+                  <a:tcPr marL="4684" marR="4684" marT="4684" marB="0"/>
+                </a:tc>
+                <a:tc>
+                  <a:txBody>
+                    <a:bodyPr/>
+                    <a:lstStyle/>
+                    <a:p>
+                      <a:pPr algn="l" fontAlgn="t">
+                        <a:buNone/>
+                      </a:pPr>
+                      <a:r>
+                        <a:rPr lang="en-IN" sz="1600" u="none" strike="noStrike">
+                          <a:effectLst/>
+                        </a:rPr>
+                        <a:t>Premium coding and analysis.</a:t>
+                      </a:r>
+                      <a:endParaRPr lang="en-IN" sz="1600" b="0" i="0" u="none" strike="noStrike">
+                        <a:solidFill>
+                          <a:srgbClr val="000000"/>
+                        </a:solidFill>
+                        <a:effectLst/>
+                        <a:latin typeface="Aptos Narrow" panose="020B0004020202020204" pitchFamily="34" charset="0"/>
+                      </a:endParaRPr>
+                    </a:p>
+                  </a:txBody>
+                  <a:tcPr marL="4684" marR="4684" marT="4684" marB="0"/>
+                </a:tc>
+                <a:extLst>
+                  <a:ext uri="{0D108BD9-81ED-4DB2-BD59-A6C34878D82A}">
+                    <a16:rowId xmlns:a16="http://schemas.microsoft.com/office/drawing/2014/main" val="3783575096"/>
+                  </a:ext>
+                </a:extLst>
+              </a:tr>
+              <a:tr h="566751">
+                <a:tc>
+                  <a:txBody>
+                    <a:bodyPr/>
+                    <a:lstStyle/>
+                    <a:p>
+                      <a:pPr algn="l" fontAlgn="t">
+                        <a:buNone/>
+                      </a:pPr>
+                      <a:r>
+                        <a:rPr lang="en-IN" sz="1600" b="1" u="none" strike="noStrike" dirty="0">
+                          <a:effectLst/>
+                        </a:rPr>
+                        <a:t>Anthropic (Flash/Mini)</a:t>
+                      </a:r>
+                      <a:endParaRPr lang="en-IN" sz="1600" b="1" i="0" u="none" strike="noStrike" dirty="0">
+                        <a:solidFill>
+                          <a:srgbClr val="000000"/>
+                        </a:solidFill>
+                        <a:effectLst/>
+                        <a:latin typeface="Aptos Narrow" panose="020B0004020202020204" pitchFamily="34" charset="0"/>
+                      </a:endParaRPr>
+                    </a:p>
+                  </a:txBody>
+                  <a:tcPr marL="4684" marR="4684" marT="4684" marB="0"/>
+                </a:tc>
+                <a:tc>
+                  <a:txBody>
+                    <a:bodyPr/>
+                    <a:lstStyle/>
+                    <a:p>
+                      <a:pPr algn="l" fontAlgn="t">
+                        <a:buNone/>
+                      </a:pPr>
+                      <a:r>
+                        <a:rPr lang="en-IN" sz="1600" u="none" strike="noStrike">
+                          <a:effectLst/>
+                        </a:rPr>
+                        <a:t>Claude Haiku 4.5</a:t>
+                      </a:r>
+                      <a:endParaRPr lang="en-IN" sz="1600" b="0" i="0" u="none" strike="noStrike">
+                        <a:solidFill>
+                          <a:srgbClr val="000000"/>
+                        </a:solidFill>
+                        <a:effectLst/>
+                        <a:latin typeface="Aptos Narrow" panose="020B0004020202020204" pitchFamily="34" charset="0"/>
+                      </a:endParaRPr>
+                    </a:p>
+                  </a:txBody>
+                  <a:tcPr marL="4684" marR="4684" marT="4684" marB="0"/>
+                </a:tc>
+                <a:tc>
+                  <a:txBody>
+                    <a:bodyPr/>
+                    <a:lstStyle/>
+                    <a:p>
+                      <a:pPr algn="l" fontAlgn="t">
+                        <a:buNone/>
+                      </a:pPr>
+                      <a:r>
+                        <a:rPr lang="en-IN" sz="1600" u="none" strike="noStrike">
+                          <a:effectLst/>
+                        </a:rPr>
+                        <a:t>$1.00</a:t>
+                      </a:r>
+                      <a:endParaRPr lang="en-IN" sz="1600" b="1" i="0" u="none" strike="noStrike">
+                        <a:solidFill>
+                          <a:srgbClr val="000000"/>
+                        </a:solidFill>
+                        <a:effectLst/>
+                        <a:latin typeface="Aptos Narrow" panose="020B0004020202020204" pitchFamily="34" charset="0"/>
+                      </a:endParaRPr>
+                    </a:p>
+                  </a:txBody>
+                  <a:tcPr marL="4684" marR="4684" marT="4684" marB="0"/>
+                </a:tc>
+                <a:tc>
+                  <a:txBody>
+                    <a:bodyPr/>
+                    <a:lstStyle/>
+                    <a:p>
+                      <a:pPr algn="l" fontAlgn="t">
+                        <a:buNone/>
+                      </a:pPr>
+                      <a:r>
+                        <a:rPr lang="en-IN" sz="1600" u="none" strike="noStrike">
+                          <a:effectLst/>
+                        </a:rPr>
+                        <a:t>$5.00</a:t>
+                      </a:r>
+                      <a:endParaRPr lang="en-IN" sz="1600" b="1" i="0" u="none" strike="noStrike">
+                        <a:solidFill>
+                          <a:srgbClr val="000000"/>
+                        </a:solidFill>
+                        <a:effectLst/>
+                        <a:latin typeface="Aptos Narrow" panose="020B0004020202020204" pitchFamily="34" charset="0"/>
+                      </a:endParaRPr>
+                    </a:p>
+                  </a:txBody>
+                  <a:tcPr marL="4684" marR="4684" marT="4684" marB="0"/>
+                </a:tc>
+                <a:tc>
+                  <a:txBody>
+                    <a:bodyPr/>
+                    <a:lstStyle/>
+                    <a:p>
+                      <a:pPr algn="l" fontAlgn="t">
+                        <a:buNone/>
+                      </a:pPr>
+                      <a:r>
+                        <a:rPr lang="en-IN" sz="1600" u="none" strike="noStrike">
+                          <a:effectLst/>
+                        </a:rPr>
+                        <a:t>Fast, balanced mid-tier workloads.</a:t>
+                      </a:r>
+                      <a:endParaRPr lang="en-IN" sz="1600" b="0" i="0" u="none" strike="noStrike">
+                        <a:solidFill>
+                          <a:srgbClr val="000000"/>
+                        </a:solidFill>
+                        <a:effectLst/>
+                        <a:latin typeface="Aptos Narrow" panose="020B0004020202020204" pitchFamily="34" charset="0"/>
+                      </a:endParaRPr>
+                    </a:p>
+                  </a:txBody>
+                  <a:tcPr marL="4684" marR="4684" marT="4684" marB="0"/>
+                </a:tc>
+                <a:extLst>
+                  <a:ext uri="{0D108BD9-81ED-4DB2-BD59-A6C34878D82A}">
+                    <a16:rowId xmlns:a16="http://schemas.microsoft.com/office/drawing/2014/main" val="1010356693"/>
+                  </a:ext>
+                </a:extLst>
+              </a:tr>
+              <a:tr h="566751">
+                <a:tc>
+                  <a:txBody>
+                    <a:bodyPr/>
+                    <a:lstStyle/>
+                    <a:p>
+                      <a:pPr algn="l" fontAlgn="t">
+                        <a:buNone/>
+                      </a:pPr>
+                      <a:r>
+                        <a:rPr lang="en-IN" sz="1600" b="1" u="none" strike="noStrike" dirty="0" err="1">
+                          <a:effectLst/>
+                        </a:rPr>
+                        <a:t>Groq</a:t>
+                      </a:r>
+                      <a:r>
+                        <a:rPr lang="en-IN" sz="1600" b="1" u="none" strike="noStrike" dirty="0">
+                          <a:effectLst/>
+                        </a:rPr>
+                        <a:t> (Open-Weights)</a:t>
+                      </a:r>
+                      <a:endParaRPr lang="en-IN" sz="1600" b="1" i="0" u="none" strike="noStrike" dirty="0">
+                        <a:solidFill>
+                          <a:srgbClr val="000000"/>
+                        </a:solidFill>
+                        <a:effectLst/>
+                        <a:latin typeface="Aptos Narrow" panose="020B0004020202020204" pitchFamily="34" charset="0"/>
+                      </a:endParaRPr>
+                    </a:p>
+                  </a:txBody>
+                  <a:tcPr marL="4684" marR="4684" marT="4684" marB="0"/>
+                </a:tc>
+                <a:tc>
+                  <a:txBody>
+                    <a:bodyPr/>
+                    <a:lstStyle/>
+                    <a:p>
+                      <a:pPr algn="l" fontAlgn="t">
+                        <a:buNone/>
+                      </a:pPr>
+                      <a:r>
+                        <a:rPr lang="en-IN" sz="1600" u="none" strike="noStrike">
+                          <a:effectLst/>
+                        </a:rPr>
+                        <a:t>Llama 3.3 70B Versatile</a:t>
+                      </a:r>
+                      <a:endParaRPr lang="en-IN" sz="1600" b="0" i="0" u="none" strike="noStrike">
+                        <a:solidFill>
+                          <a:srgbClr val="000000"/>
+                        </a:solidFill>
+                        <a:effectLst/>
+                        <a:latin typeface="Aptos Narrow" panose="020B0004020202020204" pitchFamily="34" charset="0"/>
+                      </a:endParaRPr>
+                    </a:p>
+                  </a:txBody>
+                  <a:tcPr marL="4684" marR="4684" marT="4684" marB="0"/>
+                </a:tc>
+                <a:tc>
+                  <a:txBody>
+                    <a:bodyPr/>
+                    <a:lstStyle/>
+                    <a:p>
+                      <a:pPr algn="l" fontAlgn="t">
+                        <a:buNone/>
+                      </a:pPr>
+                      <a:r>
+                        <a:rPr lang="en-IN" sz="1600" u="none" strike="noStrike">
+                          <a:effectLst/>
+                        </a:rPr>
+                        <a:t>$0.59</a:t>
+                      </a:r>
+                      <a:endParaRPr lang="en-IN" sz="1600" b="1" i="0" u="none" strike="noStrike">
+                        <a:solidFill>
+                          <a:srgbClr val="000000"/>
+                        </a:solidFill>
+                        <a:effectLst/>
+                        <a:latin typeface="Aptos Narrow" panose="020B0004020202020204" pitchFamily="34" charset="0"/>
+                      </a:endParaRPr>
+                    </a:p>
+                  </a:txBody>
+                  <a:tcPr marL="4684" marR="4684" marT="4684" marB="0"/>
+                </a:tc>
+                <a:tc>
+                  <a:txBody>
+                    <a:bodyPr/>
+                    <a:lstStyle/>
+                    <a:p>
+                      <a:pPr algn="l" fontAlgn="t">
+                        <a:buNone/>
+                      </a:pPr>
+                      <a:r>
+                        <a:rPr lang="en-IN" sz="1600" u="none" strike="noStrike">
+                          <a:effectLst/>
+                        </a:rPr>
+                        <a:t>$0.79</a:t>
+                      </a:r>
+                      <a:endParaRPr lang="en-IN" sz="1600" b="1" i="0" u="none" strike="noStrike">
+                        <a:solidFill>
+                          <a:srgbClr val="000000"/>
+                        </a:solidFill>
+                        <a:effectLst/>
+                        <a:latin typeface="Aptos Narrow" panose="020B0004020202020204" pitchFamily="34" charset="0"/>
+                      </a:endParaRPr>
+                    </a:p>
+                  </a:txBody>
+                  <a:tcPr marL="4684" marR="4684" marT="4684" marB="0"/>
+                </a:tc>
+                <a:tc>
+                  <a:txBody>
+                    <a:bodyPr/>
+                    <a:lstStyle/>
+                    <a:p>
+                      <a:pPr algn="l" fontAlgn="t">
+                        <a:buNone/>
+                      </a:pPr>
+                      <a:r>
+                        <a:rPr lang="en-IN" sz="1600" u="none" strike="noStrike">
+                          <a:effectLst/>
+                        </a:rPr>
+                        <a:t>Sub-100ms ultra-low latency inference.</a:t>
+                      </a:r>
+                      <a:endParaRPr lang="en-IN" sz="1600" b="0" i="0" u="none" strike="noStrike">
+                        <a:solidFill>
+                          <a:srgbClr val="000000"/>
+                        </a:solidFill>
+                        <a:effectLst/>
+                        <a:latin typeface="Aptos Narrow" panose="020B0004020202020204" pitchFamily="34" charset="0"/>
+                      </a:endParaRPr>
+                    </a:p>
+                  </a:txBody>
+                  <a:tcPr marL="4684" marR="4684" marT="4684" marB="0"/>
+                </a:tc>
+                <a:extLst>
+                  <a:ext uri="{0D108BD9-81ED-4DB2-BD59-A6C34878D82A}">
+                    <a16:rowId xmlns:a16="http://schemas.microsoft.com/office/drawing/2014/main" val="3106289381"/>
+                  </a:ext>
+                </a:extLst>
+              </a:tr>
+              <a:tr h="566751">
+                <a:tc>
+                  <a:txBody>
+                    <a:bodyPr/>
+                    <a:lstStyle/>
+                    <a:p>
+                      <a:pPr algn="l" fontAlgn="t">
+                        <a:buNone/>
+                      </a:pPr>
+                      <a:r>
+                        <a:rPr lang="en-IN" sz="1600" b="1" u="none" strike="noStrike" dirty="0" err="1">
+                          <a:effectLst/>
+                        </a:rPr>
+                        <a:t>Groq</a:t>
+                      </a:r>
+                      <a:r>
+                        <a:rPr lang="en-IN" sz="1600" b="1" u="none" strike="noStrike" dirty="0">
+                          <a:effectLst/>
+                        </a:rPr>
+                        <a:t> (Lightweight)</a:t>
+                      </a:r>
+                      <a:endParaRPr lang="en-IN" sz="1600" b="1" i="0" u="none" strike="noStrike" dirty="0">
+                        <a:solidFill>
+                          <a:srgbClr val="000000"/>
+                        </a:solidFill>
+                        <a:effectLst/>
+                        <a:latin typeface="Aptos Narrow" panose="020B0004020202020204" pitchFamily="34" charset="0"/>
+                      </a:endParaRPr>
+                    </a:p>
+                  </a:txBody>
+                  <a:tcPr marL="4684" marR="4684" marT="4684" marB="0"/>
+                </a:tc>
+                <a:tc>
+                  <a:txBody>
+                    <a:bodyPr/>
+                    <a:lstStyle/>
+                    <a:p>
+                      <a:pPr algn="l" fontAlgn="t">
+                        <a:buNone/>
+                      </a:pPr>
+                      <a:r>
+                        <a:rPr lang="en-IN" sz="1600" u="none" strike="noStrike">
+                          <a:effectLst/>
+                        </a:rPr>
+                        <a:t>Llama 3.1 8B Instant</a:t>
+                      </a:r>
+                      <a:endParaRPr lang="en-IN" sz="1600" b="0" i="0" u="none" strike="noStrike">
+                        <a:solidFill>
+                          <a:srgbClr val="000000"/>
+                        </a:solidFill>
+                        <a:effectLst/>
+                        <a:latin typeface="Aptos Narrow" panose="020B0004020202020204" pitchFamily="34" charset="0"/>
+                      </a:endParaRPr>
+                    </a:p>
+                  </a:txBody>
+                  <a:tcPr marL="4684" marR="4684" marT="4684" marB="0"/>
+                </a:tc>
+                <a:tc>
+                  <a:txBody>
+                    <a:bodyPr/>
+                    <a:lstStyle/>
+                    <a:p>
+                      <a:pPr algn="l" fontAlgn="t">
+                        <a:buNone/>
+                      </a:pPr>
+                      <a:r>
+                        <a:rPr lang="en-IN" sz="1600" u="none" strike="noStrike">
+                          <a:effectLst/>
+                        </a:rPr>
+                        <a:t>$0.05</a:t>
+                      </a:r>
+                      <a:endParaRPr lang="en-IN" sz="1600" b="1" i="0" u="none" strike="noStrike">
+                        <a:solidFill>
+                          <a:srgbClr val="000000"/>
+                        </a:solidFill>
+                        <a:effectLst/>
+                        <a:latin typeface="Aptos Narrow" panose="020B0004020202020204" pitchFamily="34" charset="0"/>
+                      </a:endParaRPr>
+                    </a:p>
+                  </a:txBody>
+                  <a:tcPr marL="4684" marR="4684" marT="4684" marB="0"/>
+                </a:tc>
+                <a:tc>
+                  <a:txBody>
+                    <a:bodyPr/>
+                    <a:lstStyle/>
+                    <a:p>
+                      <a:pPr algn="l" fontAlgn="t">
+                        <a:buNone/>
+                      </a:pPr>
+                      <a:r>
+                        <a:rPr lang="en-IN" sz="1600" u="none" strike="noStrike">
+                          <a:effectLst/>
+                        </a:rPr>
+                        <a:t>$0.08</a:t>
+                      </a:r>
+                      <a:endParaRPr lang="en-IN" sz="1600" b="1" i="0" u="none" strike="noStrike">
+                        <a:solidFill>
+                          <a:srgbClr val="000000"/>
+                        </a:solidFill>
+                        <a:effectLst/>
+                        <a:latin typeface="Aptos Narrow" panose="020B0004020202020204" pitchFamily="34" charset="0"/>
+                      </a:endParaRPr>
+                    </a:p>
+                  </a:txBody>
+                  <a:tcPr marL="4684" marR="4684" marT="4684" marB="0"/>
+                </a:tc>
+                <a:tc>
+                  <a:txBody>
+                    <a:bodyPr/>
+                    <a:lstStyle/>
+                    <a:p>
+                      <a:pPr algn="l" fontAlgn="t">
+                        <a:buNone/>
+                      </a:pPr>
+                      <a:r>
+                        <a:rPr lang="en-IN" sz="1600" u="none" strike="noStrike" dirty="0">
+                          <a:effectLst/>
+                        </a:rPr>
+                        <a:t>Extreme speed, highly affordable open-source.</a:t>
+                      </a:r>
+                      <a:endParaRPr lang="en-IN" sz="1600" b="0" i="0" u="none" strike="noStrike" dirty="0">
+                        <a:solidFill>
+                          <a:srgbClr val="000000"/>
+                        </a:solidFill>
+                        <a:effectLst/>
+                        <a:latin typeface="Aptos Narrow" panose="020B0004020202020204" pitchFamily="34" charset="0"/>
+                      </a:endParaRPr>
+                    </a:p>
+                  </a:txBody>
+                  <a:tcPr marL="4684" marR="4684" marT="4684" marB="0"/>
+                </a:tc>
+                <a:extLst>
+                  <a:ext uri="{0D108BD9-81ED-4DB2-BD59-A6C34878D82A}">
+                    <a16:rowId xmlns:a16="http://schemas.microsoft.com/office/drawing/2014/main" val="3632674510"/>
+                  </a:ext>
+                </a:extLst>
+              </a:tr>
+            </a:tbl>
+          </a:graphicData>
+        </a:graphic>
+      </p:graphicFrame>
+      <p:sp>
+        <p:nvSpPr>
+          <p:cNvPr id="6" name="TextBox 5">
+            <a:extLst>
+              <a:ext uri="{FF2B5EF4-FFF2-40B4-BE49-F238E27FC236}">
+                <a16:creationId xmlns:a16="http://schemas.microsoft.com/office/drawing/2014/main" id="{1BD370FB-A370-2A3D-174C-88B7AFFB7391}"/>
+              </a:ext>
+            </a:extLst>
+          </p:cNvPr>
+          <p:cNvSpPr txBox="1"/>
+          <p:nvPr/>
+        </p:nvSpPr>
+        <p:spPr>
+          <a:xfrm>
+            <a:off x="1988820" y="427982"/>
+            <a:ext cx="7822692" cy="461665"/>
+          </a:xfrm>
+          <a:prstGeom prst="rect">
+            <a:avLst/>
+          </a:prstGeom>
+          <a:noFill/>
+        </p:spPr>
+        <p:txBody>
+          <a:bodyPr wrap="square">
+            <a:spAutoFit/>
+          </a:bodyPr>
+          <a:lstStyle/>
+          <a:p>
+            <a:r>
+              <a:rPr lang="en-IN" sz="2400" dirty="0">
+                <a:solidFill>
+                  <a:schemeClr val="accent6">
+                    <a:lumMod val="60000"/>
+                    <a:lumOff val="40000"/>
+                  </a:schemeClr>
+                </a:solidFill>
+              </a:rPr>
+              <a:t>2026 API Token Price Comparison (Per 1 Million Tokens)</a:t>
+            </a:r>
+          </a:p>
+        </p:txBody>
+      </p:sp>
+    </p:spTree>
+    <p:extLst>
+      <p:ext uri="{BB962C8B-B14F-4D97-AF65-F5344CB8AC3E}">
+        <p14:creationId xmlns:p14="http://schemas.microsoft.com/office/powerpoint/2010/main" val="3189621582"/>
+      </p:ext>
+    </p:extLst>
+  </p:cSld>
+  <p:clrMapOvr>
+    <a:masterClrMapping/>
+  </p:clrMapOvr>
+</p:sld>
+</file>
+
+<file path=ppt/slides/slide9.xml><?xml version="1.0" encoding="utf-8"?>
 <p:sld xmlns:a="http://schemas.openxmlformats.org/drawingml/2006/main" xmlns:r="http://schemas.openxmlformats.org/officeDocument/2006/relationships" xmlns:p="http://schemas.openxmlformats.org/presentationml/2006/main">
   <p:cSld>
     <p:spTree>
@@ -11523,590 +14693,6 @@
     <p:extLst>
       <p:ext uri="{BB962C8B-B14F-4D97-AF65-F5344CB8AC3E}">
         <p14:creationId xmlns:p14="http://schemas.microsoft.com/office/powerpoint/2010/main" val="21276717"/>
-      </p:ext>
-    </p:extLst>
-  </p:cSld>
-  <p:clrMapOvr>
-    <a:masterClrMapping/>
-  </p:clrMapOvr>
-</p:sld>
-</file>
-
-<file path=ppt/slides/slide8.xml><?xml version="1.0" encoding="utf-8"?>
-<p:sld xmlns:a="http://schemas.openxmlformats.org/drawingml/2006/main" xmlns:r="http://schemas.openxmlformats.org/officeDocument/2006/relationships" xmlns:p="http://schemas.openxmlformats.org/presentationml/2006/main">
-  <p:cSld>
-    <p:spTree>
-      <p:nvGrpSpPr>
-        <p:cNvPr id="1" name="">
-          <a:extLst>
-            <a:ext uri="{FF2B5EF4-FFF2-40B4-BE49-F238E27FC236}">
-              <a16:creationId xmlns:a16="http://schemas.microsoft.com/office/drawing/2014/main" id="{CB37646A-C09A-9147-0AE2-A7C2894BAB11}"/>
-            </a:ext>
-          </a:extLst>
-        </p:cNvPr>
-        <p:cNvGrpSpPr/>
-        <p:nvPr/>
-      </p:nvGrpSpPr>
-      <p:grpSpPr>
-        <a:xfrm>
-          <a:off x="0" y="0"/>
-          <a:ext cx="0" cy="0"/>
-          <a:chOff x="0" y="0"/>
-          <a:chExt cx="0" cy="0"/>
-        </a:xfrm>
-      </p:grpSpPr>
-      <p:sp>
-        <p:nvSpPr>
-          <p:cNvPr id="9" name="TextBox 8">
-            <a:extLst>
-              <a:ext uri="{FF2B5EF4-FFF2-40B4-BE49-F238E27FC236}">
-                <a16:creationId xmlns:a16="http://schemas.microsoft.com/office/drawing/2014/main" id="{D64FB20C-BEAB-7BCE-2467-E1A631605A9E}"/>
-              </a:ext>
-            </a:extLst>
-          </p:cNvPr>
-          <p:cNvSpPr txBox="1"/>
-          <p:nvPr/>
-        </p:nvSpPr>
-        <p:spPr>
-          <a:xfrm>
-            <a:off x="592087" y="123858"/>
-            <a:ext cx="9859604" cy="523220"/>
-          </a:xfrm>
-          <a:prstGeom prst="rect">
-            <a:avLst/>
-          </a:prstGeom>
-          <a:noFill/>
-        </p:spPr>
-        <p:txBody>
-          <a:bodyPr wrap="square" rtlCol="0">
-            <a:spAutoFit/>
-          </a:bodyPr>
-          <a:lstStyle/>
-          <a:p>
-            <a:pPr algn="ctr"/>
-            <a:r>
-              <a:rPr lang="en-US" sz="2800" dirty="0">
-                <a:solidFill>
-                  <a:schemeClr val="accent6">
-                    <a:lumMod val="60000"/>
-                    <a:lumOff val="40000"/>
-                  </a:schemeClr>
-                </a:solidFill>
-              </a:rPr>
-              <a:t>Hallucinations – Why AI Lies &amp; How to Stop It</a:t>
-            </a:r>
-          </a:p>
-        </p:txBody>
-      </p:sp>
-      <p:sp>
-        <p:nvSpPr>
-          <p:cNvPr id="3" name="TextBox 2">
-            <a:extLst>
-              <a:ext uri="{FF2B5EF4-FFF2-40B4-BE49-F238E27FC236}">
-                <a16:creationId xmlns:a16="http://schemas.microsoft.com/office/drawing/2014/main" id="{5790FEAD-D15B-0BAB-D85D-50029C280FEE}"/>
-              </a:ext>
-            </a:extLst>
-          </p:cNvPr>
-          <p:cNvSpPr txBox="1"/>
-          <p:nvPr/>
-        </p:nvSpPr>
-        <p:spPr>
-          <a:xfrm>
-            <a:off x="306864" y="894117"/>
-            <a:ext cx="9859603" cy="2677656"/>
-          </a:xfrm>
-          <a:prstGeom prst="rect">
-            <a:avLst/>
-          </a:prstGeom>
-          <a:noFill/>
-        </p:spPr>
-        <p:txBody>
-          <a:bodyPr wrap="square">
-            <a:spAutoFit/>
-          </a:bodyPr>
-          <a:lstStyle/>
-          <a:p>
-            <a:pPr>
-              <a:buNone/>
-            </a:pPr>
-            <a:r>
-              <a:rPr lang="en-US" sz="2400" b="1" dirty="0">
-                <a:solidFill>
-                  <a:schemeClr val="accent6">
-                    <a:lumMod val="60000"/>
-                    <a:lumOff val="40000"/>
-                  </a:schemeClr>
-                </a:solidFill>
-              </a:rPr>
-              <a:t>What is Hallucination?</a:t>
-            </a:r>
-          </a:p>
-          <a:p>
-            <a:pPr>
-              <a:buNone/>
-            </a:pPr>
-            <a:endParaRPr lang="en-US" sz="2400" dirty="0">
-              <a:solidFill>
-                <a:schemeClr val="accent6">
-                  <a:lumMod val="60000"/>
-                  <a:lumOff val="40000"/>
-                </a:schemeClr>
-              </a:solidFill>
-            </a:endParaRPr>
-          </a:p>
-          <a:p>
-            <a:r>
-              <a:rPr lang="en-US" sz="2400" b="1" dirty="0">
-                <a:solidFill>
-                  <a:schemeClr val="accent6">
-                    <a:lumMod val="60000"/>
-                    <a:lumOff val="40000"/>
-                  </a:schemeClr>
-                </a:solidFill>
-              </a:rPr>
-              <a:t>Real Example</a:t>
-            </a:r>
-          </a:p>
-          <a:p>
-            <a:r>
-              <a:rPr lang="en-US" sz="2400" dirty="0">
-                <a:solidFill>
-                  <a:schemeClr val="accent6">
-                    <a:lumMod val="60000"/>
-                    <a:lumOff val="40000"/>
-                  </a:schemeClr>
-                </a:solidFill>
-              </a:rPr>
-              <a:t>Prompt: </a:t>
-            </a:r>
-            <a:r>
-              <a:rPr lang="en-US" sz="2400" b="1" dirty="0">
-                <a:solidFill>
-                  <a:schemeClr val="accent6">
-                    <a:lumMod val="60000"/>
-                    <a:lumOff val="40000"/>
-                  </a:schemeClr>
-                </a:solidFill>
-              </a:rPr>
-              <a:t>Who won FIFA World Cup 2050?</a:t>
-            </a:r>
-          </a:p>
-          <a:p>
-            <a:endParaRPr lang="en-US" sz="2400" dirty="0">
-              <a:solidFill>
-                <a:schemeClr val="accent6">
-                  <a:lumMod val="60000"/>
-                  <a:lumOff val="40000"/>
-                </a:schemeClr>
-              </a:solidFill>
-            </a:endParaRPr>
-          </a:p>
-          <a:p>
-            <a:r>
-              <a:rPr lang="en-US" sz="2400" dirty="0">
-                <a:solidFill>
-                  <a:schemeClr val="accent6">
-                    <a:lumMod val="60000"/>
-                    <a:lumOff val="40000"/>
-                  </a:schemeClr>
-                </a:solidFill>
-              </a:rPr>
-              <a:t>AI may confidently give wrong answer:</a:t>
-            </a:r>
-          </a:p>
-          <a:p>
-            <a:r>
-              <a:rPr lang="en-US" sz="2400" dirty="0">
-                <a:solidFill>
-                  <a:schemeClr val="accent6">
-                    <a:lumMod val="60000"/>
-                    <a:lumOff val="40000"/>
-                  </a:schemeClr>
-                </a:solidFill>
-              </a:rPr>
-              <a:t> </a:t>
-            </a:r>
-            <a:r>
-              <a:rPr lang="en-US" sz="2400" b="1" dirty="0">
-                <a:solidFill>
-                  <a:schemeClr val="accent6">
-                    <a:lumMod val="60000"/>
-                    <a:lumOff val="40000"/>
-                  </a:schemeClr>
-                </a:solidFill>
-              </a:rPr>
-              <a:t>The FIFA was won by Argentina</a:t>
-            </a:r>
-          </a:p>
-        </p:txBody>
-      </p:sp>
-      <p:sp>
-        <p:nvSpPr>
-          <p:cNvPr id="4" name="TextBox 3">
-            <a:extLst>
-              <a:ext uri="{FF2B5EF4-FFF2-40B4-BE49-F238E27FC236}">
-                <a16:creationId xmlns:a16="http://schemas.microsoft.com/office/drawing/2014/main" id="{262B7C94-F54C-433D-740E-B3350BEF7CBB}"/>
-              </a:ext>
-            </a:extLst>
-          </p:cNvPr>
-          <p:cNvSpPr txBox="1"/>
-          <p:nvPr/>
-        </p:nvSpPr>
-        <p:spPr>
-          <a:xfrm>
-            <a:off x="690372" y="4580466"/>
-            <a:ext cx="7758684" cy="1569660"/>
-          </a:xfrm>
-          <a:prstGeom prst="rect">
-            <a:avLst/>
-          </a:prstGeom>
-          <a:noFill/>
-        </p:spPr>
-        <p:txBody>
-          <a:bodyPr wrap="square">
-            <a:spAutoFit/>
-          </a:bodyPr>
-          <a:lstStyle/>
-          <a:p>
-            <a:pPr>
-              <a:buNone/>
-            </a:pPr>
-            <a:r>
-              <a:rPr lang="en-US" sz="2400" dirty="0">
-                <a:solidFill>
-                  <a:schemeClr val="accent6">
-                    <a:lumMod val="60000"/>
-                    <a:lumOff val="40000"/>
-                  </a:schemeClr>
-                </a:solidFill>
-              </a:rPr>
-              <a:t>Hallucination happens when AI:</a:t>
-            </a:r>
-          </a:p>
-          <a:p>
-            <a:pPr marL="342900" indent="-342900">
-              <a:buFont typeface="Arial" panose="020B0604020202020204" pitchFamily="34" charset="0"/>
-              <a:buChar char="•"/>
-            </a:pPr>
-            <a:r>
-              <a:rPr lang="en-US" sz="2400" dirty="0">
-                <a:solidFill>
-                  <a:schemeClr val="accent6">
-                    <a:lumMod val="60000"/>
-                    <a:lumOff val="40000"/>
-                  </a:schemeClr>
-                </a:solidFill>
-              </a:rPr>
-              <a:t>Generates false information</a:t>
-            </a:r>
-          </a:p>
-          <a:p>
-            <a:pPr marL="342900" indent="-342900">
-              <a:buFont typeface="Arial" panose="020B0604020202020204" pitchFamily="34" charset="0"/>
-              <a:buChar char="•"/>
-            </a:pPr>
-            <a:r>
-              <a:rPr lang="en-US" sz="2400" dirty="0">
-                <a:solidFill>
-                  <a:schemeClr val="accent6">
-                    <a:lumMod val="60000"/>
-                    <a:lumOff val="40000"/>
-                  </a:schemeClr>
-                </a:solidFill>
-              </a:rPr>
-              <a:t>Sounds confident, but information is incorrect or invented</a:t>
-            </a:r>
-          </a:p>
-          <a:p>
-            <a:pPr>
-              <a:buNone/>
-            </a:pPr>
-            <a:endParaRPr lang="en-US" sz="2400" dirty="0">
-              <a:solidFill>
-                <a:schemeClr val="accent6">
-                  <a:lumMod val="60000"/>
-                  <a:lumOff val="40000"/>
-                </a:schemeClr>
-              </a:solidFill>
-            </a:endParaRPr>
-          </a:p>
-        </p:txBody>
-      </p:sp>
-    </p:spTree>
-    <p:extLst>
-      <p:ext uri="{BB962C8B-B14F-4D97-AF65-F5344CB8AC3E}">
-        <p14:creationId xmlns:p14="http://schemas.microsoft.com/office/powerpoint/2010/main" val="1297782942"/>
-      </p:ext>
-    </p:extLst>
-  </p:cSld>
-  <p:clrMapOvr>
-    <a:masterClrMapping/>
-  </p:clrMapOvr>
-</p:sld>
-</file>
-
-<file path=ppt/slides/slide9.xml><?xml version="1.0" encoding="utf-8"?>
-<p:sld xmlns:a="http://schemas.openxmlformats.org/drawingml/2006/main" xmlns:r="http://schemas.openxmlformats.org/officeDocument/2006/relationships" xmlns:p="http://schemas.openxmlformats.org/presentationml/2006/main">
-  <p:cSld>
-    <p:spTree>
-      <p:nvGrpSpPr>
-        <p:cNvPr id="1" name="">
-          <a:extLst>
-            <a:ext uri="{FF2B5EF4-FFF2-40B4-BE49-F238E27FC236}">
-              <a16:creationId xmlns:a16="http://schemas.microsoft.com/office/drawing/2014/main" id="{61A6605F-B7B7-01EA-6F91-2D463EBE205C}"/>
-            </a:ext>
-          </a:extLst>
-        </p:cNvPr>
-        <p:cNvGrpSpPr/>
-        <p:nvPr/>
-      </p:nvGrpSpPr>
-      <p:grpSpPr>
-        <a:xfrm>
-          <a:off x="0" y="0"/>
-          <a:ext cx="0" cy="0"/>
-          <a:chOff x="0" y="0"/>
-          <a:chExt cx="0" cy="0"/>
-        </a:xfrm>
-      </p:grpSpPr>
-      <p:sp>
-        <p:nvSpPr>
-          <p:cNvPr id="9" name="TextBox 8">
-            <a:extLst>
-              <a:ext uri="{FF2B5EF4-FFF2-40B4-BE49-F238E27FC236}">
-                <a16:creationId xmlns:a16="http://schemas.microsoft.com/office/drawing/2014/main" id="{6504368B-2ECD-27F8-FF60-D39049CA2C15}"/>
-              </a:ext>
-            </a:extLst>
-          </p:cNvPr>
-          <p:cNvSpPr txBox="1"/>
-          <p:nvPr/>
-        </p:nvSpPr>
-        <p:spPr>
-          <a:xfrm>
-            <a:off x="592087" y="123858"/>
-            <a:ext cx="9859604" cy="523220"/>
-          </a:xfrm>
-          <a:prstGeom prst="rect">
-            <a:avLst/>
-          </a:prstGeom>
-          <a:noFill/>
-        </p:spPr>
-        <p:txBody>
-          <a:bodyPr wrap="square" rtlCol="0">
-            <a:spAutoFit/>
-          </a:bodyPr>
-          <a:lstStyle/>
-          <a:p>
-            <a:pPr algn="ctr"/>
-            <a:r>
-              <a:rPr lang="en-US" sz="2800" dirty="0">
-                <a:solidFill>
-                  <a:schemeClr val="accent6">
-                    <a:lumMod val="60000"/>
-                    <a:lumOff val="40000"/>
-                  </a:schemeClr>
-                </a:solidFill>
-              </a:rPr>
-              <a:t>Hallucinations – Why AI Lies &amp; How to Stop It</a:t>
-            </a:r>
-          </a:p>
-        </p:txBody>
-      </p:sp>
-      <p:sp>
-        <p:nvSpPr>
-          <p:cNvPr id="3" name="TextBox 2">
-            <a:extLst>
-              <a:ext uri="{FF2B5EF4-FFF2-40B4-BE49-F238E27FC236}">
-                <a16:creationId xmlns:a16="http://schemas.microsoft.com/office/drawing/2014/main" id="{BC0C5F40-6196-BAAF-9D14-D8C4A4CC6487}"/>
-              </a:ext>
-            </a:extLst>
-          </p:cNvPr>
-          <p:cNvSpPr txBox="1"/>
-          <p:nvPr/>
-        </p:nvSpPr>
-        <p:spPr>
-          <a:xfrm>
-            <a:off x="334297" y="1305597"/>
-            <a:ext cx="8863780" cy="4524315"/>
-          </a:xfrm>
-          <a:prstGeom prst="rect">
-            <a:avLst/>
-          </a:prstGeom>
-          <a:noFill/>
-        </p:spPr>
-        <p:txBody>
-          <a:bodyPr wrap="square">
-            <a:spAutoFit/>
-          </a:bodyPr>
-          <a:lstStyle/>
-          <a:p>
-            <a:r>
-              <a:rPr lang="en-US" sz="2400" b="1" dirty="0">
-                <a:solidFill>
-                  <a:schemeClr val="accent6">
-                    <a:lumMod val="60000"/>
-                    <a:lumOff val="40000"/>
-                  </a:schemeClr>
-                </a:solidFill>
-              </a:rPr>
-              <a:t>Why Hallucination Happens</a:t>
-            </a:r>
-          </a:p>
-          <a:p>
-            <a:endParaRPr lang="en-US" sz="2400" b="1" dirty="0">
-              <a:solidFill>
-                <a:schemeClr val="accent6">
-                  <a:lumMod val="60000"/>
-                  <a:lumOff val="40000"/>
-                </a:schemeClr>
-              </a:solidFill>
-            </a:endParaRPr>
-          </a:p>
-          <a:p>
-            <a:r>
-              <a:rPr lang="en-US" sz="2400" b="1" dirty="0">
-                <a:solidFill>
-                  <a:schemeClr val="accent6">
-                    <a:lumMod val="60000"/>
-                    <a:lumOff val="40000"/>
-                  </a:schemeClr>
-                </a:solidFill>
-              </a:rPr>
-              <a:t>1. Prediction Based Model</a:t>
-            </a:r>
-          </a:p>
-          <a:p>
-            <a:r>
-              <a:rPr lang="en-US" sz="2400" dirty="0">
-                <a:solidFill>
-                  <a:schemeClr val="accent6">
-                    <a:lumMod val="60000"/>
-                    <a:lumOff val="40000"/>
-                  </a:schemeClr>
-                </a:solidFill>
-              </a:rPr>
-              <a:t>AI predicts </a:t>
-            </a:r>
-            <a:r>
-              <a:rPr lang="en-US" sz="2400" b="1" dirty="0">
-                <a:solidFill>
-                  <a:schemeClr val="accent6">
-                    <a:lumMod val="60000"/>
-                    <a:lumOff val="40000"/>
-                  </a:schemeClr>
-                </a:solidFill>
-              </a:rPr>
-              <a:t>most probable next word</a:t>
-            </a:r>
-            <a:r>
-              <a:rPr lang="en-US" sz="2400" dirty="0">
-                <a:solidFill>
-                  <a:schemeClr val="accent6">
-                    <a:lumMod val="60000"/>
-                    <a:lumOff val="40000"/>
-                  </a:schemeClr>
-                </a:solidFill>
-              </a:rPr>
-              <a:t>, not truth. It is not verifying.</a:t>
-            </a:r>
-          </a:p>
-          <a:p>
-            <a:endParaRPr lang="en-US" sz="2400" dirty="0">
-              <a:solidFill>
-                <a:schemeClr val="accent6">
-                  <a:lumMod val="60000"/>
-                  <a:lumOff val="40000"/>
-                </a:schemeClr>
-              </a:solidFill>
-            </a:endParaRPr>
-          </a:p>
-          <a:p>
-            <a:endParaRPr lang="en-US" sz="2400" dirty="0">
-              <a:solidFill>
-                <a:schemeClr val="accent6">
-                  <a:lumMod val="60000"/>
-                  <a:lumOff val="40000"/>
-                </a:schemeClr>
-              </a:solidFill>
-            </a:endParaRPr>
-          </a:p>
-          <a:p>
-            <a:r>
-              <a:rPr lang="en-US" sz="2400" b="1" dirty="0">
-                <a:solidFill>
-                  <a:schemeClr val="accent6">
-                    <a:lumMod val="60000"/>
-                    <a:lumOff val="40000"/>
-                  </a:schemeClr>
-                </a:solidFill>
-              </a:rPr>
-              <a:t>2. Missing Information</a:t>
-            </a:r>
-          </a:p>
-          <a:p>
-            <a:r>
-              <a:rPr lang="en-US" sz="2400" dirty="0">
-                <a:solidFill>
-                  <a:schemeClr val="accent6">
-                    <a:lumMod val="60000"/>
-                    <a:lumOff val="40000"/>
-                  </a:schemeClr>
-                </a:solidFill>
-              </a:rPr>
-              <a:t>If prompt lacks details → AI guesses.</a:t>
-            </a:r>
-          </a:p>
-          <a:p>
-            <a:endParaRPr lang="en-US" sz="2400" dirty="0">
-              <a:solidFill>
-                <a:schemeClr val="accent6">
-                  <a:lumMod val="60000"/>
-                  <a:lumOff val="40000"/>
-                </a:schemeClr>
-              </a:solidFill>
-            </a:endParaRPr>
-          </a:p>
-          <a:p>
-            <a:endParaRPr lang="en-US" sz="2400" dirty="0">
-              <a:solidFill>
-                <a:schemeClr val="accent6">
-                  <a:lumMod val="60000"/>
-                  <a:lumOff val="40000"/>
-                </a:schemeClr>
-              </a:solidFill>
-            </a:endParaRPr>
-          </a:p>
-          <a:p>
-            <a:r>
-              <a:rPr lang="en-US" sz="2400" b="1" dirty="0">
-                <a:solidFill>
-                  <a:schemeClr val="accent6">
-                    <a:lumMod val="60000"/>
-                    <a:lumOff val="40000"/>
-                  </a:schemeClr>
-                </a:solidFill>
-              </a:rPr>
-              <a:t>3. Ambiguous Prompts</a:t>
-            </a:r>
-          </a:p>
-          <a:p>
-            <a:r>
-              <a:rPr lang="en-US" sz="2400" dirty="0">
-                <a:solidFill>
-                  <a:schemeClr val="accent6">
-                    <a:lumMod val="60000"/>
-                    <a:lumOff val="40000"/>
-                  </a:schemeClr>
-                </a:solidFill>
-              </a:rPr>
-              <a:t>Vague instructions lead to creative (but wrong) answers.</a:t>
-            </a:r>
-          </a:p>
-        </p:txBody>
-      </p:sp>
-    </p:spTree>
-    <p:extLst>
-      <p:ext uri="{BB962C8B-B14F-4D97-AF65-F5344CB8AC3E}">
-        <p14:creationId xmlns:p14="http://schemas.microsoft.com/office/powerpoint/2010/main" val="629540453"/>
       </p:ext>
     </p:extLst>
   </p:cSld>

--- a/prompt_engineering/pe-1-basics_Tokenization_Hallucinations_PromptFormula_v2.pptx
+++ b/prompt_engineering/pe-1-basics_Tokenization_Hallucinations_PromptFormula_v2.pptx
@@ -5,46 +5,47 @@
     <p:sldMasterId id="2147483648" r:id="rId1"/>
   </p:sldMasterIdLst>
   <p:notesMasterIdLst>
-    <p:notesMasterId r:id="rId36"/>
+    <p:notesMasterId r:id="rId37"/>
   </p:notesMasterIdLst>
   <p:handoutMasterIdLst>
-    <p:handoutMasterId r:id="rId37"/>
+    <p:handoutMasterId r:id="rId38"/>
   </p:handoutMasterIdLst>
   <p:sldIdLst>
     <p:sldId id="260" r:id="rId2"/>
-    <p:sldId id="289" r:id="rId3"/>
-    <p:sldId id="261" r:id="rId4"/>
-    <p:sldId id="262" r:id="rId5"/>
-    <p:sldId id="284" r:id="rId6"/>
-    <p:sldId id="259" r:id="rId7"/>
-    <p:sldId id="283" r:id="rId8"/>
-    <p:sldId id="290" r:id="rId9"/>
-    <p:sldId id="263" r:id="rId10"/>
-    <p:sldId id="265" r:id="rId11"/>
-    <p:sldId id="291" r:id="rId12"/>
-    <p:sldId id="266" r:id="rId13"/>
-    <p:sldId id="267" r:id="rId14"/>
-    <p:sldId id="275" r:id="rId15"/>
-    <p:sldId id="268" r:id="rId16"/>
-    <p:sldId id="286" r:id="rId17"/>
-    <p:sldId id="276" r:id="rId18"/>
-    <p:sldId id="277" r:id="rId19"/>
-    <p:sldId id="274" r:id="rId20"/>
-    <p:sldId id="278" r:id="rId21"/>
-    <p:sldId id="279" r:id="rId22"/>
-    <p:sldId id="269" r:id="rId23"/>
-    <p:sldId id="292" r:id="rId24"/>
-    <p:sldId id="281" r:id="rId25"/>
-    <p:sldId id="280" r:id="rId26"/>
-    <p:sldId id="270" r:id="rId27"/>
-    <p:sldId id="271" r:id="rId28"/>
-    <p:sldId id="287" r:id="rId29"/>
-    <p:sldId id="288" r:id="rId30"/>
-    <p:sldId id="285" r:id="rId31"/>
-    <p:sldId id="282" r:id="rId32"/>
-    <p:sldId id="272" r:id="rId33"/>
-    <p:sldId id="273" r:id="rId34"/>
-    <p:sldId id="264" r:id="rId35"/>
+    <p:sldId id="293" r:id="rId3"/>
+    <p:sldId id="289" r:id="rId4"/>
+    <p:sldId id="261" r:id="rId5"/>
+    <p:sldId id="262" r:id="rId6"/>
+    <p:sldId id="284" r:id="rId7"/>
+    <p:sldId id="259" r:id="rId8"/>
+    <p:sldId id="283" r:id="rId9"/>
+    <p:sldId id="290" r:id="rId10"/>
+    <p:sldId id="263" r:id="rId11"/>
+    <p:sldId id="265" r:id="rId12"/>
+    <p:sldId id="291" r:id="rId13"/>
+    <p:sldId id="266" r:id="rId14"/>
+    <p:sldId id="267" r:id="rId15"/>
+    <p:sldId id="275" r:id="rId16"/>
+    <p:sldId id="268" r:id="rId17"/>
+    <p:sldId id="286" r:id="rId18"/>
+    <p:sldId id="276" r:id="rId19"/>
+    <p:sldId id="277" r:id="rId20"/>
+    <p:sldId id="274" r:id="rId21"/>
+    <p:sldId id="278" r:id="rId22"/>
+    <p:sldId id="279" r:id="rId23"/>
+    <p:sldId id="269" r:id="rId24"/>
+    <p:sldId id="292" r:id="rId25"/>
+    <p:sldId id="281" r:id="rId26"/>
+    <p:sldId id="280" r:id="rId27"/>
+    <p:sldId id="270" r:id="rId28"/>
+    <p:sldId id="271" r:id="rId29"/>
+    <p:sldId id="287" r:id="rId30"/>
+    <p:sldId id="288" r:id="rId31"/>
+    <p:sldId id="285" r:id="rId32"/>
+    <p:sldId id="282" r:id="rId33"/>
+    <p:sldId id="272" r:id="rId34"/>
+    <p:sldId id="273" r:id="rId35"/>
+    <p:sldId id="264" r:id="rId36"/>
   </p:sldIdLst>
   <p:sldSz cx="12192000" cy="6858000"/>
   <p:notesSz cx="6858000" cy="9144000"/>
@@ -248,7 +249,7 @@
           <a:p>
             <a:fld id="{7BAEECA8-D063-486F-AE31-5020270C1449}" type="datetimeFigureOut">
               <a:rPr lang="en-US" smtClean="0"/>
-              <a:t>9/22/2026</a:t>
+              <a:t>10/14/2026</a:t>
             </a:fld>
             <a:endParaRPr lang="en-US"/>
           </a:p>
@@ -453,7 +454,7 @@
           <a:p>
             <a:fld id="{073EEAA7-AFB7-4D13-AC6E-D387B4394DA4}" type="datetimeFigureOut">
               <a:rPr lang="en-IN" smtClean="0"/>
-              <a:t>22-09-2026</a:t>
+              <a:t>14-10-2026</a:t>
             </a:fld>
             <a:endParaRPr lang="en-IN"/>
           </a:p>
@@ -786,7 +787,7 @@
           <a:p>
             <a:fld id="{BE7BD907-10E1-4554-8631-1965B6043C47}" type="slidenum">
               <a:rPr lang="en-IN" smtClean="0"/>
-              <a:t>27</a:t>
+              <a:t>28</a:t>
             </a:fld>
             <a:endParaRPr lang="en-IN"/>
           </a:p>
@@ -894,7 +895,7 @@
           <a:p>
             <a:fld id="{BE7BD907-10E1-4554-8631-1965B6043C47}" type="slidenum">
               <a:rPr lang="en-IN" smtClean="0"/>
-              <a:t>28</a:t>
+              <a:t>29</a:t>
             </a:fld>
             <a:endParaRPr lang="en-IN"/>
           </a:p>
@@ -1002,7 +1003,7 @@
           <a:p>
             <a:fld id="{BE7BD907-10E1-4554-8631-1965B6043C47}" type="slidenum">
               <a:rPr lang="en-IN" smtClean="0"/>
-              <a:t>29</a:t>
+              <a:t>30</a:t>
             </a:fld>
             <a:endParaRPr lang="en-IN"/>
           </a:p>
@@ -1168,7 +1169,7 @@
           <a:p>
             <a:fld id="{6383FAE1-13DE-4511-8C1B-C8AFB720664C}" type="datetimeFigureOut">
               <a:rPr lang="en-US" smtClean="0"/>
-              <a:t>9/22/2026</a:t>
+              <a:t>10/14/2026</a:t>
             </a:fld>
             <a:endParaRPr lang="en-US"/>
           </a:p>
@@ -1366,7 +1367,7 @@
           <a:p>
             <a:fld id="{6383FAE1-13DE-4511-8C1B-C8AFB720664C}" type="datetimeFigureOut">
               <a:rPr lang="en-US" smtClean="0"/>
-              <a:t>9/22/2026</a:t>
+              <a:t>10/14/2026</a:t>
             </a:fld>
             <a:endParaRPr lang="en-US"/>
           </a:p>
@@ -1574,7 +1575,7 @@
           <a:p>
             <a:fld id="{6383FAE1-13DE-4511-8C1B-C8AFB720664C}" type="datetimeFigureOut">
               <a:rPr lang="en-US" smtClean="0"/>
-              <a:t>9/22/2026</a:t>
+              <a:t>10/14/2026</a:t>
             </a:fld>
             <a:endParaRPr lang="en-US"/>
           </a:p>
@@ -1772,7 +1773,7 @@
           <a:p>
             <a:fld id="{6383FAE1-13DE-4511-8C1B-C8AFB720664C}" type="datetimeFigureOut">
               <a:rPr lang="en-US" smtClean="0"/>
-              <a:t>9/22/2026</a:t>
+              <a:t>10/14/2026</a:t>
             </a:fld>
             <a:endParaRPr lang="en-US"/>
           </a:p>
@@ -2047,7 +2048,7 @@
           <a:p>
             <a:fld id="{6383FAE1-13DE-4511-8C1B-C8AFB720664C}" type="datetimeFigureOut">
               <a:rPr lang="en-US" smtClean="0"/>
-              <a:t>9/22/2026</a:t>
+              <a:t>10/14/2026</a:t>
             </a:fld>
             <a:endParaRPr lang="en-US"/>
           </a:p>
@@ -2312,7 +2313,7 @@
           <a:p>
             <a:fld id="{6383FAE1-13DE-4511-8C1B-C8AFB720664C}" type="datetimeFigureOut">
               <a:rPr lang="en-US" smtClean="0"/>
-              <a:t>9/22/2026</a:t>
+              <a:t>10/14/2026</a:t>
             </a:fld>
             <a:endParaRPr lang="en-US"/>
           </a:p>
@@ -2724,7 +2725,7 @@
           <a:p>
             <a:fld id="{6383FAE1-13DE-4511-8C1B-C8AFB720664C}" type="datetimeFigureOut">
               <a:rPr lang="en-US" smtClean="0"/>
-              <a:t>9/22/2026</a:t>
+              <a:t>10/14/2026</a:t>
             </a:fld>
             <a:endParaRPr lang="en-US"/>
           </a:p>
@@ -2865,7 +2866,7 @@
           <a:p>
             <a:fld id="{6383FAE1-13DE-4511-8C1B-C8AFB720664C}" type="datetimeFigureOut">
               <a:rPr lang="en-US" smtClean="0"/>
-              <a:t>9/22/2026</a:t>
+              <a:t>10/14/2026</a:t>
             </a:fld>
             <a:endParaRPr lang="en-US"/>
           </a:p>
@@ -2978,7 +2979,7 @@
           <a:p>
             <a:fld id="{6383FAE1-13DE-4511-8C1B-C8AFB720664C}" type="datetimeFigureOut">
               <a:rPr lang="en-US" smtClean="0"/>
-              <a:t>9/22/2026</a:t>
+              <a:t>10/14/2026</a:t>
             </a:fld>
             <a:endParaRPr lang="en-US"/>
           </a:p>
@@ -3289,7 +3290,7 @@
           <a:p>
             <a:fld id="{6383FAE1-13DE-4511-8C1B-C8AFB720664C}" type="datetimeFigureOut">
               <a:rPr lang="en-US" smtClean="0"/>
-              <a:t>9/22/2026</a:t>
+              <a:t>10/14/2026</a:t>
             </a:fld>
             <a:endParaRPr lang="en-US"/>
           </a:p>
@@ -3580,7 +3581,7 @@
           <a:p>
             <a:fld id="{6383FAE1-13DE-4511-8C1B-C8AFB720664C}" type="datetimeFigureOut">
               <a:rPr lang="en-US" smtClean="0"/>
-              <a:t>9/22/2026</a:t>
+              <a:t>10/14/2026</a:t>
             </a:fld>
             <a:endParaRPr lang="en-US"/>
           </a:p>
@@ -3824,7 +3825,7 @@
           <a:p>
             <a:fld id="{6383FAE1-13DE-4511-8C1B-C8AFB720664C}" type="datetimeFigureOut">
               <a:rPr lang="en-US" smtClean="0"/>
-              <a:t>9/22/2026</a:t>
+              <a:t>10/14/2026</a:t>
             </a:fld>
             <a:endParaRPr lang="en-US"/>
           </a:p>
@@ -4809,6 +4810,245 @@
         <p:cNvPr id="1" name="">
           <a:extLst>
             <a:ext uri="{FF2B5EF4-FFF2-40B4-BE49-F238E27FC236}">
+              <a16:creationId xmlns:a16="http://schemas.microsoft.com/office/drawing/2014/main" id="{06171784-DCE9-DCB5-0C31-7F2F4C208B48}"/>
+            </a:ext>
+          </a:extLst>
+        </p:cNvPr>
+        <p:cNvGrpSpPr/>
+        <p:nvPr/>
+      </p:nvGrpSpPr>
+      <p:grpSpPr>
+        <a:xfrm>
+          <a:off x="0" y="0"/>
+          <a:ext cx="0" cy="0"/>
+          <a:chOff x="0" y="0"/>
+          <a:chExt cx="0" cy="0"/>
+        </a:xfrm>
+      </p:grpSpPr>
+      <p:sp>
+        <p:nvSpPr>
+          <p:cNvPr id="9" name="TextBox 8">
+            <a:extLst>
+              <a:ext uri="{FF2B5EF4-FFF2-40B4-BE49-F238E27FC236}">
+                <a16:creationId xmlns:a16="http://schemas.microsoft.com/office/drawing/2014/main" id="{2BD94085-449A-2646-3ED7-B509E94B3A12}"/>
+              </a:ext>
+            </a:extLst>
+          </p:cNvPr>
+          <p:cNvSpPr txBox="1"/>
+          <p:nvPr/>
+        </p:nvSpPr>
+        <p:spPr>
+          <a:xfrm>
+            <a:off x="292989" y="257187"/>
+            <a:ext cx="9859604" cy="4524315"/>
+          </a:xfrm>
+          <a:prstGeom prst="rect">
+            <a:avLst/>
+          </a:prstGeom>
+          <a:noFill/>
+        </p:spPr>
+        <p:txBody>
+          <a:bodyPr wrap="square" rtlCol="0">
+            <a:spAutoFit/>
+          </a:bodyPr>
+          <a:lstStyle/>
+          <a:p>
+            <a:r>
+              <a:rPr lang="en-US" sz="2400" b="1" dirty="0">
+                <a:solidFill>
+                  <a:schemeClr val="accent6">
+                    <a:lumMod val="60000"/>
+                    <a:lumOff val="40000"/>
+                  </a:schemeClr>
+                </a:solidFill>
+              </a:rPr>
+              <a:t>3) Prompt Clarity</a:t>
+            </a:r>
+          </a:p>
+          <a:p>
+            <a:endParaRPr lang="en-US" sz="2400" b="1" dirty="0">
+              <a:solidFill>
+                <a:schemeClr val="accent6">
+                  <a:lumMod val="60000"/>
+                  <a:lumOff val="40000"/>
+                </a:schemeClr>
+              </a:solidFill>
+            </a:endParaRPr>
+          </a:p>
+          <a:p>
+            <a:r>
+              <a:rPr lang="en-US" sz="2400" dirty="0">
+                <a:solidFill>
+                  <a:schemeClr val="accent6">
+                    <a:lumMod val="60000"/>
+                    <a:lumOff val="40000"/>
+                  </a:schemeClr>
+                </a:solidFill>
+              </a:rPr>
+              <a:t>Bad tokenization can change meaning.</a:t>
+            </a:r>
+          </a:p>
+          <a:p>
+            <a:endParaRPr lang="en-US" sz="2400" dirty="0">
+              <a:solidFill>
+                <a:schemeClr val="accent6">
+                  <a:lumMod val="60000"/>
+                  <a:lumOff val="40000"/>
+                </a:schemeClr>
+              </a:solidFill>
+            </a:endParaRPr>
+          </a:p>
+          <a:p>
+            <a:r>
+              <a:rPr lang="en-US" sz="2400" dirty="0">
+                <a:solidFill>
+                  <a:schemeClr val="accent6">
+                    <a:lumMod val="60000"/>
+                    <a:lumOff val="40000"/>
+                  </a:schemeClr>
+                </a:solidFill>
+              </a:rPr>
+              <a:t>Example:</a:t>
+            </a:r>
+          </a:p>
+          <a:p>
+            <a:pPr marL="342900" indent="-342900">
+              <a:buFont typeface="Arial" panose="020B0604020202020204" pitchFamily="34" charset="0"/>
+              <a:buChar char="•"/>
+            </a:pPr>
+            <a:r>
+              <a:rPr lang="en-US" sz="2400" dirty="0">
+                <a:solidFill>
+                  <a:schemeClr val="accent6">
+                    <a:lumMod val="60000"/>
+                    <a:lumOff val="40000"/>
+                  </a:schemeClr>
+                </a:solidFill>
+              </a:rPr>
+              <a:t>Let’s eat grandma</a:t>
+            </a:r>
+          </a:p>
+          <a:p>
+            <a:pPr marL="342900" indent="-342900">
+              <a:buFont typeface="Arial" panose="020B0604020202020204" pitchFamily="34" charset="0"/>
+              <a:buChar char="•"/>
+            </a:pPr>
+            <a:r>
+              <a:rPr lang="en-US" sz="2400" dirty="0">
+                <a:solidFill>
+                  <a:schemeClr val="accent6">
+                    <a:lumMod val="60000"/>
+                    <a:lumOff val="40000"/>
+                  </a:schemeClr>
+                </a:solidFill>
+              </a:rPr>
+              <a:t>Let’s eat</a:t>
+            </a:r>
+            <a:r>
+              <a:rPr lang="en-US" sz="2400" dirty="0">
+                <a:solidFill>
+                  <a:schemeClr val="accent4">
+                    <a:lumMod val="60000"/>
+                    <a:lumOff val="40000"/>
+                  </a:schemeClr>
+                </a:solidFill>
+              </a:rPr>
+              <a:t>,</a:t>
+            </a:r>
+            <a:r>
+              <a:rPr lang="en-US" sz="2400" dirty="0">
+                <a:solidFill>
+                  <a:schemeClr val="accent6">
+                    <a:lumMod val="60000"/>
+                    <a:lumOff val="40000"/>
+                  </a:schemeClr>
+                </a:solidFill>
+              </a:rPr>
+              <a:t> grandma</a:t>
+            </a:r>
+          </a:p>
+          <a:p>
+            <a:endParaRPr lang="en-US" sz="2400" dirty="0">
+              <a:solidFill>
+                <a:schemeClr val="accent6">
+                  <a:lumMod val="60000"/>
+                  <a:lumOff val="40000"/>
+                </a:schemeClr>
+              </a:solidFill>
+            </a:endParaRPr>
+          </a:p>
+          <a:p>
+            <a:r>
+              <a:rPr lang="en-US" sz="2400" dirty="0">
+                <a:solidFill>
+                  <a:schemeClr val="accent6">
+                    <a:lumMod val="60000"/>
+                    <a:lumOff val="40000"/>
+                  </a:schemeClr>
+                </a:solidFill>
+              </a:rPr>
+              <a:t>Comma changes tokens → meaning changes</a:t>
+            </a:r>
+          </a:p>
+          <a:p>
+            <a:endParaRPr lang="en-US" sz="2400" dirty="0">
+              <a:solidFill>
+                <a:schemeClr val="accent6">
+                  <a:lumMod val="60000"/>
+                  <a:lumOff val="40000"/>
+                </a:schemeClr>
+              </a:solidFill>
+            </a:endParaRPr>
+          </a:p>
+          <a:p>
+            <a:r>
+              <a:rPr lang="en-US" sz="2400" dirty="0">
+                <a:solidFill>
+                  <a:schemeClr val="accent6">
+                    <a:lumMod val="60000"/>
+                    <a:lumOff val="40000"/>
+                  </a:schemeClr>
+                </a:solidFill>
+              </a:rPr>
+              <a:t>In first case      : Tokens could be [234, 12, 0,   34]</a:t>
+            </a:r>
+          </a:p>
+          <a:p>
+            <a:r>
+              <a:rPr lang="en-US" sz="2400" dirty="0">
+                <a:solidFill>
+                  <a:schemeClr val="accent6">
+                    <a:lumMod val="60000"/>
+                    <a:lumOff val="40000"/>
+                  </a:schemeClr>
+                </a:solidFill>
+              </a:rPr>
+              <a:t>In second case: Tokens could be [215, 12, 6, 37, 892]</a:t>
+            </a:r>
+          </a:p>
+        </p:txBody>
+      </p:sp>
+    </p:spTree>
+    <p:extLst>
+      <p:ext uri="{BB962C8B-B14F-4D97-AF65-F5344CB8AC3E}">
+        <p14:creationId xmlns:p14="http://schemas.microsoft.com/office/powerpoint/2010/main" val="21276717"/>
+      </p:ext>
+    </p:extLst>
+  </p:cSld>
+  <p:clrMapOvr>
+    <a:masterClrMapping/>
+  </p:clrMapOvr>
+</p:sld>
+</file>
+
+<file path=ppt/slides/slide11.xml><?xml version="1.0" encoding="utf-8"?>
+<p:sld xmlns:a="http://schemas.openxmlformats.org/drawingml/2006/main" xmlns:r="http://schemas.openxmlformats.org/officeDocument/2006/relationships" xmlns:p="http://schemas.openxmlformats.org/presentationml/2006/main">
+  <p:cSld>
+    <p:spTree>
+      <p:nvGrpSpPr>
+        <p:cNvPr id="1" name="">
+          <a:extLst>
+            <a:ext uri="{FF2B5EF4-FFF2-40B4-BE49-F238E27FC236}">
               <a16:creationId xmlns:a16="http://schemas.microsoft.com/office/drawing/2014/main" id="{CB37646A-C09A-9147-0AE2-A7C2894BAB11}"/>
             </a:ext>
           </a:extLst>
@@ -4880,7 +5120,7 @@
 </p:sld>
 </file>
 
-<file path=ppt/slides/slide11.xml><?xml version="1.0" encoding="utf-8"?>
+<file path=ppt/slides/slide12.xml><?xml version="1.0" encoding="utf-8"?>
 <p:sld xmlns:a="http://schemas.openxmlformats.org/drawingml/2006/main" xmlns:r="http://schemas.openxmlformats.org/officeDocument/2006/relationships" xmlns:p="http://schemas.openxmlformats.org/presentationml/2006/main">
   <p:cSld>
     <p:spTree>
@@ -5137,7 +5377,7 @@
 </p:sld>
 </file>
 
-<file path=ppt/slides/slide12.xml><?xml version="1.0" encoding="utf-8"?>
+<file path=ppt/slides/slide13.xml><?xml version="1.0" encoding="utf-8"?>
 <p:sld xmlns:a="http://schemas.openxmlformats.org/drawingml/2006/main" xmlns:r="http://schemas.openxmlformats.org/officeDocument/2006/relationships" xmlns:p="http://schemas.openxmlformats.org/presentationml/2006/main">
   <p:cSld>
     <p:spTree>
@@ -5580,7 +5820,7 @@
 </p:sld>
 </file>
 
-<file path=ppt/slides/slide13.xml><?xml version="1.0" encoding="utf-8"?>
+<file path=ppt/slides/slide14.xml><?xml version="1.0" encoding="utf-8"?>
 <p:sld xmlns:a="http://schemas.openxmlformats.org/drawingml/2006/main" xmlns:r="http://schemas.openxmlformats.org/officeDocument/2006/relationships" xmlns:p="http://schemas.openxmlformats.org/presentationml/2006/main">
   <p:cSld>
     <p:spTree>
@@ -5862,8 +6102,8 @@
           </a:p>
         </p:txBody>
       </p:sp>
-      <mc:AlternateContent xmlns:mc="http://schemas.openxmlformats.org/markup-compatibility/2006">
-        <mc:Choice xmlns:p14="http://schemas.microsoft.com/office/powerpoint/2010/main" Requires="p14">
+      <mc:AlternateContent xmlns:mc="http://schemas.openxmlformats.org/markup-compatibility/2006" xmlns:p14="http://schemas.microsoft.com/office/powerpoint/2010/main">
+        <mc:Choice Requires="p14">
           <p:contentPart p14:bwMode="auto" r:id="rId2">
             <p14:nvContentPartPr>
               <p14:cNvPr id="5" name="Ink 4">
@@ -5882,7 +6122,7 @@
             </p14:xfrm>
           </p:contentPart>
         </mc:Choice>
-        <mc:Fallback>
+        <mc:Fallback xmlns="">
           <p:pic>
             <p:nvPicPr>
               <p:cNvPr id="5" name="Ink 4">
@@ -5926,7 +6166,7 @@
 </p:sld>
 </file>
 
-<file path=ppt/slides/slide14.xml><?xml version="1.0" encoding="utf-8"?>
+<file path=ppt/slides/slide15.xml><?xml version="1.0" encoding="utf-8"?>
 <p:sld xmlns:a="http://schemas.openxmlformats.org/drawingml/2006/main" xmlns:r="http://schemas.openxmlformats.org/officeDocument/2006/relationships" xmlns:p="http://schemas.openxmlformats.org/presentationml/2006/main">
   <p:cSld>
     <p:spTree>
@@ -6205,7 +6445,7 @@
 </p:sld>
 </file>
 
-<file path=ppt/slides/slide15.xml><?xml version="1.0" encoding="utf-8"?>
+<file path=ppt/slides/slide16.xml><?xml version="1.0" encoding="utf-8"?>
 <p:sld xmlns:a="http://schemas.openxmlformats.org/drawingml/2006/main" xmlns:r="http://schemas.openxmlformats.org/officeDocument/2006/relationships" xmlns:p="http://schemas.openxmlformats.org/presentationml/2006/main">
   <p:cSld>
     <p:spTree>
@@ -6464,7 +6704,7 @@
 </p:sld>
 </file>
 
-<file path=ppt/slides/slide16.xml><?xml version="1.0" encoding="utf-8"?>
+<file path=ppt/slides/slide17.xml><?xml version="1.0" encoding="utf-8"?>
 <p:sld xmlns:a="http://schemas.openxmlformats.org/drawingml/2006/main" xmlns:r="http://schemas.openxmlformats.org/officeDocument/2006/relationships" xmlns:p="http://schemas.openxmlformats.org/presentationml/2006/main">
   <p:cSld>
     <p:spTree>
@@ -6831,7 +7071,7 @@
 </p:sld>
 </file>
 
-<file path=ppt/slides/slide17.xml><?xml version="1.0" encoding="utf-8"?>
+<file path=ppt/slides/slide18.xml><?xml version="1.0" encoding="utf-8"?>
 <p:sld xmlns:a="http://schemas.openxmlformats.org/drawingml/2006/main" xmlns:r="http://schemas.openxmlformats.org/officeDocument/2006/relationships" xmlns:p="http://schemas.openxmlformats.org/presentationml/2006/main">
   <p:cSld>
     <p:spTree>
@@ -6939,7 +7179,7 @@
 </p:sld>
 </file>
 
-<file path=ppt/slides/slide18.xml><?xml version="1.0" encoding="utf-8"?>
+<file path=ppt/slides/slide19.xml><?xml version="1.0" encoding="utf-8"?>
 <p:sld xmlns:a="http://schemas.openxmlformats.org/drawingml/2006/main" xmlns:r="http://schemas.openxmlformats.org/officeDocument/2006/relationships" xmlns:p="http://schemas.openxmlformats.org/presentationml/2006/main">
   <p:cSld>
     <p:spTree>
@@ -7077,7 +7317,413 @@
 </p:sld>
 </file>
 
-<file path=ppt/slides/slide19.xml><?xml version="1.0" encoding="utf-8"?>
+<file path=ppt/slides/slide2.xml><?xml version="1.0" encoding="utf-8"?>
+<p:sld xmlns:a="http://schemas.openxmlformats.org/drawingml/2006/main" xmlns:r="http://schemas.openxmlformats.org/officeDocument/2006/relationships" xmlns:p="http://schemas.openxmlformats.org/presentationml/2006/main">
+  <p:cSld>
+    <p:spTree>
+      <p:nvGrpSpPr>
+        <p:cNvPr id="1" name="">
+          <a:extLst>
+            <a:ext uri="{FF2B5EF4-FFF2-40B4-BE49-F238E27FC236}">
+              <a16:creationId xmlns:a16="http://schemas.microsoft.com/office/drawing/2014/main" id="{8E832058-02CD-D02E-638E-43BBE6F29102}"/>
+            </a:ext>
+          </a:extLst>
+        </p:cNvPr>
+        <p:cNvGrpSpPr/>
+        <p:nvPr/>
+      </p:nvGrpSpPr>
+      <p:grpSpPr>
+        <a:xfrm>
+          <a:off x="0" y="0"/>
+          <a:ext cx="0" cy="0"/>
+          <a:chOff x="0" y="0"/>
+          <a:chExt cx="0" cy="0"/>
+        </a:xfrm>
+      </p:grpSpPr>
+      <p:sp>
+        <p:nvSpPr>
+          <p:cNvPr id="118" name="TextBox 117">
+            <a:extLst>
+              <a:ext uri="{FF2B5EF4-FFF2-40B4-BE49-F238E27FC236}">
+                <a16:creationId xmlns:a16="http://schemas.microsoft.com/office/drawing/2014/main" id="{5222DD9C-EBA0-B2B0-C888-2B414F30A020}"/>
+              </a:ext>
+            </a:extLst>
+          </p:cNvPr>
+          <p:cNvSpPr txBox="1"/>
+          <p:nvPr/>
+        </p:nvSpPr>
+        <p:spPr>
+          <a:xfrm>
+            <a:off x="134565" y="197669"/>
+            <a:ext cx="11842946" cy="3693319"/>
+          </a:xfrm>
+          <a:prstGeom prst="rect">
+            <a:avLst/>
+          </a:prstGeom>
+          <a:noFill/>
+        </p:spPr>
+        <p:txBody>
+          <a:bodyPr wrap="square">
+            <a:spAutoFit/>
+          </a:bodyPr>
+          <a:lstStyle/>
+          <a:p>
+            <a:pPr>
+              <a:buNone/>
+            </a:pPr>
+            <a:r>
+              <a:rPr lang="en-US" sz="2400">
+                <a:solidFill>
+                  <a:schemeClr val="accent6">
+                    <a:lumMod val="60000"/>
+                    <a:lumOff val="40000"/>
+                  </a:schemeClr>
+                </a:solidFill>
+              </a:rPr>
+              <a:t>Understanding why prompt matters through a simple example</a:t>
+            </a:r>
+          </a:p>
+          <a:p>
+            <a:pPr>
+              <a:buNone/>
+            </a:pPr>
+            <a:r>
+              <a:rPr lang="en-US" sz="2400" b="1" u="sng">
+                <a:solidFill>
+                  <a:schemeClr val="accent6">
+                    <a:lumMod val="60000"/>
+                    <a:lumOff val="40000"/>
+                  </a:schemeClr>
+                </a:solidFill>
+              </a:rPr>
+              <a:t>Prompt:</a:t>
+            </a:r>
+          </a:p>
+          <a:p>
+            <a:pPr>
+              <a:buNone/>
+            </a:pPr>
+            <a:r>
+              <a:rPr lang="en-US" sz="2400">
+                <a:solidFill>
+                  <a:schemeClr val="accent6">
+                    <a:lumMod val="60000"/>
+                    <a:lumOff val="40000"/>
+                  </a:schemeClr>
+                </a:solidFill>
+              </a:rPr>
+              <a:t>How do leaders choose AI Vendors.</a:t>
+            </a:r>
+          </a:p>
+          <a:p>
+            <a:pPr>
+              <a:buNone/>
+            </a:pPr>
+            <a:endParaRPr lang="en-US" sz="2400">
+              <a:solidFill>
+                <a:schemeClr val="accent6">
+                  <a:lumMod val="60000"/>
+                  <a:lumOff val="40000"/>
+                </a:schemeClr>
+              </a:solidFill>
+            </a:endParaRPr>
+          </a:p>
+          <a:p>
+            <a:pPr>
+              <a:buNone/>
+            </a:pPr>
+            <a:r>
+              <a:rPr lang="en-US" sz="2400" b="1" u="sng">
+                <a:solidFill>
+                  <a:schemeClr val="accent6">
+                    <a:lumMod val="60000"/>
+                    <a:lumOff val="40000"/>
+                  </a:schemeClr>
+                </a:solidFill>
+              </a:rPr>
+              <a:t>Response can be 5 different types answering the above question with </a:t>
+            </a:r>
+            <a:r>
+              <a:rPr lang="en-US" sz="2400" b="1" u="sng">
+                <a:solidFill>
+                  <a:schemeClr val="accent4">
+                    <a:lumMod val="60000"/>
+                    <a:lumOff val="40000"/>
+                  </a:schemeClr>
+                </a:solidFill>
+              </a:rPr>
+              <a:t>“same”</a:t>
+            </a:r>
+            <a:r>
+              <a:rPr lang="en-US" sz="2400" b="1" u="sng">
+                <a:solidFill>
+                  <a:schemeClr val="accent6">
+                    <a:lumMod val="60000"/>
+                    <a:lumOff val="40000"/>
+                  </a:schemeClr>
+                </a:solidFill>
+              </a:rPr>
+              <a:t> content</a:t>
+            </a:r>
+          </a:p>
+          <a:p>
+            <a:pPr>
+              <a:buNone/>
+            </a:pPr>
+            <a:endParaRPr lang="en-US" sz="2400" b="1" u="sng">
+              <a:solidFill>
+                <a:schemeClr val="accent6">
+                  <a:lumMod val="60000"/>
+                  <a:lumOff val="40000"/>
+                </a:schemeClr>
+              </a:solidFill>
+            </a:endParaRPr>
+          </a:p>
+          <a:p>
+            <a:pPr marL="342900" indent="-342900">
+              <a:buFont typeface="+mj-lt"/>
+              <a:buAutoNum type="arabicPeriod"/>
+            </a:pPr>
+            <a:r>
+              <a:rPr lang="en-US">
+                <a:solidFill>
+                  <a:schemeClr val="accent6">
+                    <a:lumMod val="60000"/>
+                    <a:lumOff val="40000"/>
+                  </a:schemeClr>
+                </a:solidFill>
+              </a:rPr>
+              <a:t>Leaders must be able </a:t>
+            </a:r>
+            <a:r>
+              <a:rPr lang="en-US" u="sng">
+                <a:solidFill>
+                  <a:schemeClr val="accent6">
+                    <a:lumMod val="60000"/>
+                    <a:lumOff val="40000"/>
+                  </a:schemeClr>
+                </a:solidFill>
+              </a:rPr>
+              <a:t>to cut through marketing hype</a:t>
+            </a:r>
+            <a:r>
+              <a:rPr lang="en-US">
+                <a:solidFill>
+                  <a:schemeClr val="accent6">
+                    <a:lumMod val="60000"/>
+                    <a:lumOff val="40000"/>
+                  </a:schemeClr>
+                </a:solidFill>
+              </a:rPr>
+              <a:t> to evaluate the technical foundations of enterprise agent platforms.</a:t>
+            </a:r>
+          </a:p>
+          <a:p>
+            <a:pPr marL="342900" indent="-342900">
+              <a:buFont typeface="+mj-lt"/>
+              <a:buAutoNum type="arabicPeriod"/>
+            </a:pPr>
+            <a:r>
+              <a:rPr lang="en-US">
+                <a:solidFill>
+                  <a:schemeClr val="accent6">
+                    <a:lumMod val="60000"/>
+                    <a:lumOff val="40000"/>
+                  </a:schemeClr>
+                </a:solidFill>
+              </a:rPr>
+              <a:t>Leaders must be able                                                        </a:t>
+            </a:r>
+            <a:r>
+              <a:rPr lang="en-US" u="sng">
+                <a:solidFill>
+                  <a:schemeClr val="accent6">
+                    <a:lumMod val="60000"/>
+                    <a:lumOff val="40000"/>
+                  </a:schemeClr>
+                </a:solidFill>
+              </a:rPr>
+              <a:t>to</a:t>
+            </a:r>
+            <a:r>
+              <a:rPr lang="en-US">
+                <a:solidFill>
+                  <a:schemeClr val="accent6">
+                    <a:lumMod val="60000"/>
+                    <a:lumOff val="40000"/>
+                  </a:schemeClr>
+                </a:solidFill>
+              </a:rPr>
+              <a:t> evaluate the technical foundations of enterprise agent platforms.</a:t>
+            </a:r>
+          </a:p>
+          <a:p>
+            <a:pPr marL="342900" indent="-342900">
+              <a:buFont typeface="+mj-lt"/>
+              <a:buAutoNum type="arabicPeriod"/>
+            </a:pPr>
+            <a:r>
+              <a:rPr lang="en-US">
+                <a:solidFill>
+                  <a:schemeClr val="accent6">
+                    <a:lumMod val="60000"/>
+                    <a:lumOff val="40000"/>
+                  </a:schemeClr>
+                </a:solidFill>
+              </a:rPr>
+              <a:t>Leaders must                                                                           </a:t>
+            </a:r>
+            <a:r>
+              <a:rPr lang="en-US" u="sng">
+                <a:solidFill>
+                  <a:schemeClr val="accent6">
+                    <a:lumMod val="60000"/>
+                    <a:lumOff val="40000"/>
+                  </a:schemeClr>
+                </a:solidFill>
+              </a:rPr>
+              <a:t>evaluate the</a:t>
+            </a:r>
+            <a:r>
+              <a:rPr lang="en-US">
+                <a:solidFill>
+                  <a:schemeClr val="accent6">
+                    <a:lumMod val="60000"/>
+                    <a:lumOff val="40000"/>
+                  </a:schemeClr>
+                </a:solidFill>
+              </a:rPr>
+              <a:t> technical foundations of enterprise agent platforms.</a:t>
+            </a:r>
+          </a:p>
+          <a:p>
+            <a:pPr marL="342900" indent="-342900">
+              <a:buFont typeface="+mj-lt"/>
+              <a:buAutoNum type="arabicPeriod"/>
+            </a:pPr>
+            <a:r>
+              <a:rPr lang="en-US">
+                <a:solidFill>
+                  <a:schemeClr val="accent6">
+                    <a:lumMod val="60000"/>
+                    <a:lumOff val="40000"/>
+                  </a:schemeClr>
+                </a:solidFill>
+              </a:rPr>
+              <a:t>                                                                                                                         </a:t>
+            </a:r>
+            <a:r>
+              <a:rPr lang="en-US" u="sng">
+                <a:solidFill>
+                  <a:schemeClr val="accent6">
+                    <a:lumMod val="60000"/>
+                    <a:lumOff val="40000"/>
+                  </a:schemeClr>
+                </a:solidFill>
+              </a:rPr>
+              <a:t>Technical</a:t>
+            </a:r>
+            <a:r>
+              <a:rPr lang="en-US">
+                <a:solidFill>
+                  <a:schemeClr val="accent6">
+                    <a:lumMod val="60000"/>
+                    <a:lumOff val="40000"/>
+                  </a:schemeClr>
+                </a:solidFill>
+              </a:rPr>
+              <a:t> foundations of enterprise agent platforms.</a:t>
+            </a:r>
+          </a:p>
+          <a:p>
+            <a:pPr marL="342900" indent="-342900">
+              <a:buFont typeface="+mj-lt"/>
+              <a:buAutoNum type="arabicPeriod"/>
+            </a:pPr>
+            <a:r>
+              <a:rPr lang="en-US">
+                <a:solidFill>
+                  <a:schemeClr val="accent6">
+                    <a:lumMod val="60000"/>
+                    <a:lumOff val="40000"/>
+                  </a:schemeClr>
+                </a:solidFill>
+              </a:rPr>
+              <a:t>                                                                                                                                          Foundations of enterprise agent platforms.</a:t>
+            </a:r>
+          </a:p>
+        </p:txBody>
+      </p:sp>
+      <p:sp>
+        <p:nvSpPr>
+          <p:cNvPr id="7" name="TextBox 6">
+            <a:extLst>
+              <a:ext uri="{FF2B5EF4-FFF2-40B4-BE49-F238E27FC236}">
+                <a16:creationId xmlns:a16="http://schemas.microsoft.com/office/drawing/2014/main" id="{E87F972B-45B3-288C-BF4F-846F01419AA3}"/>
+              </a:ext>
+            </a:extLst>
+          </p:cNvPr>
+          <p:cNvSpPr txBox="1"/>
+          <p:nvPr/>
+        </p:nvSpPr>
+        <p:spPr>
+          <a:xfrm>
+            <a:off x="1857022" y="5684545"/>
+            <a:ext cx="6197600" cy="830997"/>
+          </a:xfrm>
+          <a:prstGeom prst="rect">
+            <a:avLst/>
+          </a:prstGeom>
+          <a:noFill/>
+        </p:spPr>
+        <p:txBody>
+          <a:bodyPr wrap="square">
+            <a:spAutoFit/>
+          </a:bodyPr>
+          <a:lstStyle/>
+          <a:p>
+            <a:r>
+              <a:rPr lang="en-US" sz="2400">
+                <a:solidFill>
+                  <a:schemeClr val="accent6">
+                    <a:lumMod val="60000"/>
+                    <a:lumOff val="40000"/>
+                  </a:schemeClr>
+                </a:solidFill>
+              </a:rPr>
+              <a:t>With prompting, we control the output of LLM.</a:t>
+            </a:r>
+          </a:p>
+          <a:p>
+            <a:r>
+              <a:rPr lang="en-US" sz="2400">
+                <a:solidFill>
+                  <a:schemeClr val="accent6">
+                    <a:lumMod val="60000"/>
+                    <a:lumOff val="40000"/>
+                  </a:schemeClr>
+                </a:solidFill>
+              </a:rPr>
+              <a:t>We can ask it to be concise</a:t>
+            </a:r>
+            <a:endParaRPr lang="en-IN"/>
+          </a:p>
+        </p:txBody>
+      </p:sp>
+    </p:spTree>
+    <p:extLst>
+      <p:ext uri="{BB962C8B-B14F-4D97-AF65-F5344CB8AC3E}">
+        <p14:creationId xmlns:p14="http://schemas.microsoft.com/office/powerpoint/2010/main" val="2545992763"/>
+      </p:ext>
+    </p:extLst>
+  </p:cSld>
+  <p:clrMapOvr>
+    <a:masterClrMapping/>
+  </p:clrMapOvr>
+</p:sld>
+</file>
+
+<file path=ppt/slides/slide20.xml><?xml version="1.0" encoding="utf-8"?>
 <p:sld xmlns:a="http://schemas.openxmlformats.org/drawingml/2006/main" xmlns:r="http://schemas.openxmlformats.org/officeDocument/2006/relationships" xmlns:p="http://schemas.openxmlformats.org/presentationml/2006/main">
   <p:cSld>
     <p:spTree>
@@ -7275,7 +7921,2247 @@
 </p:sld>
 </file>
 
-<file path=ppt/slides/slide2.xml><?xml version="1.0" encoding="utf-8"?>
+<file path=ppt/slides/slide21.xml><?xml version="1.0" encoding="utf-8"?>
+<p:sld xmlns:a="http://schemas.openxmlformats.org/drawingml/2006/main" xmlns:r="http://schemas.openxmlformats.org/officeDocument/2006/relationships" xmlns:p="http://schemas.openxmlformats.org/presentationml/2006/main">
+  <p:cSld>
+    <p:spTree>
+      <p:nvGrpSpPr>
+        <p:cNvPr id="1" name="">
+          <a:extLst>
+            <a:ext uri="{FF2B5EF4-FFF2-40B4-BE49-F238E27FC236}">
+              <a16:creationId xmlns:a16="http://schemas.microsoft.com/office/drawing/2014/main" id="{7BE7EC01-868E-51D5-AFC2-04601CBF63F3}"/>
+            </a:ext>
+          </a:extLst>
+        </p:cNvPr>
+        <p:cNvGrpSpPr/>
+        <p:nvPr/>
+      </p:nvGrpSpPr>
+      <p:grpSpPr>
+        <a:xfrm>
+          <a:off x="0" y="0"/>
+          <a:ext cx="0" cy="0"/>
+          <a:chOff x="0" y="0"/>
+          <a:chExt cx="0" cy="0"/>
+        </a:xfrm>
+      </p:grpSpPr>
+      <p:sp>
+        <p:nvSpPr>
+          <p:cNvPr id="9" name="TextBox 8">
+            <a:extLst>
+              <a:ext uri="{FF2B5EF4-FFF2-40B4-BE49-F238E27FC236}">
+                <a16:creationId xmlns:a16="http://schemas.microsoft.com/office/drawing/2014/main" id="{F6DE7F71-4BCB-3293-30E2-B234F9E82116}"/>
+              </a:ext>
+            </a:extLst>
+          </p:cNvPr>
+          <p:cNvSpPr txBox="1"/>
+          <p:nvPr/>
+        </p:nvSpPr>
+        <p:spPr>
+          <a:xfrm>
+            <a:off x="592087" y="123858"/>
+            <a:ext cx="9859604" cy="523220"/>
+          </a:xfrm>
+          <a:prstGeom prst="rect">
+            <a:avLst/>
+          </a:prstGeom>
+          <a:noFill/>
+        </p:spPr>
+        <p:txBody>
+          <a:bodyPr wrap="square" rtlCol="0">
+            <a:spAutoFit/>
+          </a:bodyPr>
+          <a:lstStyle/>
+          <a:p>
+            <a:pPr algn="ctr"/>
+            <a:r>
+              <a:rPr lang="en-US" sz="2800" dirty="0">
+                <a:solidFill>
+                  <a:schemeClr val="accent6">
+                    <a:lumMod val="60000"/>
+                    <a:lumOff val="40000"/>
+                  </a:schemeClr>
+                </a:solidFill>
+              </a:rPr>
+              <a:t>Hallucinations – Why AI Lies &amp; How to Stop It</a:t>
+            </a:r>
+          </a:p>
+        </p:txBody>
+      </p:sp>
+      <p:sp>
+        <p:nvSpPr>
+          <p:cNvPr id="3" name="TextBox 2">
+            <a:extLst>
+              <a:ext uri="{FF2B5EF4-FFF2-40B4-BE49-F238E27FC236}">
+                <a16:creationId xmlns:a16="http://schemas.microsoft.com/office/drawing/2014/main" id="{6141AFE8-D07E-2ABA-986F-EDCAE0FC3DA3}"/>
+              </a:ext>
+            </a:extLst>
+          </p:cNvPr>
+          <p:cNvSpPr txBox="1"/>
+          <p:nvPr/>
+        </p:nvSpPr>
+        <p:spPr>
+          <a:xfrm>
+            <a:off x="334296" y="1305597"/>
+            <a:ext cx="10336751" cy="3785652"/>
+          </a:xfrm>
+          <a:prstGeom prst="rect">
+            <a:avLst/>
+          </a:prstGeom>
+          <a:noFill/>
+        </p:spPr>
+        <p:txBody>
+          <a:bodyPr wrap="square">
+            <a:spAutoFit/>
+          </a:bodyPr>
+          <a:lstStyle/>
+          <a:p>
+            <a:r>
+              <a:rPr lang="en-US" sz="2400" b="1" dirty="0">
+                <a:solidFill>
+                  <a:schemeClr val="accent6">
+                    <a:lumMod val="60000"/>
+                    <a:lumOff val="40000"/>
+                  </a:schemeClr>
+                </a:solidFill>
+              </a:rPr>
+              <a:t>Role Prompting</a:t>
+            </a:r>
+          </a:p>
+          <a:p>
+            <a:endParaRPr lang="en-US" sz="2400" b="1" dirty="0">
+              <a:solidFill>
+                <a:schemeClr val="accent6">
+                  <a:lumMod val="60000"/>
+                  <a:lumOff val="40000"/>
+                </a:schemeClr>
+              </a:solidFill>
+            </a:endParaRPr>
+          </a:p>
+          <a:p>
+            <a:r>
+              <a:rPr lang="en-US" sz="2400" dirty="0">
+                <a:solidFill>
+                  <a:schemeClr val="accent6">
+                    <a:lumMod val="60000"/>
+                    <a:lumOff val="40000"/>
+                  </a:schemeClr>
+                </a:solidFill>
+              </a:rPr>
+              <a:t>The "</a:t>
+            </a:r>
+            <a:r>
+              <a:rPr lang="en-US" sz="2400" b="1" i="1" dirty="0">
+                <a:solidFill>
+                  <a:schemeClr val="accent6">
+                    <a:lumMod val="60000"/>
+                    <a:lumOff val="40000"/>
+                  </a:schemeClr>
+                </a:solidFill>
+              </a:rPr>
+              <a:t>Generic</a:t>
+            </a:r>
+            <a:r>
+              <a:rPr lang="en-US" sz="2400" dirty="0">
+                <a:solidFill>
+                  <a:schemeClr val="accent6">
+                    <a:lumMod val="60000"/>
+                    <a:lumOff val="40000"/>
+                  </a:schemeClr>
+                </a:solidFill>
+              </a:rPr>
+              <a:t>" Prompt (High Hallucination Risk)</a:t>
+            </a:r>
+          </a:p>
+          <a:p>
+            <a:endParaRPr lang="en-US" sz="2400" dirty="0">
+              <a:solidFill>
+                <a:schemeClr val="accent6">
+                  <a:lumMod val="60000"/>
+                  <a:lumOff val="40000"/>
+                </a:schemeClr>
+              </a:solidFill>
+            </a:endParaRPr>
+          </a:p>
+          <a:p>
+            <a:r>
+              <a:rPr lang="en-US" sz="2400" dirty="0">
+                <a:solidFill>
+                  <a:schemeClr val="accent6">
+                    <a:lumMod val="60000"/>
+                    <a:lumOff val="40000"/>
+                  </a:schemeClr>
+                </a:solidFill>
+              </a:rPr>
+              <a:t>Bad Prompt: </a:t>
+            </a:r>
+            <a:r>
+              <a:rPr lang="en-US" sz="2400" dirty="0">
+                <a:solidFill>
+                  <a:schemeClr val="accent4">
+                    <a:lumMod val="60000"/>
+                    <a:lumOff val="40000"/>
+                  </a:schemeClr>
+                </a:solidFill>
+              </a:rPr>
+              <a:t>"What should I do if my heart is racing?“</a:t>
+            </a:r>
+          </a:p>
+          <a:p>
+            <a:endParaRPr lang="en-US" sz="2400" dirty="0">
+              <a:solidFill>
+                <a:schemeClr val="accent6">
+                  <a:lumMod val="60000"/>
+                  <a:lumOff val="40000"/>
+                </a:schemeClr>
+              </a:solidFill>
+            </a:endParaRPr>
+          </a:p>
+          <a:p>
+            <a:r>
+              <a:rPr lang="en-US" sz="2400" dirty="0">
+                <a:solidFill>
+                  <a:schemeClr val="accent6">
+                    <a:lumMod val="60000"/>
+                    <a:lumOff val="40000"/>
+                  </a:schemeClr>
+                </a:solidFill>
+              </a:rPr>
+              <a:t>Risk: The AI might give overly cautious, irrelevant, or dangerously vague advice because it's pulling from its entire training set—which includes forums, blog posts, and fiction.</a:t>
+            </a:r>
+          </a:p>
+          <a:p>
+            <a:r>
+              <a:rPr lang="en-US" sz="2400" dirty="0">
+                <a:solidFill>
+                  <a:schemeClr val="accent6">
+                    <a:lumMod val="60000"/>
+                    <a:lumOff val="40000"/>
+                  </a:schemeClr>
+                </a:solidFill>
+              </a:rPr>
+              <a:t> </a:t>
+            </a:r>
+          </a:p>
+        </p:txBody>
+      </p:sp>
+    </p:spTree>
+    <p:extLst>
+      <p:ext uri="{BB962C8B-B14F-4D97-AF65-F5344CB8AC3E}">
+        <p14:creationId xmlns:p14="http://schemas.microsoft.com/office/powerpoint/2010/main" val="3386885138"/>
+      </p:ext>
+    </p:extLst>
+  </p:cSld>
+  <p:clrMapOvr>
+    <a:masterClrMapping/>
+  </p:clrMapOvr>
+</p:sld>
+</file>
+
+<file path=ppt/slides/slide22.xml><?xml version="1.0" encoding="utf-8"?>
+<p:sld xmlns:a="http://schemas.openxmlformats.org/drawingml/2006/main" xmlns:r="http://schemas.openxmlformats.org/officeDocument/2006/relationships" xmlns:p="http://schemas.openxmlformats.org/presentationml/2006/main">
+  <p:cSld>
+    <p:spTree>
+      <p:nvGrpSpPr>
+        <p:cNvPr id="1" name="">
+          <a:extLst>
+            <a:ext uri="{FF2B5EF4-FFF2-40B4-BE49-F238E27FC236}">
+              <a16:creationId xmlns:a16="http://schemas.microsoft.com/office/drawing/2014/main" id="{6B66B357-E497-DF01-124A-B0781F1B11C0}"/>
+            </a:ext>
+          </a:extLst>
+        </p:cNvPr>
+        <p:cNvGrpSpPr/>
+        <p:nvPr/>
+      </p:nvGrpSpPr>
+      <p:grpSpPr>
+        <a:xfrm>
+          <a:off x="0" y="0"/>
+          <a:ext cx="0" cy="0"/>
+          <a:chOff x="0" y="0"/>
+          <a:chExt cx="0" cy="0"/>
+        </a:xfrm>
+      </p:grpSpPr>
+      <p:sp>
+        <p:nvSpPr>
+          <p:cNvPr id="3" name="TextBox 2">
+            <a:extLst>
+              <a:ext uri="{FF2B5EF4-FFF2-40B4-BE49-F238E27FC236}">
+                <a16:creationId xmlns:a16="http://schemas.microsoft.com/office/drawing/2014/main" id="{44415BF9-1F39-844F-1575-041EF59759EA}"/>
+              </a:ext>
+            </a:extLst>
+          </p:cNvPr>
+          <p:cNvSpPr txBox="1"/>
+          <p:nvPr/>
+        </p:nvSpPr>
+        <p:spPr>
+          <a:xfrm>
+            <a:off x="334296" y="116877"/>
+            <a:ext cx="11379168" cy="2308324"/>
+          </a:xfrm>
+          <a:prstGeom prst="rect">
+            <a:avLst/>
+          </a:prstGeom>
+          <a:noFill/>
+        </p:spPr>
+        <p:txBody>
+          <a:bodyPr wrap="square">
+            <a:spAutoFit/>
+          </a:bodyPr>
+          <a:lstStyle/>
+          <a:p>
+            <a:r>
+              <a:rPr lang="en-US" sz="2400" dirty="0">
+                <a:solidFill>
+                  <a:schemeClr val="accent6">
+                    <a:lumMod val="60000"/>
+                    <a:lumOff val="40000"/>
+                  </a:schemeClr>
+                </a:solidFill>
+              </a:rPr>
+              <a:t>The "Role-Prompted" Example (Lower Hallucination Risk)</a:t>
+            </a:r>
+          </a:p>
+          <a:p>
+            <a:endParaRPr lang="en-US" sz="2400" dirty="0">
+              <a:solidFill>
+                <a:schemeClr val="accent6">
+                  <a:lumMod val="60000"/>
+                  <a:lumOff val="40000"/>
+                </a:schemeClr>
+              </a:solidFill>
+            </a:endParaRPr>
+          </a:p>
+          <a:p>
+            <a:r>
+              <a:rPr lang="en-US" sz="2400" dirty="0">
+                <a:solidFill>
+                  <a:schemeClr val="accent6">
+                    <a:lumMod val="60000"/>
+                    <a:lumOff val="40000"/>
+                  </a:schemeClr>
+                </a:solidFill>
+              </a:rPr>
+              <a:t>Better Prompt: </a:t>
+            </a:r>
+            <a:r>
+              <a:rPr lang="en-US" sz="2400" dirty="0">
+                <a:solidFill>
+                  <a:schemeClr val="accent4">
+                    <a:lumMod val="60000"/>
+                    <a:lumOff val="40000"/>
+                  </a:schemeClr>
+                </a:solidFill>
+              </a:rPr>
+              <a:t>"You are a board-certified cardiologist with 20 years of experience. </a:t>
+            </a:r>
+          </a:p>
+          <a:p>
+            <a:r>
+              <a:rPr lang="en-US" sz="2400" dirty="0">
+                <a:solidFill>
+                  <a:schemeClr val="accent4">
+                    <a:lumMod val="60000"/>
+                    <a:lumOff val="40000"/>
+                  </a:schemeClr>
+                </a:solidFill>
+              </a:rPr>
+              <a:t>Based on clinical emergency protocols, what is the step-by-step procedure for a patient experiencing a sudden resting heart rate over 120 BPM? If you are unsure of specific diagnostic criteria, state that you cannot provide medical advice for that detail</a:t>
+            </a:r>
+            <a:r>
+              <a:rPr lang="en-US" sz="2400" dirty="0">
+                <a:solidFill>
+                  <a:schemeClr val="accent6">
+                    <a:lumMod val="60000"/>
+                    <a:lumOff val="40000"/>
+                  </a:schemeClr>
+                </a:solidFill>
+              </a:rPr>
+              <a:t>."</a:t>
+            </a:r>
+          </a:p>
+        </p:txBody>
+      </p:sp>
+      <p:sp>
+        <p:nvSpPr>
+          <p:cNvPr id="4" name="TextBox 3">
+            <a:extLst>
+              <a:ext uri="{FF2B5EF4-FFF2-40B4-BE49-F238E27FC236}">
+                <a16:creationId xmlns:a16="http://schemas.microsoft.com/office/drawing/2014/main" id="{2F7D8C63-60B9-7002-C7A3-9E98DEA0AA6D}"/>
+              </a:ext>
+            </a:extLst>
+          </p:cNvPr>
+          <p:cNvSpPr txBox="1"/>
+          <p:nvPr/>
+        </p:nvSpPr>
+        <p:spPr>
+          <a:xfrm>
+            <a:off x="571500" y="3160235"/>
+            <a:ext cx="10410444" cy="2308324"/>
+          </a:xfrm>
+          <a:prstGeom prst="rect">
+            <a:avLst/>
+          </a:prstGeom>
+          <a:noFill/>
+        </p:spPr>
+        <p:txBody>
+          <a:bodyPr wrap="square">
+            <a:spAutoFit/>
+          </a:bodyPr>
+          <a:lstStyle/>
+          <a:p>
+            <a:r>
+              <a:rPr lang="en-US" sz="2400" u="sng" dirty="0">
+                <a:solidFill>
+                  <a:schemeClr val="accent6">
+                    <a:lumMod val="60000"/>
+                    <a:lumOff val="40000"/>
+                  </a:schemeClr>
+                </a:solidFill>
+              </a:rPr>
+              <a:t>Why this works:</a:t>
+            </a:r>
+          </a:p>
+          <a:p>
+            <a:pPr marL="342900" indent="-342900">
+              <a:buFont typeface="Arial" panose="020B0604020202020204" pitchFamily="34" charset="0"/>
+              <a:buChar char="•"/>
+            </a:pPr>
+            <a:r>
+              <a:rPr lang="en-US" sz="2400" b="1" dirty="0">
+                <a:solidFill>
+                  <a:schemeClr val="accent6">
+                    <a:lumMod val="60000"/>
+                    <a:lumOff val="40000"/>
+                  </a:schemeClr>
+                </a:solidFill>
+              </a:rPr>
+              <a:t>Domain Alignment: </a:t>
+            </a:r>
+            <a:r>
+              <a:rPr lang="en-US" sz="2400" dirty="0">
+                <a:solidFill>
+                  <a:schemeClr val="accent6">
+                    <a:lumMod val="60000"/>
+                    <a:lumOff val="40000"/>
+                  </a:schemeClr>
+                </a:solidFill>
+              </a:rPr>
+              <a:t>By assuming the role, the model weights "medical journal" data more heavily than "internet forum" data.</a:t>
+            </a:r>
+          </a:p>
+          <a:p>
+            <a:pPr marL="342900" indent="-342900">
+              <a:buFont typeface="Arial" panose="020B0604020202020204" pitchFamily="34" charset="0"/>
+              <a:buChar char="•"/>
+            </a:pPr>
+            <a:endParaRPr lang="en-US" sz="2400" b="1" dirty="0">
+              <a:solidFill>
+                <a:schemeClr val="accent6">
+                  <a:lumMod val="60000"/>
+                  <a:lumOff val="40000"/>
+                </a:schemeClr>
+              </a:solidFill>
+            </a:endParaRPr>
+          </a:p>
+          <a:p>
+            <a:pPr marL="342900" indent="-342900">
+              <a:buFont typeface="Arial" panose="020B0604020202020204" pitchFamily="34" charset="0"/>
+              <a:buChar char="•"/>
+            </a:pPr>
+            <a:r>
+              <a:rPr lang="en-US" sz="2400" b="1" dirty="0">
+                <a:solidFill>
+                  <a:schemeClr val="accent6">
+                    <a:lumMod val="60000"/>
+                    <a:lumOff val="40000"/>
+                  </a:schemeClr>
+                </a:solidFill>
+              </a:rPr>
+              <a:t>Specific Constraints: </a:t>
+            </a:r>
+            <a:r>
+              <a:rPr lang="en-US" sz="2400" dirty="0">
+                <a:solidFill>
+                  <a:schemeClr val="accent6">
+                    <a:lumMod val="60000"/>
+                    <a:lumOff val="40000"/>
+                  </a:schemeClr>
+                </a:solidFill>
+              </a:rPr>
+              <a:t>You’ve combined the role with an "uncertainty" clause, which is proven to reduce hallucinations by up to 30–50%.</a:t>
+            </a:r>
+          </a:p>
+        </p:txBody>
+      </p:sp>
+    </p:spTree>
+    <p:extLst>
+      <p:ext uri="{BB962C8B-B14F-4D97-AF65-F5344CB8AC3E}">
+        <p14:creationId xmlns:p14="http://schemas.microsoft.com/office/powerpoint/2010/main" val="1734586659"/>
+      </p:ext>
+    </p:extLst>
+  </p:cSld>
+  <p:clrMapOvr>
+    <a:masterClrMapping/>
+  </p:clrMapOvr>
+</p:sld>
+</file>
+
+<file path=ppt/slides/slide23.xml><?xml version="1.0" encoding="utf-8"?>
+<p:sld xmlns:a="http://schemas.openxmlformats.org/drawingml/2006/main" xmlns:r="http://schemas.openxmlformats.org/officeDocument/2006/relationships" xmlns:p="http://schemas.openxmlformats.org/presentationml/2006/main">
+  <p:cSld>
+    <p:spTree>
+      <p:nvGrpSpPr>
+        <p:cNvPr id="1" name="">
+          <a:extLst>
+            <a:ext uri="{FF2B5EF4-FFF2-40B4-BE49-F238E27FC236}">
+              <a16:creationId xmlns:a16="http://schemas.microsoft.com/office/drawing/2014/main" id="{CFE62C5E-367C-D7D8-A5DB-EAFD2E61F5A7}"/>
+            </a:ext>
+          </a:extLst>
+        </p:cNvPr>
+        <p:cNvGrpSpPr/>
+        <p:nvPr/>
+      </p:nvGrpSpPr>
+      <p:grpSpPr>
+        <a:xfrm>
+          <a:off x="0" y="0"/>
+          <a:ext cx="0" cy="0"/>
+          <a:chOff x="0" y="0"/>
+          <a:chExt cx="0" cy="0"/>
+        </a:xfrm>
+      </p:grpSpPr>
+      <p:sp>
+        <p:nvSpPr>
+          <p:cNvPr id="9" name="TextBox 8">
+            <a:extLst>
+              <a:ext uri="{FF2B5EF4-FFF2-40B4-BE49-F238E27FC236}">
+                <a16:creationId xmlns:a16="http://schemas.microsoft.com/office/drawing/2014/main" id="{55A24F56-4986-6B09-716A-D2F09625D23C}"/>
+              </a:ext>
+            </a:extLst>
+          </p:cNvPr>
+          <p:cNvSpPr txBox="1"/>
+          <p:nvPr/>
+        </p:nvSpPr>
+        <p:spPr>
+          <a:xfrm>
+            <a:off x="930415" y="2281842"/>
+            <a:ext cx="9859604" cy="707886"/>
+          </a:xfrm>
+          <a:prstGeom prst="rect">
+            <a:avLst/>
+          </a:prstGeom>
+          <a:noFill/>
+        </p:spPr>
+        <p:txBody>
+          <a:bodyPr wrap="square" rtlCol="0">
+            <a:spAutoFit/>
+          </a:bodyPr>
+          <a:lstStyle/>
+          <a:p>
+            <a:pPr algn="ctr"/>
+            <a:r>
+              <a:rPr lang="en-IN" sz="4000" b="1" dirty="0">
+                <a:solidFill>
+                  <a:schemeClr val="accent6">
+                    <a:lumMod val="60000"/>
+                    <a:lumOff val="40000"/>
+                  </a:schemeClr>
+                </a:solidFill>
+              </a:rPr>
+              <a:t>The Golden Prompt Formula</a:t>
+            </a:r>
+            <a:endParaRPr lang="en-US" sz="4000" b="1" dirty="0">
+              <a:solidFill>
+                <a:schemeClr val="accent6">
+                  <a:lumMod val="60000"/>
+                  <a:lumOff val="40000"/>
+                </a:schemeClr>
+              </a:solidFill>
+            </a:endParaRPr>
+          </a:p>
+        </p:txBody>
+      </p:sp>
+    </p:spTree>
+    <p:extLst>
+      <p:ext uri="{BB962C8B-B14F-4D97-AF65-F5344CB8AC3E}">
+        <p14:creationId xmlns:p14="http://schemas.microsoft.com/office/powerpoint/2010/main" val="813288299"/>
+      </p:ext>
+    </p:extLst>
+  </p:cSld>
+  <p:clrMapOvr>
+    <a:masterClrMapping/>
+  </p:clrMapOvr>
+</p:sld>
+</file>
+
+<file path=ppt/slides/slide24.xml><?xml version="1.0" encoding="utf-8"?>
+<p:sld xmlns:a="http://schemas.openxmlformats.org/drawingml/2006/main" xmlns:r="http://schemas.openxmlformats.org/officeDocument/2006/relationships" xmlns:p="http://schemas.openxmlformats.org/presentationml/2006/main">
+  <p:cSld>
+    <p:spTree>
+      <p:nvGrpSpPr>
+        <p:cNvPr id="1" name="">
+          <a:extLst>
+            <a:ext uri="{FF2B5EF4-FFF2-40B4-BE49-F238E27FC236}">
+              <a16:creationId xmlns:a16="http://schemas.microsoft.com/office/drawing/2014/main" id="{280A40C9-5836-9616-9193-C4C731FF36DB}"/>
+            </a:ext>
+          </a:extLst>
+        </p:cNvPr>
+        <p:cNvGrpSpPr/>
+        <p:nvPr/>
+      </p:nvGrpSpPr>
+      <p:grpSpPr>
+        <a:xfrm>
+          <a:off x="0" y="0"/>
+          <a:ext cx="0" cy="0"/>
+          <a:chOff x="0" y="0"/>
+          <a:chExt cx="0" cy="0"/>
+        </a:xfrm>
+      </p:grpSpPr>
+      <p:sp>
+        <p:nvSpPr>
+          <p:cNvPr id="9" name="TextBox 8">
+            <a:extLst>
+              <a:ext uri="{FF2B5EF4-FFF2-40B4-BE49-F238E27FC236}">
+                <a16:creationId xmlns:a16="http://schemas.microsoft.com/office/drawing/2014/main" id="{EFC1F84D-1637-4F29-477A-E9FC9817A89C}"/>
+              </a:ext>
+            </a:extLst>
+          </p:cNvPr>
+          <p:cNvSpPr txBox="1"/>
+          <p:nvPr/>
+        </p:nvSpPr>
+        <p:spPr>
+          <a:xfrm>
+            <a:off x="592087" y="123858"/>
+            <a:ext cx="9859604" cy="523220"/>
+          </a:xfrm>
+          <a:prstGeom prst="rect">
+            <a:avLst/>
+          </a:prstGeom>
+          <a:noFill/>
+        </p:spPr>
+        <p:txBody>
+          <a:bodyPr wrap="square" rtlCol="0">
+            <a:spAutoFit/>
+          </a:bodyPr>
+          <a:lstStyle/>
+          <a:p>
+            <a:pPr algn="ctr"/>
+            <a:r>
+              <a:rPr lang="en-IN" sz="2800" dirty="0">
+                <a:solidFill>
+                  <a:schemeClr val="accent6">
+                    <a:lumMod val="60000"/>
+                    <a:lumOff val="40000"/>
+                  </a:schemeClr>
+                </a:solidFill>
+              </a:rPr>
+              <a:t>The Golden Prompt Formula</a:t>
+            </a:r>
+            <a:endParaRPr lang="en-US" sz="2800" dirty="0">
+              <a:solidFill>
+                <a:schemeClr val="accent6">
+                  <a:lumMod val="60000"/>
+                  <a:lumOff val="40000"/>
+                </a:schemeClr>
+              </a:solidFill>
+            </a:endParaRPr>
+          </a:p>
+        </p:txBody>
+      </p:sp>
+      <p:sp>
+        <p:nvSpPr>
+          <p:cNvPr id="3" name="TextBox 2">
+            <a:extLst>
+              <a:ext uri="{FF2B5EF4-FFF2-40B4-BE49-F238E27FC236}">
+                <a16:creationId xmlns:a16="http://schemas.microsoft.com/office/drawing/2014/main" id="{3ECCED15-FB22-1A40-3D21-D2AACED571C7}"/>
+              </a:ext>
+            </a:extLst>
+          </p:cNvPr>
+          <p:cNvSpPr txBox="1"/>
+          <p:nvPr/>
+        </p:nvSpPr>
+        <p:spPr>
+          <a:xfrm>
+            <a:off x="334296" y="830109"/>
+            <a:ext cx="10336751" cy="5262979"/>
+          </a:xfrm>
+          <a:prstGeom prst="rect">
+            <a:avLst/>
+          </a:prstGeom>
+          <a:noFill/>
+        </p:spPr>
+        <p:txBody>
+          <a:bodyPr wrap="square">
+            <a:spAutoFit/>
+          </a:bodyPr>
+          <a:lstStyle/>
+          <a:p>
+            <a:r>
+              <a:rPr lang="en-IN" sz="2400" b="1" dirty="0">
+                <a:solidFill>
+                  <a:schemeClr val="accent4">
+                    <a:lumMod val="60000"/>
+                    <a:lumOff val="40000"/>
+                  </a:schemeClr>
+                </a:solidFill>
+              </a:rPr>
+              <a:t>Prompt = Context + Task + Constraint + Output Format</a:t>
+            </a:r>
+          </a:p>
+          <a:p>
+            <a:endParaRPr lang="en-IN" sz="2400" dirty="0">
+              <a:solidFill>
+                <a:schemeClr val="accent6">
+                  <a:lumMod val="60000"/>
+                  <a:lumOff val="40000"/>
+                </a:schemeClr>
+              </a:solidFill>
+            </a:endParaRPr>
+          </a:p>
+          <a:p>
+            <a:r>
+              <a:rPr lang="en-US" sz="2400" b="1" dirty="0">
+                <a:solidFill>
+                  <a:schemeClr val="accent6">
+                    <a:lumMod val="60000"/>
+                    <a:lumOff val="40000"/>
+                  </a:schemeClr>
+                </a:solidFill>
+              </a:rPr>
+              <a:t>1. Context (Background Information)</a:t>
+            </a:r>
+          </a:p>
+          <a:p>
+            <a:r>
+              <a:rPr lang="en-US" sz="2400" dirty="0">
+                <a:solidFill>
+                  <a:schemeClr val="accent6">
+                    <a:lumMod val="60000"/>
+                    <a:lumOff val="40000"/>
+                  </a:schemeClr>
+                </a:solidFill>
+              </a:rPr>
+              <a:t>Gives AI situation or environment.</a:t>
+            </a:r>
+          </a:p>
+          <a:p>
+            <a:endParaRPr lang="en-US" sz="2400" dirty="0">
+              <a:solidFill>
+                <a:schemeClr val="accent6">
+                  <a:lumMod val="60000"/>
+                  <a:lumOff val="40000"/>
+                </a:schemeClr>
+              </a:solidFill>
+            </a:endParaRPr>
+          </a:p>
+          <a:p>
+            <a:r>
+              <a:rPr lang="en-US" sz="2400" dirty="0">
+                <a:solidFill>
+                  <a:schemeClr val="accent6">
+                    <a:lumMod val="60000"/>
+                    <a:lumOff val="40000"/>
+                  </a:schemeClr>
+                </a:solidFill>
+              </a:rPr>
+              <a:t>Without context → AI guesses</a:t>
+            </a:r>
+          </a:p>
+          <a:p>
+            <a:endParaRPr lang="en-US" sz="2400" dirty="0">
+              <a:solidFill>
+                <a:schemeClr val="accent6">
+                  <a:lumMod val="60000"/>
+                  <a:lumOff val="40000"/>
+                </a:schemeClr>
+              </a:solidFill>
+            </a:endParaRPr>
+          </a:p>
+          <a:p>
+            <a:r>
+              <a:rPr lang="en-US" sz="2400" b="1" dirty="0">
+                <a:solidFill>
+                  <a:schemeClr val="accent6">
+                    <a:lumMod val="60000"/>
+                    <a:lumOff val="40000"/>
+                  </a:schemeClr>
+                </a:solidFill>
+              </a:rPr>
+              <a:t>The "No Context" Prompt (The Guessing Game)</a:t>
+            </a:r>
+          </a:p>
+          <a:p>
+            <a:r>
+              <a:rPr lang="en-US" sz="2400" dirty="0">
+                <a:solidFill>
+                  <a:schemeClr val="accent6">
+                    <a:lumMod val="60000"/>
+                    <a:lumOff val="40000"/>
+                  </a:schemeClr>
+                </a:solidFill>
+              </a:rPr>
+              <a:t>Bad Prompt</a:t>
+            </a:r>
+            <a:r>
+              <a:rPr lang="en-US" sz="2400" b="1" dirty="0">
+                <a:solidFill>
+                  <a:schemeClr val="accent6">
+                    <a:lumMod val="60000"/>
+                    <a:lumOff val="40000"/>
+                  </a:schemeClr>
+                </a:solidFill>
+              </a:rPr>
+              <a:t>:</a:t>
+            </a:r>
+            <a:r>
+              <a:rPr lang="en-US" sz="2400" dirty="0">
+                <a:solidFill>
+                  <a:schemeClr val="accent6">
+                    <a:lumMod val="60000"/>
+                    <a:lumOff val="40000"/>
+                  </a:schemeClr>
+                </a:solidFill>
+              </a:rPr>
+              <a:t> "Write a plan to improve customer retention.“</a:t>
+            </a:r>
+          </a:p>
+          <a:p>
+            <a:endParaRPr lang="en-US" sz="2400" dirty="0">
+              <a:solidFill>
+                <a:schemeClr val="accent6">
+                  <a:lumMod val="60000"/>
+                  <a:lumOff val="40000"/>
+                </a:schemeClr>
+              </a:solidFill>
+            </a:endParaRPr>
+          </a:p>
+          <a:p>
+            <a:r>
+              <a:rPr lang="en-US" sz="2400" b="1" dirty="0">
+                <a:solidFill>
+                  <a:schemeClr val="accent6">
+                    <a:lumMod val="60000"/>
+                    <a:lumOff val="40000"/>
+                  </a:schemeClr>
+                </a:solidFill>
+              </a:rPr>
+              <a:t>The Problem:</a:t>
+            </a:r>
+            <a:r>
+              <a:rPr lang="en-US" sz="2400" dirty="0">
+                <a:solidFill>
+                  <a:schemeClr val="accent6">
+                    <a:lumMod val="60000"/>
+                    <a:lumOff val="40000"/>
+                  </a:schemeClr>
+                </a:solidFill>
+              </a:rPr>
+              <a:t> The AI doesn't know if you are a local coffee shop, a billion-dollar SaaS company, or a non-profit.</a:t>
+            </a:r>
+          </a:p>
+          <a:p>
+            <a:r>
+              <a:rPr lang="en-US" sz="2400" dirty="0">
+                <a:solidFill>
+                  <a:schemeClr val="accent6">
+                    <a:lumMod val="60000"/>
+                    <a:lumOff val="40000"/>
+                  </a:schemeClr>
+                </a:solidFill>
+              </a:rPr>
+              <a:t> It will likely give you a "generic list" (loyalty cards, email newsletters) that might be totally irrelevant to your business model.</a:t>
+            </a:r>
+          </a:p>
+        </p:txBody>
+      </p:sp>
+    </p:spTree>
+    <p:extLst>
+      <p:ext uri="{BB962C8B-B14F-4D97-AF65-F5344CB8AC3E}">
+        <p14:creationId xmlns:p14="http://schemas.microsoft.com/office/powerpoint/2010/main" val="3974240285"/>
+      </p:ext>
+    </p:extLst>
+  </p:cSld>
+  <p:clrMapOvr>
+    <a:masterClrMapping/>
+  </p:clrMapOvr>
+</p:sld>
+</file>
+
+<file path=ppt/slides/slide25.xml><?xml version="1.0" encoding="utf-8"?>
+<p:sld xmlns:a="http://schemas.openxmlformats.org/drawingml/2006/main" xmlns:r="http://schemas.openxmlformats.org/officeDocument/2006/relationships" xmlns:p="http://schemas.openxmlformats.org/presentationml/2006/main">
+  <p:cSld>
+    <p:spTree>
+      <p:nvGrpSpPr>
+        <p:cNvPr id="1" name="">
+          <a:extLst>
+            <a:ext uri="{FF2B5EF4-FFF2-40B4-BE49-F238E27FC236}">
+              <a16:creationId xmlns:a16="http://schemas.microsoft.com/office/drawing/2014/main" id="{748ED755-196A-D016-8E69-CCCD17E3B2C0}"/>
+            </a:ext>
+          </a:extLst>
+        </p:cNvPr>
+        <p:cNvGrpSpPr/>
+        <p:nvPr/>
+      </p:nvGrpSpPr>
+      <p:grpSpPr>
+        <a:xfrm>
+          <a:off x="0" y="0"/>
+          <a:ext cx="0" cy="0"/>
+          <a:chOff x="0" y="0"/>
+          <a:chExt cx="0" cy="0"/>
+        </a:xfrm>
+      </p:grpSpPr>
+      <p:sp>
+        <p:nvSpPr>
+          <p:cNvPr id="9" name="TextBox 8">
+            <a:extLst>
+              <a:ext uri="{FF2B5EF4-FFF2-40B4-BE49-F238E27FC236}">
+                <a16:creationId xmlns:a16="http://schemas.microsoft.com/office/drawing/2014/main" id="{DCBDEF69-878C-AE3B-E950-6C1686609CE5}"/>
+              </a:ext>
+            </a:extLst>
+          </p:cNvPr>
+          <p:cNvSpPr txBox="1"/>
+          <p:nvPr/>
+        </p:nvSpPr>
+        <p:spPr>
+          <a:xfrm>
+            <a:off x="592087" y="123858"/>
+            <a:ext cx="9859604" cy="523220"/>
+          </a:xfrm>
+          <a:prstGeom prst="rect">
+            <a:avLst/>
+          </a:prstGeom>
+          <a:noFill/>
+        </p:spPr>
+        <p:txBody>
+          <a:bodyPr wrap="square" rtlCol="0">
+            <a:spAutoFit/>
+          </a:bodyPr>
+          <a:lstStyle/>
+          <a:p>
+            <a:pPr algn="ctr"/>
+            <a:r>
+              <a:rPr lang="en-IN" sz="2800" dirty="0">
+                <a:solidFill>
+                  <a:schemeClr val="accent6">
+                    <a:lumMod val="60000"/>
+                    <a:lumOff val="40000"/>
+                  </a:schemeClr>
+                </a:solidFill>
+              </a:rPr>
+              <a:t>The Golden Prompt Formula</a:t>
+            </a:r>
+            <a:endParaRPr lang="en-US" sz="2800" dirty="0">
+              <a:solidFill>
+                <a:schemeClr val="accent6">
+                  <a:lumMod val="60000"/>
+                  <a:lumOff val="40000"/>
+                </a:schemeClr>
+              </a:solidFill>
+            </a:endParaRPr>
+          </a:p>
+        </p:txBody>
+      </p:sp>
+      <p:sp>
+        <p:nvSpPr>
+          <p:cNvPr id="3" name="TextBox 2">
+            <a:extLst>
+              <a:ext uri="{FF2B5EF4-FFF2-40B4-BE49-F238E27FC236}">
+                <a16:creationId xmlns:a16="http://schemas.microsoft.com/office/drawing/2014/main" id="{FD7A18B4-25EE-0E35-77F7-5B0E974A326D}"/>
+              </a:ext>
+            </a:extLst>
+          </p:cNvPr>
+          <p:cNvSpPr txBox="1"/>
+          <p:nvPr/>
+        </p:nvSpPr>
+        <p:spPr>
+          <a:xfrm>
+            <a:off x="334296" y="830109"/>
+            <a:ext cx="10336751" cy="4893647"/>
+          </a:xfrm>
+          <a:prstGeom prst="rect">
+            <a:avLst/>
+          </a:prstGeom>
+          <a:noFill/>
+        </p:spPr>
+        <p:txBody>
+          <a:bodyPr wrap="square">
+            <a:spAutoFit/>
+          </a:bodyPr>
+          <a:lstStyle/>
+          <a:p>
+            <a:r>
+              <a:rPr lang="en-IN" sz="2400" b="1" dirty="0">
+                <a:solidFill>
+                  <a:schemeClr val="accent4">
+                    <a:lumMod val="60000"/>
+                    <a:lumOff val="40000"/>
+                  </a:schemeClr>
+                </a:solidFill>
+              </a:rPr>
+              <a:t>Prompt = Context + Task + Constraint + Output Format</a:t>
+            </a:r>
+          </a:p>
+          <a:p>
+            <a:endParaRPr lang="en-IN" sz="2400" dirty="0">
+              <a:solidFill>
+                <a:schemeClr val="accent6">
+                  <a:lumMod val="60000"/>
+                  <a:lumOff val="40000"/>
+                </a:schemeClr>
+              </a:solidFill>
+            </a:endParaRPr>
+          </a:p>
+          <a:p>
+            <a:r>
+              <a:rPr lang="en-US" sz="2400" b="1" dirty="0">
+                <a:solidFill>
+                  <a:schemeClr val="accent6">
+                    <a:lumMod val="60000"/>
+                    <a:lumOff val="40000"/>
+                  </a:schemeClr>
+                </a:solidFill>
+              </a:rPr>
+              <a:t>The "High Context" Example (The Grounded Response)</a:t>
+            </a:r>
+          </a:p>
+          <a:p>
+            <a:endParaRPr lang="en-US" sz="2400" b="1" dirty="0">
+              <a:solidFill>
+                <a:schemeClr val="accent6">
+                  <a:lumMod val="60000"/>
+                  <a:lumOff val="40000"/>
+                </a:schemeClr>
+              </a:solidFill>
+            </a:endParaRPr>
+          </a:p>
+          <a:p>
+            <a:r>
+              <a:rPr lang="en-US" sz="2400" dirty="0">
+                <a:solidFill>
+                  <a:schemeClr val="accent6">
+                    <a:lumMod val="60000"/>
+                    <a:lumOff val="40000"/>
+                  </a:schemeClr>
+                </a:solidFill>
+              </a:rPr>
+              <a:t>Better Prompt </a:t>
+            </a:r>
+            <a:r>
+              <a:rPr lang="en-US" sz="2400" b="1" dirty="0">
+                <a:solidFill>
+                  <a:schemeClr val="accent6">
+                    <a:lumMod val="60000"/>
+                    <a:lumOff val="40000"/>
+                  </a:schemeClr>
+                </a:solidFill>
+              </a:rPr>
+              <a:t>:</a:t>
+            </a:r>
+            <a:r>
+              <a:rPr lang="en-US" sz="2400" dirty="0">
+                <a:solidFill>
+                  <a:schemeClr val="accent6">
+                    <a:lumMod val="60000"/>
+                    <a:lumOff val="40000"/>
+                  </a:schemeClr>
+                </a:solidFill>
+              </a:rPr>
+              <a:t> </a:t>
+            </a:r>
+          </a:p>
+          <a:p>
+            <a:r>
+              <a:rPr lang="en-US" sz="2400" dirty="0">
+                <a:solidFill>
+                  <a:schemeClr val="accent6">
+                    <a:lumMod val="60000"/>
+                    <a:lumOff val="40000"/>
+                  </a:schemeClr>
+                </a:solidFill>
+              </a:rPr>
+              <a:t>"</a:t>
+            </a:r>
+            <a:r>
+              <a:rPr lang="en-US" sz="2400" b="1" dirty="0">
+                <a:solidFill>
+                  <a:schemeClr val="accent6">
+                    <a:lumMod val="60000"/>
+                    <a:lumOff val="40000"/>
+                  </a:schemeClr>
+                </a:solidFill>
+              </a:rPr>
+              <a:t>[Background]:</a:t>
+            </a:r>
+            <a:r>
+              <a:rPr lang="en-US" sz="2400" dirty="0">
+                <a:solidFill>
+                  <a:schemeClr val="accent6">
+                    <a:lumMod val="60000"/>
+                    <a:lumOff val="40000"/>
+                  </a:schemeClr>
+                </a:solidFill>
+              </a:rPr>
+              <a:t> We are a mid-sized B2B software company that sells a project management tool to construction firms. Our subscription is $500/month.</a:t>
+            </a:r>
+          </a:p>
+          <a:p>
+            <a:endParaRPr lang="en-US" sz="2400" dirty="0">
+              <a:solidFill>
+                <a:schemeClr val="accent6">
+                  <a:lumMod val="60000"/>
+                  <a:lumOff val="40000"/>
+                </a:schemeClr>
+              </a:solidFill>
+            </a:endParaRPr>
+          </a:p>
+          <a:p>
+            <a:r>
+              <a:rPr lang="en-US" sz="2400" b="1" dirty="0">
+                <a:solidFill>
+                  <a:schemeClr val="accent6">
+                    <a:lumMod val="60000"/>
+                    <a:lumOff val="40000"/>
+                  </a:schemeClr>
+                </a:solidFill>
+              </a:rPr>
+              <a:t>[The Situation]:</a:t>
+            </a:r>
+            <a:r>
+              <a:rPr lang="en-US" sz="2400" dirty="0">
+                <a:solidFill>
+                  <a:schemeClr val="accent6">
+                    <a:lumMod val="60000"/>
+                    <a:lumOff val="40000"/>
+                  </a:schemeClr>
+                </a:solidFill>
+              </a:rPr>
+              <a:t> We’ve noticed that customers usually leave (churn) after the 3rd month because the software feels too complex for their field workers.</a:t>
+            </a:r>
+          </a:p>
+          <a:p>
+            <a:endParaRPr lang="en-US" sz="2400" dirty="0">
+              <a:solidFill>
+                <a:schemeClr val="accent6">
+                  <a:lumMod val="60000"/>
+                  <a:lumOff val="40000"/>
+                </a:schemeClr>
+              </a:solidFill>
+            </a:endParaRPr>
+          </a:p>
+          <a:p>
+            <a:r>
+              <a:rPr lang="en-US" sz="2400" b="1" dirty="0">
+                <a:solidFill>
+                  <a:schemeClr val="accent6">
+                    <a:lumMod val="60000"/>
+                    <a:lumOff val="40000"/>
+                  </a:schemeClr>
+                </a:solidFill>
+              </a:rPr>
+              <a:t>[Goal]:</a:t>
+            </a:r>
+            <a:r>
+              <a:rPr lang="en-US" sz="2400" dirty="0">
+                <a:solidFill>
+                  <a:schemeClr val="accent6">
+                    <a:lumMod val="60000"/>
+                    <a:lumOff val="40000"/>
+                  </a:schemeClr>
+                </a:solidFill>
+              </a:rPr>
+              <a:t> Create a 30-day retention plan specifically focused on simplifying the 'onboarding' phase for non-technical users."</a:t>
+            </a:r>
+          </a:p>
+        </p:txBody>
+      </p:sp>
+    </p:spTree>
+    <p:extLst>
+      <p:ext uri="{BB962C8B-B14F-4D97-AF65-F5344CB8AC3E}">
+        <p14:creationId xmlns:p14="http://schemas.microsoft.com/office/powerpoint/2010/main" val="1629387032"/>
+      </p:ext>
+    </p:extLst>
+  </p:cSld>
+  <p:clrMapOvr>
+    <a:masterClrMapping/>
+  </p:clrMapOvr>
+</p:sld>
+</file>
+
+<file path=ppt/slides/slide26.xml><?xml version="1.0" encoding="utf-8"?>
+<p:sld xmlns:a="http://schemas.openxmlformats.org/drawingml/2006/main" xmlns:r="http://schemas.openxmlformats.org/officeDocument/2006/relationships" xmlns:p="http://schemas.openxmlformats.org/presentationml/2006/main">
+  <p:cSld>
+    <p:spTree>
+      <p:nvGrpSpPr>
+        <p:cNvPr id="1" name="">
+          <a:extLst>
+            <a:ext uri="{FF2B5EF4-FFF2-40B4-BE49-F238E27FC236}">
+              <a16:creationId xmlns:a16="http://schemas.microsoft.com/office/drawing/2014/main" id="{40D30D9C-6AA7-1B04-8873-C4C9861176CA}"/>
+            </a:ext>
+          </a:extLst>
+        </p:cNvPr>
+        <p:cNvGrpSpPr/>
+        <p:nvPr/>
+      </p:nvGrpSpPr>
+      <p:grpSpPr>
+        <a:xfrm>
+          <a:off x="0" y="0"/>
+          <a:ext cx="0" cy="0"/>
+          <a:chOff x="0" y="0"/>
+          <a:chExt cx="0" cy="0"/>
+        </a:xfrm>
+      </p:grpSpPr>
+      <p:sp>
+        <p:nvSpPr>
+          <p:cNvPr id="9" name="TextBox 8">
+            <a:extLst>
+              <a:ext uri="{FF2B5EF4-FFF2-40B4-BE49-F238E27FC236}">
+                <a16:creationId xmlns:a16="http://schemas.microsoft.com/office/drawing/2014/main" id="{C8BF1571-0D70-554F-342C-AFB2107BB1DF}"/>
+              </a:ext>
+            </a:extLst>
+          </p:cNvPr>
+          <p:cNvSpPr txBox="1"/>
+          <p:nvPr/>
+        </p:nvSpPr>
+        <p:spPr>
+          <a:xfrm>
+            <a:off x="592087" y="123858"/>
+            <a:ext cx="9859604" cy="523220"/>
+          </a:xfrm>
+          <a:prstGeom prst="rect">
+            <a:avLst/>
+          </a:prstGeom>
+          <a:noFill/>
+        </p:spPr>
+        <p:txBody>
+          <a:bodyPr wrap="square" rtlCol="0">
+            <a:spAutoFit/>
+          </a:bodyPr>
+          <a:lstStyle/>
+          <a:p>
+            <a:pPr algn="ctr"/>
+            <a:r>
+              <a:rPr lang="en-IN" sz="2800" dirty="0">
+                <a:solidFill>
+                  <a:schemeClr val="accent6">
+                    <a:lumMod val="60000"/>
+                    <a:lumOff val="40000"/>
+                  </a:schemeClr>
+                </a:solidFill>
+              </a:rPr>
+              <a:t>The Golden Prompt Formula</a:t>
+            </a:r>
+            <a:endParaRPr lang="en-US" sz="2800" dirty="0">
+              <a:solidFill>
+                <a:schemeClr val="accent6">
+                  <a:lumMod val="60000"/>
+                  <a:lumOff val="40000"/>
+                </a:schemeClr>
+              </a:solidFill>
+            </a:endParaRPr>
+          </a:p>
+        </p:txBody>
+      </p:sp>
+      <p:sp>
+        <p:nvSpPr>
+          <p:cNvPr id="3" name="TextBox 2">
+            <a:extLst>
+              <a:ext uri="{FF2B5EF4-FFF2-40B4-BE49-F238E27FC236}">
+                <a16:creationId xmlns:a16="http://schemas.microsoft.com/office/drawing/2014/main" id="{05AA8BAF-41E1-6BBC-E16F-8D64B25EB437}"/>
+              </a:ext>
+            </a:extLst>
+          </p:cNvPr>
+          <p:cNvSpPr txBox="1"/>
+          <p:nvPr/>
+        </p:nvSpPr>
+        <p:spPr>
+          <a:xfrm>
+            <a:off x="334296" y="884973"/>
+            <a:ext cx="11132279" cy="2677656"/>
+          </a:xfrm>
+          <a:prstGeom prst="rect">
+            <a:avLst/>
+          </a:prstGeom>
+          <a:noFill/>
+        </p:spPr>
+        <p:txBody>
+          <a:bodyPr wrap="square">
+            <a:spAutoFit/>
+          </a:bodyPr>
+          <a:lstStyle/>
+          <a:p>
+            <a:r>
+              <a:rPr lang="en-IN" sz="2400" b="1" dirty="0">
+                <a:solidFill>
+                  <a:schemeClr val="accent4">
+                    <a:lumMod val="60000"/>
+                    <a:lumOff val="40000"/>
+                  </a:schemeClr>
+                </a:solidFill>
+              </a:rPr>
+              <a:t>Prompt = Context + Task + Constraint + Output Format</a:t>
+            </a:r>
+          </a:p>
+          <a:p>
+            <a:endParaRPr lang="en-IN" sz="2400" dirty="0">
+              <a:solidFill>
+                <a:schemeClr val="accent6">
+                  <a:lumMod val="60000"/>
+                  <a:lumOff val="40000"/>
+                </a:schemeClr>
+              </a:solidFill>
+            </a:endParaRPr>
+          </a:p>
+          <a:p>
+            <a:r>
+              <a:rPr lang="en-US" sz="2400" b="1" dirty="0">
+                <a:solidFill>
+                  <a:schemeClr val="accent6">
+                    <a:lumMod val="60000"/>
+                    <a:lumOff val="40000"/>
+                  </a:schemeClr>
+                </a:solidFill>
+              </a:rPr>
+              <a:t>2. Task (What AI Should Do)</a:t>
+            </a:r>
+          </a:p>
+          <a:p>
+            <a:r>
+              <a:rPr lang="en-US" sz="2400" dirty="0">
+                <a:solidFill>
+                  <a:schemeClr val="accent6">
+                    <a:lumMod val="60000"/>
+                    <a:lumOff val="40000"/>
+                  </a:schemeClr>
+                </a:solidFill>
+              </a:rPr>
+              <a:t>Clear action instruction.</a:t>
+            </a:r>
+          </a:p>
+          <a:p>
+            <a:endParaRPr lang="en-US" sz="2400" dirty="0">
+              <a:solidFill>
+                <a:schemeClr val="accent6">
+                  <a:lumMod val="60000"/>
+                  <a:lumOff val="40000"/>
+                </a:schemeClr>
+              </a:solidFill>
+            </a:endParaRPr>
+          </a:p>
+          <a:p>
+            <a:r>
+              <a:rPr lang="en-US" sz="2400" dirty="0">
+                <a:solidFill>
+                  <a:schemeClr val="accent6">
+                    <a:lumMod val="60000"/>
+                    <a:lumOff val="40000"/>
+                  </a:schemeClr>
+                </a:solidFill>
+              </a:rPr>
+              <a:t>Example: </a:t>
+            </a:r>
+          </a:p>
+          <a:p>
+            <a:r>
+              <a:rPr lang="en-US" sz="2400" dirty="0">
+                <a:solidFill>
+                  <a:schemeClr val="accent6">
+                    <a:lumMod val="60000"/>
+                    <a:lumOff val="40000"/>
+                  </a:schemeClr>
+                </a:solidFill>
+              </a:rPr>
+              <a:t>Analyze the dataset and find trends in sales from the column </a:t>
+            </a:r>
+            <a:r>
+              <a:rPr lang="en-US" sz="2400" dirty="0" err="1">
+                <a:solidFill>
+                  <a:schemeClr val="accent6">
+                    <a:lumMod val="60000"/>
+                    <a:lumOff val="40000"/>
+                  </a:schemeClr>
+                </a:solidFill>
+              </a:rPr>
+              <a:t>monthly_sales</a:t>
+            </a:r>
+            <a:r>
+              <a:rPr lang="en-US" sz="2400" dirty="0">
+                <a:solidFill>
+                  <a:schemeClr val="accent6">
+                    <a:lumMod val="60000"/>
+                    <a:lumOff val="40000"/>
+                  </a:schemeClr>
+                </a:solidFill>
+              </a:rPr>
+              <a:t>.</a:t>
+            </a:r>
+          </a:p>
+        </p:txBody>
+      </p:sp>
+    </p:spTree>
+    <p:extLst>
+      <p:ext uri="{BB962C8B-B14F-4D97-AF65-F5344CB8AC3E}">
+        <p14:creationId xmlns:p14="http://schemas.microsoft.com/office/powerpoint/2010/main" val="311028205"/>
+      </p:ext>
+    </p:extLst>
+  </p:cSld>
+  <p:clrMapOvr>
+    <a:masterClrMapping/>
+  </p:clrMapOvr>
+</p:sld>
+</file>
+
+<file path=ppt/slides/slide27.xml><?xml version="1.0" encoding="utf-8"?>
+<p:sld xmlns:a="http://schemas.openxmlformats.org/drawingml/2006/main" xmlns:r="http://schemas.openxmlformats.org/officeDocument/2006/relationships" xmlns:p="http://schemas.openxmlformats.org/presentationml/2006/main">
+  <p:cSld>
+    <p:spTree>
+      <p:nvGrpSpPr>
+        <p:cNvPr id="1" name="">
+          <a:extLst>
+            <a:ext uri="{FF2B5EF4-FFF2-40B4-BE49-F238E27FC236}">
+              <a16:creationId xmlns:a16="http://schemas.microsoft.com/office/drawing/2014/main" id="{F062AA41-F939-98FE-A90D-5341B5CE38D3}"/>
+            </a:ext>
+          </a:extLst>
+        </p:cNvPr>
+        <p:cNvGrpSpPr/>
+        <p:nvPr/>
+      </p:nvGrpSpPr>
+      <p:grpSpPr>
+        <a:xfrm>
+          <a:off x="0" y="0"/>
+          <a:ext cx="0" cy="0"/>
+          <a:chOff x="0" y="0"/>
+          <a:chExt cx="0" cy="0"/>
+        </a:xfrm>
+      </p:grpSpPr>
+      <p:sp>
+        <p:nvSpPr>
+          <p:cNvPr id="9" name="TextBox 8">
+            <a:extLst>
+              <a:ext uri="{FF2B5EF4-FFF2-40B4-BE49-F238E27FC236}">
+                <a16:creationId xmlns:a16="http://schemas.microsoft.com/office/drawing/2014/main" id="{3F0ADDDA-F15C-4140-8576-8E9336785F8C}"/>
+              </a:ext>
+            </a:extLst>
+          </p:cNvPr>
+          <p:cNvSpPr txBox="1"/>
+          <p:nvPr/>
+        </p:nvSpPr>
+        <p:spPr>
+          <a:xfrm>
+            <a:off x="592087" y="123858"/>
+            <a:ext cx="9859604" cy="523220"/>
+          </a:xfrm>
+          <a:prstGeom prst="rect">
+            <a:avLst/>
+          </a:prstGeom>
+          <a:noFill/>
+        </p:spPr>
+        <p:txBody>
+          <a:bodyPr wrap="square" rtlCol="0">
+            <a:spAutoFit/>
+          </a:bodyPr>
+          <a:lstStyle/>
+          <a:p>
+            <a:pPr algn="ctr"/>
+            <a:r>
+              <a:rPr lang="en-IN" sz="2800" dirty="0">
+                <a:solidFill>
+                  <a:schemeClr val="accent6">
+                    <a:lumMod val="60000"/>
+                    <a:lumOff val="40000"/>
+                  </a:schemeClr>
+                </a:solidFill>
+              </a:rPr>
+              <a:t>The Golden Prompt Formula</a:t>
+            </a:r>
+            <a:endParaRPr lang="en-US" sz="2800" dirty="0">
+              <a:solidFill>
+                <a:schemeClr val="accent6">
+                  <a:lumMod val="60000"/>
+                  <a:lumOff val="40000"/>
+                </a:schemeClr>
+              </a:solidFill>
+            </a:endParaRPr>
+          </a:p>
+        </p:txBody>
+      </p:sp>
+      <p:sp>
+        <p:nvSpPr>
+          <p:cNvPr id="3" name="TextBox 2">
+            <a:extLst>
+              <a:ext uri="{FF2B5EF4-FFF2-40B4-BE49-F238E27FC236}">
+                <a16:creationId xmlns:a16="http://schemas.microsoft.com/office/drawing/2014/main" id="{FEA16668-708F-9B3A-9401-B6B4F4EA4E70}"/>
+              </a:ext>
+            </a:extLst>
+          </p:cNvPr>
+          <p:cNvSpPr txBox="1"/>
+          <p:nvPr/>
+        </p:nvSpPr>
+        <p:spPr>
+          <a:xfrm>
+            <a:off x="334296" y="766101"/>
+            <a:ext cx="9859603" cy="6001643"/>
+          </a:xfrm>
+          <a:prstGeom prst="rect">
+            <a:avLst/>
+          </a:prstGeom>
+          <a:noFill/>
+        </p:spPr>
+        <p:txBody>
+          <a:bodyPr wrap="square">
+            <a:spAutoFit/>
+          </a:bodyPr>
+          <a:lstStyle/>
+          <a:p>
+            <a:r>
+              <a:rPr lang="en-IN" sz="2400" b="1" dirty="0">
+                <a:solidFill>
+                  <a:schemeClr val="accent4">
+                    <a:lumMod val="60000"/>
+                    <a:lumOff val="40000"/>
+                  </a:schemeClr>
+                </a:solidFill>
+              </a:rPr>
+              <a:t>Prompt = Context + Task + Constraint + Output Format</a:t>
+            </a:r>
+          </a:p>
+          <a:p>
+            <a:endParaRPr lang="en-IN" sz="2400" b="1" dirty="0">
+              <a:solidFill>
+                <a:schemeClr val="accent6">
+                  <a:lumMod val="60000"/>
+                  <a:lumOff val="40000"/>
+                </a:schemeClr>
+              </a:solidFill>
+            </a:endParaRPr>
+          </a:p>
+          <a:p>
+            <a:r>
+              <a:rPr lang="en-IN" sz="2400" b="1" dirty="0">
+                <a:solidFill>
+                  <a:schemeClr val="accent6">
+                    <a:lumMod val="60000"/>
+                    <a:lumOff val="40000"/>
+                  </a:schemeClr>
+                </a:solidFill>
+              </a:rPr>
+              <a:t>3. Constraint (Rules &amp; Limitations)</a:t>
+            </a:r>
+          </a:p>
+          <a:p>
+            <a:r>
+              <a:rPr lang="en-IN" sz="2400" dirty="0">
+                <a:solidFill>
+                  <a:schemeClr val="accent6">
+                    <a:lumMod val="60000"/>
+                    <a:lumOff val="40000"/>
+                  </a:schemeClr>
+                </a:solidFill>
+              </a:rPr>
+              <a:t>Controls AI output.</a:t>
+            </a:r>
+          </a:p>
+          <a:p>
+            <a:endParaRPr lang="en-IN" sz="2400" dirty="0">
+              <a:solidFill>
+                <a:schemeClr val="accent6">
+                  <a:lumMod val="60000"/>
+                  <a:lumOff val="40000"/>
+                </a:schemeClr>
+              </a:solidFill>
+            </a:endParaRPr>
+          </a:p>
+          <a:p>
+            <a:r>
+              <a:rPr lang="en-IN" sz="2400" dirty="0">
+                <a:solidFill>
+                  <a:schemeClr val="accent6">
+                    <a:lumMod val="60000"/>
+                    <a:lumOff val="40000"/>
+                  </a:schemeClr>
+                </a:solidFill>
+              </a:rPr>
+              <a:t>Examples:</a:t>
+            </a:r>
+          </a:p>
+          <a:p>
+            <a:pPr marL="342900" indent="-342900">
+              <a:buFont typeface="Arial" panose="020B0604020202020204" pitchFamily="34" charset="0"/>
+              <a:buChar char="•"/>
+            </a:pPr>
+            <a:r>
+              <a:rPr lang="en-IN" sz="2400" dirty="0">
+                <a:solidFill>
+                  <a:schemeClr val="accent6">
+                    <a:lumMod val="60000"/>
+                    <a:lumOff val="40000"/>
+                  </a:schemeClr>
+                </a:solidFill>
+              </a:rPr>
+              <a:t>Word limit</a:t>
+            </a:r>
+          </a:p>
+          <a:p>
+            <a:pPr marL="342900" indent="-342900">
+              <a:buFont typeface="Arial" panose="020B0604020202020204" pitchFamily="34" charset="0"/>
+              <a:buChar char="•"/>
+            </a:pPr>
+            <a:r>
+              <a:rPr lang="en-IN" sz="2400" dirty="0">
+                <a:solidFill>
+                  <a:schemeClr val="accent6">
+                    <a:lumMod val="60000"/>
+                    <a:lumOff val="40000"/>
+                  </a:schemeClr>
+                </a:solidFill>
+              </a:rPr>
+              <a:t>Tone</a:t>
+            </a:r>
+          </a:p>
+          <a:p>
+            <a:pPr marL="342900" indent="-342900">
+              <a:buFont typeface="Arial" panose="020B0604020202020204" pitchFamily="34" charset="0"/>
+              <a:buChar char="•"/>
+            </a:pPr>
+            <a:r>
+              <a:rPr lang="en-IN" sz="2400" dirty="0">
+                <a:solidFill>
+                  <a:schemeClr val="accent6">
+                    <a:lumMod val="60000"/>
+                    <a:lumOff val="40000"/>
+                  </a:schemeClr>
+                </a:solidFill>
+              </a:rPr>
+              <a:t>Audience level</a:t>
+            </a:r>
+          </a:p>
+          <a:p>
+            <a:pPr marL="342900" indent="-342900">
+              <a:buFont typeface="Arial" panose="020B0604020202020204" pitchFamily="34" charset="0"/>
+              <a:buChar char="•"/>
+            </a:pPr>
+            <a:r>
+              <a:rPr lang="en-IN" sz="2400" dirty="0">
+                <a:solidFill>
+                  <a:schemeClr val="accent6">
+                    <a:lumMod val="60000"/>
+                    <a:lumOff val="40000"/>
+                  </a:schemeClr>
+                </a:solidFill>
+              </a:rPr>
+              <a:t>Style</a:t>
+            </a:r>
+          </a:p>
+          <a:p>
+            <a:pPr marL="342900" indent="-342900">
+              <a:buFont typeface="Arial" panose="020B0604020202020204" pitchFamily="34" charset="0"/>
+              <a:buChar char="•"/>
+            </a:pPr>
+            <a:r>
+              <a:rPr lang="en-IN" sz="2400" dirty="0">
+                <a:solidFill>
+                  <a:schemeClr val="accent6">
+                    <a:lumMod val="60000"/>
+                    <a:lumOff val="40000"/>
+                  </a:schemeClr>
+                </a:solidFill>
+              </a:rPr>
+              <a:t>Technology restriction</a:t>
+            </a:r>
+          </a:p>
+          <a:p>
+            <a:endParaRPr lang="en-IN" sz="2400" dirty="0">
+              <a:solidFill>
+                <a:schemeClr val="accent6">
+                  <a:lumMod val="60000"/>
+                  <a:lumOff val="40000"/>
+                </a:schemeClr>
+              </a:solidFill>
+            </a:endParaRPr>
+          </a:p>
+          <a:p>
+            <a:r>
+              <a:rPr lang="en-US" sz="2400" dirty="0">
+                <a:solidFill>
+                  <a:schemeClr val="accent6">
+                    <a:lumMod val="60000"/>
+                    <a:lumOff val="40000"/>
+                  </a:schemeClr>
+                </a:solidFill>
+              </a:rPr>
+              <a:t>Example: </a:t>
+            </a:r>
+          </a:p>
+          <a:p>
+            <a:r>
+              <a:rPr lang="en-US" sz="2400" dirty="0">
+                <a:solidFill>
+                  <a:schemeClr val="accent6">
+                    <a:lumMod val="60000"/>
+                    <a:lumOff val="40000"/>
+                  </a:schemeClr>
+                </a:solidFill>
+              </a:rPr>
+              <a:t>Explain in </a:t>
+            </a:r>
+            <a:r>
+              <a:rPr lang="en-US" sz="2400" b="1" i="1" dirty="0">
+                <a:solidFill>
+                  <a:schemeClr val="accent6">
+                    <a:lumMod val="60000"/>
+                    <a:lumOff val="40000"/>
+                  </a:schemeClr>
+                </a:solidFill>
+              </a:rPr>
+              <a:t>simple language under 150 words</a:t>
+            </a:r>
+            <a:r>
+              <a:rPr lang="en-US" sz="2400" b="1" dirty="0">
+                <a:solidFill>
+                  <a:schemeClr val="accent6">
+                    <a:lumMod val="60000"/>
+                    <a:lumOff val="40000"/>
+                  </a:schemeClr>
+                </a:solidFill>
+              </a:rPr>
+              <a:t> </a:t>
+            </a:r>
+            <a:r>
+              <a:rPr lang="en-US" sz="2400" dirty="0">
+                <a:solidFill>
+                  <a:schemeClr val="accent6">
+                    <a:lumMod val="60000"/>
+                    <a:lumOff val="40000"/>
+                  </a:schemeClr>
+                </a:solidFill>
+              </a:rPr>
+              <a:t>the concept of calculus. My audience is </a:t>
+            </a:r>
+            <a:r>
+              <a:rPr lang="en-US" sz="2400" b="1" i="1" dirty="0">
+                <a:solidFill>
+                  <a:schemeClr val="accent6">
+                    <a:lumMod val="60000"/>
+                    <a:lumOff val="40000"/>
+                  </a:schemeClr>
+                </a:solidFill>
+              </a:rPr>
+              <a:t>high school students</a:t>
+            </a:r>
+            <a:r>
+              <a:rPr lang="en-US" sz="2400" b="1" dirty="0">
+                <a:solidFill>
+                  <a:schemeClr val="accent6">
+                    <a:lumMod val="60000"/>
+                    <a:lumOff val="40000"/>
+                  </a:schemeClr>
+                </a:solidFill>
+              </a:rPr>
+              <a:t> </a:t>
+            </a:r>
+            <a:r>
+              <a:rPr lang="en-US" sz="2400" dirty="0">
+                <a:solidFill>
+                  <a:schemeClr val="accent6">
+                    <a:lumMod val="60000"/>
+                    <a:lumOff val="40000"/>
+                  </a:schemeClr>
+                </a:solidFill>
+              </a:rPr>
+              <a:t>with weak math background. </a:t>
+            </a:r>
+            <a:r>
+              <a:rPr lang="en-US" sz="2400" b="1" i="1" dirty="0">
+                <a:solidFill>
+                  <a:schemeClr val="accent6">
+                    <a:lumMod val="60000"/>
+                    <a:lumOff val="40000"/>
+                  </a:schemeClr>
+                </a:solidFill>
+              </a:rPr>
+              <a:t>Do not use complex math formulas.</a:t>
+            </a:r>
+          </a:p>
+        </p:txBody>
+      </p:sp>
+    </p:spTree>
+    <p:extLst>
+      <p:ext uri="{BB962C8B-B14F-4D97-AF65-F5344CB8AC3E}">
+        <p14:creationId xmlns:p14="http://schemas.microsoft.com/office/powerpoint/2010/main" val="3973849161"/>
+      </p:ext>
+    </p:extLst>
+  </p:cSld>
+  <p:clrMapOvr>
+    <a:masterClrMapping/>
+  </p:clrMapOvr>
+</p:sld>
+</file>
+
+<file path=ppt/slides/slide28.xml><?xml version="1.0" encoding="utf-8"?>
+<p:sld xmlns:a="http://schemas.openxmlformats.org/drawingml/2006/main" xmlns:r="http://schemas.openxmlformats.org/officeDocument/2006/relationships" xmlns:p="http://schemas.openxmlformats.org/presentationml/2006/main">
+  <p:cSld>
+    <p:spTree>
+      <p:nvGrpSpPr>
+        <p:cNvPr id="1" name="">
+          <a:extLst>
+            <a:ext uri="{FF2B5EF4-FFF2-40B4-BE49-F238E27FC236}">
+              <a16:creationId xmlns:a16="http://schemas.microsoft.com/office/drawing/2014/main" id="{173670BF-11AC-D158-95CA-D69482D74C5A}"/>
+            </a:ext>
+          </a:extLst>
+        </p:cNvPr>
+        <p:cNvGrpSpPr/>
+        <p:nvPr/>
+      </p:nvGrpSpPr>
+      <p:grpSpPr>
+        <a:xfrm>
+          <a:off x="0" y="0"/>
+          <a:ext cx="0" cy="0"/>
+          <a:chOff x="0" y="0"/>
+          <a:chExt cx="0" cy="0"/>
+        </a:xfrm>
+      </p:grpSpPr>
+      <p:sp>
+        <p:nvSpPr>
+          <p:cNvPr id="9" name="TextBox 8">
+            <a:extLst>
+              <a:ext uri="{FF2B5EF4-FFF2-40B4-BE49-F238E27FC236}">
+                <a16:creationId xmlns:a16="http://schemas.microsoft.com/office/drawing/2014/main" id="{61CC46AD-353B-E9B0-DBC3-9EE0EE447951}"/>
+              </a:ext>
+            </a:extLst>
+          </p:cNvPr>
+          <p:cNvSpPr txBox="1"/>
+          <p:nvPr/>
+        </p:nvSpPr>
+        <p:spPr>
+          <a:xfrm>
+            <a:off x="592087" y="123858"/>
+            <a:ext cx="9859604" cy="523220"/>
+          </a:xfrm>
+          <a:prstGeom prst="rect">
+            <a:avLst/>
+          </a:prstGeom>
+          <a:noFill/>
+        </p:spPr>
+        <p:txBody>
+          <a:bodyPr wrap="square" rtlCol="0">
+            <a:spAutoFit/>
+          </a:bodyPr>
+          <a:lstStyle/>
+          <a:p>
+            <a:pPr algn="ctr"/>
+            <a:r>
+              <a:rPr lang="en-IN" sz="2800" dirty="0">
+                <a:solidFill>
+                  <a:schemeClr val="accent6">
+                    <a:lumMod val="60000"/>
+                    <a:lumOff val="40000"/>
+                  </a:schemeClr>
+                </a:solidFill>
+              </a:rPr>
+              <a:t>The Golden Prompt Formula</a:t>
+            </a:r>
+            <a:endParaRPr lang="en-US" sz="2800" dirty="0">
+              <a:solidFill>
+                <a:schemeClr val="accent6">
+                  <a:lumMod val="60000"/>
+                  <a:lumOff val="40000"/>
+                </a:schemeClr>
+              </a:solidFill>
+            </a:endParaRPr>
+          </a:p>
+        </p:txBody>
+      </p:sp>
+      <p:sp>
+        <p:nvSpPr>
+          <p:cNvPr id="3" name="TextBox 2">
+            <a:extLst>
+              <a:ext uri="{FF2B5EF4-FFF2-40B4-BE49-F238E27FC236}">
+                <a16:creationId xmlns:a16="http://schemas.microsoft.com/office/drawing/2014/main" id="{129E7542-8957-F3C2-DB3D-05ED1D5A72C9}"/>
+              </a:ext>
+            </a:extLst>
+          </p:cNvPr>
+          <p:cNvSpPr txBox="1"/>
+          <p:nvPr/>
+        </p:nvSpPr>
+        <p:spPr>
+          <a:xfrm>
+            <a:off x="334297" y="811821"/>
+            <a:ext cx="7423355" cy="4154984"/>
+          </a:xfrm>
+          <a:prstGeom prst="rect">
+            <a:avLst/>
+          </a:prstGeom>
+          <a:noFill/>
+        </p:spPr>
+        <p:txBody>
+          <a:bodyPr wrap="square">
+            <a:spAutoFit/>
+          </a:bodyPr>
+          <a:lstStyle/>
+          <a:p>
+            <a:r>
+              <a:rPr lang="en-IN" sz="2400" b="1" dirty="0">
+                <a:solidFill>
+                  <a:schemeClr val="accent4">
+                    <a:lumMod val="60000"/>
+                    <a:lumOff val="40000"/>
+                  </a:schemeClr>
+                </a:solidFill>
+              </a:rPr>
+              <a:t>Prompt = Context + Task + Constraint + Output Format</a:t>
+            </a:r>
+          </a:p>
+          <a:p>
+            <a:endParaRPr lang="en-US" sz="2400" b="1" dirty="0">
+              <a:solidFill>
+                <a:schemeClr val="accent6">
+                  <a:lumMod val="60000"/>
+                  <a:lumOff val="40000"/>
+                </a:schemeClr>
+              </a:solidFill>
+            </a:endParaRPr>
+          </a:p>
+          <a:p>
+            <a:r>
+              <a:rPr lang="en-US" sz="2400" b="1" dirty="0">
+                <a:solidFill>
+                  <a:schemeClr val="accent6">
+                    <a:lumMod val="60000"/>
+                    <a:lumOff val="40000"/>
+                  </a:schemeClr>
+                </a:solidFill>
+              </a:rPr>
+              <a:t>4. Output Format (Structure)</a:t>
+            </a:r>
+          </a:p>
+          <a:p>
+            <a:r>
+              <a:rPr lang="en-US" sz="2400" dirty="0">
+                <a:solidFill>
+                  <a:schemeClr val="accent6">
+                    <a:lumMod val="60000"/>
+                    <a:lumOff val="40000"/>
+                  </a:schemeClr>
+                </a:solidFill>
+              </a:rPr>
+              <a:t>This dramatically improves results.</a:t>
+            </a:r>
+          </a:p>
+          <a:p>
+            <a:endParaRPr lang="en-US" sz="2400" dirty="0">
+              <a:solidFill>
+                <a:schemeClr val="accent6">
+                  <a:lumMod val="60000"/>
+                  <a:lumOff val="40000"/>
+                </a:schemeClr>
+              </a:solidFill>
+            </a:endParaRPr>
+          </a:p>
+          <a:p>
+            <a:r>
+              <a:rPr lang="en-US" sz="2400" dirty="0">
+                <a:solidFill>
+                  <a:schemeClr val="accent6">
+                    <a:lumMod val="60000"/>
+                    <a:lumOff val="40000"/>
+                  </a:schemeClr>
+                </a:solidFill>
+              </a:rPr>
+              <a:t>Output format examples:</a:t>
+            </a:r>
+          </a:p>
+          <a:p>
+            <a:pPr marL="342900" indent="-342900">
+              <a:buFont typeface="Arial" panose="020B0604020202020204" pitchFamily="34" charset="0"/>
+              <a:buChar char="•"/>
+            </a:pPr>
+            <a:r>
+              <a:rPr lang="en-US" sz="2400" dirty="0">
+                <a:solidFill>
+                  <a:schemeClr val="accent6">
+                    <a:lumMod val="60000"/>
+                    <a:lumOff val="40000"/>
+                  </a:schemeClr>
+                </a:solidFill>
+              </a:rPr>
+              <a:t>Table</a:t>
+            </a:r>
+          </a:p>
+          <a:p>
+            <a:pPr marL="342900" indent="-342900">
+              <a:buFont typeface="Arial" panose="020B0604020202020204" pitchFamily="34" charset="0"/>
+              <a:buChar char="•"/>
+            </a:pPr>
+            <a:r>
+              <a:rPr lang="en-US" sz="2400" dirty="0">
+                <a:solidFill>
+                  <a:schemeClr val="accent6">
+                    <a:lumMod val="60000"/>
+                    <a:lumOff val="40000"/>
+                  </a:schemeClr>
+                </a:solidFill>
+              </a:rPr>
+              <a:t>Bullet points</a:t>
+            </a:r>
+          </a:p>
+          <a:p>
+            <a:pPr marL="342900" indent="-342900">
+              <a:buFont typeface="Arial" panose="020B0604020202020204" pitchFamily="34" charset="0"/>
+              <a:buChar char="•"/>
+            </a:pPr>
+            <a:r>
+              <a:rPr lang="en-US" sz="2400" dirty="0">
+                <a:solidFill>
+                  <a:schemeClr val="accent6">
+                    <a:lumMod val="60000"/>
+                    <a:lumOff val="40000"/>
+                  </a:schemeClr>
+                </a:solidFill>
+              </a:rPr>
+              <a:t>JSON</a:t>
+            </a:r>
+          </a:p>
+          <a:p>
+            <a:pPr marL="342900" indent="-342900">
+              <a:buFont typeface="Arial" panose="020B0604020202020204" pitchFamily="34" charset="0"/>
+              <a:buChar char="•"/>
+            </a:pPr>
+            <a:r>
+              <a:rPr lang="en-US" sz="2400" dirty="0">
+                <a:solidFill>
+                  <a:schemeClr val="accent6">
+                    <a:lumMod val="60000"/>
+                    <a:lumOff val="40000"/>
+                  </a:schemeClr>
+                </a:solidFill>
+              </a:rPr>
+              <a:t>Code</a:t>
+            </a:r>
+          </a:p>
+          <a:p>
+            <a:pPr marL="342900" indent="-342900">
+              <a:buFont typeface="Arial" panose="020B0604020202020204" pitchFamily="34" charset="0"/>
+              <a:buChar char="•"/>
+            </a:pPr>
+            <a:r>
+              <a:rPr lang="en-US" sz="2400" dirty="0">
+                <a:solidFill>
+                  <a:schemeClr val="accent6">
+                    <a:lumMod val="60000"/>
+                    <a:lumOff val="40000"/>
+                  </a:schemeClr>
+                </a:solidFill>
+              </a:rPr>
+              <a:t>Step-by-step guide</a:t>
+            </a:r>
+          </a:p>
+        </p:txBody>
+      </p:sp>
+    </p:spTree>
+    <p:extLst>
+      <p:ext uri="{BB962C8B-B14F-4D97-AF65-F5344CB8AC3E}">
+        <p14:creationId xmlns:p14="http://schemas.microsoft.com/office/powerpoint/2010/main" val="3464606236"/>
+      </p:ext>
+    </p:extLst>
+  </p:cSld>
+  <p:clrMapOvr>
+    <a:masterClrMapping/>
+  </p:clrMapOvr>
+</p:sld>
+</file>
+
+<file path=ppt/slides/slide29.xml><?xml version="1.0" encoding="utf-8"?>
+<p:sld xmlns:a="http://schemas.openxmlformats.org/drawingml/2006/main" xmlns:r="http://schemas.openxmlformats.org/officeDocument/2006/relationships" xmlns:p="http://schemas.openxmlformats.org/presentationml/2006/main">
+  <p:cSld>
+    <p:spTree>
+      <p:nvGrpSpPr>
+        <p:cNvPr id="1" name="">
+          <a:extLst>
+            <a:ext uri="{FF2B5EF4-FFF2-40B4-BE49-F238E27FC236}">
+              <a16:creationId xmlns:a16="http://schemas.microsoft.com/office/drawing/2014/main" id="{602DC570-E0A4-B9C5-988A-7FC8B36737CC}"/>
+            </a:ext>
+          </a:extLst>
+        </p:cNvPr>
+        <p:cNvGrpSpPr/>
+        <p:nvPr/>
+      </p:nvGrpSpPr>
+      <p:grpSpPr>
+        <a:xfrm>
+          <a:off x="0" y="0"/>
+          <a:ext cx="0" cy="0"/>
+          <a:chOff x="0" y="0"/>
+          <a:chExt cx="0" cy="0"/>
+        </a:xfrm>
+      </p:grpSpPr>
+      <p:sp>
+        <p:nvSpPr>
+          <p:cNvPr id="9" name="TextBox 8">
+            <a:extLst>
+              <a:ext uri="{FF2B5EF4-FFF2-40B4-BE49-F238E27FC236}">
+                <a16:creationId xmlns:a16="http://schemas.microsoft.com/office/drawing/2014/main" id="{42CD7745-5608-5569-FDDD-A46EA0CF672E}"/>
+              </a:ext>
+            </a:extLst>
+          </p:cNvPr>
+          <p:cNvSpPr txBox="1"/>
+          <p:nvPr/>
+        </p:nvSpPr>
+        <p:spPr>
+          <a:xfrm>
+            <a:off x="592087" y="123858"/>
+            <a:ext cx="9859604" cy="523220"/>
+          </a:xfrm>
+          <a:prstGeom prst="rect">
+            <a:avLst/>
+          </a:prstGeom>
+          <a:noFill/>
+        </p:spPr>
+        <p:txBody>
+          <a:bodyPr wrap="square" rtlCol="0">
+            <a:spAutoFit/>
+          </a:bodyPr>
+          <a:lstStyle/>
+          <a:p>
+            <a:pPr algn="ctr"/>
+            <a:r>
+              <a:rPr lang="en-IN" sz="2800" dirty="0">
+                <a:solidFill>
+                  <a:schemeClr val="accent6">
+                    <a:lumMod val="60000"/>
+                    <a:lumOff val="40000"/>
+                  </a:schemeClr>
+                </a:solidFill>
+              </a:rPr>
+              <a:t>The Golden Prompt Formula</a:t>
+            </a:r>
+            <a:endParaRPr lang="en-US" sz="2800" dirty="0">
+              <a:solidFill>
+                <a:schemeClr val="accent6">
+                  <a:lumMod val="60000"/>
+                  <a:lumOff val="40000"/>
+                </a:schemeClr>
+              </a:solidFill>
+            </a:endParaRPr>
+          </a:p>
+        </p:txBody>
+      </p:sp>
+      <p:pic>
+        <p:nvPicPr>
+          <p:cNvPr id="4" name="Picture 3">
+            <a:extLst>
+              <a:ext uri="{FF2B5EF4-FFF2-40B4-BE49-F238E27FC236}">
+                <a16:creationId xmlns:a16="http://schemas.microsoft.com/office/drawing/2014/main" id="{E6F581D1-28DA-28B5-FFEB-DB6C8CF6619B}"/>
+              </a:ext>
+            </a:extLst>
+          </p:cNvPr>
+          <p:cNvPicPr>
+            <a:picLocks noChangeAspect="1"/>
+          </p:cNvPicPr>
+          <p:nvPr/>
+        </p:nvPicPr>
+        <p:blipFill>
+          <a:blip r:embed="rId3"/>
+          <a:stretch>
+            <a:fillRect/>
+          </a:stretch>
+        </p:blipFill>
+        <p:spPr>
+          <a:xfrm>
+            <a:off x="1200913" y="3104883"/>
+            <a:ext cx="8917158" cy="2637155"/>
+          </a:xfrm>
+          <a:prstGeom prst="rect">
+            <a:avLst/>
+          </a:prstGeom>
+        </p:spPr>
+      </p:pic>
+      <p:sp>
+        <p:nvSpPr>
+          <p:cNvPr id="6" name="TextBox 5">
+            <a:extLst>
+              <a:ext uri="{FF2B5EF4-FFF2-40B4-BE49-F238E27FC236}">
+                <a16:creationId xmlns:a16="http://schemas.microsoft.com/office/drawing/2014/main" id="{FFFC0898-4A59-3995-001A-ED66D933E0DB}"/>
+              </a:ext>
+            </a:extLst>
+          </p:cNvPr>
+          <p:cNvSpPr txBox="1"/>
+          <p:nvPr/>
+        </p:nvSpPr>
+        <p:spPr>
+          <a:xfrm>
+            <a:off x="522487" y="985427"/>
+            <a:ext cx="9358932" cy="1200329"/>
+          </a:xfrm>
+          <a:prstGeom prst="rect">
+            <a:avLst/>
+          </a:prstGeom>
+          <a:noFill/>
+        </p:spPr>
+        <p:txBody>
+          <a:bodyPr wrap="square">
+            <a:spAutoFit/>
+          </a:bodyPr>
+          <a:lstStyle/>
+          <a:p>
+            <a:r>
+              <a:rPr lang="en-US" sz="2400" dirty="0">
+                <a:solidFill>
+                  <a:schemeClr val="accent6">
+                    <a:lumMod val="60000"/>
+                    <a:lumOff val="40000"/>
+                  </a:schemeClr>
+                </a:solidFill>
+              </a:rPr>
+              <a:t>Example: </a:t>
+            </a:r>
+          </a:p>
+          <a:p>
+            <a:r>
+              <a:rPr lang="en-US" sz="2400" dirty="0">
+                <a:solidFill>
+                  <a:schemeClr val="accent6">
+                    <a:lumMod val="60000"/>
+                    <a:lumOff val="40000"/>
+                  </a:schemeClr>
+                </a:solidFill>
+              </a:rPr>
+              <a:t>Tell me the 3 difference between regular data and time series data. Provide output in </a:t>
+            </a:r>
+            <a:r>
+              <a:rPr lang="en-US" sz="2400" b="1" i="1" dirty="0">
+                <a:solidFill>
+                  <a:schemeClr val="accent6">
+                    <a:lumMod val="60000"/>
+                    <a:lumOff val="40000"/>
+                  </a:schemeClr>
+                </a:solidFill>
+              </a:rPr>
+              <a:t>table format</a:t>
+            </a:r>
+            <a:r>
+              <a:rPr lang="en-US" sz="2400" dirty="0">
+                <a:solidFill>
+                  <a:schemeClr val="accent6">
+                    <a:lumMod val="60000"/>
+                    <a:lumOff val="40000"/>
+                  </a:schemeClr>
+                </a:solidFill>
+              </a:rPr>
+              <a:t>.</a:t>
+            </a:r>
+          </a:p>
+        </p:txBody>
+      </p:sp>
+    </p:spTree>
+    <p:extLst>
+      <p:ext uri="{BB962C8B-B14F-4D97-AF65-F5344CB8AC3E}">
+        <p14:creationId xmlns:p14="http://schemas.microsoft.com/office/powerpoint/2010/main" val="3378689541"/>
+      </p:ext>
+    </p:extLst>
+  </p:cSld>
+  <p:clrMapOvr>
+    <a:masterClrMapping/>
+  </p:clrMapOvr>
+</p:sld>
+</file>
+
+<file path=ppt/slides/slide3.xml><?xml version="1.0" encoding="utf-8"?>
 <p:sld xmlns:a="http://schemas.openxmlformats.org/drawingml/2006/main" xmlns:r="http://schemas.openxmlformats.org/officeDocument/2006/relationships" xmlns:p="http://schemas.openxmlformats.org/presentationml/2006/main">
   <p:cSld>
     <p:spTree>
@@ -8034,2247 +10920,7 @@
 </p:sld>
 </file>
 
-<file path=ppt/slides/slide20.xml><?xml version="1.0" encoding="utf-8"?>
-<p:sld xmlns:a="http://schemas.openxmlformats.org/drawingml/2006/main" xmlns:r="http://schemas.openxmlformats.org/officeDocument/2006/relationships" xmlns:p="http://schemas.openxmlformats.org/presentationml/2006/main">
-  <p:cSld>
-    <p:spTree>
-      <p:nvGrpSpPr>
-        <p:cNvPr id="1" name="">
-          <a:extLst>
-            <a:ext uri="{FF2B5EF4-FFF2-40B4-BE49-F238E27FC236}">
-              <a16:creationId xmlns:a16="http://schemas.microsoft.com/office/drawing/2014/main" id="{7BE7EC01-868E-51D5-AFC2-04601CBF63F3}"/>
-            </a:ext>
-          </a:extLst>
-        </p:cNvPr>
-        <p:cNvGrpSpPr/>
-        <p:nvPr/>
-      </p:nvGrpSpPr>
-      <p:grpSpPr>
-        <a:xfrm>
-          <a:off x="0" y="0"/>
-          <a:ext cx="0" cy="0"/>
-          <a:chOff x="0" y="0"/>
-          <a:chExt cx="0" cy="0"/>
-        </a:xfrm>
-      </p:grpSpPr>
-      <p:sp>
-        <p:nvSpPr>
-          <p:cNvPr id="9" name="TextBox 8">
-            <a:extLst>
-              <a:ext uri="{FF2B5EF4-FFF2-40B4-BE49-F238E27FC236}">
-                <a16:creationId xmlns:a16="http://schemas.microsoft.com/office/drawing/2014/main" id="{F6DE7F71-4BCB-3293-30E2-B234F9E82116}"/>
-              </a:ext>
-            </a:extLst>
-          </p:cNvPr>
-          <p:cNvSpPr txBox="1"/>
-          <p:nvPr/>
-        </p:nvSpPr>
-        <p:spPr>
-          <a:xfrm>
-            <a:off x="592087" y="123858"/>
-            <a:ext cx="9859604" cy="523220"/>
-          </a:xfrm>
-          <a:prstGeom prst="rect">
-            <a:avLst/>
-          </a:prstGeom>
-          <a:noFill/>
-        </p:spPr>
-        <p:txBody>
-          <a:bodyPr wrap="square" rtlCol="0">
-            <a:spAutoFit/>
-          </a:bodyPr>
-          <a:lstStyle/>
-          <a:p>
-            <a:pPr algn="ctr"/>
-            <a:r>
-              <a:rPr lang="en-US" sz="2800" dirty="0">
-                <a:solidFill>
-                  <a:schemeClr val="accent6">
-                    <a:lumMod val="60000"/>
-                    <a:lumOff val="40000"/>
-                  </a:schemeClr>
-                </a:solidFill>
-              </a:rPr>
-              <a:t>Hallucinations – Why AI Lies &amp; How to Stop It</a:t>
-            </a:r>
-          </a:p>
-        </p:txBody>
-      </p:sp>
-      <p:sp>
-        <p:nvSpPr>
-          <p:cNvPr id="3" name="TextBox 2">
-            <a:extLst>
-              <a:ext uri="{FF2B5EF4-FFF2-40B4-BE49-F238E27FC236}">
-                <a16:creationId xmlns:a16="http://schemas.microsoft.com/office/drawing/2014/main" id="{6141AFE8-D07E-2ABA-986F-EDCAE0FC3DA3}"/>
-              </a:ext>
-            </a:extLst>
-          </p:cNvPr>
-          <p:cNvSpPr txBox="1"/>
-          <p:nvPr/>
-        </p:nvSpPr>
-        <p:spPr>
-          <a:xfrm>
-            <a:off x="334296" y="1305597"/>
-            <a:ext cx="10336751" cy="3785652"/>
-          </a:xfrm>
-          <a:prstGeom prst="rect">
-            <a:avLst/>
-          </a:prstGeom>
-          <a:noFill/>
-        </p:spPr>
-        <p:txBody>
-          <a:bodyPr wrap="square">
-            <a:spAutoFit/>
-          </a:bodyPr>
-          <a:lstStyle/>
-          <a:p>
-            <a:r>
-              <a:rPr lang="en-US" sz="2400" b="1" dirty="0">
-                <a:solidFill>
-                  <a:schemeClr val="accent6">
-                    <a:lumMod val="60000"/>
-                    <a:lumOff val="40000"/>
-                  </a:schemeClr>
-                </a:solidFill>
-              </a:rPr>
-              <a:t>Role Prompting</a:t>
-            </a:r>
-          </a:p>
-          <a:p>
-            <a:endParaRPr lang="en-US" sz="2400" b="1" dirty="0">
-              <a:solidFill>
-                <a:schemeClr val="accent6">
-                  <a:lumMod val="60000"/>
-                  <a:lumOff val="40000"/>
-                </a:schemeClr>
-              </a:solidFill>
-            </a:endParaRPr>
-          </a:p>
-          <a:p>
-            <a:r>
-              <a:rPr lang="en-US" sz="2400" dirty="0">
-                <a:solidFill>
-                  <a:schemeClr val="accent6">
-                    <a:lumMod val="60000"/>
-                    <a:lumOff val="40000"/>
-                  </a:schemeClr>
-                </a:solidFill>
-              </a:rPr>
-              <a:t>The "</a:t>
-            </a:r>
-            <a:r>
-              <a:rPr lang="en-US" sz="2400" b="1" i="1" dirty="0">
-                <a:solidFill>
-                  <a:schemeClr val="accent6">
-                    <a:lumMod val="60000"/>
-                    <a:lumOff val="40000"/>
-                  </a:schemeClr>
-                </a:solidFill>
-              </a:rPr>
-              <a:t>Generic</a:t>
-            </a:r>
-            <a:r>
-              <a:rPr lang="en-US" sz="2400" dirty="0">
-                <a:solidFill>
-                  <a:schemeClr val="accent6">
-                    <a:lumMod val="60000"/>
-                    <a:lumOff val="40000"/>
-                  </a:schemeClr>
-                </a:solidFill>
-              </a:rPr>
-              <a:t>" Prompt (High Hallucination Risk)</a:t>
-            </a:r>
-          </a:p>
-          <a:p>
-            <a:endParaRPr lang="en-US" sz="2400" dirty="0">
-              <a:solidFill>
-                <a:schemeClr val="accent6">
-                  <a:lumMod val="60000"/>
-                  <a:lumOff val="40000"/>
-                </a:schemeClr>
-              </a:solidFill>
-            </a:endParaRPr>
-          </a:p>
-          <a:p>
-            <a:r>
-              <a:rPr lang="en-US" sz="2400" dirty="0">
-                <a:solidFill>
-                  <a:schemeClr val="accent6">
-                    <a:lumMod val="60000"/>
-                    <a:lumOff val="40000"/>
-                  </a:schemeClr>
-                </a:solidFill>
-              </a:rPr>
-              <a:t>Bad Prompt: </a:t>
-            </a:r>
-            <a:r>
-              <a:rPr lang="en-US" sz="2400" dirty="0">
-                <a:solidFill>
-                  <a:schemeClr val="accent4">
-                    <a:lumMod val="60000"/>
-                    <a:lumOff val="40000"/>
-                  </a:schemeClr>
-                </a:solidFill>
-              </a:rPr>
-              <a:t>"What should I do if my heart is racing?“</a:t>
-            </a:r>
-          </a:p>
-          <a:p>
-            <a:endParaRPr lang="en-US" sz="2400" dirty="0">
-              <a:solidFill>
-                <a:schemeClr val="accent6">
-                  <a:lumMod val="60000"/>
-                  <a:lumOff val="40000"/>
-                </a:schemeClr>
-              </a:solidFill>
-            </a:endParaRPr>
-          </a:p>
-          <a:p>
-            <a:r>
-              <a:rPr lang="en-US" sz="2400" dirty="0">
-                <a:solidFill>
-                  <a:schemeClr val="accent6">
-                    <a:lumMod val="60000"/>
-                    <a:lumOff val="40000"/>
-                  </a:schemeClr>
-                </a:solidFill>
-              </a:rPr>
-              <a:t>Risk: The AI might give overly cautious, irrelevant, or dangerously vague advice because it's pulling from its entire training set—which includes forums, blog posts, and fiction.</a:t>
-            </a:r>
-          </a:p>
-          <a:p>
-            <a:r>
-              <a:rPr lang="en-US" sz="2400" dirty="0">
-                <a:solidFill>
-                  <a:schemeClr val="accent6">
-                    <a:lumMod val="60000"/>
-                    <a:lumOff val="40000"/>
-                  </a:schemeClr>
-                </a:solidFill>
-              </a:rPr>
-              <a:t> </a:t>
-            </a:r>
-          </a:p>
-        </p:txBody>
-      </p:sp>
-    </p:spTree>
-    <p:extLst>
-      <p:ext uri="{BB962C8B-B14F-4D97-AF65-F5344CB8AC3E}">
-        <p14:creationId xmlns:p14="http://schemas.microsoft.com/office/powerpoint/2010/main" val="3386885138"/>
-      </p:ext>
-    </p:extLst>
-  </p:cSld>
-  <p:clrMapOvr>
-    <a:masterClrMapping/>
-  </p:clrMapOvr>
-</p:sld>
-</file>
-
-<file path=ppt/slides/slide21.xml><?xml version="1.0" encoding="utf-8"?>
-<p:sld xmlns:a="http://schemas.openxmlformats.org/drawingml/2006/main" xmlns:r="http://schemas.openxmlformats.org/officeDocument/2006/relationships" xmlns:p="http://schemas.openxmlformats.org/presentationml/2006/main">
-  <p:cSld>
-    <p:spTree>
-      <p:nvGrpSpPr>
-        <p:cNvPr id="1" name="">
-          <a:extLst>
-            <a:ext uri="{FF2B5EF4-FFF2-40B4-BE49-F238E27FC236}">
-              <a16:creationId xmlns:a16="http://schemas.microsoft.com/office/drawing/2014/main" id="{6B66B357-E497-DF01-124A-B0781F1B11C0}"/>
-            </a:ext>
-          </a:extLst>
-        </p:cNvPr>
-        <p:cNvGrpSpPr/>
-        <p:nvPr/>
-      </p:nvGrpSpPr>
-      <p:grpSpPr>
-        <a:xfrm>
-          <a:off x="0" y="0"/>
-          <a:ext cx="0" cy="0"/>
-          <a:chOff x="0" y="0"/>
-          <a:chExt cx="0" cy="0"/>
-        </a:xfrm>
-      </p:grpSpPr>
-      <p:sp>
-        <p:nvSpPr>
-          <p:cNvPr id="3" name="TextBox 2">
-            <a:extLst>
-              <a:ext uri="{FF2B5EF4-FFF2-40B4-BE49-F238E27FC236}">
-                <a16:creationId xmlns:a16="http://schemas.microsoft.com/office/drawing/2014/main" id="{44415BF9-1F39-844F-1575-041EF59759EA}"/>
-              </a:ext>
-            </a:extLst>
-          </p:cNvPr>
-          <p:cNvSpPr txBox="1"/>
-          <p:nvPr/>
-        </p:nvSpPr>
-        <p:spPr>
-          <a:xfrm>
-            <a:off x="334296" y="116877"/>
-            <a:ext cx="11379168" cy="2308324"/>
-          </a:xfrm>
-          <a:prstGeom prst="rect">
-            <a:avLst/>
-          </a:prstGeom>
-          <a:noFill/>
-        </p:spPr>
-        <p:txBody>
-          <a:bodyPr wrap="square">
-            <a:spAutoFit/>
-          </a:bodyPr>
-          <a:lstStyle/>
-          <a:p>
-            <a:r>
-              <a:rPr lang="en-US" sz="2400" dirty="0">
-                <a:solidFill>
-                  <a:schemeClr val="accent6">
-                    <a:lumMod val="60000"/>
-                    <a:lumOff val="40000"/>
-                  </a:schemeClr>
-                </a:solidFill>
-              </a:rPr>
-              <a:t>The "Role-Prompted" Example (Lower Hallucination Risk)</a:t>
-            </a:r>
-          </a:p>
-          <a:p>
-            <a:endParaRPr lang="en-US" sz="2400" dirty="0">
-              <a:solidFill>
-                <a:schemeClr val="accent6">
-                  <a:lumMod val="60000"/>
-                  <a:lumOff val="40000"/>
-                </a:schemeClr>
-              </a:solidFill>
-            </a:endParaRPr>
-          </a:p>
-          <a:p>
-            <a:r>
-              <a:rPr lang="en-US" sz="2400" dirty="0">
-                <a:solidFill>
-                  <a:schemeClr val="accent6">
-                    <a:lumMod val="60000"/>
-                    <a:lumOff val="40000"/>
-                  </a:schemeClr>
-                </a:solidFill>
-              </a:rPr>
-              <a:t>Better Prompt: </a:t>
-            </a:r>
-            <a:r>
-              <a:rPr lang="en-US" sz="2400" dirty="0">
-                <a:solidFill>
-                  <a:schemeClr val="accent4">
-                    <a:lumMod val="60000"/>
-                    <a:lumOff val="40000"/>
-                  </a:schemeClr>
-                </a:solidFill>
-              </a:rPr>
-              <a:t>"You are a board-certified cardiologist with 20 years of experience. </a:t>
-            </a:r>
-          </a:p>
-          <a:p>
-            <a:r>
-              <a:rPr lang="en-US" sz="2400" dirty="0">
-                <a:solidFill>
-                  <a:schemeClr val="accent4">
-                    <a:lumMod val="60000"/>
-                    <a:lumOff val="40000"/>
-                  </a:schemeClr>
-                </a:solidFill>
-              </a:rPr>
-              <a:t>Based on clinical emergency protocols, what is the step-by-step procedure for a patient experiencing a sudden resting heart rate over 120 BPM? If you are unsure of specific diagnostic criteria, state that you cannot provide medical advice for that detail</a:t>
-            </a:r>
-            <a:r>
-              <a:rPr lang="en-US" sz="2400" dirty="0">
-                <a:solidFill>
-                  <a:schemeClr val="accent6">
-                    <a:lumMod val="60000"/>
-                    <a:lumOff val="40000"/>
-                  </a:schemeClr>
-                </a:solidFill>
-              </a:rPr>
-              <a:t>."</a:t>
-            </a:r>
-          </a:p>
-        </p:txBody>
-      </p:sp>
-      <p:sp>
-        <p:nvSpPr>
-          <p:cNvPr id="4" name="TextBox 3">
-            <a:extLst>
-              <a:ext uri="{FF2B5EF4-FFF2-40B4-BE49-F238E27FC236}">
-                <a16:creationId xmlns:a16="http://schemas.microsoft.com/office/drawing/2014/main" id="{2F7D8C63-60B9-7002-C7A3-9E98DEA0AA6D}"/>
-              </a:ext>
-            </a:extLst>
-          </p:cNvPr>
-          <p:cNvSpPr txBox="1"/>
-          <p:nvPr/>
-        </p:nvSpPr>
-        <p:spPr>
-          <a:xfrm>
-            <a:off x="571500" y="3160235"/>
-            <a:ext cx="10410444" cy="2308324"/>
-          </a:xfrm>
-          <a:prstGeom prst="rect">
-            <a:avLst/>
-          </a:prstGeom>
-          <a:noFill/>
-        </p:spPr>
-        <p:txBody>
-          <a:bodyPr wrap="square">
-            <a:spAutoFit/>
-          </a:bodyPr>
-          <a:lstStyle/>
-          <a:p>
-            <a:r>
-              <a:rPr lang="en-US" sz="2400" u="sng" dirty="0">
-                <a:solidFill>
-                  <a:schemeClr val="accent6">
-                    <a:lumMod val="60000"/>
-                    <a:lumOff val="40000"/>
-                  </a:schemeClr>
-                </a:solidFill>
-              </a:rPr>
-              <a:t>Why this works:</a:t>
-            </a:r>
-          </a:p>
-          <a:p>
-            <a:pPr marL="342900" indent="-342900">
-              <a:buFont typeface="Arial" panose="020B0604020202020204" pitchFamily="34" charset="0"/>
-              <a:buChar char="•"/>
-            </a:pPr>
-            <a:r>
-              <a:rPr lang="en-US" sz="2400" b="1" dirty="0">
-                <a:solidFill>
-                  <a:schemeClr val="accent6">
-                    <a:lumMod val="60000"/>
-                    <a:lumOff val="40000"/>
-                  </a:schemeClr>
-                </a:solidFill>
-              </a:rPr>
-              <a:t>Domain Alignment: </a:t>
-            </a:r>
-            <a:r>
-              <a:rPr lang="en-US" sz="2400" dirty="0">
-                <a:solidFill>
-                  <a:schemeClr val="accent6">
-                    <a:lumMod val="60000"/>
-                    <a:lumOff val="40000"/>
-                  </a:schemeClr>
-                </a:solidFill>
-              </a:rPr>
-              <a:t>By assuming the role, the model weights "medical journal" data more heavily than "internet forum" data.</a:t>
-            </a:r>
-          </a:p>
-          <a:p>
-            <a:pPr marL="342900" indent="-342900">
-              <a:buFont typeface="Arial" panose="020B0604020202020204" pitchFamily="34" charset="0"/>
-              <a:buChar char="•"/>
-            </a:pPr>
-            <a:endParaRPr lang="en-US" sz="2400" b="1" dirty="0">
-              <a:solidFill>
-                <a:schemeClr val="accent6">
-                  <a:lumMod val="60000"/>
-                  <a:lumOff val="40000"/>
-                </a:schemeClr>
-              </a:solidFill>
-            </a:endParaRPr>
-          </a:p>
-          <a:p>
-            <a:pPr marL="342900" indent="-342900">
-              <a:buFont typeface="Arial" panose="020B0604020202020204" pitchFamily="34" charset="0"/>
-              <a:buChar char="•"/>
-            </a:pPr>
-            <a:r>
-              <a:rPr lang="en-US" sz="2400" b="1" dirty="0">
-                <a:solidFill>
-                  <a:schemeClr val="accent6">
-                    <a:lumMod val="60000"/>
-                    <a:lumOff val="40000"/>
-                  </a:schemeClr>
-                </a:solidFill>
-              </a:rPr>
-              <a:t>Specific Constraints: </a:t>
-            </a:r>
-            <a:r>
-              <a:rPr lang="en-US" sz="2400" dirty="0">
-                <a:solidFill>
-                  <a:schemeClr val="accent6">
-                    <a:lumMod val="60000"/>
-                    <a:lumOff val="40000"/>
-                  </a:schemeClr>
-                </a:solidFill>
-              </a:rPr>
-              <a:t>You’ve combined the role with an "uncertainty" clause, which is proven to reduce hallucinations by up to 30–50%.</a:t>
-            </a:r>
-          </a:p>
-        </p:txBody>
-      </p:sp>
-    </p:spTree>
-    <p:extLst>
-      <p:ext uri="{BB962C8B-B14F-4D97-AF65-F5344CB8AC3E}">
-        <p14:creationId xmlns:p14="http://schemas.microsoft.com/office/powerpoint/2010/main" val="1734586659"/>
-      </p:ext>
-    </p:extLst>
-  </p:cSld>
-  <p:clrMapOvr>
-    <a:masterClrMapping/>
-  </p:clrMapOvr>
-</p:sld>
-</file>
-
-<file path=ppt/slides/slide22.xml><?xml version="1.0" encoding="utf-8"?>
-<p:sld xmlns:a="http://schemas.openxmlformats.org/drawingml/2006/main" xmlns:r="http://schemas.openxmlformats.org/officeDocument/2006/relationships" xmlns:p="http://schemas.openxmlformats.org/presentationml/2006/main">
-  <p:cSld>
-    <p:spTree>
-      <p:nvGrpSpPr>
-        <p:cNvPr id="1" name="">
-          <a:extLst>
-            <a:ext uri="{FF2B5EF4-FFF2-40B4-BE49-F238E27FC236}">
-              <a16:creationId xmlns:a16="http://schemas.microsoft.com/office/drawing/2014/main" id="{CFE62C5E-367C-D7D8-A5DB-EAFD2E61F5A7}"/>
-            </a:ext>
-          </a:extLst>
-        </p:cNvPr>
-        <p:cNvGrpSpPr/>
-        <p:nvPr/>
-      </p:nvGrpSpPr>
-      <p:grpSpPr>
-        <a:xfrm>
-          <a:off x="0" y="0"/>
-          <a:ext cx="0" cy="0"/>
-          <a:chOff x="0" y="0"/>
-          <a:chExt cx="0" cy="0"/>
-        </a:xfrm>
-      </p:grpSpPr>
-      <p:sp>
-        <p:nvSpPr>
-          <p:cNvPr id="9" name="TextBox 8">
-            <a:extLst>
-              <a:ext uri="{FF2B5EF4-FFF2-40B4-BE49-F238E27FC236}">
-                <a16:creationId xmlns:a16="http://schemas.microsoft.com/office/drawing/2014/main" id="{55A24F56-4986-6B09-716A-D2F09625D23C}"/>
-              </a:ext>
-            </a:extLst>
-          </p:cNvPr>
-          <p:cNvSpPr txBox="1"/>
-          <p:nvPr/>
-        </p:nvSpPr>
-        <p:spPr>
-          <a:xfrm>
-            <a:off x="930415" y="2281842"/>
-            <a:ext cx="9859604" cy="707886"/>
-          </a:xfrm>
-          <a:prstGeom prst="rect">
-            <a:avLst/>
-          </a:prstGeom>
-          <a:noFill/>
-        </p:spPr>
-        <p:txBody>
-          <a:bodyPr wrap="square" rtlCol="0">
-            <a:spAutoFit/>
-          </a:bodyPr>
-          <a:lstStyle/>
-          <a:p>
-            <a:pPr algn="ctr"/>
-            <a:r>
-              <a:rPr lang="en-IN" sz="4000" b="1" dirty="0">
-                <a:solidFill>
-                  <a:schemeClr val="accent6">
-                    <a:lumMod val="60000"/>
-                    <a:lumOff val="40000"/>
-                  </a:schemeClr>
-                </a:solidFill>
-              </a:rPr>
-              <a:t>The Golden Prompt Formula</a:t>
-            </a:r>
-            <a:endParaRPr lang="en-US" sz="4000" b="1" dirty="0">
-              <a:solidFill>
-                <a:schemeClr val="accent6">
-                  <a:lumMod val="60000"/>
-                  <a:lumOff val="40000"/>
-                </a:schemeClr>
-              </a:solidFill>
-            </a:endParaRPr>
-          </a:p>
-        </p:txBody>
-      </p:sp>
-    </p:spTree>
-    <p:extLst>
-      <p:ext uri="{BB962C8B-B14F-4D97-AF65-F5344CB8AC3E}">
-        <p14:creationId xmlns:p14="http://schemas.microsoft.com/office/powerpoint/2010/main" val="813288299"/>
-      </p:ext>
-    </p:extLst>
-  </p:cSld>
-  <p:clrMapOvr>
-    <a:masterClrMapping/>
-  </p:clrMapOvr>
-</p:sld>
-</file>
-
-<file path=ppt/slides/slide23.xml><?xml version="1.0" encoding="utf-8"?>
-<p:sld xmlns:a="http://schemas.openxmlformats.org/drawingml/2006/main" xmlns:r="http://schemas.openxmlformats.org/officeDocument/2006/relationships" xmlns:p="http://schemas.openxmlformats.org/presentationml/2006/main">
-  <p:cSld>
-    <p:spTree>
-      <p:nvGrpSpPr>
-        <p:cNvPr id="1" name="">
-          <a:extLst>
-            <a:ext uri="{FF2B5EF4-FFF2-40B4-BE49-F238E27FC236}">
-              <a16:creationId xmlns:a16="http://schemas.microsoft.com/office/drawing/2014/main" id="{280A40C9-5836-9616-9193-C4C731FF36DB}"/>
-            </a:ext>
-          </a:extLst>
-        </p:cNvPr>
-        <p:cNvGrpSpPr/>
-        <p:nvPr/>
-      </p:nvGrpSpPr>
-      <p:grpSpPr>
-        <a:xfrm>
-          <a:off x="0" y="0"/>
-          <a:ext cx="0" cy="0"/>
-          <a:chOff x="0" y="0"/>
-          <a:chExt cx="0" cy="0"/>
-        </a:xfrm>
-      </p:grpSpPr>
-      <p:sp>
-        <p:nvSpPr>
-          <p:cNvPr id="9" name="TextBox 8">
-            <a:extLst>
-              <a:ext uri="{FF2B5EF4-FFF2-40B4-BE49-F238E27FC236}">
-                <a16:creationId xmlns:a16="http://schemas.microsoft.com/office/drawing/2014/main" id="{EFC1F84D-1637-4F29-477A-E9FC9817A89C}"/>
-              </a:ext>
-            </a:extLst>
-          </p:cNvPr>
-          <p:cNvSpPr txBox="1"/>
-          <p:nvPr/>
-        </p:nvSpPr>
-        <p:spPr>
-          <a:xfrm>
-            <a:off x="592087" y="123858"/>
-            <a:ext cx="9859604" cy="523220"/>
-          </a:xfrm>
-          <a:prstGeom prst="rect">
-            <a:avLst/>
-          </a:prstGeom>
-          <a:noFill/>
-        </p:spPr>
-        <p:txBody>
-          <a:bodyPr wrap="square" rtlCol="0">
-            <a:spAutoFit/>
-          </a:bodyPr>
-          <a:lstStyle/>
-          <a:p>
-            <a:pPr algn="ctr"/>
-            <a:r>
-              <a:rPr lang="en-IN" sz="2800" dirty="0">
-                <a:solidFill>
-                  <a:schemeClr val="accent6">
-                    <a:lumMod val="60000"/>
-                    <a:lumOff val="40000"/>
-                  </a:schemeClr>
-                </a:solidFill>
-              </a:rPr>
-              <a:t>The Golden Prompt Formula</a:t>
-            </a:r>
-            <a:endParaRPr lang="en-US" sz="2800" dirty="0">
-              <a:solidFill>
-                <a:schemeClr val="accent6">
-                  <a:lumMod val="60000"/>
-                  <a:lumOff val="40000"/>
-                </a:schemeClr>
-              </a:solidFill>
-            </a:endParaRPr>
-          </a:p>
-        </p:txBody>
-      </p:sp>
-      <p:sp>
-        <p:nvSpPr>
-          <p:cNvPr id="3" name="TextBox 2">
-            <a:extLst>
-              <a:ext uri="{FF2B5EF4-FFF2-40B4-BE49-F238E27FC236}">
-                <a16:creationId xmlns:a16="http://schemas.microsoft.com/office/drawing/2014/main" id="{3ECCED15-FB22-1A40-3D21-D2AACED571C7}"/>
-              </a:ext>
-            </a:extLst>
-          </p:cNvPr>
-          <p:cNvSpPr txBox="1"/>
-          <p:nvPr/>
-        </p:nvSpPr>
-        <p:spPr>
-          <a:xfrm>
-            <a:off x="334296" y="830109"/>
-            <a:ext cx="10336751" cy="5262979"/>
-          </a:xfrm>
-          <a:prstGeom prst="rect">
-            <a:avLst/>
-          </a:prstGeom>
-          <a:noFill/>
-        </p:spPr>
-        <p:txBody>
-          <a:bodyPr wrap="square">
-            <a:spAutoFit/>
-          </a:bodyPr>
-          <a:lstStyle/>
-          <a:p>
-            <a:r>
-              <a:rPr lang="en-IN" sz="2400" b="1" dirty="0">
-                <a:solidFill>
-                  <a:schemeClr val="accent4">
-                    <a:lumMod val="60000"/>
-                    <a:lumOff val="40000"/>
-                  </a:schemeClr>
-                </a:solidFill>
-              </a:rPr>
-              <a:t>Prompt = Context + Task + Constraint + Output Format</a:t>
-            </a:r>
-          </a:p>
-          <a:p>
-            <a:endParaRPr lang="en-IN" sz="2400" dirty="0">
-              <a:solidFill>
-                <a:schemeClr val="accent6">
-                  <a:lumMod val="60000"/>
-                  <a:lumOff val="40000"/>
-                </a:schemeClr>
-              </a:solidFill>
-            </a:endParaRPr>
-          </a:p>
-          <a:p>
-            <a:r>
-              <a:rPr lang="en-US" sz="2400" b="1" dirty="0">
-                <a:solidFill>
-                  <a:schemeClr val="accent6">
-                    <a:lumMod val="60000"/>
-                    <a:lumOff val="40000"/>
-                  </a:schemeClr>
-                </a:solidFill>
-              </a:rPr>
-              <a:t>1. Context (Background Information)</a:t>
-            </a:r>
-          </a:p>
-          <a:p>
-            <a:r>
-              <a:rPr lang="en-US" sz="2400" dirty="0">
-                <a:solidFill>
-                  <a:schemeClr val="accent6">
-                    <a:lumMod val="60000"/>
-                    <a:lumOff val="40000"/>
-                  </a:schemeClr>
-                </a:solidFill>
-              </a:rPr>
-              <a:t>Gives AI situation or environment.</a:t>
-            </a:r>
-          </a:p>
-          <a:p>
-            <a:endParaRPr lang="en-US" sz="2400" dirty="0">
-              <a:solidFill>
-                <a:schemeClr val="accent6">
-                  <a:lumMod val="60000"/>
-                  <a:lumOff val="40000"/>
-                </a:schemeClr>
-              </a:solidFill>
-            </a:endParaRPr>
-          </a:p>
-          <a:p>
-            <a:r>
-              <a:rPr lang="en-US" sz="2400" dirty="0">
-                <a:solidFill>
-                  <a:schemeClr val="accent6">
-                    <a:lumMod val="60000"/>
-                    <a:lumOff val="40000"/>
-                  </a:schemeClr>
-                </a:solidFill>
-              </a:rPr>
-              <a:t>Without context → AI guesses</a:t>
-            </a:r>
-          </a:p>
-          <a:p>
-            <a:endParaRPr lang="en-US" sz="2400" dirty="0">
-              <a:solidFill>
-                <a:schemeClr val="accent6">
-                  <a:lumMod val="60000"/>
-                  <a:lumOff val="40000"/>
-                </a:schemeClr>
-              </a:solidFill>
-            </a:endParaRPr>
-          </a:p>
-          <a:p>
-            <a:r>
-              <a:rPr lang="en-US" sz="2400" b="1" dirty="0">
-                <a:solidFill>
-                  <a:schemeClr val="accent6">
-                    <a:lumMod val="60000"/>
-                    <a:lumOff val="40000"/>
-                  </a:schemeClr>
-                </a:solidFill>
-              </a:rPr>
-              <a:t>The "No Context" Prompt (The Guessing Game)</a:t>
-            </a:r>
-          </a:p>
-          <a:p>
-            <a:r>
-              <a:rPr lang="en-US" sz="2400" dirty="0">
-                <a:solidFill>
-                  <a:schemeClr val="accent6">
-                    <a:lumMod val="60000"/>
-                    <a:lumOff val="40000"/>
-                  </a:schemeClr>
-                </a:solidFill>
-              </a:rPr>
-              <a:t>Bad Prompt</a:t>
-            </a:r>
-            <a:r>
-              <a:rPr lang="en-US" sz="2400" b="1" dirty="0">
-                <a:solidFill>
-                  <a:schemeClr val="accent6">
-                    <a:lumMod val="60000"/>
-                    <a:lumOff val="40000"/>
-                  </a:schemeClr>
-                </a:solidFill>
-              </a:rPr>
-              <a:t>:</a:t>
-            </a:r>
-            <a:r>
-              <a:rPr lang="en-US" sz="2400" dirty="0">
-                <a:solidFill>
-                  <a:schemeClr val="accent6">
-                    <a:lumMod val="60000"/>
-                    <a:lumOff val="40000"/>
-                  </a:schemeClr>
-                </a:solidFill>
-              </a:rPr>
-              <a:t> "Write a plan to improve customer retention.“</a:t>
-            </a:r>
-          </a:p>
-          <a:p>
-            <a:endParaRPr lang="en-US" sz="2400" dirty="0">
-              <a:solidFill>
-                <a:schemeClr val="accent6">
-                  <a:lumMod val="60000"/>
-                  <a:lumOff val="40000"/>
-                </a:schemeClr>
-              </a:solidFill>
-            </a:endParaRPr>
-          </a:p>
-          <a:p>
-            <a:r>
-              <a:rPr lang="en-US" sz="2400" b="1" dirty="0">
-                <a:solidFill>
-                  <a:schemeClr val="accent6">
-                    <a:lumMod val="60000"/>
-                    <a:lumOff val="40000"/>
-                  </a:schemeClr>
-                </a:solidFill>
-              </a:rPr>
-              <a:t>The Problem:</a:t>
-            </a:r>
-            <a:r>
-              <a:rPr lang="en-US" sz="2400" dirty="0">
-                <a:solidFill>
-                  <a:schemeClr val="accent6">
-                    <a:lumMod val="60000"/>
-                    <a:lumOff val="40000"/>
-                  </a:schemeClr>
-                </a:solidFill>
-              </a:rPr>
-              <a:t> The AI doesn't know if you are a local coffee shop, a billion-dollar SaaS company, or a non-profit.</a:t>
-            </a:r>
-          </a:p>
-          <a:p>
-            <a:r>
-              <a:rPr lang="en-US" sz="2400" dirty="0">
-                <a:solidFill>
-                  <a:schemeClr val="accent6">
-                    <a:lumMod val="60000"/>
-                    <a:lumOff val="40000"/>
-                  </a:schemeClr>
-                </a:solidFill>
-              </a:rPr>
-              <a:t> It will likely give you a "generic list" (loyalty cards, email newsletters) that might be totally irrelevant to your business model.</a:t>
-            </a:r>
-          </a:p>
-        </p:txBody>
-      </p:sp>
-    </p:spTree>
-    <p:extLst>
-      <p:ext uri="{BB962C8B-B14F-4D97-AF65-F5344CB8AC3E}">
-        <p14:creationId xmlns:p14="http://schemas.microsoft.com/office/powerpoint/2010/main" val="3974240285"/>
-      </p:ext>
-    </p:extLst>
-  </p:cSld>
-  <p:clrMapOvr>
-    <a:masterClrMapping/>
-  </p:clrMapOvr>
-</p:sld>
-</file>
-
-<file path=ppt/slides/slide24.xml><?xml version="1.0" encoding="utf-8"?>
-<p:sld xmlns:a="http://schemas.openxmlformats.org/drawingml/2006/main" xmlns:r="http://schemas.openxmlformats.org/officeDocument/2006/relationships" xmlns:p="http://schemas.openxmlformats.org/presentationml/2006/main">
-  <p:cSld>
-    <p:spTree>
-      <p:nvGrpSpPr>
-        <p:cNvPr id="1" name="">
-          <a:extLst>
-            <a:ext uri="{FF2B5EF4-FFF2-40B4-BE49-F238E27FC236}">
-              <a16:creationId xmlns:a16="http://schemas.microsoft.com/office/drawing/2014/main" id="{748ED755-196A-D016-8E69-CCCD17E3B2C0}"/>
-            </a:ext>
-          </a:extLst>
-        </p:cNvPr>
-        <p:cNvGrpSpPr/>
-        <p:nvPr/>
-      </p:nvGrpSpPr>
-      <p:grpSpPr>
-        <a:xfrm>
-          <a:off x="0" y="0"/>
-          <a:ext cx="0" cy="0"/>
-          <a:chOff x="0" y="0"/>
-          <a:chExt cx="0" cy="0"/>
-        </a:xfrm>
-      </p:grpSpPr>
-      <p:sp>
-        <p:nvSpPr>
-          <p:cNvPr id="9" name="TextBox 8">
-            <a:extLst>
-              <a:ext uri="{FF2B5EF4-FFF2-40B4-BE49-F238E27FC236}">
-                <a16:creationId xmlns:a16="http://schemas.microsoft.com/office/drawing/2014/main" id="{DCBDEF69-878C-AE3B-E950-6C1686609CE5}"/>
-              </a:ext>
-            </a:extLst>
-          </p:cNvPr>
-          <p:cNvSpPr txBox="1"/>
-          <p:nvPr/>
-        </p:nvSpPr>
-        <p:spPr>
-          <a:xfrm>
-            <a:off x="592087" y="123858"/>
-            <a:ext cx="9859604" cy="523220"/>
-          </a:xfrm>
-          <a:prstGeom prst="rect">
-            <a:avLst/>
-          </a:prstGeom>
-          <a:noFill/>
-        </p:spPr>
-        <p:txBody>
-          <a:bodyPr wrap="square" rtlCol="0">
-            <a:spAutoFit/>
-          </a:bodyPr>
-          <a:lstStyle/>
-          <a:p>
-            <a:pPr algn="ctr"/>
-            <a:r>
-              <a:rPr lang="en-IN" sz="2800" dirty="0">
-                <a:solidFill>
-                  <a:schemeClr val="accent6">
-                    <a:lumMod val="60000"/>
-                    <a:lumOff val="40000"/>
-                  </a:schemeClr>
-                </a:solidFill>
-              </a:rPr>
-              <a:t>The Golden Prompt Formula</a:t>
-            </a:r>
-            <a:endParaRPr lang="en-US" sz="2800" dirty="0">
-              <a:solidFill>
-                <a:schemeClr val="accent6">
-                  <a:lumMod val="60000"/>
-                  <a:lumOff val="40000"/>
-                </a:schemeClr>
-              </a:solidFill>
-            </a:endParaRPr>
-          </a:p>
-        </p:txBody>
-      </p:sp>
-      <p:sp>
-        <p:nvSpPr>
-          <p:cNvPr id="3" name="TextBox 2">
-            <a:extLst>
-              <a:ext uri="{FF2B5EF4-FFF2-40B4-BE49-F238E27FC236}">
-                <a16:creationId xmlns:a16="http://schemas.microsoft.com/office/drawing/2014/main" id="{FD7A18B4-25EE-0E35-77F7-5B0E974A326D}"/>
-              </a:ext>
-            </a:extLst>
-          </p:cNvPr>
-          <p:cNvSpPr txBox="1"/>
-          <p:nvPr/>
-        </p:nvSpPr>
-        <p:spPr>
-          <a:xfrm>
-            <a:off x="334296" y="830109"/>
-            <a:ext cx="10336751" cy="4893647"/>
-          </a:xfrm>
-          <a:prstGeom prst="rect">
-            <a:avLst/>
-          </a:prstGeom>
-          <a:noFill/>
-        </p:spPr>
-        <p:txBody>
-          <a:bodyPr wrap="square">
-            <a:spAutoFit/>
-          </a:bodyPr>
-          <a:lstStyle/>
-          <a:p>
-            <a:r>
-              <a:rPr lang="en-IN" sz="2400" b="1" dirty="0">
-                <a:solidFill>
-                  <a:schemeClr val="accent4">
-                    <a:lumMod val="60000"/>
-                    <a:lumOff val="40000"/>
-                  </a:schemeClr>
-                </a:solidFill>
-              </a:rPr>
-              <a:t>Prompt = Context + Task + Constraint + Output Format</a:t>
-            </a:r>
-          </a:p>
-          <a:p>
-            <a:endParaRPr lang="en-IN" sz="2400" dirty="0">
-              <a:solidFill>
-                <a:schemeClr val="accent6">
-                  <a:lumMod val="60000"/>
-                  <a:lumOff val="40000"/>
-                </a:schemeClr>
-              </a:solidFill>
-            </a:endParaRPr>
-          </a:p>
-          <a:p>
-            <a:r>
-              <a:rPr lang="en-US" sz="2400" b="1" dirty="0">
-                <a:solidFill>
-                  <a:schemeClr val="accent6">
-                    <a:lumMod val="60000"/>
-                    <a:lumOff val="40000"/>
-                  </a:schemeClr>
-                </a:solidFill>
-              </a:rPr>
-              <a:t>The "High Context" Example (The Grounded Response)</a:t>
-            </a:r>
-          </a:p>
-          <a:p>
-            <a:endParaRPr lang="en-US" sz="2400" b="1" dirty="0">
-              <a:solidFill>
-                <a:schemeClr val="accent6">
-                  <a:lumMod val="60000"/>
-                  <a:lumOff val="40000"/>
-                </a:schemeClr>
-              </a:solidFill>
-            </a:endParaRPr>
-          </a:p>
-          <a:p>
-            <a:r>
-              <a:rPr lang="en-US" sz="2400" dirty="0">
-                <a:solidFill>
-                  <a:schemeClr val="accent6">
-                    <a:lumMod val="60000"/>
-                    <a:lumOff val="40000"/>
-                  </a:schemeClr>
-                </a:solidFill>
-              </a:rPr>
-              <a:t>Better Prompt </a:t>
-            </a:r>
-            <a:r>
-              <a:rPr lang="en-US" sz="2400" b="1" dirty="0">
-                <a:solidFill>
-                  <a:schemeClr val="accent6">
-                    <a:lumMod val="60000"/>
-                    <a:lumOff val="40000"/>
-                  </a:schemeClr>
-                </a:solidFill>
-              </a:rPr>
-              <a:t>:</a:t>
-            </a:r>
-            <a:r>
-              <a:rPr lang="en-US" sz="2400" dirty="0">
-                <a:solidFill>
-                  <a:schemeClr val="accent6">
-                    <a:lumMod val="60000"/>
-                    <a:lumOff val="40000"/>
-                  </a:schemeClr>
-                </a:solidFill>
-              </a:rPr>
-              <a:t> </a:t>
-            </a:r>
-          </a:p>
-          <a:p>
-            <a:r>
-              <a:rPr lang="en-US" sz="2400" dirty="0">
-                <a:solidFill>
-                  <a:schemeClr val="accent6">
-                    <a:lumMod val="60000"/>
-                    <a:lumOff val="40000"/>
-                  </a:schemeClr>
-                </a:solidFill>
-              </a:rPr>
-              <a:t>"</a:t>
-            </a:r>
-            <a:r>
-              <a:rPr lang="en-US" sz="2400" b="1" dirty="0">
-                <a:solidFill>
-                  <a:schemeClr val="accent6">
-                    <a:lumMod val="60000"/>
-                    <a:lumOff val="40000"/>
-                  </a:schemeClr>
-                </a:solidFill>
-              </a:rPr>
-              <a:t>[Background]:</a:t>
-            </a:r>
-            <a:r>
-              <a:rPr lang="en-US" sz="2400" dirty="0">
-                <a:solidFill>
-                  <a:schemeClr val="accent6">
-                    <a:lumMod val="60000"/>
-                    <a:lumOff val="40000"/>
-                  </a:schemeClr>
-                </a:solidFill>
-              </a:rPr>
-              <a:t> We are a mid-sized B2B software company that sells a project management tool to construction firms. Our subscription is $500/month.</a:t>
-            </a:r>
-          </a:p>
-          <a:p>
-            <a:endParaRPr lang="en-US" sz="2400" dirty="0">
-              <a:solidFill>
-                <a:schemeClr val="accent6">
-                  <a:lumMod val="60000"/>
-                  <a:lumOff val="40000"/>
-                </a:schemeClr>
-              </a:solidFill>
-            </a:endParaRPr>
-          </a:p>
-          <a:p>
-            <a:r>
-              <a:rPr lang="en-US" sz="2400" b="1" dirty="0">
-                <a:solidFill>
-                  <a:schemeClr val="accent6">
-                    <a:lumMod val="60000"/>
-                    <a:lumOff val="40000"/>
-                  </a:schemeClr>
-                </a:solidFill>
-              </a:rPr>
-              <a:t>[The Situation]:</a:t>
-            </a:r>
-            <a:r>
-              <a:rPr lang="en-US" sz="2400" dirty="0">
-                <a:solidFill>
-                  <a:schemeClr val="accent6">
-                    <a:lumMod val="60000"/>
-                    <a:lumOff val="40000"/>
-                  </a:schemeClr>
-                </a:solidFill>
-              </a:rPr>
-              <a:t> We’ve noticed that customers usually leave (churn) after the 3rd month because the software feels too complex for their field workers.</a:t>
-            </a:r>
-          </a:p>
-          <a:p>
-            <a:endParaRPr lang="en-US" sz="2400" dirty="0">
-              <a:solidFill>
-                <a:schemeClr val="accent6">
-                  <a:lumMod val="60000"/>
-                  <a:lumOff val="40000"/>
-                </a:schemeClr>
-              </a:solidFill>
-            </a:endParaRPr>
-          </a:p>
-          <a:p>
-            <a:r>
-              <a:rPr lang="en-US" sz="2400" b="1" dirty="0">
-                <a:solidFill>
-                  <a:schemeClr val="accent6">
-                    <a:lumMod val="60000"/>
-                    <a:lumOff val="40000"/>
-                  </a:schemeClr>
-                </a:solidFill>
-              </a:rPr>
-              <a:t>[Goal]:</a:t>
-            </a:r>
-            <a:r>
-              <a:rPr lang="en-US" sz="2400" dirty="0">
-                <a:solidFill>
-                  <a:schemeClr val="accent6">
-                    <a:lumMod val="60000"/>
-                    <a:lumOff val="40000"/>
-                  </a:schemeClr>
-                </a:solidFill>
-              </a:rPr>
-              <a:t> Create a 30-day retention plan specifically focused on simplifying the 'onboarding' phase for non-technical users."</a:t>
-            </a:r>
-          </a:p>
-        </p:txBody>
-      </p:sp>
-    </p:spTree>
-    <p:extLst>
-      <p:ext uri="{BB962C8B-B14F-4D97-AF65-F5344CB8AC3E}">
-        <p14:creationId xmlns:p14="http://schemas.microsoft.com/office/powerpoint/2010/main" val="1629387032"/>
-      </p:ext>
-    </p:extLst>
-  </p:cSld>
-  <p:clrMapOvr>
-    <a:masterClrMapping/>
-  </p:clrMapOvr>
-</p:sld>
-</file>
-
-<file path=ppt/slides/slide25.xml><?xml version="1.0" encoding="utf-8"?>
-<p:sld xmlns:a="http://schemas.openxmlformats.org/drawingml/2006/main" xmlns:r="http://schemas.openxmlformats.org/officeDocument/2006/relationships" xmlns:p="http://schemas.openxmlformats.org/presentationml/2006/main">
-  <p:cSld>
-    <p:spTree>
-      <p:nvGrpSpPr>
-        <p:cNvPr id="1" name="">
-          <a:extLst>
-            <a:ext uri="{FF2B5EF4-FFF2-40B4-BE49-F238E27FC236}">
-              <a16:creationId xmlns:a16="http://schemas.microsoft.com/office/drawing/2014/main" id="{40D30D9C-6AA7-1B04-8873-C4C9861176CA}"/>
-            </a:ext>
-          </a:extLst>
-        </p:cNvPr>
-        <p:cNvGrpSpPr/>
-        <p:nvPr/>
-      </p:nvGrpSpPr>
-      <p:grpSpPr>
-        <a:xfrm>
-          <a:off x="0" y="0"/>
-          <a:ext cx="0" cy="0"/>
-          <a:chOff x="0" y="0"/>
-          <a:chExt cx="0" cy="0"/>
-        </a:xfrm>
-      </p:grpSpPr>
-      <p:sp>
-        <p:nvSpPr>
-          <p:cNvPr id="9" name="TextBox 8">
-            <a:extLst>
-              <a:ext uri="{FF2B5EF4-FFF2-40B4-BE49-F238E27FC236}">
-                <a16:creationId xmlns:a16="http://schemas.microsoft.com/office/drawing/2014/main" id="{C8BF1571-0D70-554F-342C-AFB2107BB1DF}"/>
-              </a:ext>
-            </a:extLst>
-          </p:cNvPr>
-          <p:cNvSpPr txBox="1"/>
-          <p:nvPr/>
-        </p:nvSpPr>
-        <p:spPr>
-          <a:xfrm>
-            <a:off x="592087" y="123858"/>
-            <a:ext cx="9859604" cy="523220"/>
-          </a:xfrm>
-          <a:prstGeom prst="rect">
-            <a:avLst/>
-          </a:prstGeom>
-          <a:noFill/>
-        </p:spPr>
-        <p:txBody>
-          <a:bodyPr wrap="square" rtlCol="0">
-            <a:spAutoFit/>
-          </a:bodyPr>
-          <a:lstStyle/>
-          <a:p>
-            <a:pPr algn="ctr"/>
-            <a:r>
-              <a:rPr lang="en-IN" sz="2800" dirty="0">
-                <a:solidFill>
-                  <a:schemeClr val="accent6">
-                    <a:lumMod val="60000"/>
-                    <a:lumOff val="40000"/>
-                  </a:schemeClr>
-                </a:solidFill>
-              </a:rPr>
-              <a:t>The Golden Prompt Formula</a:t>
-            </a:r>
-            <a:endParaRPr lang="en-US" sz="2800" dirty="0">
-              <a:solidFill>
-                <a:schemeClr val="accent6">
-                  <a:lumMod val="60000"/>
-                  <a:lumOff val="40000"/>
-                </a:schemeClr>
-              </a:solidFill>
-            </a:endParaRPr>
-          </a:p>
-        </p:txBody>
-      </p:sp>
-      <p:sp>
-        <p:nvSpPr>
-          <p:cNvPr id="3" name="TextBox 2">
-            <a:extLst>
-              <a:ext uri="{FF2B5EF4-FFF2-40B4-BE49-F238E27FC236}">
-                <a16:creationId xmlns:a16="http://schemas.microsoft.com/office/drawing/2014/main" id="{05AA8BAF-41E1-6BBC-E16F-8D64B25EB437}"/>
-              </a:ext>
-            </a:extLst>
-          </p:cNvPr>
-          <p:cNvSpPr txBox="1"/>
-          <p:nvPr/>
-        </p:nvSpPr>
-        <p:spPr>
-          <a:xfrm>
-            <a:off x="334296" y="884973"/>
-            <a:ext cx="11132279" cy="2677656"/>
-          </a:xfrm>
-          <a:prstGeom prst="rect">
-            <a:avLst/>
-          </a:prstGeom>
-          <a:noFill/>
-        </p:spPr>
-        <p:txBody>
-          <a:bodyPr wrap="square">
-            <a:spAutoFit/>
-          </a:bodyPr>
-          <a:lstStyle/>
-          <a:p>
-            <a:r>
-              <a:rPr lang="en-IN" sz="2400" b="1" dirty="0">
-                <a:solidFill>
-                  <a:schemeClr val="accent4">
-                    <a:lumMod val="60000"/>
-                    <a:lumOff val="40000"/>
-                  </a:schemeClr>
-                </a:solidFill>
-              </a:rPr>
-              <a:t>Prompt = Context + Task + Constraint + Output Format</a:t>
-            </a:r>
-          </a:p>
-          <a:p>
-            <a:endParaRPr lang="en-IN" sz="2400" dirty="0">
-              <a:solidFill>
-                <a:schemeClr val="accent6">
-                  <a:lumMod val="60000"/>
-                  <a:lumOff val="40000"/>
-                </a:schemeClr>
-              </a:solidFill>
-            </a:endParaRPr>
-          </a:p>
-          <a:p>
-            <a:r>
-              <a:rPr lang="en-US" sz="2400" b="1" dirty="0">
-                <a:solidFill>
-                  <a:schemeClr val="accent6">
-                    <a:lumMod val="60000"/>
-                    <a:lumOff val="40000"/>
-                  </a:schemeClr>
-                </a:solidFill>
-              </a:rPr>
-              <a:t>2. Task (What AI Should Do)</a:t>
-            </a:r>
-          </a:p>
-          <a:p>
-            <a:r>
-              <a:rPr lang="en-US" sz="2400" dirty="0">
-                <a:solidFill>
-                  <a:schemeClr val="accent6">
-                    <a:lumMod val="60000"/>
-                    <a:lumOff val="40000"/>
-                  </a:schemeClr>
-                </a:solidFill>
-              </a:rPr>
-              <a:t>Clear action instruction.</a:t>
-            </a:r>
-          </a:p>
-          <a:p>
-            <a:endParaRPr lang="en-US" sz="2400" dirty="0">
-              <a:solidFill>
-                <a:schemeClr val="accent6">
-                  <a:lumMod val="60000"/>
-                  <a:lumOff val="40000"/>
-                </a:schemeClr>
-              </a:solidFill>
-            </a:endParaRPr>
-          </a:p>
-          <a:p>
-            <a:r>
-              <a:rPr lang="en-US" sz="2400" dirty="0">
-                <a:solidFill>
-                  <a:schemeClr val="accent6">
-                    <a:lumMod val="60000"/>
-                    <a:lumOff val="40000"/>
-                  </a:schemeClr>
-                </a:solidFill>
-              </a:rPr>
-              <a:t>Example: </a:t>
-            </a:r>
-          </a:p>
-          <a:p>
-            <a:r>
-              <a:rPr lang="en-US" sz="2400" dirty="0">
-                <a:solidFill>
-                  <a:schemeClr val="accent6">
-                    <a:lumMod val="60000"/>
-                    <a:lumOff val="40000"/>
-                  </a:schemeClr>
-                </a:solidFill>
-              </a:rPr>
-              <a:t>Analyze the dataset and find trends in sales from the column </a:t>
-            </a:r>
-            <a:r>
-              <a:rPr lang="en-US" sz="2400" dirty="0" err="1">
-                <a:solidFill>
-                  <a:schemeClr val="accent6">
-                    <a:lumMod val="60000"/>
-                    <a:lumOff val="40000"/>
-                  </a:schemeClr>
-                </a:solidFill>
-              </a:rPr>
-              <a:t>monthly_sales</a:t>
-            </a:r>
-            <a:r>
-              <a:rPr lang="en-US" sz="2400" dirty="0">
-                <a:solidFill>
-                  <a:schemeClr val="accent6">
-                    <a:lumMod val="60000"/>
-                    <a:lumOff val="40000"/>
-                  </a:schemeClr>
-                </a:solidFill>
-              </a:rPr>
-              <a:t>.</a:t>
-            </a:r>
-          </a:p>
-        </p:txBody>
-      </p:sp>
-    </p:spTree>
-    <p:extLst>
-      <p:ext uri="{BB962C8B-B14F-4D97-AF65-F5344CB8AC3E}">
-        <p14:creationId xmlns:p14="http://schemas.microsoft.com/office/powerpoint/2010/main" val="311028205"/>
-      </p:ext>
-    </p:extLst>
-  </p:cSld>
-  <p:clrMapOvr>
-    <a:masterClrMapping/>
-  </p:clrMapOvr>
-</p:sld>
-</file>
-
-<file path=ppt/slides/slide26.xml><?xml version="1.0" encoding="utf-8"?>
-<p:sld xmlns:a="http://schemas.openxmlformats.org/drawingml/2006/main" xmlns:r="http://schemas.openxmlformats.org/officeDocument/2006/relationships" xmlns:p="http://schemas.openxmlformats.org/presentationml/2006/main">
-  <p:cSld>
-    <p:spTree>
-      <p:nvGrpSpPr>
-        <p:cNvPr id="1" name="">
-          <a:extLst>
-            <a:ext uri="{FF2B5EF4-FFF2-40B4-BE49-F238E27FC236}">
-              <a16:creationId xmlns:a16="http://schemas.microsoft.com/office/drawing/2014/main" id="{F062AA41-F939-98FE-A90D-5341B5CE38D3}"/>
-            </a:ext>
-          </a:extLst>
-        </p:cNvPr>
-        <p:cNvGrpSpPr/>
-        <p:nvPr/>
-      </p:nvGrpSpPr>
-      <p:grpSpPr>
-        <a:xfrm>
-          <a:off x="0" y="0"/>
-          <a:ext cx="0" cy="0"/>
-          <a:chOff x="0" y="0"/>
-          <a:chExt cx="0" cy="0"/>
-        </a:xfrm>
-      </p:grpSpPr>
-      <p:sp>
-        <p:nvSpPr>
-          <p:cNvPr id="9" name="TextBox 8">
-            <a:extLst>
-              <a:ext uri="{FF2B5EF4-FFF2-40B4-BE49-F238E27FC236}">
-                <a16:creationId xmlns:a16="http://schemas.microsoft.com/office/drawing/2014/main" id="{3F0ADDDA-F15C-4140-8576-8E9336785F8C}"/>
-              </a:ext>
-            </a:extLst>
-          </p:cNvPr>
-          <p:cNvSpPr txBox="1"/>
-          <p:nvPr/>
-        </p:nvSpPr>
-        <p:spPr>
-          <a:xfrm>
-            <a:off x="592087" y="123858"/>
-            <a:ext cx="9859604" cy="523220"/>
-          </a:xfrm>
-          <a:prstGeom prst="rect">
-            <a:avLst/>
-          </a:prstGeom>
-          <a:noFill/>
-        </p:spPr>
-        <p:txBody>
-          <a:bodyPr wrap="square" rtlCol="0">
-            <a:spAutoFit/>
-          </a:bodyPr>
-          <a:lstStyle/>
-          <a:p>
-            <a:pPr algn="ctr"/>
-            <a:r>
-              <a:rPr lang="en-IN" sz="2800" dirty="0">
-                <a:solidFill>
-                  <a:schemeClr val="accent6">
-                    <a:lumMod val="60000"/>
-                    <a:lumOff val="40000"/>
-                  </a:schemeClr>
-                </a:solidFill>
-              </a:rPr>
-              <a:t>The Golden Prompt Formula</a:t>
-            </a:r>
-            <a:endParaRPr lang="en-US" sz="2800" dirty="0">
-              <a:solidFill>
-                <a:schemeClr val="accent6">
-                  <a:lumMod val="60000"/>
-                  <a:lumOff val="40000"/>
-                </a:schemeClr>
-              </a:solidFill>
-            </a:endParaRPr>
-          </a:p>
-        </p:txBody>
-      </p:sp>
-      <p:sp>
-        <p:nvSpPr>
-          <p:cNvPr id="3" name="TextBox 2">
-            <a:extLst>
-              <a:ext uri="{FF2B5EF4-FFF2-40B4-BE49-F238E27FC236}">
-                <a16:creationId xmlns:a16="http://schemas.microsoft.com/office/drawing/2014/main" id="{FEA16668-708F-9B3A-9401-B6B4F4EA4E70}"/>
-              </a:ext>
-            </a:extLst>
-          </p:cNvPr>
-          <p:cNvSpPr txBox="1"/>
-          <p:nvPr/>
-        </p:nvSpPr>
-        <p:spPr>
-          <a:xfrm>
-            <a:off x="334296" y="766101"/>
-            <a:ext cx="9859603" cy="6001643"/>
-          </a:xfrm>
-          <a:prstGeom prst="rect">
-            <a:avLst/>
-          </a:prstGeom>
-          <a:noFill/>
-        </p:spPr>
-        <p:txBody>
-          <a:bodyPr wrap="square">
-            <a:spAutoFit/>
-          </a:bodyPr>
-          <a:lstStyle/>
-          <a:p>
-            <a:r>
-              <a:rPr lang="en-IN" sz="2400" b="1" dirty="0">
-                <a:solidFill>
-                  <a:schemeClr val="accent4">
-                    <a:lumMod val="60000"/>
-                    <a:lumOff val="40000"/>
-                  </a:schemeClr>
-                </a:solidFill>
-              </a:rPr>
-              <a:t>Prompt = Context + Task + Constraint + Output Format</a:t>
-            </a:r>
-          </a:p>
-          <a:p>
-            <a:endParaRPr lang="en-IN" sz="2400" b="1" dirty="0">
-              <a:solidFill>
-                <a:schemeClr val="accent6">
-                  <a:lumMod val="60000"/>
-                  <a:lumOff val="40000"/>
-                </a:schemeClr>
-              </a:solidFill>
-            </a:endParaRPr>
-          </a:p>
-          <a:p>
-            <a:r>
-              <a:rPr lang="en-IN" sz="2400" b="1" dirty="0">
-                <a:solidFill>
-                  <a:schemeClr val="accent6">
-                    <a:lumMod val="60000"/>
-                    <a:lumOff val="40000"/>
-                  </a:schemeClr>
-                </a:solidFill>
-              </a:rPr>
-              <a:t>3. Constraint (Rules &amp; Limitations)</a:t>
-            </a:r>
-          </a:p>
-          <a:p>
-            <a:r>
-              <a:rPr lang="en-IN" sz="2400" dirty="0">
-                <a:solidFill>
-                  <a:schemeClr val="accent6">
-                    <a:lumMod val="60000"/>
-                    <a:lumOff val="40000"/>
-                  </a:schemeClr>
-                </a:solidFill>
-              </a:rPr>
-              <a:t>Controls AI output.</a:t>
-            </a:r>
-          </a:p>
-          <a:p>
-            <a:endParaRPr lang="en-IN" sz="2400" dirty="0">
-              <a:solidFill>
-                <a:schemeClr val="accent6">
-                  <a:lumMod val="60000"/>
-                  <a:lumOff val="40000"/>
-                </a:schemeClr>
-              </a:solidFill>
-            </a:endParaRPr>
-          </a:p>
-          <a:p>
-            <a:r>
-              <a:rPr lang="en-IN" sz="2400" dirty="0">
-                <a:solidFill>
-                  <a:schemeClr val="accent6">
-                    <a:lumMod val="60000"/>
-                    <a:lumOff val="40000"/>
-                  </a:schemeClr>
-                </a:solidFill>
-              </a:rPr>
-              <a:t>Examples:</a:t>
-            </a:r>
-          </a:p>
-          <a:p>
-            <a:pPr marL="342900" indent="-342900">
-              <a:buFont typeface="Arial" panose="020B0604020202020204" pitchFamily="34" charset="0"/>
-              <a:buChar char="•"/>
-            </a:pPr>
-            <a:r>
-              <a:rPr lang="en-IN" sz="2400" dirty="0">
-                <a:solidFill>
-                  <a:schemeClr val="accent6">
-                    <a:lumMod val="60000"/>
-                    <a:lumOff val="40000"/>
-                  </a:schemeClr>
-                </a:solidFill>
-              </a:rPr>
-              <a:t>Word limit</a:t>
-            </a:r>
-          </a:p>
-          <a:p>
-            <a:pPr marL="342900" indent="-342900">
-              <a:buFont typeface="Arial" panose="020B0604020202020204" pitchFamily="34" charset="0"/>
-              <a:buChar char="•"/>
-            </a:pPr>
-            <a:r>
-              <a:rPr lang="en-IN" sz="2400" dirty="0">
-                <a:solidFill>
-                  <a:schemeClr val="accent6">
-                    <a:lumMod val="60000"/>
-                    <a:lumOff val="40000"/>
-                  </a:schemeClr>
-                </a:solidFill>
-              </a:rPr>
-              <a:t>Tone</a:t>
-            </a:r>
-          </a:p>
-          <a:p>
-            <a:pPr marL="342900" indent="-342900">
-              <a:buFont typeface="Arial" panose="020B0604020202020204" pitchFamily="34" charset="0"/>
-              <a:buChar char="•"/>
-            </a:pPr>
-            <a:r>
-              <a:rPr lang="en-IN" sz="2400" dirty="0">
-                <a:solidFill>
-                  <a:schemeClr val="accent6">
-                    <a:lumMod val="60000"/>
-                    <a:lumOff val="40000"/>
-                  </a:schemeClr>
-                </a:solidFill>
-              </a:rPr>
-              <a:t>Audience level</a:t>
-            </a:r>
-          </a:p>
-          <a:p>
-            <a:pPr marL="342900" indent="-342900">
-              <a:buFont typeface="Arial" panose="020B0604020202020204" pitchFamily="34" charset="0"/>
-              <a:buChar char="•"/>
-            </a:pPr>
-            <a:r>
-              <a:rPr lang="en-IN" sz="2400" dirty="0">
-                <a:solidFill>
-                  <a:schemeClr val="accent6">
-                    <a:lumMod val="60000"/>
-                    <a:lumOff val="40000"/>
-                  </a:schemeClr>
-                </a:solidFill>
-              </a:rPr>
-              <a:t>Style</a:t>
-            </a:r>
-          </a:p>
-          <a:p>
-            <a:pPr marL="342900" indent="-342900">
-              <a:buFont typeface="Arial" panose="020B0604020202020204" pitchFamily="34" charset="0"/>
-              <a:buChar char="•"/>
-            </a:pPr>
-            <a:r>
-              <a:rPr lang="en-IN" sz="2400" dirty="0">
-                <a:solidFill>
-                  <a:schemeClr val="accent6">
-                    <a:lumMod val="60000"/>
-                    <a:lumOff val="40000"/>
-                  </a:schemeClr>
-                </a:solidFill>
-              </a:rPr>
-              <a:t>Technology restriction</a:t>
-            </a:r>
-          </a:p>
-          <a:p>
-            <a:endParaRPr lang="en-IN" sz="2400" dirty="0">
-              <a:solidFill>
-                <a:schemeClr val="accent6">
-                  <a:lumMod val="60000"/>
-                  <a:lumOff val="40000"/>
-                </a:schemeClr>
-              </a:solidFill>
-            </a:endParaRPr>
-          </a:p>
-          <a:p>
-            <a:r>
-              <a:rPr lang="en-US" sz="2400" dirty="0">
-                <a:solidFill>
-                  <a:schemeClr val="accent6">
-                    <a:lumMod val="60000"/>
-                    <a:lumOff val="40000"/>
-                  </a:schemeClr>
-                </a:solidFill>
-              </a:rPr>
-              <a:t>Example: </a:t>
-            </a:r>
-          </a:p>
-          <a:p>
-            <a:r>
-              <a:rPr lang="en-US" sz="2400" dirty="0">
-                <a:solidFill>
-                  <a:schemeClr val="accent6">
-                    <a:lumMod val="60000"/>
-                    <a:lumOff val="40000"/>
-                  </a:schemeClr>
-                </a:solidFill>
-              </a:rPr>
-              <a:t>Explain in </a:t>
-            </a:r>
-            <a:r>
-              <a:rPr lang="en-US" sz="2400" b="1" i="1" dirty="0">
-                <a:solidFill>
-                  <a:schemeClr val="accent6">
-                    <a:lumMod val="60000"/>
-                    <a:lumOff val="40000"/>
-                  </a:schemeClr>
-                </a:solidFill>
-              </a:rPr>
-              <a:t>simple language under 150 words</a:t>
-            </a:r>
-            <a:r>
-              <a:rPr lang="en-US" sz="2400" b="1" dirty="0">
-                <a:solidFill>
-                  <a:schemeClr val="accent6">
-                    <a:lumMod val="60000"/>
-                    <a:lumOff val="40000"/>
-                  </a:schemeClr>
-                </a:solidFill>
-              </a:rPr>
-              <a:t> </a:t>
-            </a:r>
-            <a:r>
-              <a:rPr lang="en-US" sz="2400" dirty="0">
-                <a:solidFill>
-                  <a:schemeClr val="accent6">
-                    <a:lumMod val="60000"/>
-                    <a:lumOff val="40000"/>
-                  </a:schemeClr>
-                </a:solidFill>
-              </a:rPr>
-              <a:t>the concept of calculus. My audience is </a:t>
-            </a:r>
-            <a:r>
-              <a:rPr lang="en-US" sz="2400" b="1" i="1" dirty="0">
-                <a:solidFill>
-                  <a:schemeClr val="accent6">
-                    <a:lumMod val="60000"/>
-                    <a:lumOff val="40000"/>
-                  </a:schemeClr>
-                </a:solidFill>
-              </a:rPr>
-              <a:t>high school students</a:t>
-            </a:r>
-            <a:r>
-              <a:rPr lang="en-US" sz="2400" b="1" dirty="0">
-                <a:solidFill>
-                  <a:schemeClr val="accent6">
-                    <a:lumMod val="60000"/>
-                    <a:lumOff val="40000"/>
-                  </a:schemeClr>
-                </a:solidFill>
-              </a:rPr>
-              <a:t> </a:t>
-            </a:r>
-            <a:r>
-              <a:rPr lang="en-US" sz="2400" dirty="0">
-                <a:solidFill>
-                  <a:schemeClr val="accent6">
-                    <a:lumMod val="60000"/>
-                    <a:lumOff val="40000"/>
-                  </a:schemeClr>
-                </a:solidFill>
-              </a:rPr>
-              <a:t>with weak math background. </a:t>
-            </a:r>
-            <a:r>
-              <a:rPr lang="en-US" sz="2400" b="1" i="1" dirty="0">
-                <a:solidFill>
-                  <a:schemeClr val="accent6">
-                    <a:lumMod val="60000"/>
-                    <a:lumOff val="40000"/>
-                  </a:schemeClr>
-                </a:solidFill>
-              </a:rPr>
-              <a:t>Do not use complex math formulas.</a:t>
-            </a:r>
-          </a:p>
-        </p:txBody>
-      </p:sp>
-    </p:spTree>
-    <p:extLst>
-      <p:ext uri="{BB962C8B-B14F-4D97-AF65-F5344CB8AC3E}">
-        <p14:creationId xmlns:p14="http://schemas.microsoft.com/office/powerpoint/2010/main" val="3973849161"/>
-      </p:ext>
-    </p:extLst>
-  </p:cSld>
-  <p:clrMapOvr>
-    <a:masterClrMapping/>
-  </p:clrMapOvr>
-</p:sld>
-</file>
-
-<file path=ppt/slides/slide27.xml><?xml version="1.0" encoding="utf-8"?>
-<p:sld xmlns:a="http://schemas.openxmlformats.org/drawingml/2006/main" xmlns:r="http://schemas.openxmlformats.org/officeDocument/2006/relationships" xmlns:p="http://schemas.openxmlformats.org/presentationml/2006/main">
-  <p:cSld>
-    <p:spTree>
-      <p:nvGrpSpPr>
-        <p:cNvPr id="1" name="">
-          <a:extLst>
-            <a:ext uri="{FF2B5EF4-FFF2-40B4-BE49-F238E27FC236}">
-              <a16:creationId xmlns:a16="http://schemas.microsoft.com/office/drawing/2014/main" id="{173670BF-11AC-D158-95CA-D69482D74C5A}"/>
-            </a:ext>
-          </a:extLst>
-        </p:cNvPr>
-        <p:cNvGrpSpPr/>
-        <p:nvPr/>
-      </p:nvGrpSpPr>
-      <p:grpSpPr>
-        <a:xfrm>
-          <a:off x="0" y="0"/>
-          <a:ext cx="0" cy="0"/>
-          <a:chOff x="0" y="0"/>
-          <a:chExt cx="0" cy="0"/>
-        </a:xfrm>
-      </p:grpSpPr>
-      <p:sp>
-        <p:nvSpPr>
-          <p:cNvPr id="9" name="TextBox 8">
-            <a:extLst>
-              <a:ext uri="{FF2B5EF4-FFF2-40B4-BE49-F238E27FC236}">
-                <a16:creationId xmlns:a16="http://schemas.microsoft.com/office/drawing/2014/main" id="{61CC46AD-353B-E9B0-DBC3-9EE0EE447951}"/>
-              </a:ext>
-            </a:extLst>
-          </p:cNvPr>
-          <p:cNvSpPr txBox="1"/>
-          <p:nvPr/>
-        </p:nvSpPr>
-        <p:spPr>
-          <a:xfrm>
-            <a:off x="592087" y="123858"/>
-            <a:ext cx="9859604" cy="523220"/>
-          </a:xfrm>
-          <a:prstGeom prst="rect">
-            <a:avLst/>
-          </a:prstGeom>
-          <a:noFill/>
-        </p:spPr>
-        <p:txBody>
-          <a:bodyPr wrap="square" rtlCol="0">
-            <a:spAutoFit/>
-          </a:bodyPr>
-          <a:lstStyle/>
-          <a:p>
-            <a:pPr algn="ctr"/>
-            <a:r>
-              <a:rPr lang="en-IN" sz="2800" dirty="0">
-                <a:solidFill>
-                  <a:schemeClr val="accent6">
-                    <a:lumMod val="60000"/>
-                    <a:lumOff val="40000"/>
-                  </a:schemeClr>
-                </a:solidFill>
-              </a:rPr>
-              <a:t>The Golden Prompt Formula</a:t>
-            </a:r>
-            <a:endParaRPr lang="en-US" sz="2800" dirty="0">
-              <a:solidFill>
-                <a:schemeClr val="accent6">
-                  <a:lumMod val="60000"/>
-                  <a:lumOff val="40000"/>
-                </a:schemeClr>
-              </a:solidFill>
-            </a:endParaRPr>
-          </a:p>
-        </p:txBody>
-      </p:sp>
-      <p:sp>
-        <p:nvSpPr>
-          <p:cNvPr id="3" name="TextBox 2">
-            <a:extLst>
-              <a:ext uri="{FF2B5EF4-FFF2-40B4-BE49-F238E27FC236}">
-                <a16:creationId xmlns:a16="http://schemas.microsoft.com/office/drawing/2014/main" id="{129E7542-8957-F3C2-DB3D-05ED1D5A72C9}"/>
-              </a:ext>
-            </a:extLst>
-          </p:cNvPr>
-          <p:cNvSpPr txBox="1"/>
-          <p:nvPr/>
-        </p:nvSpPr>
-        <p:spPr>
-          <a:xfrm>
-            <a:off x="334297" y="811821"/>
-            <a:ext cx="7423355" cy="4154984"/>
-          </a:xfrm>
-          <a:prstGeom prst="rect">
-            <a:avLst/>
-          </a:prstGeom>
-          <a:noFill/>
-        </p:spPr>
-        <p:txBody>
-          <a:bodyPr wrap="square">
-            <a:spAutoFit/>
-          </a:bodyPr>
-          <a:lstStyle/>
-          <a:p>
-            <a:r>
-              <a:rPr lang="en-IN" sz="2400" b="1" dirty="0">
-                <a:solidFill>
-                  <a:schemeClr val="accent4">
-                    <a:lumMod val="60000"/>
-                    <a:lumOff val="40000"/>
-                  </a:schemeClr>
-                </a:solidFill>
-              </a:rPr>
-              <a:t>Prompt = Context + Task + Constraint + Output Format</a:t>
-            </a:r>
-          </a:p>
-          <a:p>
-            <a:endParaRPr lang="en-US" sz="2400" b="1" dirty="0">
-              <a:solidFill>
-                <a:schemeClr val="accent6">
-                  <a:lumMod val="60000"/>
-                  <a:lumOff val="40000"/>
-                </a:schemeClr>
-              </a:solidFill>
-            </a:endParaRPr>
-          </a:p>
-          <a:p>
-            <a:r>
-              <a:rPr lang="en-US" sz="2400" b="1" dirty="0">
-                <a:solidFill>
-                  <a:schemeClr val="accent6">
-                    <a:lumMod val="60000"/>
-                    <a:lumOff val="40000"/>
-                  </a:schemeClr>
-                </a:solidFill>
-              </a:rPr>
-              <a:t>4. Output Format (Structure)</a:t>
-            </a:r>
-          </a:p>
-          <a:p>
-            <a:r>
-              <a:rPr lang="en-US" sz="2400" dirty="0">
-                <a:solidFill>
-                  <a:schemeClr val="accent6">
-                    <a:lumMod val="60000"/>
-                    <a:lumOff val="40000"/>
-                  </a:schemeClr>
-                </a:solidFill>
-              </a:rPr>
-              <a:t>This dramatically improves results.</a:t>
-            </a:r>
-          </a:p>
-          <a:p>
-            <a:endParaRPr lang="en-US" sz="2400" dirty="0">
-              <a:solidFill>
-                <a:schemeClr val="accent6">
-                  <a:lumMod val="60000"/>
-                  <a:lumOff val="40000"/>
-                </a:schemeClr>
-              </a:solidFill>
-            </a:endParaRPr>
-          </a:p>
-          <a:p>
-            <a:r>
-              <a:rPr lang="en-US" sz="2400" dirty="0">
-                <a:solidFill>
-                  <a:schemeClr val="accent6">
-                    <a:lumMod val="60000"/>
-                    <a:lumOff val="40000"/>
-                  </a:schemeClr>
-                </a:solidFill>
-              </a:rPr>
-              <a:t>Output format examples:</a:t>
-            </a:r>
-          </a:p>
-          <a:p>
-            <a:pPr marL="342900" indent="-342900">
-              <a:buFont typeface="Arial" panose="020B0604020202020204" pitchFamily="34" charset="0"/>
-              <a:buChar char="•"/>
-            </a:pPr>
-            <a:r>
-              <a:rPr lang="en-US" sz="2400" dirty="0">
-                <a:solidFill>
-                  <a:schemeClr val="accent6">
-                    <a:lumMod val="60000"/>
-                    <a:lumOff val="40000"/>
-                  </a:schemeClr>
-                </a:solidFill>
-              </a:rPr>
-              <a:t>Table</a:t>
-            </a:r>
-          </a:p>
-          <a:p>
-            <a:pPr marL="342900" indent="-342900">
-              <a:buFont typeface="Arial" panose="020B0604020202020204" pitchFamily="34" charset="0"/>
-              <a:buChar char="•"/>
-            </a:pPr>
-            <a:r>
-              <a:rPr lang="en-US" sz="2400" dirty="0">
-                <a:solidFill>
-                  <a:schemeClr val="accent6">
-                    <a:lumMod val="60000"/>
-                    <a:lumOff val="40000"/>
-                  </a:schemeClr>
-                </a:solidFill>
-              </a:rPr>
-              <a:t>Bullet points</a:t>
-            </a:r>
-          </a:p>
-          <a:p>
-            <a:pPr marL="342900" indent="-342900">
-              <a:buFont typeface="Arial" panose="020B0604020202020204" pitchFamily="34" charset="0"/>
-              <a:buChar char="•"/>
-            </a:pPr>
-            <a:r>
-              <a:rPr lang="en-US" sz="2400" dirty="0">
-                <a:solidFill>
-                  <a:schemeClr val="accent6">
-                    <a:lumMod val="60000"/>
-                    <a:lumOff val="40000"/>
-                  </a:schemeClr>
-                </a:solidFill>
-              </a:rPr>
-              <a:t>JSON</a:t>
-            </a:r>
-          </a:p>
-          <a:p>
-            <a:pPr marL="342900" indent="-342900">
-              <a:buFont typeface="Arial" panose="020B0604020202020204" pitchFamily="34" charset="0"/>
-              <a:buChar char="•"/>
-            </a:pPr>
-            <a:r>
-              <a:rPr lang="en-US" sz="2400" dirty="0">
-                <a:solidFill>
-                  <a:schemeClr val="accent6">
-                    <a:lumMod val="60000"/>
-                    <a:lumOff val="40000"/>
-                  </a:schemeClr>
-                </a:solidFill>
-              </a:rPr>
-              <a:t>Code</a:t>
-            </a:r>
-          </a:p>
-          <a:p>
-            <a:pPr marL="342900" indent="-342900">
-              <a:buFont typeface="Arial" panose="020B0604020202020204" pitchFamily="34" charset="0"/>
-              <a:buChar char="•"/>
-            </a:pPr>
-            <a:r>
-              <a:rPr lang="en-US" sz="2400" dirty="0">
-                <a:solidFill>
-                  <a:schemeClr val="accent6">
-                    <a:lumMod val="60000"/>
-                    <a:lumOff val="40000"/>
-                  </a:schemeClr>
-                </a:solidFill>
-              </a:rPr>
-              <a:t>Step-by-step guide</a:t>
-            </a:r>
-          </a:p>
-        </p:txBody>
-      </p:sp>
-    </p:spTree>
-    <p:extLst>
-      <p:ext uri="{BB962C8B-B14F-4D97-AF65-F5344CB8AC3E}">
-        <p14:creationId xmlns:p14="http://schemas.microsoft.com/office/powerpoint/2010/main" val="3464606236"/>
-      </p:ext>
-    </p:extLst>
-  </p:cSld>
-  <p:clrMapOvr>
-    <a:masterClrMapping/>
-  </p:clrMapOvr>
-</p:sld>
-</file>
-
-<file path=ppt/slides/slide28.xml><?xml version="1.0" encoding="utf-8"?>
-<p:sld xmlns:a="http://schemas.openxmlformats.org/drawingml/2006/main" xmlns:r="http://schemas.openxmlformats.org/officeDocument/2006/relationships" xmlns:p="http://schemas.openxmlformats.org/presentationml/2006/main">
-  <p:cSld>
-    <p:spTree>
-      <p:nvGrpSpPr>
-        <p:cNvPr id="1" name="">
-          <a:extLst>
-            <a:ext uri="{FF2B5EF4-FFF2-40B4-BE49-F238E27FC236}">
-              <a16:creationId xmlns:a16="http://schemas.microsoft.com/office/drawing/2014/main" id="{602DC570-E0A4-B9C5-988A-7FC8B36737CC}"/>
-            </a:ext>
-          </a:extLst>
-        </p:cNvPr>
-        <p:cNvGrpSpPr/>
-        <p:nvPr/>
-      </p:nvGrpSpPr>
-      <p:grpSpPr>
-        <a:xfrm>
-          <a:off x="0" y="0"/>
-          <a:ext cx="0" cy="0"/>
-          <a:chOff x="0" y="0"/>
-          <a:chExt cx="0" cy="0"/>
-        </a:xfrm>
-      </p:grpSpPr>
-      <p:sp>
-        <p:nvSpPr>
-          <p:cNvPr id="9" name="TextBox 8">
-            <a:extLst>
-              <a:ext uri="{FF2B5EF4-FFF2-40B4-BE49-F238E27FC236}">
-                <a16:creationId xmlns:a16="http://schemas.microsoft.com/office/drawing/2014/main" id="{42CD7745-5608-5569-FDDD-A46EA0CF672E}"/>
-              </a:ext>
-            </a:extLst>
-          </p:cNvPr>
-          <p:cNvSpPr txBox="1"/>
-          <p:nvPr/>
-        </p:nvSpPr>
-        <p:spPr>
-          <a:xfrm>
-            <a:off x="592087" y="123858"/>
-            <a:ext cx="9859604" cy="523220"/>
-          </a:xfrm>
-          <a:prstGeom prst="rect">
-            <a:avLst/>
-          </a:prstGeom>
-          <a:noFill/>
-        </p:spPr>
-        <p:txBody>
-          <a:bodyPr wrap="square" rtlCol="0">
-            <a:spAutoFit/>
-          </a:bodyPr>
-          <a:lstStyle/>
-          <a:p>
-            <a:pPr algn="ctr"/>
-            <a:r>
-              <a:rPr lang="en-IN" sz="2800" dirty="0">
-                <a:solidFill>
-                  <a:schemeClr val="accent6">
-                    <a:lumMod val="60000"/>
-                    <a:lumOff val="40000"/>
-                  </a:schemeClr>
-                </a:solidFill>
-              </a:rPr>
-              <a:t>The Golden Prompt Formula</a:t>
-            </a:r>
-            <a:endParaRPr lang="en-US" sz="2800" dirty="0">
-              <a:solidFill>
-                <a:schemeClr val="accent6">
-                  <a:lumMod val="60000"/>
-                  <a:lumOff val="40000"/>
-                </a:schemeClr>
-              </a:solidFill>
-            </a:endParaRPr>
-          </a:p>
-        </p:txBody>
-      </p:sp>
-      <p:pic>
-        <p:nvPicPr>
-          <p:cNvPr id="4" name="Picture 3">
-            <a:extLst>
-              <a:ext uri="{FF2B5EF4-FFF2-40B4-BE49-F238E27FC236}">
-                <a16:creationId xmlns:a16="http://schemas.microsoft.com/office/drawing/2014/main" id="{E6F581D1-28DA-28B5-FFEB-DB6C8CF6619B}"/>
-              </a:ext>
-            </a:extLst>
-          </p:cNvPr>
-          <p:cNvPicPr>
-            <a:picLocks noChangeAspect="1"/>
-          </p:cNvPicPr>
-          <p:nvPr/>
-        </p:nvPicPr>
-        <p:blipFill>
-          <a:blip r:embed="rId3"/>
-          <a:stretch>
-            <a:fillRect/>
-          </a:stretch>
-        </p:blipFill>
-        <p:spPr>
-          <a:xfrm>
-            <a:off x="1200913" y="3104883"/>
-            <a:ext cx="8917158" cy="2637155"/>
-          </a:xfrm>
-          <a:prstGeom prst="rect">
-            <a:avLst/>
-          </a:prstGeom>
-        </p:spPr>
-      </p:pic>
-      <p:sp>
-        <p:nvSpPr>
-          <p:cNvPr id="6" name="TextBox 5">
-            <a:extLst>
-              <a:ext uri="{FF2B5EF4-FFF2-40B4-BE49-F238E27FC236}">
-                <a16:creationId xmlns:a16="http://schemas.microsoft.com/office/drawing/2014/main" id="{FFFC0898-4A59-3995-001A-ED66D933E0DB}"/>
-              </a:ext>
-            </a:extLst>
-          </p:cNvPr>
-          <p:cNvSpPr txBox="1"/>
-          <p:nvPr/>
-        </p:nvSpPr>
-        <p:spPr>
-          <a:xfrm>
-            <a:off x="522487" y="985427"/>
-            <a:ext cx="9358932" cy="1200329"/>
-          </a:xfrm>
-          <a:prstGeom prst="rect">
-            <a:avLst/>
-          </a:prstGeom>
-          <a:noFill/>
-        </p:spPr>
-        <p:txBody>
-          <a:bodyPr wrap="square">
-            <a:spAutoFit/>
-          </a:bodyPr>
-          <a:lstStyle/>
-          <a:p>
-            <a:r>
-              <a:rPr lang="en-US" sz="2400" dirty="0">
-                <a:solidFill>
-                  <a:schemeClr val="accent6">
-                    <a:lumMod val="60000"/>
-                    <a:lumOff val="40000"/>
-                  </a:schemeClr>
-                </a:solidFill>
-              </a:rPr>
-              <a:t>Example: </a:t>
-            </a:r>
-          </a:p>
-          <a:p>
-            <a:r>
-              <a:rPr lang="en-US" sz="2400" dirty="0">
-                <a:solidFill>
-                  <a:schemeClr val="accent6">
-                    <a:lumMod val="60000"/>
-                    <a:lumOff val="40000"/>
-                  </a:schemeClr>
-                </a:solidFill>
-              </a:rPr>
-              <a:t>Tell me the 3 difference between regular data and time series data. Provide output in </a:t>
-            </a:r>
-            <a:r>
-              <a:rPr lang="en-US" sz="2400" b="1" i="1" dirty="0">
-                <a:solidFill>
-                  <a:schemeClr val="accent6">
-                    <a:lumMod val="60000"/>
-                    <a:lumOff val="40000"/>
-                  </a:schemeClr>
-                </a:solidFill>
-              </a:rPr>
-              <a:t>table format</a:t>
-            </a:r>
-            <a:r>
-              <a:rPr lang="en-US" sz="2400" dirty="0">
-                <a:solidFill>
-                  <a:schemeClr val="accent6">
-                    <a:lumMod val="60000"/>
-                    <a:lumOff val="40000"/>
-                  </a:schemeClr>
-                </a:solidFill>
-              </a:rPr>
-              <a:t>.</a:t>
-            </a:r>
-          </a:p>
-        </p:txBody>
-      </p:sp>
-    </p:spTree>
-    <p:extLst>
-      <p:ext uri="{BB962C8B-B14F-4D97-AF65-F5344CB8AC3E}">
-        <p14:creationId xmlns:p14="http://schemas.microsoft.com/office/powerpoint/2010/main" val="3378689541"/>
-      </p:ext>
-    </p:extLst>
-  </p:cSld>
-  <p:clrMapOvr>
-    <a:masterClrMapping/>
-  </p:clrMapOvr>
-</p:sld>
-</file>
-
-<file path=ppt/slides/slide29.xml><?xml version="1.0" encoding="utf-8"?>
+<file path=ppt/slides/slide30.xml><?xml version="1.0" encoding="utf-8"?>
 <p:sld xmlns:a="http://schemas.openxmlformats.org/drawingml/2006/main" xmlns:r="http://schemas.openxmlformats.org/officeDocument/2006/relationships" xmlns:p="http://schemas.openxmlformats.org/presentationml/2006/main">
   <p:cSld>
     <p:spTree>
@@ -10468,269 +11114,7 @@
 </p:sld>
 </file>
 
-<file path=ppt/slides/slide3.xml><?xml version="1.0" encoding="utf-8"?>
-<p:sld xmlns:a="http://schemas.openxmlformats.org/drawingml/2006/main" xmlns:r="http://schemas.openxmlformats.org/officeDocument/2006/relationships" xmlns:p="http://schemas.openxmlformats.org/presentationml/2006/main">
-  <p:cSld>
-    <p:spTree>
-      <p:nvGrpSpPr>
-        <p:cNvPr id="1" name="">
-          <a:extLst>
-            <a:ext uri="{FF2B5EF4-FFF2-40B4-BE49-F238E27FC236}">
-              <a16:creationId xmlns:a16="http://schemas.microsoft.com/office/drawing/2014/main" id="{1E5E4F6F-FF16-B480-353A-FD9A5B959985}"/>
-            </a:ext>
-          </a:extLst>
-        </p:cNvPr>
-        <p:cNvGrpSpPr/>
-        <p:nvPr/>
-      </p:nvGrpSpPr>
-      <p:grpSpPr>
-        <a:xfrm>
-          <a:off x="0" y="0"/>
-          <a:ext cx="0" cy="0"/>
-          <a:chOff x="0" y="0"/>
-          <a:chExt cx="0" cy="0"/>
-        </a:xfrm>
-      </p:grpSpPr>
-      <p:sp>
-        <p:nvSpPr>
-          <p:cNvPr id="20" name="TextBox 19">
-            <a:extLst>
-              <a:ext uri="{FF2B5EF4-FFF2-40B4-BE49-F238E27FC236}">
-                <a16:creationId xmlns:a16="http://schemas.microsoft.com/office/drawing/2014/main" id="{E66140D9-FCDC-B3BB-C84D-13761381A495}"/>
-              </a:ext>
-            </a:extLst>
-          </p:cNvPr>
-          <p:cNvSpPr txBox="1"/>
-          <p:nvPr/>
-        </p:nvSpPr>
-        <p:spPr>
-          <a:xfrm>
-            <a:off x="164592" y="1698209"/>
-            <a:ext cx="11402568" cy="2677656"/>
-          </a:xfrm>
-          <a:prstGeom prst="rect">
-            <a:avLst/>
-          </a:prstGeom>
-          <a:noFill/>
-        </p:spPr>
-        <p:txBody>
-          <a:bodyPr wrap="square">
-            <a:spAutoFit/>
-          </a:bodyPr>
-          <a:lstStyle/>
-          <a:p>
-            <a:r>
-              <a:rPr lang="en-US" sz="2400" b="1" dirty="0">
-                <a:solidFill>
-                  <a:schemeClr val="accent6">
-                    <a:lumMod val="60000"/>
-                    <a:lumOff val="40000"/>
-                  </a:schemeClr>
-                </a:solidFill>
-              </a:rPr>
-              <a:t>Tokenization</a:t>
-            </a:r>
-            <a:endParaRPr lang="en-US" sz="2400" dirty="0">
-              <a:solidFill>
-                <a:schemeClr val="accent6">
-                  <a:lumMod val="60000"/>
-                  <a:lumOff val="40000"/>
-                </a:schemeClr>
-              </a:solidFill>
-            </a:endParaRPr>
-          </a:p>
-          <a:p>
-            <a:endParaRPr lang="en-US" sz="2400" dirty="0">
-              <a:solidFill>
-                <a:schemeClr val="accent6">
-                  <a:lumMod val="60000"/>
-                  <a:lumOff val="40000"/>
-                </a:schemeClr>
-              </a:solidFill>
-            </a:endParaRPr>
-          </a:p>
-          <a:p>
-            <a:r>
-              <a:rPr lang="en-US" sz="2400" dirty="0">
-                <a:solidFill>
-                  <a:schemeClr val="accent6">
-                    <a:lumMod val="60000"/>
-                    <a:lumOff val="40000"/>
-                  </a:schemeClr>
-                </a:solidFill>
-              </a:rPr>
-              <a:t>AI models </a:t>
-            </a:r>
-            <a:r>
-              <a:rPr lang="en-US" sz="2400" b="1" dirty="0">
-                <a:solidFill>
-                  <a:schemeClr val="accent6">
-                    <a:lumMod val="60000"/>
-                    <a:lumOff val="40000"/>
-                  </a:schemeClr>
-                </a:solidFill>
-              </a:rPr>
-              <a:t>do not understand language like humans</a:t>
-            </a:r>
-            <a:r>
-              <a:rPr lang="en-US" sz="2400" dirty="0">
-                <a:solidFill>
-                  <a:schemeClr val="accent6">
-                    <a:lumMod val="60000"/>
-                    <a:lumOff val="40000"/>
-                  </a:schemeClr>
-                </a:solidFill>
-              </a:rPr>
-              <a:t>.</a:t>
-            </a:r>
-            <a:br>
-              <a:rPr lang="en-US" sz="2400" dirty="0">
-                <a:solidFill>
-                  <a:schemeClr val="accent6">
-                    <a:lumMod val="60000"/>
-                    <a:lumOff val="40000"/>
-                  </a:schemeClr>
-                </a:solidFill>
-              </a:rPr>
-            </a:br>
-            <a:r>
-              <a:rPr lang="en-US" sz="2400" dirty="0">
-                <a:solidFill>
-                  <a:schemeClr val="accent6">
-                    <a:lumMod val="60000"/>
-                    <a:lumOff val="40000"/>
-                  </a:schemeClr>
-                </a:solidFill>
-              </a:rPr>
-              <a:t>They convert </a:t>
-            </a:r>
-            <a:r>
-              <a:rPr lang="en-US" sz="2400" b="1" dirty="0">
-                <a:solidFill>
-                  <a:schemeClr val="accent6">
-                    <a:lumMod val="60000"/>
-                    <a:lumOff val="40000"/>
-                  </a:schemeClr>
-                </a:solidFill>
-              </a:rPr>
-              <a:t>text into tokens</a:t>
-            </a:r>
-            <a:r>
-              <a:rPr lang="en-US" sz="2400" dirty="0">
-                <a:solidFill>
-                  <a:schemeClr val="accent6">
-                    <a:lumMod val="60000"/>
-                    <a:lumOff val="40000"/>
-                  </a:schemeClr>
-                </a:solidFill>
-              </a:rPr>
-              <a:t>, which are basically </a:t>
-            </a:r>
-            <a:r>
-              <a:rPr lang="en-US" sz="2400" b="1" dirty="0">
-                <a:solidFill>
-                  <a:schemeClr val="accent6">
-                    <a:lumMod val="60000"/>
-                    <a:lumOff val="40000"/>
-                  </a:schemeClr>
-                </a:solidFill>
-              </a:rPr>
-              <a:t>numbers representing </a:t>
-            </a:r>
-            <a:r>
-              <a:rPr lang="en-US" sz="2400" b="1" dirty="0">
-                <a:solidFill>
-                  <a:schemeClr val="accent4">
-                    <a:lumMod val="60000"/>
-                    <a:lumOff val="40000"/>
-                  </a:schemeClr>
-                </a:solidFill>
-              </a:rPr>
-              <a:t>pieces</a:t>
-            </a:r>
-            <a:r>
-              <a:rPr lang="en-US" sz="2400" b="1" dirty="0">
-                <a:solidFill>
-                  <a:schemeClr val="accent6">
-                    <a:lumMod val="60000"/>
-                    <a:lumOff val="40000"/>
-                  </a:schemeClr>
-                </a:solidFill>
-              </a:rPr>
-              <a:t> of words</a:t>
-            </a:r>
-            <a:r>
-              <a:rPr lang="en-US" sz="2400" dirty="0">
-                <a:solidFill>
-                  <a:schemeClr val="accent6">
-                    <a:lumMod val="60000"/>
-                    <a:lumOff val="40000"/>
-                  </a:schemeClr>
-                </a:solidFill>
-              </a:rPr>
-              <a:t>.</a:t>
-            </a:r>
-          </a:p>
-          <a:p>
-            <a:endParaRPr lang="en-US" sz="2400" dirty="0">
-              <a:solidFill>
-                <a:schemeClr val="accent6">
-                  <a:lumMod val="60000"/>
-                  <a:lumOff val="40000"/>
-                </a:schemeClr>
-              </a:solidFill>
-            </a:endParaRPr>
-          </a:p>
-          <a:p>
-            <a:r>
-              <a:rPr lang="en-IN" sz="2400" dirty="0">
-                <a:solidFill>
-                  <a:schemeClr val="accent6">
-                    <a:lumMod val="60000"/>
-                    <a:lumOff val="40000"/>
-                  </a:schemeClr>
-                </a:solidFill>
-              </a:rPr>
-              <a:t>Humans see: I love machine learning</a:t>
-            </a:r>
-            <a:endParaRPr lang="en-US" sz="2400" dirty="0">
-              <a:solidFill>
-                <a:schemeClr val="accent6">
-                  <a:lumMod val="60000"/>
-                  <a:lumOff val="40000"/>
-                </a:schemeClr>
-              </a:solidFill>
-            </a:endParaRPr>
-          </a:p>
-          <a:p>
-            <a:r>
-              <a:rPr lang="it-IT" sz="2400" dirty="0">
-                <a:solidFill>
-                  <a:schemeClr val="accent6">
-                    <a:lumMod val="60000"/>
-                    <a:lumOff val="40000"/>
-                  </a:schemeClr>
-                </a:solidFill>
-              </a:rPr>
-              <a:t>AI sees         :  [101, 1045, 2293, 3698, 4083, 102]</a:t>
-            </a:r>
-          </a:p>
-        </p:txBody>
-      </p:sp>
-    </p:spTree>
-    <p:extLst>
-      <p:ext uri="{BB962C8B-B14F-4D97-AF65-F5344CB8AC3E}">
-        <p14:creationId xmlns:p14="http://schemas.microsoft.com/office/powerpoint/2010/main" val="513358844"/>
-      </p:ext>
-    </p:extLst>
-  </p:cSld>
-  <p:clrMapOvr>
-    <a:masterClrMapping/>
-  </p:clrMapOvr>
-</p:sld>
-</file>
-
-<file path=ppt/slides/slide30.xml><?xml version="1.0" encoding="utf-8"?>
+<file path=ppt/slides/slide31.xml><?xml version="1.0" encoding="utf-8"?>
 <p:sld xmlns:a="http://schemas.openxmlformats.org/drawingml/2006/main" xmlns:r="http://schemas.openxmlformats.org/officeDocument/2006/relationships" xmlns:p="http://schemas.openxmlformats.org/presentationml/2006/main">
   <p:cSld>
     <p:spTree>
@@ -10877,7 +11261,7 @@
 </p:sld>
 </file>
 
-<file path=ppt/slides/slide31.xml><?xml version="1.0" encoding="utf-8"?>
+<file path=ppt/slides/slide32.xml><?xml version="1.0" encoding="utf-8"?>
 <p:sld xmlns:a="http://schemas.openxmlformats.org/drawingml/2006/main" xmlns:r="http://schemas.openxmlformats.org/officeDocument/2006/relationships" xmlns:p="http://schemas.openxmlformats.org/presentationml/2006/main">
   <p:cSld>
     <p:spTree>
@@ -11148,7 +11532,7 @@
 </p:sld>
 </file>
 
-<file path=ppt/slides/slide32.xml><?xml version="1.0" encoding="utf-8"?>
+<file path=ppt/slides/slide33.xml><?xml version="1.0" encoding="utf-8"?>
 <p:sld xmlns:a="http://schemas.openxmlformats.org/drawingml/2006/main" xmlns:r="http://schemas.openxmlformats.org/officeDocument/2006/relationships" xmlns:p="http://schemas.openxmlformats.org/presentationml/2006/main">
   <p:cSld>
     <p:spTree>
@@ -11460,7 +11844,7 @@
 </p:sld>
 </file>
 
-<file path=ppt/slides/slide33.xml><?xml version="1.0" encoding="utf-8"?>
+<file path=ppt/slides/slide34.xml><?xml version="1.0" encoding="utf-8"?>
 <p:sld xmlns:a="http://schemas.openxmlformats.org/drawingml/2006/main" xmlns:r="http://schemas.openxmlformats.org/officeDocument/2006/relationships" xmlns:p="http://schemas.openxmlformats.org/presentationml/2006/main">
   <p:cSld>
     <p:spTree>
@@ -11496,7 +11880,7 @@
 </p:sld>
 </file>
 
-<file path=ppt/slides/slide34.xml><?xml version="1.0" encoding="utf-8"?>
+<file path=ppt/slides/slide35.xml><?xml version="1.0" encoding="utf-8"?>
 <p:sld xmlns:a="http://schemas.openxmlformats.org/drawingml/2006/main" xmlns:r="http://schemas.openxmlformats.org/officeDocument/2006/relationships" xmlns:p="http://schemas.openxmlformats.org/presentationml/2006/main">
   <p:cSld>
     <p:spTree>
@@ -11691,6 +12075,268 @@
         <p:cNvPr id="1" name="">
           <a:extLst>
             <a:ext uri="{FF2B5EF4-FFF2-40B4-BE49-F238E27FC236}">
+              <a16:creationId xmlns:a16="http://schemas.microsoft.com/office/drawing/2014/main" id="{1E5E4F6F-FF16-B480-353A-FD9A5B959985}"/>
+            </a:ext>
+          </a:extLst>
+        </p:cNvPr>
+        <p:cNvGrpSpPr/>
+        <p:nvPr/>
+      </p:nvGrpSpPr>
+      <p:grpSpPr>
+        <a:xfrm>
+          <a:off x="0" y="0"/>
+          <a:ext cx="0" cy="0"/>
+          <a:chOff x="0" y="0"/>
+          <a:chExt cx="0" cy="0"/>
+        </a:xfrm>
+      </p:grpSpPr>
+      <p:sp>
+        <p:nvSpPr>
+          <p:cNvPr id="20" name="TextBox 19">
+            <a:extLst>
+              <a:ext uri="{FF2B5EF4-FFF2-40B4-BE49-F238E27FC236}">
+                <a16:creationId xmlns:a16="http://schemas.microsoft.com/office/drawing/2014/main" id="{E66140D9-FCDC-B3BB-C84D-13761381A495}"/>
+              </a:ext>
+            </a:extLst>
+          </p:cNvPr>
+          <p:cNvSpPr txBox="1"/>
+          <p:nvPr/>
+        </p:nvSpPr>
+        <p:spPr>
+          <a:xfrm>
+            <a:off x="164592" y="1698209"/>
+            <a:ext cx="11402568" cy="2677656"/>
+          </a:xfrm>
+          <a:prstGeom prst="rect">
+            <a:avLst/>
+          </a:prstGeom>
+          <a:noFill/>
+        </p:spPr>
+        <p:txBody>
+          <a:bodyPr wrap="square">
+            <a:spAutoFit/>
+          </a:bodyPr>
+          <a:lstStyle/>
+          <a:p>
+            <a:r>
+              <a:rPr lang="en-US" sz="2400" b="1" dirty="0">
+                <a:solidFill>
+                  <a:schemeClr val="accent6">
+                    <a:lumMod val="60000"/>
+                    <a:lumOff val="40000"/>
+                  </a:schemeClr>
+                </a:solidFill>
+              </a:rPr>
+              <a:t>Tokenization</a:t>
+            </a:r>
+            <a:endParaRPr lang="en-US" sz="2400" dirty="0">
+              <a:solidFill>
+                <a:schemeClr val="accent6">
+                  <a:lumMod val="60000"/>
+                  <a:lumOff val="40000"/>
+                </a:schemeClr>
+              </a:solidFill>
+            </a:endParaRPr>
+          </a:p>
+          <a:p>
+            <a:endParaRPr lang="en-US" sz="2400" dirty="0">
+              <a:solidFill>
+                <a:schemeClr val="accent6">
+                  <a:lumMod val="60000"/>
+                  <a:lumOff val="40000"/>
+                </a:schemeClr>
+              </a:solidFill>
+            </a:endParaRPr>
+          </a:p>
+          <a:p>
+            <a:r>
+              <a:rPr lang="en-US" sz="2400" dirty="0">
+                <a:solidFill>
+                  <a:schemeClr val="accent6">
+                    <a:lumMod val="60000"/>
+                    <a:lumOff val="40000"/>
+                  </a:schemeClr>
+                </a:solidFill>
+              </a:rPr>
+              <a:t>AI models </a:t>
+            </a:r>
+            <a:r>
+              <a:rPr lang="en-US" sz="2400" b="1" dirty="0">
+                <a:solidFill>
+                  <a:schemeClr val="accent6">
+                    <a:lumMod val="60000"/>
+                    <a:lumOff val="40000"/>
+                  </a:schemeClr>
+                </a:solidFill>
+              </a:rPr>
+              <a:t>do not understand language like humans</a:t>
+            </a:r>
+            <a:r>
+              <a:rPr lang="en-US" sz="2400" dirty="0">
+                <a:solidFill>
+                  <a:schemeClr val="accent6">
+                    <a:lumMod val="60000"/>
+                    <a:lumOff val="40000"/>
+                  </a:schemeClr>
+                </a:solidFill>
+              </a:rPr>
+              <a:t>.</a:t>
+            </a:r>
+            <a:br>
+              <a:rPr lang="en-US" sz="2400" dirty="0">
+                <a:solidFill>
+                  <a:schemeClr val="accent6">
+                    <a:lumMod val="60000"/>
+                    <a:lumOff val="40000"/>
+                  </a:schemeClr>
+                </a:solidFill>
+              </a:rPr>
+            </a:br>
+            <a:r>
+              <a:rPr lang="en-US" sz="2400" dirty="0">
+                <a:solidFill>
+                  <a:schemeClr val="accent6">
+                    <a:lumMod val="60000"/>
+                    <a:lumOff val="40000"/>
+                  </a:schemeClr>
+                </a:solidFill>
+              </a:rPr>
+              <a:t>They convert </a:t>
+            </a:r>
+            <a:r>
+              <a:rPr lang="en-US" sz="2400" b="1" dirty="0">
+                <a:solidFill>
+                  <a:schemeClr val="accent6">
+                    <a:lumMod val="60000"/>
+                    <a:lumOff val="40000"/>
+                  </a:schemeClr>
+                </a:solidFill>
+              </a:rPr>
+              <a:t>text into tokens</a:t>
+            </a:r>
+            <a:r>
+              <a:rPr lang="en-US" sz="2400" dirty="0">
+                <a:solidFill>
+                  <a:schemeClr val="accent6">
+                    <a:lumMod val="60000"/>
+                    <a:lumOff val="40000"/>
+                  </a:schemeClr>
+                </a:solidFill>
+              </a:rPr>
+              <a:t>, which are basically </a:t>
+            </a:r>
+            <a:r>
+              <a:rPr lang="en-US" sz="2400" b="1" dirty="0">
+                <a:solidFill>
+                  <a:schemeClr val="accent6">
+                    <a:lumMod val="60000"/>
+                    <a:lumOff val="40000"/>
+                  </a:schemeClr>
+                </a:solidFill>
+              </a:rPr>
+              <a:t>numbers representing </a:t>
+            </a:r>
+            <a:r>
+              <a:rPr lang="en-US" sz="2400" b="1" dirty="0">
+                <a:solidFill>
+                  <a:schemeClr val="accent4">
+                    <a:lumMod val="60000"/>
+                    <a:lumOff val="40000"/>
+                  </a:schemeClr>
+                </a:solidFill>
+              </a:rPr>
+              <a:t>pieces</a:t>
+            </a:r>
+            <a:r>
+              <a:rPr lang="en-US" sz="2400" b="1" dirty="0">
+                <a:solidFill>
+                  <a:schemeClr val="accent6">
+                    <a:lumMod val="60000"/>
+                    <a:lumOff val="40000"/>
+                  </a:schemeClr>
+                </a:solidFill>
+              </a:rPr>
+              <a:t> of words</a:t>
+            </a:r>
+            <a:r>
+              <a:rPr lang="en-US" sz="2400" dirty="0">
+                <a:solidFill>
+                  <a:schemeClr val="accent6">
+                    <a:lumMod val="60000"/>
+                    <a:lumOff val="40000"/>
+                  </a:schemeClr>
+                </a:solidFill>
+              </a:rPr>
+              <a:t>.</a:t>
+            </a:r>
+          </a:p>
+          <a:p>
+            <a:endParaRPr lang="en-US" sz="2400" dirty="0">
+              <a:solidFill>
+                <a:schemeClr val="accent6">
+                  <a:lumMod val="60000"/>
+                  <a:lumOff val="40000"/>
+                </a:schemeClr>
+              </a:solidFill>
+            </a:endParaRPr>
+          </a:p>
+          <a:p>
+            <a:r>
+              <a:rPr lang="en-IN" sz="2400" dirty="0">
+                <a:solidFill>
+                  <a:schemeClr val="accent6">
+                    <a:lumMod val="60000"/>
+                    <a:lumOff val="40000"/>
+                  </a:schemeClr>
+                </a:solidFill>
+              </a:rPr>
+              <a:t>Humans see: I love machine learning</a:t>
+            </a:r>
+            <a:endParaRPr lang="en-US" sz="2400" dirty="0">
+              <a:solidFill>
+                <a:schemeClr val="accent6">
+                  <a:lumMod val="60000"/>
+                  <a:lumOff val="40000"/>
+                </a:schemeClr>
+              </a:solidFill>
+            </a:endParaRPr>
+          </a:p>
+          <a:p>
+            <a:r>
+              <a:rPr lang="it-IT" sz="2400" dirty="0">
+                <a:solidFill>
+                  <a:schemeClr val="accent6">
+                    <a:lumMod val="60000"/>
+                    <a:lumOff val="40000"/>
+                  </a:schemeClr>
+                </a:solidFill>
+              </a:rPr>
+              <a:t>AI sees         :  [101, 1045, 2293, 3698, 4083, 102]</a:t>
+            </a:r>
+          </a:p>
+        </p:txBody>
+      </p:sp>
+    </p:spTree>
+    <p:extLst>
+      <p:ext uri="{BB962C8B-B14F-4D97-AF65-F5344CB8AC3E}">
+        <p14:creationId xmlns:p14="http://schemas.microsoft.com/office/powerpoint/2010/main" val="513358844"/>
+      </p:ext>
+    </p:extLst>
+  </p:cSld>
+  <p:clrMapOvr>
+    <a:masterClrMapping/>
+  </p:clrMapOvr>
+</p:sld>
+</file>
+
+<file path=ppt/slides/slide5.xml><?xml version="1.0" encoding="utf-8"?>
+<p:sld xmlns:a="http://schemas.openxmlformats.org/drawingml/2006/main" xmlns:r="http://schemas.openxmlformats.org/officeDocument/2006/relationships" xmlns:p="http://schemas.openxmlformats.org/presentationml/2006/main">
+  <p:cSld>
+    <p:spTree>
+      <p:nvGrpSpPr>
+        <p:cNvPr id="1" name="">
+          <a:extLst>
+            <a:ext uri="{FF2B5EF4-FFF2-40B4-BE49-F238E27FC236}">
               <a16:creationId xmlns:a16="http://schemas.microsoft.com/office/drawing/2014/main" id="{46A82779-FCFB-257D-1625-518884704144}"/>
             </a:ext>
           </a:extLst>
@@ -11903,7 +12549,7 @@
 </p:sld>
 </file>
 
-<file path=ppt/slides/slide5.xml><?xml version="1.0" encoding="utf-8"?>
+<file path=ppt/slides/slide6.xml><?xml version="1.0" encoding="utf-8"?>
 <p:sld xmlns:a="http://schemas.openxmlformats.org/drawingml/2006/main" xmlns:r="http://schemas.openxmlformats.org/officeDocument/2006/relationships" xmlns:p="http://schemas.openxmlformats.org/presentationml/2006/main">
   <p:cSld>
     <p:spTree>
@@ -12539,7 +13185,7 @@
 </p:sld>
 </file>
 
-<file path=ppt/slides/slide6.xml><?xml version="1.0" encoding="utf-8"?>
+<file path=ppt/slides/slide7.xml><?xml version="1.0" encoding="utf-8"?>
 <p:sld xmlns:a="http://schemas.openxmlformats.org/drawingml/2006/main" xmlns:r="http://schemas.openxmlformats.org/officeDocument/2006/relationships" xmlns:p="http://schemas.openxmlformats.org/presentationml/2006/main">
   <p:cSld>
     <p:spTree>
@@ -12926,7 +13572,7 @@
 </p:sld>
 </file>
 
-<file path=ppt/slides/slide7.xml><?xml version="1.0" encoding="utf-8"?>
+<file path=ppt/slides/slide8.xml><?xml version="1.0" encoding="utf-8"?>
 <p:sld xmlns:a="http://schemas.openxmlformats.org/drawingml/2006/main" xmlns:r="http://schemas.openxmlformats.org/officeDocument/2006/relationships" xmlns:p="http://schemas.openxmlformats.org/presentationml/2006/main">
   <p:cSld>
     <p:spTree>
@@ -12992,7 +13638,7 @@
 </p:sld>
 </file>
 
-<file path=ppt/slides/slide8.xml><?xml version="1.0" encoding="utf-8"?>
+<file path=ppt/slides/slide9.xml><?xml version="1.0" encoding="utf-8"?>
 <p:sld xmlns:a="http://schemas.openxmlformats.org/drawingml/2006/main" xmlns:r="http://schemas.openxmlformats.org/officeDocument/2006/relationships" xmlns:p="http://schemas.openxmlformats.org/presentationml/2006/main">
   <p:cSld>
     <p:spTree>
@@ -14463,245 +15109,6 @@
 </p:sld>
 </file>
 
-<file path=ppt/slides/slide9.xml><?xml version="1.0" encoding="utf-8"?>
-<p:sld xmlns:a="http://schemas.openxmlformats.org/drawingml/2006/main" xmlns:r="http://schemas.openxmlformats.org/officeDocument/2006/relationships" xmlns:p="http://schemas.openxmlformats.org/presentationml/2006/main">
-  <p:cSld>
-    <p:spTree>
-      <p:nvGrpSpPr>
-        <p:cNvPr id="1" name="">
-          <a:extLst>
-            <a:ext uri="{FF2B5EF4-FFF2-40B4-BE49-F238E27FC236}">
-              <a16:creationId xmlns:a16="http://schemas.microsoft.com/office/drawing/2014/main" id="{06171784-DCE9-DCB5-0C31-7F2F4C208B48}"/>
-            </a:ext>
-          </a:extLst>
-        </p:cNvPr>
-        <p:cNvGrpSpPr/>
-        <p:nvPr/>
-      </p:nvGrpSpPr>
-      <p:grpSpPr>
-        <a:xfrm>
-          <a:off x="0" y="0"/>
-          <a:ext cx="0" cy="0"/>
-          <a:chOff x="0" y="0"/>
-          <a:chExt cx="0" cy="0"/>
-        </a:xfrm>
-      </p:grpSpPr>
-      <p:sp>
-        <p:nvSpPr>
-          <p:cNvPr id="9" name="TextBox 8">
-            <a:extLst>
-              <a:ext uri="{FF2B5EF4-FFF2-40B4-BE49-F238E27FC236}">
-                <a16:creationId xmlns:a16="http://schemas.microsoft.com/office/drawing/2014/main" id="{2BD94085-449A-2646-3ED7-B509E94B3A12}"/>
-              </a:ext>
-            </a:extLst>
-          </p:cNvPr>
-          <p:cNvSpPr txBox="1"/>
-          <p:nvPr/>
-        </p:nvSpPr>
-        <p:spPr>
-          <a:xfrm>
-            <a:off x="292989" y="257187"/>
-            <a:ext cx="9859604" cy="4524315"/>
-          </a:xfrm>
-          <a:prstGeom prst="rect">
-            <a:avLst/>
-          </a:prstGeom>
-          <a:noFill/>
-        </p:spPr>
-        <p:txBody>
-          <a:bodyPr wrap="square" rtlCol="0">
-            <a:spAutoFit/>
-          </a:bodyPr>
-          <a:lstStyle/>
-          <a:p>
-            <a:r>
-              <a:rPr lang="en-US" sz="2400" b="1" dirty="0">
-                <a:solidFill>
-                  <a:schemeClr val="accent6">
-                    <a:lumMod val="60000"/>
-                    <a:lumOff val="40000"/>
-                  </a:schemeClr>
-                </a:solidFill>
-              </a:rPr>
-              <a:t>3) Prompt Clarity</a:t>
-            </a:r>
-          </a:p>
-          <a:p>
-            <a:endParaRPr lang="en-US" sz="2400" b="1" dirty="0">
-              <a:solidFill>
-                <a:schemeClr val="accent6">
-                  <a:lumMod val="60000"/>
-                  <a:lumOff val="40000"/>
-                </a:schemeClr>
-              </a:solidFill>
-            </a:endParaRPr>
-          </a:p>
-          <a:p>
-            <a:r>
-              <a:rPr lang="en-US" sz="2400" dirty="0">
-                <a:solidFill>
-                  <a:schemeClr val="accent6">
-                    <a:lumMod val="60000"/>
-                    <a:lumOff val="40000"/>
-                  </a:schemeClr>
-                </a:solidFill>
-              </a:rPr>
-              <a:t>Bad tokenization can change meaning.</a:t>
-            </a:r>
-          </a:p>
-          <a:p>
-            <a:endParaRPr lang="en-US" sz="2400" dirty="0">
-              <a:solidFill>
-                <a:schemeClr val="accent6">
-                  <a:lumMod val="60000"/>
-                  <a:lumOff val="40000"/>
-                </a:schemeClr>
-              </a:solidFill>
-            </a:endParaRPr>
-          </a:p>
-          <a:p>
-            <a:r>
-              <a:rPr lang="en-US" sz="2400" dirty="0">
-                <a:solidFill>
-                  <a:schemeClr val="accent6">
-                    <a:lumMod val="60000"/>
-                    <a:lumOff val="40000"/>
-                  </a:schemeClr>
-                </a:solidFill>
-              </a:rPr>
-              <a:t>Example:</a:t>
-            </a:r>
-          </a:p>
-          <a:p>
-            <a:pPr marL="342900" indent="-342900">
-              <a:buFont typeface="Arial" panose="020B0604020202020204" pitchFamily="34" charset="0"/>
-              <a:buChar char="•"/>
-            </a:pPr>
-            <a:r>
-              <a:rPr lang="en-US" sz="2400" dirty="0">
-                <a:solidFill>
-                  <a:schemeClr val="accent6">
-                    <a:lumMod val="60000"/>
-                    <a:lumOff val="40000"/>
-                  </a:schemeClr>
-                </a:solidFill>
-              </a:rPr>
-              <a:t>Let’s eat grandma</a:t>
-            </a:r>
-          </a:p>
-          <a:p>
-            <a:pPr marL="342900" indent="-342900">
-              <a:buFont typeface="Arial" panose="020B0604020202020204" pitchFamily="34" charset="0"/>
-              <a:buChar char="•"/>
-            </a:pPr>
-            <a:r>
-              <a:rPr lang="en-US" sz="2400" dirty="0">
-                <a:solidFill>
-                  <a:schemeClr val="accent6">
-                    <a:lumMod val="60000"/>
-                    <a:lumOff val="40000"/>
-                  </a:schemeClr>
-                </a:solidFill>
-              </a:rPr>
-              <a:t>Let’s eat</a:t>
-            </a:r>
-            <a:r>
-              <a:rPr lang="en-US" sz="2400" dirty="0">
-                <a:solidFill>
-                  <a:schemeClr val="accent4">
-                    <a:lumMod val="60000"/>
-                    <a:lumOff val="40000"/>
-                  </a:schemeClr>
-                </a:solidFill>
-              </a:rPr>
-              <a:t>,</a:t>
-            </a:r>
-            <a:r>
-              <a:rPr lang="en-US" sz="2400" dirty="0">
-                <a:solidFill>
-                  <a:schemeClr val="accent6">
-                    <a:lumMod val="60000"/>
-                    <a:lumOff val="40000"/>
-                  </a:schemeClr>
-                </a:solidFill>
-              </a:rPr>
-              <a:t> grandma</a:t>
-            </a:r>
-          </a:p>
-          <a:p>
-            <a:endParaRPr lang="en-US" sz="2400" dirty="0">
-              <a:solidFill>
-                <a:schemeClr val="accent6">
-                  <a:lumMod val="60000"/>
-                  <a:lumOff val="40000"/>
-                </a:schemeClr>
-              </a:solidFill>
-            </a:endParaRPr>
-          </a:p>
-          <a:p>
-            <a:r>
-              <a:rPr lang="en-US" sz="2400" dirty="0">
-                <a:solidFill>
-                  <a:schemeClr val="accent6">
-                    <a:lumMod val="60000"/>
-                    <a:lumOff val="40000"/>
-                  </a:schemeClr>
-                </a:solidFill>
-              </a:rPr>
-              <a:t>Comma changes tokens → meaning changes</a:t>
-            </a:r>
-          </a:p>
-          <a:p>
-            <a:endParaRPr lang="en-US" sz="2400" dirty="0">
-              <a:solidFill>
-                <a:schemeClr val="accent6">
-                  <a:lumMod val="60000"/>
-                  <a:lumOff val="40000"/>
-                </a:schemeClr>
-              </a:solidFill>
-            </a:endParaRPr>
-          </a:p>
-          <a:p>
-            <a:r>
-              <a:rPr lang="en-US" sz="2400" dirty="0">
-                <a:solidFill>
-                  <a:schemeClr val="accent6">
-                    <a:lumMod val="60000"/>
-                    <a:lumOff val="40000"/>
-                  </a:schemeClr>
-                </a:solidFill>
-              </a:rPr>
-              <a:t>In first case      : Tokens could be [234, 12, 0,   34]</a:t>
-            </a:r>
-          </a:p>
-          <a:p>
-            <a:r>
-              <a:rPr lang="en-US" sz="2400" dirty="0">
-                <a:solidFill>
-                  <a:schemeClr val="accent6">
-                    <a:lumMod val="60000"/>
-                    <a:lumOff val="40000"/>
-                  </a:schemeClr>
-                </a:solidFill>
-              </a:rPr>
-              <a:t>In second case: Tokens could be [215, 12, 6, 37, 892]</a:t>
-            </a:r>
-          </a:p>
-        </p:txBody>
-      </p:sp>
-    </p:spTree>
-    <p:extLst>
-      <p:ext uri="{BB962C8B-B14F-4D97-AF65-F5344CB8AC3E}">
-        <p14:creationId xmlns:p14="http://schemas.microsoft.com/office/powerpoint/2010/main" val="21276717"/>
-      </p:ext>
-    </p:extLst>
-  </p:cSld>
-  <p:clrMapOvr>
-    <a:masterClrMapping/>
-  </p:clrMapOvr>
-</p:sld>
-</file>
-
 <file path=ppt/theme/theme1.xml><?xml version="1.0" encoding="utf-8"?>
 <a:theme xmlns:a="http://schemas.openxmlformats.org/drawingml/2006/main" name="Office Theme">
   <a:themeElements>
